--- a/RNP-讯飞交流-会议版.pptx
+++ b/RNP-讯飞交流-会议版.pptx
@@ -589,7 +589,7 @@
           <a:lstStyle/>
           <a:p>
             <a:r>
-              <a:t>Stage 与算力数字来自 8/13 答复 Q2；运维阶段分工来自 5/8 答复 Q2；两段式发展来自 5/4 答复 Q10。五个阶段与月份是示意，待 SOW。</a:t>
+              <a:t>Stage 与算力来自 8/13 答复 Q2；运维阶段分工来自 5/8 答复 Q2。五个阶段与月份是示意，待 SOW。</a:t>
             </a:r>
           </a:p>
         </p:txBody>
@@ -729,7 +729,7 @@
           <a:lstStyle/>
           <a:p>
             <a:r>
-              <a:t>对 Mota 电话最直接的回应：巴方要出多少人、什么人、什么时候。RNP 主导事项来自 5/4 答复 Q3；LGPD 合规专员来自 4/29 答复建议；人数待 SOW。</a:t>
+              <a:t>对 Mota 电话最直接的回应：巴方要出多少人、什么人、什么时候。人数待 SOW。</a:t>
             </a:r>
           </a:p>
         </p:txBody>
@@ -869,7 +869,7 @@
           <a:lstStyle/>
           <a:p>
             <a:r>
-              <a:t>知识包、交付物、培训方式来自 5/4 答复 Q10 保障 2；结果来自 5/8 答复 Q1、Q3 与 Q2 运维阶段。第一层已在报价中，第二层可选单独报价。</a:t>
+              <a:t>知识包与方式来自 5/4 答复 Q10；结果来自 5/8 答复。第一层已在报价中，第二层可选单独报价。</a:t>
             </a:r>
           </a:p>
         </p:txBody>
@@ -1009,7 +1009,7 @@
           <a:lstStyle/>
           <a:p>
             <a:r>
-              <a:t>范围三栏把 RNP 历次提问（开源、许可、依赖、算力、DLM、开源模型）的书面结论带进来。这次会相当于锁定 SOW，争取技术部分当场基本谈定。</a:t>
+              <a:t>范围三栏把 RNP 历次提问的书面结论带进来。这次会相当于锁定 SOW，争取技术部分当场基本谈定。</a:t>
             </a:r>
           </a:p>
         </p:txBody>
@@ -1154,7 +1154,7 @@
           <a:lstStyle/>
           <a:p>
             <a:r>
-              <a:t>先回答最基本的问题：讯飞这部分最终形成什么，各有什么用，巴方要做什么。三大中心是 RNP 已经熟悉的框架（HLD），要用这个词。</a:t>
+              <a:t>一页讲完：交付什么、怎么建、谁做、多大。RNP 可以直接用这一页向上汇报。六个锚点数字：300B、50B+300B、3 个 DLM、1000 万/500 并发、280P/560P、6 个月一版。</a:t>
             </a:r>
           </a:p>
         </p:txBody>
@@ -1224,7 +1224,7 @@
           <a:lstStyle/>
           <a:p>
             <a:r>
-              <a:t>规模、周期、算力来自 8/13 答复；语料分工与规模来自 5/4、5/8 答复；底座与权重归属来自 4/29 清单答复；评测来自 5/4 Q6、Q7。</a:t>
+              <a:t>规模、周期来自 8/13 答复；语料分工来自 5/4、5/8 答复；底座与权重归属来自 4/29 答复。数字只留锚点，其余在后两页。</a:t>
             </a:r>
           </a:p>
         </p:txBody>
@@ -1434,7 +1434,7 @@
           <a:lstStyle/>
           <a:p>
             <a:r>
-              <a:t>基线产品与本地化范围来自 5/8 答复 Q4；服务与容量来自 8/13 答复 Q2。要有界面或视频，标明是星火 APP 案例还是本项目版本。</a:t>
+              <a:t>基线与本地化来自 5/8 答复 Q4；用户规模与并发来自 8/13 答复 Q2。要有界面或视频。</a:t>
             </a:r>
           </a:p>
         </p:txBody>
@@ -1574,7 +1574,7 @@
           <a:lstStyle/>
           <a:p>
             <a:r>
-              <a:t>实施条件与分工来自 8/13 答复 Q1；DLM 数量 3 个为最新口径，8/13 写的是 1 个，算力 70P 也是按 1 个规划，会上要说明。领域经验来自 5/8 答复 Q3。</a:t>
+              <a:t>实施条件与分工来自 8/13 答复 Q1；数量 3 个为最新口径（8/13 为 1 个），会上要说明。</a:t>
             </a:r>
           </a:p>
         </p:txBody>
@@ -7606,7 +7606,7 @@
                 <a:latin typeface="微软雅黑"/>
                 <a:ea typeface="微软雅黑"/>
               </a:rPr>
-              <a:t>Stage 2 · 国家级全面运营 · 新增约 280P，合计约 560P　</a:t>
+              <a:t>Stage 2 · 国家级全面运营 · 合计约 560P　</a:t>
             </a:r>
             <a:r>
               <a:rPr sz="1150" b="1">
@@ -7630,7 +7630,7 @@
         <p:spPr>
           <a:xfrm>
             <a:off x="457200" y="1463040"/>
-            <a:ext cx="2050084" cy="2148840"/>
+            <a:ext cx="2050084" cy="2011680"/>
           </a:xfrm>
           <a:prstGeom prst="roundRect">
             <a:avLst>
@@ -7675,7 +7675,7 @@
         </p:nvSpPr>
         <p:spPr>
           <a:xfrm>
-            <a:off x="1290218" y="1627632"/>
+            <a:off x="1290218" y="1645920"/>
             <a:ext cx="384048" cy="384048"/>
           </a:xfrm>
           <a:prstGeom prst="ellipse">
@@ -7738,7 +7738,7 @@
         </p:nvSpPr>
         <p:spPr>
           <a:xfrm>
-            <a:off x="530352" y="2084832"/>
+            <a:off x="530352" y="2121408"/>
             <a:ext cx="1903780" cy="365760"/>
           </a:xfrm>
           <a:prstGeom prst="rect">
@@ -7781,8 +7781,8 @@
         </p:nvSpPr>
         <p:spPr>
           <a:xfrm>
-            <a:off x="594360" y="2487168"/>
-            <a:ext cx="1775764" cy="731520"/>
+            <a:off x="594360" y="2514600"/>
+            <a:ext cx="1775764" cy="411480"/>
           </a:xfrm>
           <a:prstGeom prst="rect">
             <a:avLst/>
@@ -7804,34 +7804,14 @@
               </a:spcAft>
             </a:pPr>
             <a:r>
-              <a:rPr sz="1050" b="0">
+              <a:rPr sz="1100" b="0">
                 <a:solidFill>
                   <a:srgbClr val="333333"/>
                 </a:solidFill>
                 <a:latin typeface="微软雅黑"/>
                 <a:ea typeface="微软雅黑"/>
               </a:rPr>
-              <a:t>RNP 采集 50B 本地语料</a:t>
-            </a:r>
-          </a:p>
-          <a:p>
-            <a:pPr algn="ctr">
-              <a:lnSpc>
-                <a:spcPct val="115000"/>
-              </a:lnSpc>
-              <a:spcAft>
-                <a:spcPts val="400"/>
-              </a:spcAft>
-            </a:pPr>
-            <a:r>
-              <a:rPr sz="1050" b="0">
-                <a:solidFill>
-                  <a:srgbClr val="333333"/>
-                </a:solidFill>
-                <a:latin typeface="微软雅黑"/>
-                <a:ea typeface="微软雅黑"/>
-              </a:rPr>
-              <a:t>讯飞加工与质检；授权落实</a:t>
+              <a:t>本地语料采集与加工</a:t>
             </a:r>
           </a:p>
         </p:txBody>
@@ -7844,7 +7824,7 @@
         </p:nvSpPr>
         <p:spPr>
           <a:xfrm>
-            <a:off x="594360" y="3218688"/>
+            <a:off x="594360" y="3017520"/>
             <a:ext cx="1775764" cy="329184"/>
           </a:xfrm>
           <a:prstGeom prst="rect">
@@ -7932,7 +7912,7 @@
         <p:spPr>
           <a:xfrm>
             <a:off x="2763316" y="1463040"/>
-            <a:ext cx="2050084" cy="2148840"/>
+            <a:ext cx="2050084" cy="2011680"/>
           </a:xfrm>
           <a:prstGeom prst="roundRect">
             <a:avLst>
@@ -7977,7 +7957,7 @@
         </p:nvSpPr>
         <p:spPr>
           <a:xfrm>
-            <a:off x="3596335" y="1627632"/>
+            <a:off x="3596335" y="1645920"/>
             <a:ext cx="384048" cy="384048"/>
           </a:xfrm>
           <a:prstGeom prst="ellipse">
@@ -8040,7 +8020,7 @@
         </p:nvSpPr>
         <p:spPr>
           <a:xfrm>
-            <a:off x="2836468" y="2084832"/>
+            <a:off x="2836468" y="2121408"/>
             <a:ext cx="1903780" cy="365760"/>
           </a:xfrm>
           <a:prstGeom prst="rect">
@@ -8083,8 +8063,8 @@
         </p:nvSpPr>
         <p:spPr>
           <a:xfrm>
-            <a:off x="2900476" y="2487168"/>
-            <a:ext cx="1775764" cy="731520"/>
+            <a:off x="2900476" y="2514600"/>
+            <a:ext cx="1775764" cy="411480"/>
           </a:xfrm>
           <a:prstGeom prst="rect">
             <a:avLst/>
@@ -8106,34 +8086,14 @@
               </a:spcAft>
             </a:pPr>
             <a:r>
-              <a:rPr sz="1050" b="0">
+              <a:rPr sz="1100" b="0">
                 <a:solidFill>
                   <a:srgbClr val="333333"/>
                 </a:solidFill>
                 <a:latin typeface="微软雅黑"/>
                 <a:ea typeface="微软雅黑"/>
               </a:rPr>
-              <a:t>约 300B 预训练与后训练</a:t>
-            </a:r>
-          </a:p>
-          <a:p>
-            <a:pPr algn="ctr">
-              <a:lnSpc>
-                <a:spcPct val="115000"/>
-              </a:lnSpc>
-              <a:spcAft>
-                <a:spcPts val="400"/>
-              </a:spcAft>
-            </a:pPr>
-            <a:r>
-              <a:rPr sz="1050" b="0">
-                <a:solidFill>
-                  <a:srgbClr val="333333"/>
-                </a:solidFill>
-                <a:latin typeface="微软雅黑"/>
-                <a:ea typeface="微软雅黑"/>
-              </a:rPr>
-              <a:t>葡语 ASR/TTS；联合评测</a:t>
+              <a:t>预训练、后训练与评测</a:t>
             </a:r>
           </a:p>
         </p:txBody>
@@ -8146,7 +8106,7 @@
         </p:nvSpPr>
         <p:spPr>
           <a:xfrm>
-            <a:off x="2900476" y="3218688"/>
+            <a:off x="2900476" y="3017520"/>
             <a:ext cx="1775764" cy="329184"/>
           </a:xfrm>
           <a:prstGeom prst="rect">
@@ -8234,7 +8194,7 @@
         <p:spPr>
           <a:xfrm>
             <a:off x="5069433" y="1463040"/>
-            <a:ext cx="2050084" cy="2148840"/>
+            <a:ext cx="2050084" cy="2011680"/>
           </a:xfrm>
           <a:prstGeom prst="roundRect">
             <a:avLst>
@@ -8279,7 +8239,7 @@
         </p:nvSpPr>
         <p:spPr>
           <a:xfrm>
-            <a:off x="5902452" y="1627632"/>
+            <a:off x="5902452" y="1645920"/>
             <a:ext cx="384048" cy="384048"/>
           </a:xfrm>
           <a:prstGeom prst="ellipse">
@@ -8342,7 +8302,7 @@
         </p:nvSpPr>
         <p:spPr>
           <a:xfrm>
-            <a:off x="5142585" y="2084832"/>
+            <a:off x="5142585" y="2121408"/>
             <a:ext cx="1903780" cy="365760"/>
           </a:xfrm>
           <a:prstGeom prst="rect">
@@ -8385,8 +8345,8 @@
         </p:nvSpPr>
         <p:spPr>
           <a:xfrm>
-            <a:off x="5206593" y="2487168"/>
-            <a:ext cx="1775764" cy="731520"/>
+            <a:off x="5206593" y="2514600"/>
+            <a:ext cx="1775764" cy="411480"/>
           </a:xfrm>
           <a:prstGeom prst="rect">
             <a:avLst/>
@@ -8408,34 +8368,14 @@
               </a:spcAft>
             </a:pPr>
             <a:r>
-              <a:rPr sz="1050" b="0">
+              <a:rPr sz="1100" b="0">
                 <a:solidFill>
                   <a:srgbClr val="333333"/>
                 </a:solidFill>
                 <a:latin typeface="微软雅黑"/>
                 <a:ea typeface="微软雅黑"/>
               </a:rPr>
-              <a:t>APP 本地化与集成</a:t>
-            </a:r>
-          </a:p>
-          <a:p>
-            <a:pPr algn="ctr">
-              <a:lnSpc>
-                <a:spcPct val="115000"/>
-              </a:lnSpc>
-              <a:spcAft>
-                <a:spcPts val="400"/>
-              </a:spcAft>
-            </a:pPr>
-            <a:r>
-              <a:rPr sz="1050" b="0">
-                <a:solidFill>
-                  <a:srgbClr val="333333"/>
-                </a:solidFill>
-                <a:latin typeface="微软雅黑"/>
-                <a:ea typeface="微软雅黑"/>
-              </a:rPr>
-              <a:t>DLM：RNP 自主训练，讯飞辅助</a:t>
+              <a:t>APP 本地化；DLM 自主训练</a:t>
             </a:r>
           </a:p>
         </p:txBody>
@@ -8448,7 +8388,7 @@
         </p:nvSpPr>
         <p:spPr>
           <a:xfrm>
-            <a:off x="5206593" y="3218688"/>
+            <a:off x="5206593" y="3017520"/>
             <a:ext cx="1775764" cy="329184"/>
           </a:xfrm>
           <a:prstGeom prst="rect">
@@ -8536,7 +8476,7 @@
         <p:spPr>
           <a:xfrm>
             <a:off x="7375550" y="1463040"/>
-            <a:ext cx="2050084" cy="2148840"/>
+            <a:ext cx="2050084" cy="2011680"/>
           </a:xfrm>
           <a:prstGeom prst="roundRect">
             <a:avLst>
@@ -8581,7 +8521,7 @@
         </p:nvSpPr>
         <p:spPr>
           <a:xfrm>
-            <a:off x="8208568" y="1627632"/>
+            <a:off x="8208568" y="1645920"/>
             <a:ext cx="384048" cy="384048"/>
           </a:xfrm>
           <a:prstGeom prst="ellipse">
@@ -8644,7 +8584,7 @@
         </p:nvSpPr>
         <p:spPr>
           <a:xfrm>
-            <a:off x="7448702" y="2084832"/>
+            <a:off x="7448702" y="2121408"/>
             <a:ext cx="1903780" cy="365760"/>
           </a:xfrm>
           <a:prstGeom prst="rect">
@@ -8687,8 +8627,8 @@
         </p:nvSpPr>
         <p:spPr>
           <a:xfrm>
-            <a:off x="7512710" y="2487168"/>
-            <a:ext cx="1775764" cy="731520"/>
+            <a:off x="7512710" y="2514600"/>
+            <a:ext cx="1775764" cy="411480"/>
           </a:xfrm>
           <a:prstGeom prst="rect">
             <a:avLst/>
@@ -8710,34 +8650,14 @@
               </a:spcAft>
             </a:pPr>
             <a:r>
-              <a:rPr sz="1050" b="0">
+              <a:rPr sz="1100" b="0">
                 <a:solidFill>
                   <a:srgbClr val="333333"/>
                 </a:solidFill>
                 <a:latin typeface="微软雅黑"/>
                 <a:ea typeface="微软雅黑"/>
               </a:rPr>
-              <a:t>部署到华为平台</a:t>
-            </a:r>
-          </a:p>
-          <a:p>
-            <a:pPr algn="ctr">
-              <a:lnSpc>
-                <a:spcPct val="115000"/>
-              </a:lnSpc>
-              <a:spcAft>
-                <a:spcPts val="400"/>
-              </a:spcAft>
-            </a:pPr>
-            <a:r>
-              <a:rPr sz="1050" b="0">
-                <a:solidFill>
-                  <a:srgbClr val="333333"/>
-                </a:solidFill>
-                <a:latin typeface="微软雅黑"/>
-                <a:ea typeface="微软雅黑"/>
-              </a:rPr>
-              <a:t>国家 APP 在线推理；验收</a:t>
+              <a:t>部署、试运行、验收</a:t>
             </a:r>
           </a:p>
         </p:txBody>
@@ -8750,7 +8670,7 @@
         </p:nvSpPr>
         <p:spPr>
           <a:xfrm>
-            <a:off x="7512710" y="3218688"/>
+            <a:off x="7512710" y="3017520"/>
             <a:ext cx="1775764" cy="329184"/>
           </a:xfrm>
           <a:prstGeom prst="rect">
@@ -8838,7 +8758,7 @@
         <p:spPr>
           <a:xfrm>
             <a:off x="9681667" y="1463040"/>
-            <a:ext cx="2050084" cy="2148840"/>
+            <a:ext cx="2050084" cy="2011680"/>
           </a:xfrm>
           <a:prstGeom prst="roundRect">
             <a:avLst>
@@ -8883,7 +8803,7 @@
         </p:nvSpPr>
         <p:spPr>
           <a:xfrm>
-            <a:off x="10514685" y="1627632"/>
+            <a:off x="10514685" y="1645920"/>
             <a:ext cx="384048" cy="384048"/>
           </a:xfrm>
           <a:prstGeom prst="ellipse">
@@ -8946,7 +8866,7 @@
         </p:nvSpPr>
         <p:spPr>
           <a:xfrm>
-            <a:off x="9754819" y="2084832"/>
+            <a:off x="9754819" y="2121408"/>
             <a:ext cx="1903780" cy="365760"/>
           </a:xfrm>
           <a:prstGeom prst="rect">
@@ -8989,8 +8909,8 @@
         </p:nvSpPr>
         <p:spPr>
           <a:xfrm>
-            <a:off x="9818827" y="2487168"/>
-            <a:ext cx="1775764" cy="731520"/>
+            <a:off x="9818827" y="2514600"/>
+            <a:ext cx="1775764" cy="411480"/>
           </a:xfrm>
           <a:prstGeom prst="rect">
             <a:avLst/>
@@ -9012,34 +8932,14 @@
               </a:spcAft>
             </a:pPr>
             <a:r>
-              <a:rPr sz="1050" b="0">
+              <a:rPr sz="1100" b="0">
                 <a:solidFill>
                   <a:srgbClr val="333333"/>
                 </a:solidFill>
                 <a:latin typeface="微软雅黑"/>
                 <a:ea typeface="微软雅黑"/>
               </a:rPr>
-              <a:t>权重、代码、文档移交</a:t>
-            </a:r>
-          </a:p>
-          <a:p>
-            <a:pPr algn="ctr">
-              <a:lnSpc>
-                <a:spcPct val="115000"/>
-              </a:lnSpc>
-              <a:spcAft>
-                <a:spcPts val="400"/>
-              </a:spcAft>
-            </a:pPr>
-            <a:r>
-              <a:rPr sz="1050" b="0">
-                <a:solidFill>
-                  <a:srgbClr val="333333"/>
-                </a:solidFill>
-                <a:latin typeface="微软雅黑"/>
-                <a:ea typeface="微软雅黑"/>
-              </a:rPr>
-              <a:t>RNP 主导运营，讯飞支持</a:t>
+              <a:t>移交权重、代码、文档</a:t>
             </a:r>
           </a:p>
         </p:txBody>
@@ -9052,7 +8952,7 @@
         </p:nvSpPr>
         <p:spPr>
           <a:xfrm>
-            <a:off x="9818827" y="3218688"/>
+            <a:off x="9818827" y="3017520"/>
             <a:ext cx="1775764" cy="329184"/>
           </a:xfrm>
           <a:prstGeom prst="rect">
@@ -9095,7 +8995,7 @@
         </p:nvSpPr>
         <p:spPr>
           <a:xfrm>
-            <a:off x="457200" y="3794760"/>
+            <a:off x="457200" y="3703320"/>
             <a:ext cx="11274552" cy="512064"/>
           </a:xfrm>
           <a:prstGeom prst="roundRect">
@@ -9143,7 +9043,7 @@
         </p:nvSpPr>
         <p:spPr>
           <a:xfrm>
-            <a:off x="685800" y="3895344"/>
+            <a:off x="685800" y="3803904"/>
             <a:ext cx="1371600" cy="310896"/>
           </a:xfrm>
           <a:prstGeom prst="rect">
@@ -9186,7 +9086,7 @@
         </p:nvSpPr>
         <p:spPr>
           <a:xfrm>
-            <a:off x="2057400" y="3867912"/>
+            <a:off x="2057400" y="3776472"/>
             <a:ext cx="9445752" cy="384048"/>
           </a:xfrm>
           <a:prstGeom prst="rect">
@@ -9209,14 +9109,14 @@
               </a:spcAft>
             </a:pPr>
             <a:r>
-              <a:rPr sz="1100" b="0">
+              <a:rPr sz="1150" b="0">
                 <a:solidFill>
                   <a:srgbClr val="333333"/>
                 </a:solidFill>
                 <a:latin typeface="微软雅黑"/>
                 <a:ea typeface="微软雅黑"/>
               </a:rPr>
-              <a:t>Stage 1 约 280P，Stage 2 合计约 560P，全部 NPU 统一池化调度　·　部署环境与网络　·　数据中心运维衔接</a:t>
+              <a:t>Stage 1 约 280P，Stage 2 合计约 560P，统一池化调度　·　部署环境与网络　·　数据中心运维衔接</a:t>
             </a:r>
           </a:p>
         </p:txBody>
@@ -9229,7 +9129,7 @@
         </p:nvSpPr>
         <p:spPr>
           <a:xfrm>
-            <a:off x="457200" y="4443984"/>
+            <a:off x="457200" y="4370832"/>
             <a:ext cx="11274552" cy="512064"/>
           </a:xfrm>
           <a:prstGeom prst="roundRect">
@@ -9275,7 +9175,7 @@
         </p:nvSpPr>
         <p:spPr>
           <a:xfrm>
-            <a:off x="685800" y="4544568"/>
+            <a:off x="685800" y="4471416"/>
             <a:ext cx="1371600" cy="310896"/>
           </a:xfrm>
           <a:prstGeom prst="rect">
@@ -9318,7 +9218,7 @@
         </p:nvSpPr>
         <p:spPr>
           <a:xfrm>
-            <a:off x="2057400" y="4517136"/>
+            <a:off x="2057400" y="4443984"/>
             <a:ext cx="9445752" cy="384048"/>
           </a:xfrm>
           <a:prstGeom prst="rect">
@@ -9341,14 +9241,14 @@
               </a:spcAft>
             </a:pPr>
             <a:r>
-              <a:rPr sz="1100" b="0">
+              <a:rPr sz="1150" b="0">
                 <a:solidFill>
                   <a:srgbClr val="333333"/>
                 </a:solidFill>
                 <a:latin typeface="微软雅黑"/>
                 <a:ea typeface="微软雅黑"/>
               </a:rPr>
-              <a:t>贯穿五个阶段：巴方人员每个阶段与讯飞一起做；DLM 以 RNP 自主训练为主，讯飞辅助与持续咨询</a:t>
+              <a:t>贯穿五个阶段，巴方人员每个阶段与讯飞一起做；DLM 以 RNP 自主训练为主</a:t>
             </a:r>
           </a:p>
         </p:txBody>
@@ -9361,8 +9261,8 @@
         </p:nvSpPr>
         <p:spPr>
           <a:xfrm>
-            <a:off x="457200" y="5093208"/>
-            <a:ext cx="11274552" cy="566928"/>
+            <a:off x="457200" y="5038344"/>
+            <a:ext cx="11274552" cy="512064"/>
           </a:xfrm>
           <a:prstGeom prst="roundRect">
             <a:avLst>
@@ -9409,7 +9309,7 @@
         </p:nvSpPr>
         <p:spPr>
           <a:xfrm>
-            <a:off x="685800" y="5221224"/>
+            <a:off x="685800" y="5138928"/>
             <a:ext cx="1371600" cy="310896"/>
           </a:xfrm>
           <a:prstGeom prst="rect">
@@ -9452,8 +9352,8 @@
         </p:nvSpPr>
         <p:spPr>
           <a:xfrm>
-            <a:off x="2057400" y="5166360"/>
-            <a:ext cx="9445752" cy="438912"/>
+            <a:off x="2057400" y="5111496"/>
+            <a:ext cx="9445752" cy="384048"/>
           </a:xfrm>
           <a:prstGeom prst="rect">
             <a:avLst/>
@@ -9475,14 +9375,14 @@
               </a:spcAft>
             </a:pPr>
             <a:r>
-              <a:rPr sz="1050" b="0">
+              <a:rPr sz="1150" b="0">
                 <a:solidFill>
                   <a:srgbClr val="333333"/>
                 </a:solidFill>
                 <a:latin typeface="微软雅黑"/>
                 <a:ea typeface="微软雅黑"/>
               </a:rPr>
-              <a:t>交接后 RNP 主导三大中心日常运营，讯飞持续提供运维支持、模型迭代与运营团队培训（年费另行约定）；1–3 年授权 + 本地增训 + 知识转移，3–5 年及以后巴方主导自主研发</a:t>
+              <a:t>交接后 RNP 主导三大中心日常运营，讯飞持续支持；许可、年费与长期路径见下页</a:t>
             </a:r>
           </a:p>
         </p:txBody>
@@ -9495,8 +9395,8 @@
         </p:nvSpPr>
         <p:spPr>
           <a:xfrm>
-            <a:off x="457200" y="5779008"/>
-            <a:ext cx="11274552" cy="411480"/>
+            <a:off x="457200" y="5715000"/>
+            <a:ext cx="11274552" cy="365760"/>
           </a:xfrm>
           <a:prstGeom prst="rect">
             <a:avLst/>
@@ -9525,27 +9425,7 @@
                 <a:latin typeface="微软雅黑"/>
                 <a:ea typeface="微软雅黑"/>
               </a:rPr>
-              <a:t>阶段名称、数量与月份为示例，按实际方案确定；里程碑示例：</a:t>
-            </a:r>
-            <a:r>
-              <a:rPr sz="1000" b="0">
-                <a:solidFill>
-                  <a:srgbClr val="0070C0"/>
-                </a:solidFill>
-                <a:latin typeface="微软雅黑"/>
-                <a:ea typeface="微软雅黑"/>
-              </a:rPr>
-              <a:t>M3 语料到位 · M8 底座通过评测 · M11 应用联调通过 · M13 验收</a:t>
-            </a:r>
-            <a:r>
-              <a:rPr sz="1000" b="0">
-                <a:solidFill>
-                  <a:srgbClr val="666666"/>
-                </a:solidFill>
-                <a:latin typeface="微软雅黑"/>
-                <a:ea typeface="微软雅黑"/>
-              </a:rPr>
-              <a:t>。RNP 据此编制本方计划。</a:t>
+              <a:t>阶段名称、数量与月份为示例，按实际方案确定。RNP 据此编制本方计划。</a:t>
             </a:r>
           </a:p>
         </p:txBody>
@@ -11688,11 +11568,11 @@
                 <a:tableStyleId>{2D5ABB26-0587-4C30-8999-92F81FD0307C}</a:tableStyleId>
               </a:tblPr>
               <a:tblGrid>
-                <a:gridCol w="1828800"/>
-                <a:gridCol w="3794760"/>
                 <a:gridCol w="1920240"/>
-                <a:gridCol w="2286000"/>
-                <a:gridCol w="1444752"/>
+                <a:gridCol w="3931920"/>
+                <a:gridCol w="2194560"/>
+                <a:gridCol w="1463040"/>
+                <a:gridCol w="1764792"/>
               </a:tblGrid>
               <a:tr h="365760">
                 <a:tc>
@@ -11889,7 +11769,7 @@
                           <a:latin typeface="微软雅黑"/>
                           <a:ea typeface="微软雅黑"/>
                         </a:rPr>
-                        <a:t>参与哪项 · Stage</a:t>
+                        <a:t>参与 Stage</a:t>
                       </a:r>
                     </a:p>
                   </a:txBody>
@@ -11998,7 +11878,7 @@
                         </a:spcAft>
                       </a:pPr>
                       <a:r>
-                        <a:rPr sz="1000" b="1">
+                        <a:rPr sz="1050" b="1">
                           <a:solidFill>
                             <a:srgbClr val="1D1D1A"/>
                           </a:solidFill>
@@ -12055,14 +11935,14 @@
                         </a:spcAft>
                       </a:pPr>
                       <a:r>
-                        <a:rPr sz="1000" b="0">
+                        <a:rPr sz="1050" b="0">
                           <a:solidFill>
                             <a:srgbClr val="333333"/>
                           </a:solidFill>
                           <a:latin typeface="微软雅黑"/>
                           <a:ea typeface="微软雅黑"/>
                         </a:rPr>
-                        <a:t>统筹巴方资源，对接讯飞与华为；确认训练方案、评测、发布与验收</a:t>
+                        <a:t>统筹资源；确认方案、评测与验收</a:t>
                       </a:r>
                     </a:p>
                   </a:txBody>
@@ -12112,7 +11992,7 @@
                         </a:spcAft>
                       </a:pPr>
                       <a:r>
-                        <a:rPr sz="1000" b="0">
+                        <a:rPr sz="1050" b="0">
                           <a:solidFill>
                             <a:srgbClr val="333333"/>
                           </a:solidFill>
@@ -12169,14 +12049,14 @@
                         </a:spcAft>
                       </a:pPr>
                       <a:r>
-                        <a:rPr sz="1000" b="0">
+                        <a:rPr sz="1050" b="0">
                           <a:solidFill>
                             <a:srgbClr val="333333"/>
                           </a:solidFill>
                           <a:latin typeface="微软雅黑"/>
                           <a:ea typeface="微软雅黑"/>
                         </a:rPr>
-                        <a:t>全部 · Stage 1–2</a:t>
+                        <a:t>全部</a:t>
                       </a:r>
                     </a:p>
                   </a:txBody>
@@ -12226,7 +12106,7 @@
                         </a:spcAft>
                       </a:pPr>
                       <a:r>
-                        <a:rPr sz="1000" b="0">
+                        <a:rPr sz="1050" b="0">
                           <a:solidFill>
                             <a:srgbClr val="0070C0"/>
                           </a:solidFill>
@@ -12285,7 +12165,7 @@
                         </a:spcAft>
                       </a:pPr>
                       <a:r>
-                        <a:rPr sz="1000" b="1">
+                        <a:rPr sz="1050" b="1">
                           <a:solidFill>
                             <a:srgbClr val="1D1D1A"/>
                           </a:solidFill>
@@ -12342,14 +12222,14 @@
                         </a:spcAft>
                       </a:pPr>
                       <a:r>
-                        <a:rPr sz="1000" b="0">
+                        <a:rPr sz="1050" b="0">
                           <a:solidFill>
                             <a:srgbClr val="333333"/>
                           </a:solidFill>
                           <a:latin typeface="微软雅黑"/>
                           <a:ea typeface="微软雅黑"/>
                         </a:rPr>
-                        <a:t>执行本地语料采集；对接高校、SoberanIA、WideLabs、国家图书馆等来源</a:t>
+                        <a:t>执行本地语料采集，对接来源机构</a:t>
                       </a:r>
                     </a:p>
                   </a:txBody>
@@ -12399,7 +12279,7 @@
                         </a:spcAft>
                       </a:pPr>
                       <a:r>
-                        <a:rPr sz="1000" b="0">
+                        <a:rPr sz="1050" b="0">
                           <a:solidFill>
                             <a:srgbClr val="333333"/>
                           </a:solidFill>
@@ -12456,14 +12336,14 @@
                         </a:spcAft>
                       </a:pPr>
                       <a:r>
-                        <a:rPr sz="1000" b="0">
+                        <a:rPr sz="1050" b="0">
                           <a:solidFill>
                             <a:srgbClr val="333333"/>
                           </a:solidFill>
                           <a:latin typeface="微软雅黑"/>
                           <a:ea typeface="微软雅黑"/>
                         </a:rPr>
-                        <a:t>大模型 · Stage 1</a:t>
+                        <a:t>Stage 1</a:t>
                       </a:r>
                     </a:p>
                   </a:txBody>
@@ -12513,7 +12393,7 @@
                         </a:spcAft>
                       </a:pPr>
                       <a:r>
-                        <a:rPr sz="1000" b="0">
+                        <a:rPr sz="1050" b="0">
                           <a:solidFill>
                             <a:srgbClr val="0070C0"/>
                           </a:solidFill>
@@ -12572,7 +12452,7 @@
                         </a:spcAft>
                       </a:pPr>
                       <a:r>
-                        <a:rPr sz="1000" b="1">
+                        <a:rPr sz="1050" b="1">
                           <a:solidFill>
                             <a:srgbClr val="1D1D1A"/>
                           </a:solidFill>
@@ -12629,14 +12509,14 @@
                         </a:spcAft>
                       </a:pPr>
                       <a:r>
-                        <a:rPr sz="1000" b="0">
+                        <a:rPr sz="1050" b="0">
                           <a:solidFill>
                             <a:srgbClr val="333333"/>
                           </a:solidFill>
                           <a:latin typeface="微软雅黑"/>
                           <a:ea typeface="微软雅黑"/>
                         </a:rPr>
-                        <a:t>语料审核、SFT 标注质量、TTS 标准发音人协调</a:t>
+                        <a:t>语料审核、标注质量、发音人协调</a:t>
                       </a:r>
                     </a:p>
                   </a:txBody>
@@ -12686,7 +12566,7 @@
                         </a:spcAft>
                       </a:pPr>
                       <a:r>
-                        <a:rPr sz="1000" b="0">
+                        <a:rPr sz="1050" b="0">
                           <a:solidFill>
                             <a:srgbClr val="333333"/>
                           </a:solidFill>
@@ -12743,14 +12623,14 @@
                         </a:spcAft>
                       </a:pPr>
                       <a:r>
-                        <a:rPr sz="1000" b="0">
+                        <a:rPr sz="1050" b="0">
                           <a:solidFill>
                             <a:srgbClr val="333333"/>
                           </a:solidFill>
                           <a:latin typeface="微软雅黑"/>
                           <a:ea typeface="微软雅黑"/>
                         </a:rPr>
-                        <a:t>大模型 · Stage 1</a:t>
+                        <a:t>Stage 1</a:t>
                       </a:r>
                     </a:p>
                   </a:txBody>
@@ -12800,7 +12680,7 @@
                         </a:spcAft>
                       </a:pPr>
                       <a:r>
-                        <a:rPr sz="1000" b="0">
+                        <a:rPr sz="1050" b="0">
                           <a:solidFill>
                             <a:srgbClr val="0070C0"/>
                           </a:solidFill>
@@ -12859,7 +12739,7 @@
                         </a:spcAft>
                       </a:pPr>
                       <a:r>
-                        <a:rPr sz="1000" b="1">
+                        <a:rPr sz="1050" b="1">
                           <a:solidFill>
                             <a:srgbClr val="1D1D1A"/>
                           </a:solidFill>
@@ -12916,14 +12796,14 @@
                         </a:spcAft>
                       </a:pPr>
                       <a:r>
-                        <a:rPr sz="1000" b="0">
+                        <a:rPr sz="1050" b="0">
                           <a:solidFill>
                             <a:srgbClr val="333333"/>
                           </a:solidFill>
                           <a:latin typeface="微软雅黑"/>
                           <a:ea typeface="微软雅黑"/>
                         </a:rPr>
-                        <a:t>数据来源分类、版权与 LGPD 审核、授权文件</a:t>
+                        <a:t>数据来源分类、版权与 LGPD 审核</a:t>
                       </a:r>
                     </a:p>
                   </a:txBody>
@@ -12973,7 +12853,7 @@
                         </a:spcAft>
                       </a:pPr>
                       <a:r>
-                        <a:rPr sz="1000" b="0">
+                        <a:rPr sz="1050" b="0">
                           <a:solidFill>
                             <a:srgbClr val="333333"/>
                           </a:solidFill>
@@ -13030,7 +12910,7 @@
                         </a:spcAft>
                       </a:pPr>
                       <a:r>
-                        <a:rPr sz="1000" b="0">
+                        <a:rPr sz="1050" b="0">
                           <a:solidFill>
                             <a:srgbClr val="333333"/>
                           </a:solidFill>
@@ -13087,7 +12967,7 @@
                         </a:spcAft>
                       </a:pPr>
                       <a:r>
-                        <a:rPr sz="1000" b="0">
+                        <a:rPr sz="1050" b="0">
                           <a:solidFill>
                             <a:srgbClr val="0070C0"/>
                           </a:solidFill>
@@ -13146,7 +13026,7 @@
                         </a:spcAft>
                       </a:pPr>
                       <a:r>
-                        <a:rPr sz="1000" b="1">
+                        <a:rPr sz="1050" b="1">
                           <a:solidFill>
                             <a:srgbClr val="1D1D1A"/>
                           </a:solidFill>
@@ -13203,14 +13083,14 @@
                         </a:spcAft>
                       </a:pPr>
                       <a:r>
-                        <a:rPr sz="1000" b="0">
+                        <a:rPr sz="1050" b="0">
                           <a:solidFill>
                             <a:srgbClr val="333333"/>
                           </a:solidFill>
                           <a:latin typeface="微软雅黑"/>
                           <a:ea typeface="微软雅黑"/>
                         </a:rPr>
-                        <a:t>确定 DLM 场景与目标；评价领域成果</a:t>
+                        <a:t>确定 DLM 场景；评价领域成果</a:t>
                       </a:r>
                     </a:p>
                   </a:txBody>
@@ -13260,7 +13140,7 @@
                         </a:spcAft>
                       </a:pPr>
                       <a:r>
-                        <a:rPr sz="1000" b="0">
+                        <a:rPr sz="1050" b="0">
                           <a:solidFill>
                             <a:srgbClr val="333333"/>
                           </a:solidFill>
@@ -13317,14 +13197,14 @@
                         </a:spcAft>
                       </a:pPr>
                       <a:r>
-                        <a:rPr sz="1000" b="0">
+                        <a:rPr sz="1050" b="0">
                           <a:solidFill>
                             <a:srgbClr val="333333"/>
                           </a:solidFill>
                           <a:latin typeface="微软雅黑"/>
                           <a:ea typeface="微软雅黑"/>
                         </a:rPr>
-                        <a:t>DLM · Stage 2</a:t>
+                        <a:t>Stage 2</a:t>
                       </a:r>
                     </a:p>
                   </a:txBody>
@@ -13374,7 +13254,7 @@
                         </a:spcAft>
                       </a:pPr>
                       <a:r>
-                        <a:rPr sz="1000" b="0">
+                        <a:rPr sz="1050" b="0">
                           <a:solidFill>
                             <a:srgbClr val="0070C0"/>
                           </a:solidFill>
@@ -13433,7 +13313,7 @@
                         </a:spcAft>
                       </a:pPr>
                       <a:r>
-                        <a:rPr sz="1000" b="1">
+                        <a:rPr sz="1050" b="1">
                           <a:solidFill>
                             <a:srgbClr val="1D1D1A"/>
                           </a:solidFill>
@@ -13490,14 +13370,14 @@
                         </a:spcAft>
                       </a:pPr>
                       <a:r>
-                        <a:rPr sz="1000" b="0">
+                        <a:rPr sz="1050" b="0">
                           <a:solidFill>
                             <a:srgbClr val="333333"/>
                           </a:solidFill>
                           <a:latin typeface="微软雅黑"/>
                           <a:ea typeface="微软雅黑"/>
                         </a:rPr>
-                        <a:t>通过知识转移参与国家大模型训练；DLM 自主训练与评测</a:t>
+                        <a:t>参与大模型训练；DLM 自主训练与评测</a:t>
                       </a:r>
                     </a:p>
                   </a:txBody>
@@ -13547,14 +13427,14 @@
                         </a:spcAft>
                       </a:pPr>
                       <a:r>
-                        <a:rPr sz="1000" b="0">
+                        <a:rPr sz="1050" b="0">
                           <a:solidFill>
                             <a:srgbClr val="333333"/>
                           </a:solidFill>
                           <a:latin typeface="微软雅黑"/>
                           <a:ea typeface="微软雅黑"/>
                         </a:rPr>
-                        <a:t>Python，机器学习基础</a:t>
+                        <a:t>Python，机器学习</a:t>
                       </a:r>
                     </a:p>
                   </a:txBody>
@@ -13604,14 +13484,14 @@
                         </a:spcAft>
                       </a:pPr>
                       <a:r>
-                        <a:rPr sz="1000" b="0">
+                        <a:rPr sz="1050" b="0">
                           <a:solidFill>
                             <a:srgbClr val="333333"/>
                           </a:solidFill>
                           <a:latin typeface="微软雅黑"/>
                           <a:ea typeface="微软雅黑"/>
                         </a:rPr>
-                        <a:t>大模型、DLM · Stage 1–2</a:t>
+                        <a:t>Stage 1–2</a:t>
                       </a:r>
                     </a:p>
                   </a:txBody>
@@ -13661,7 +13541,7 @@
                         </a:spcAft>
                       </a:pPr>
                       <a:r>
-                        <a:rPr sz="1000" b="0">
+                        <a:rPr sz="1050" b="0">
                           <a:solidFill>
                             <a:srgbClr val="0070C0"/>
                           </a:solidFill>
@@ -13720,7 +13600,7 @@
                         </a:spcAft>
                       </a:pPr>
                       <a:r>
-                        <a:rPr sz="1000" b="1">
+                        <a:rPr sz="1050" b="1">
                           <a:solidFill>
                             <a:srgbClr val="1D1D1A"/>
                           </a:solidFill>
@@ -13777,14 +13657,14 @@
                         </a:spcAft>
                       </a:pPr>
                       <a:r>
-                        <a:rPr sz="1000" b="0">
+                        <a:rPr sz="1050" b="0">
                           <a:solidFill>
                             <a:srgbClr val="333333"/>
                           </a:solidFill>
                           <a:latin typeface="微软雅黑"/>
                           <a:ea typeface="微软雅黑"/>
                         </a:rPr>
-                        <a:t>定义国民 APP 本地场景与功能；参与本地化与系统集成</a:t>
+                        <a:t>定义 APP 本地场景；参与本地化与集成</a:t>
                       </a:r>
                     </a:p>
                   </a:txBody>
@@ -13834,14 +13714,14 @@
                         </a:spcAft>
                       </a:pPr>
                       <a:r>
-                        <a:rPr sz="1000" b="0">
+                        <a:rPr sz="1050" b="0">
                           <a:solidFill>
                             <a:srgbClr val="333333"/>
                           </a:solidFill>
                           <a:latin typeface="微软雅黑"/>
                           <a:ea typeface="微软雅黑"/>
                         </a:rPr>
-                        <a:t>软件开发经验</a:t>
+                        <a:t>软件开发</a:t>
                       </a:r>
                     </a:p>
                   </a:txBody>
@@ -13891,14 +13771,14 @@
                         </a:spcAft>
                       </a:pPr>
                       <a:r>
-                        <a:rPr sz="1000" b="0">
+                        <a:rPr sz="1050" b="0">
                           <a:solidFill>
                             <a:srgbClr val="333333"/>
                           </a:solidFill>
                           <a:latin typeface="微软雅黑"/>
                           <a:ea typeface="微软雅黑"/>
                         </a:rPr>
-                        <a:t>国家 APP · Stage 2</a:t>
+                        <a:t>Stage 2</a:t>
                       </a:r>
                     </a:p>
                   </a:txBody>
@@ -13948,7 +13828,7 @@
                         </a:spcAft>
                       </a:pPr>
                       <a:r>
-                        <a:rPr sz="1000" b="0">
+                        <a:rPr sz="1050" b="0">
                           <a:solidFill>
                             <a:srgbClr val="0070C0"/>
                           </a:solidFill>
@@ -14007,7 +13887,7 @@
                         </a:spcAft>
                       </a:pPr>
                       <a:r>
-                        <a:rPr sz="1000" b="1">
+                        <a:rPr sz="1050" b="1">
                           <a:solidFill>
                             <a:srgbClr val="1D1D1A"/>
                           </a:solidFill>
@@ -14064,14 +13944,14 @@
                         </a:spcAft>
                       </a:pPr>
                       <a:r>
-                        <a:rPr sz="1000" b="0">
+                        <a:rPr sz="1050" b="0">
                           <a:solidFill>
                             <a:srgbClr val="333333"/>
                           </a:solidFill>
                           <a:latin typeface="微软雅黑"/>
                           <a:ea typeface="微软雅黑"/>
                         </a:rPr>
-                        <a:t>三大中心日常运营；部署、监控、故障处理</a:t>
+                        <a:t>三大中心日常运营；部署与监控</a:t>
                       </a:r>
                     </a:p>
                   </a:txBody>
@@ -14121,14 +14001,14 @@
                         </a:spcAft>
                       </a:pPr>
                       <a:r>
-                        <a:rPr sz="1000" b="0">
+                        <a:rPr sz="1050" b="0">
                           <a:solidFill>
                             <a:srgbClr val="333333"/>
                           </a:solidFill>
                           <a:latin typeface="微软雅黑"/>
                           <a:ea typeface="微软雅黑"/>
                         </a:rPr>
-                        <a:t>Linux 与容器基础</a:t>
+                        <a:t>Linux 与容器</a:t>
                       </a:r>
                     </a:p>
                   </a:txBody>
@@ -14178,14 +14058,14 @@
                         </a:spcAft>
                       </a:pPr>
                       <a:r>
-                        <a:rPr sz="1000" b="0">
+                        <a:rPr sz="1050" b="0">
                           <a:solidFill>
                             <a:srgbClr val="333333"/>
                           </a:solidFill>
                           <a:latin typeface="微软雅黑"/>
                           <a:ea typeface="微软雅黑"/>
                         </a:rPr>
-                        <a:t>全部 · Stage 2</a:t>
+                        <a:t>Stage 2</a:t>
                       </a:r>
                     </a:p>
                   </a:txBody>
@@ -14235,7 +14115,7 @@
                         </a:spcAft>
                       </a:pPr>
                       <a:r>
-                        <a:rPr sz="1000" b="0">
+                        <a:rPr sz="1050" b="0">
                           <a:solidFill>
                             <a:srgbClr val="0070C0"/>
                           </a:solidFill>
@@ -14290,7 +14170,7 @@
         <p:spPr>
           <a:xfrm>
             <a:off x="457200" y="4572000"/>
-            <a:ext cx="11274552" cy="658368"/>
+            <a:ext cx="11274552" cy="548640"/>
           </a:xfrm>
           <a:prstGeom prst="roundRect">
             <a:avLst>
@@ -14337,7 +14217,7 @@
         </p:nvSpPr>
         <p:spPr>
           <a:xfrm>
-            <a:off x="685800" y="4745736"/>
+            <a:off x="685800" y="4690872"/>
             <a:ext cx="914400" cy="310896"/>
           </a:xfrm>
           <a:prstGeom prst="rect">
@@ -14381,7 +14261,7 @@
         <p:spPr>
           <a:xfrm>
             <a:off x="1600200" y="4645152"/>
-            <a:ext cx="9902952" cy="530352"/>
+            <a:ext cx="9902952" cy="420623"/>
           </a:xfrm>
           <a:prstGeom prst="rect">
             <a:avLst/>
@@ -14403,17 +14283,17 @@
               </a:spcAft>
             </a:pPr>
             <a:r>
-              <a:rPr sz="1050" b="0">
+              <a:rPr sz="1100" b="0">
                 <a:solidFill>
                   <a:srgbClr val="333333"/>
                 </a:solidFill>
                 <a:latin typeface="微软雅黑"/>
                 <a:ea typeface="微软雅黑"/>
               </a:rPr>
-              <a:t>本地语料 50B 及授权　·　有监督 20 万条、安全对齐 2 万条　·　ASR 1 万小时、TTS 100 小时　·　实施环境　·　本地系统接口　·　到位时间 </a:t>
+              <a:t>本地语料 50B 及授权　·　标注与评测数据　·　实施环境　·　本地系统接口　·　到位时间 </a:t>
             </a:r>
             <a:r>
-              <a:rPr sz="1050" b="0">
+              <a:rPr sz="1100" b="0">
                 <a:solidFill>
                   <a:srgbClr val="0070C0"/>
                 </a:solidFill>
@@ -14433,7 +14313,7 @@
         </p:nvSpPr>
         <p:spPr>
           <a:xfrm>
-            <a:off x="457200" y="5394960"/>
+            <a:off x="457200" y="5303520"/>
             <a:ext cx="11274552" cy="457200"/>
           </a:xfrm>
           <a:prstGeom prst="rect">
@@ -14463,7 +14343,7 @@
                 <a:latin typeface="微软雅黑"/>
                 <a:ea typeface="微软雅黑"/>
               </a:rPr>
-              <a:t>角色与责任按 5/4 答复 Q3 的 RNP 主导事项及 8/13 答复 Q1 整理，人数为示例。RNP 据此编制本方参与计划；本页角色即知识转移的对象。</a:t>
+              <a:t>角色按 5/4、8/13 答复中 RNP 的责任整理，人数为示例。RNP 据此编制本方参与计划；本页角色即知识转移的对象，分阶段人数见下页。</a:t>
             </a:r>
           </a:p>
         </p:txBody>
@@ -18439,7 +18319,7 @@
         <p:spPr>
           <a:xfrm>
             <a:off x="457200" y="1005840"/>
-            <a:ext cx="5454396" cy="3611880"/>
+            <a:ext cx="5454396" cy="3383280"/>
           </a:xfrm>
           <a:prstGeom prst="roundRect">
             <a:avLst>
@@ -18592,8 +18472,8 @@
         </p:nvSpPr>
         <p:spPr>
           <a:xfrm>
-            <a:off x="731520" y="2240280"/>
-            <a:ext cx="4905756" cy="2286000"/>
+            <a:off x="731520" y="2286000"/>
+            <a:ext cx="4905756" cy="2011680"/>
           </a:xfrm>
           <a:prstGeom prst="rect">
             <a:avLst/>
@@ -18611,7 +18491,7 @@
                 <a:spcPct val="115000"/>
               </a:lnSpc>
               <a:spcAft>
-                <a:spcPts val="400"/>
+                <a:spcPts val="700"/>
               </a:spcAft>
               <a:buClr>
                 <a:srgbClr val="3B7A1A"/>
@@ -18621,14 +18501,14 @@
               <a:buChar char="•"/>
             </a:pPr>
             <a:r>
-              <a:rPr sz="1100" b="0">
+              <a:rPr sz="1200" b="0">
                 <a:solidFill>
                   <a:srgbClr val="333333"/>
                 </a:solidFill>
                 <a:latin typeface="微软雅黑"/>
                 <a:ea typeface="微软雅黑"/>
               </a:rPr>
-              <a:t>五个知识包：语料采集方法论、数据工程、训练方法论、模型评估、部署运维</a:t>
+              <a:t>五个知识包：语料采集、数据工程、训练方法、模型评估、部署运维</a:t>
             </a:r>
           </a:p>
           <a:p>
@@ -18637,7 +18517,7 @@
                 <a:spcPct val="115000"/>
               </a:lnSpc>
               <a:spcAft>
-                <a:spcPts val="400"/>
+                <a:spcPts val="700"/>
               </a:spcAft>
               <a:buClr>
                 <a:srgbClr val="3B7A1A"/>
@@ -18647,14 +18527,44 @@
               <a:buChar char="•"/>
             </a:pPr>
             <a:r>
-              <a:rPr sz="1100" b="0">
+              <a:rPr sz="1200" b="0">
                 <a:solidFill>
                   <a:srgbClr val="333333"/>
                 </a:solidFill>
                 <a:latin typeface="微软雅黑"/>
                 <a:ea typeface="微软雅黑"/>
               </a:rPr>
-              <a:t>方式：现场培训、工作坊、联合工作机制；边做边学，DLM 由 RNP 自主训练、讯飞辅助</a:t>
+              <a:t>方式：现场培训、工作坊、边做边学；名额 </a:t>
+            </a:r>
+            <a:r>
+              <a:rPr sz="1200" b="0">
+                <a:solidFill>
+                  <a:srgbClr val="0070C0"/>
+                </a:solidFill>
+                <a:latin typeface="微软雅黑"/>
+                <a:ea typeface="微软雅黑"/>
+              </a:rPr>
+              <a:t>示例：每阶段 10 人</a:t>
+            </a:r>
+            <a:r>
+              <a:rPr sz="1200" b="0">
+                <a:solidFill>
+                  <a:srgbClr val="333333"/>
+                </a:solidFill>
+                <a:latin typeface="微软雅黑"/>
+                <a:ea typeface="微软雅黑"/>
+              </a:rPr>
+              <a:t>，语言 </a:t>
+            </a:r>
+            <a:r>
+              <a:rPr sz="1200" b="0">
+                <a:solidFill>
+                  <a:srgbClr val="0070C0"/>
+                </a:solidFill>
+                <a:latin typeface="微软雅黑"/>
+                <a:ea typeface="微软雅黑"/>
+              </a:rPr>
+              <a:t>示例：英语加葡语助教</a:t>
             </a:r>
           </a:p>
           <a:p>
@@ -18663,7 +18573,7 @@
                 <a:spcPct val="115000"/>
               </a:lnSpc>
               <a:spcAft>
-                <a:spcPts val="400"/>
+                <a:spcPts val="700"/>
               </a:spcAft>
               <a:buClr>
                 <a:srgbClr val="3B7A1A"/>
@@ -18673,96 +18583,14 @@
               <a:buChar char="•"/>
             </a:pPr>
             <a:r>
-              <a:rPr sz="1100" b="0">
+              <a:rPr sz="1200" b="0">
                 <a:solidFill>
                   <a:srgbClr val="333333"/>
                 </a:solidFill>
                 <a:latin typeface="微软雅黑"/>
                 <a:ea typeface="微软雅黑"/>
               </a:rPr>
-              <a:t>交付：运维文档、产品文档、定制代码、集成脚本、接口文档、专属语料、工具链</a:t>
-            </a:r>
-          </a:p>
-          <a:p>
-            <a:pPr algn="l" marL="164592" indent="-164592">
-              <a:lnSpc>
-                <a:spcPct val="115000"/>
-              </a:lnSpc>
-              <a:spcAft>
-                <a:spcPts val="400"/>
-              </a:spcAft>
-              <a:buClr>
-                <a:srgbClr val="3B7A1A"/>
-              </a:buClr>
-              <a:buSzPct val="100000"/>
-              <a:buFont typeface="Arial"/>
-              <a:buChar char="•"/>
-            </a:pPr>
-            <a:r>
-              <a:rPr sz="1100" b="0">
-                <a:solidFill>
-                  <a:srgbClr val="333333"/>
-                </a:solidFill>
-                <a:latin typeface="微软雅黑"/>
-                <a:ea typeface="微软雅黑"/>
-              </a:rPr>
-              <a:t>对象：上一页的参与人员，名额 </a:t>
-            </a:r>
-            <a:r>
-              <a:rPr sz="1100" b="0">
-                <a:solidFill>
-                  <a:srgbClr val="0070C0"/>
-                </a:solidFill>
-                <a:latin typeface="微软雅黑"/>
-                <a:ea typeface="微软雅黑"/>
-              </a:rPr>
-              <a:t>示例：每阶段 10 人；待 SOW</a:t>
-            </a:r>
-            <a:r>
-              <a:rPr sz="1100" b="0">
-                <a:solidFill>
-                  <a:srgbClr val="333333"/>
-                </a:solidFill>
-                <a:latin typeface="微软雅黑"/>
-                <a:ea typeface="微软雅黑"/>
-              </a:rPr>
-              <a:t>；语言 </a:t>
-            </a:r>
-            <a:r>
-              <a:rPr sz="1100" b="0">
-                <a:solidFill>
-                  <a:srgbClr val="0070C0"/>
-                </a:solidFill>
-                <a:latin typeface="微软雅黑"/>
-                <a:ea typeface="微软雅黑"/>
-              </a:rPr>
-              <a:t>示例：英语授课，配葡语助教</a:t>
-            </a:r>
-          </a:p>
-          <a:p>
-            <a:pPr algn="l" marL="164592" indent="-164592">
-              <a:lnSpc>
-                <a:spcPct val="115000"/>
-              </a:lnSpc>
-              <a:spcAft>
-                <a:spcPts val="400"/>
-              </a:spcAft>
-              <a:buClr>
-                <a:srgbClr val="3B7A1A"/>
-              </a:buClr>
-              <a:buSzPct val="100000"/>
-              <a:buFont typeface="Arial"/>
-              <a:buChar char="•"/>
-            </a:pPr>
-            <a:r>
-              <a:rPr sz="1100" b="0">
-                <a:solidFill>
-                  <a:srgbClr val="333333"/>
-                </a:solidFill>
-                <a:latin typeface="微软雅黑"/>
-                <a:ea typeface="微软雅黑"/>
-              </a:rPr>
-              <a:t>结果：完成知识转移后，巴方可自主研发 DLM 与其他尺寸模型，并主导三大中心运营</a:t>
+              <a:t>结果：巴方可自主研发 DLM 与其他尺寸模型，并主导三大中心运营</a:t>
             </a:r>
           </a:p>
         </p:txBody>
@@ -18776,7 +18604,7 @@
         <p:spPr>
           <a:xfrm>
             <a:off x="6277356" y="1005840"/>
-            <a:ext cx="5454396" cy="3611880"/>
+            <a:ext cx="5454396" cy="3383280"/>
           </a:xfrm>
           <a:prstGeom prst="roundRect">
             <a:avLst>
@@ -18929,8 +18757,8 @@
         </p:nvSpPr>
         <p:spPr>
           <a:xfrm>
-            <a:off x="6551676" y="2240280"/>
-            <a:ext cx="4905756" cy="2286000"/>
+            <a:off x="6551676" y="2286000"/>
+            <a:ext cx="4905756" cy="2011680"/>
           </a:xfrm>
           <a:prstGeom prst="rect">
             <a:avLst/>
@@ -18948,7 +18776,7 @@
                 <a:spcPct val="115000"/>
               </a:lnSpc>
               <a:spcAft>
-                <a:spcPts val="400"/>
+                <a:spcPts val="700"/>
               </a:spcAft>
               <a:buClr>
                 <a:srgbClr val="B35400"/>
@@ -18958,17 +18786,17 @@
               <a:buChar char="•"/>
             </a:pPr>
             <a:r>
-              <a:rPr sz="1100" b="0">
+              <a:rPr sz="1200" b="0">
                 <a:solidFill>
                   <a:srgbClr val="333333"/>
                 </a:solidFill>
                 <a:latin typeface="微软雅黑"/>
                 <a:ea typeface="微软雅黑"/>
               </a:rPr>
-              <a:t>对象：少数有编程与模型基础的人员，人数 </a:t>
+              <a:t>对象：少数有编程与模型基础的人员，</a:t>
             </a:r>
             <a:r>
-              <a:rPr sz="1100" b="0">
+              <a:rPr sz="1200" b="0">
                 <a:solidFill>
                   <a:srgbClr val="0070C0"/>
                 </a:solidFill>
@@ -18984,7 +18812,7 @@
                 <a:spcPct val="115000"/>
               </a:lnSpc>
               <a:spcAft>
-                <a:spcPts val="400"/>
+                <a:spcPts val="700"/>
               </a:spcAft>
               <a:buClr>
                 <a:srgbClr val="B35400"/>
@@ -18994,7 +18822,7 @@
               <a:buChar char="•"/>
             </a:pPr>
             <a:r>
-              <a:rPr sz="1100" b="0">
+              <a:rPr sz="1200" b="0">
                 <a:solidFill>
                   <a:srgbClr val="333333"/>
                 </a:solidFill>
@@ -19010,7 +18838,7 @@
                 <a:spcPct val="115000"/>
               </a:lnSpc>
               <a:spcAft>
-                <a:spcPts val="400"/>
+                <a:spcPts val="700"/>
               </a:spcAft>
               <a:buClr>
                 <a:srgbClr val="B35400"/>
@@ -19020,86 +18848,24 @@
               <a:buChar char="•"/>
             </a:pPr>
             <a:r>
-              <a:rPr sz="1100" b="0">
+              <a:rPr sz="1200" b="0">
                 <a:solidFill>
                   <a:srgbClr val="333333"/>
                 </a:solidFill>
                 <a:latin typeface="微软雅黑"/>
                 <a:ea typeface="微软雅黑"/>
               </a:rPr>
-              <a:t>形式与周期：</a:t>
+              <a:t>形式、周期与价格：</a:t>
             </a:r>
             <a:r>
-              <a:rPr sz="1100" b="0">
+              <a:rPr sz="1200" b="0">
                 <a:solidFill>
                   <a:srgbClr val="0070C0"/>
                 </a:solidFill>
                 <a:latin typeface="微软雅黑"/>
                 <a:ea typeface="微软雅黑"/>
               </a:rPr>
-              <a:t>示例：合肥现场 4 周 + 远程 8 周</a:t>
-            </a:r>
-          </a:p>
-          <a:p>
-            <a:pPr algn="l" marL="164592" indent="-164592">
-              <a:lnSpc>
-                <a:spcPct val="115000"/>
-              </a:lnSpc>
-              <a:spcAft>
-                <a:spcPts val="400"/>
-              </a:spcAft>
-              <a:buClr>
-                <a:srgbClr val="B35400"/>
-              </a:buClr>
-              <a:buSzPct val="100000"/>
-              <a:buFont typeface="Arial"/>
-              <a:buChar char="•"/>
-            </a:pPr>
-            <a:r>
-              <a:rPr sz="1100" b="0">
-                <a:solidFill>
-                  <a:srgbClr val="333333"/>
-                </a:solidFill>
-                <a:latin typeface="微软雅黑"/>
-                <a:ea typeface="微软雅黑"/>
-              </a:rPr>
-              <a:t>价格：</a:t>
-            </a:r>
-            <a:r>
-              <a:rPr sz="1100" b="0">
-                <a:solidFill>
-                  <a:srgbClr val="0070C0"/>
-                </a:solidFill>
-                <a:latin typeface="微软雅黑"/>
-                <a:ea typeface="微软雅黑"/>
-              </a:rPr>
-              <a:t>示例：按人数与周期单独报价</a:t>
-            </a:r>
-          </a:p>
-          <a:p>
-            <a:pPr algn="l" marL="164592" indent="-164592">
-              <a:lnSpc>
-                <a:spcPct val="115000"/>
-              </a:lnSpc>
-              <a:spcAft>
-                <a:spcPts val="400"/>
-              </a:spcAft>
-              <a:buClr>
-                <a:srgbClr val="B35400"/>
-              </a:buClr>
-              <a:buSzPct val="100000"/>
-              <a:buFont typeface="Arial"/>
-              <a:buChar char="•"/>
-            </a:pPr>
-            <a:r>
-              <a:rPr sz="1100" b="0">
-                <a:solidFill>
-                  <a:srgbClr val="333333"/>
-                </a:solidFill>
-                <a:latin typeface="微软雅黑"/>
-                <a:ea typeface="微软雅黑"/>
-              </a:rPr>
-              <a:t>与已包含内容的边界：开源模型微调、性能优化与定制开发属另行评估报价（8/13 答复 Q3）</a:t>
+              <a:t>示例：现场 4 周 + 远程 8 周，按人数与周期报价</a:t>
             </a:r>
           </a:p>
         </p:txBody>
@@ -19112,7 +18878,7 @@
         </p:nvSpPr>
         <p:spPr>
           <a:xfrm>
-            <a:off x="457200" y="4754880"/>
+            <a:off x="457200" y="4572000"/>
             <a:ext cx="11274552" cy="512064"/>
           </a:xfrm>
           <a:prstGeom prst="roundRect">
@@ -19160,7 +18926,7 @@
         </p:nvSpPr>
         <p:spPr>
           <a:xfrm>
-            <a:off x="685800" y="4855464"/>
+            <a:off x="685800" y="4672584"/>
             <a:ext cx="1645920" cy="310896"/>
           </a:xfrm>
           <a:prstGeom prst="rect">
@@ -19203,7 +18969,7 @@
         </p:nvSpPr>
         <p:spPr>
           <a:xfrm>
-            <a:off x="2331720" y="4828032"/>
+            <a:off x="2331720" y="4645152"/>
             <a:ext cx="9171432" cy="384048"/>
           </a:xfrm>
           <a:prstGeom prst="rect">
@@ -19276,7 +19042,7 @@
         </p:nvSpPr>
         <p:spPr>
           <a:xfrm>
-            <a:off x="457200" y="5413248"/>
+            <a:off x="457200" y="5257800"/>
             <a:ext cx="11274552" cy="457200"/>
           </a:xfrm>
           <a:prstGeom prst="rect">
@@ -19306,7 +19072,7 @@
                 <a:latin typeface="微软雅黑"/>
                 <a:ea typeface="微软雅黑"/>
               </a:rPr>
-              <a:t>软件栈：研发与验证算力（17.5P）及兼容性验证在范围内；软件栈自研的主体工作由 RNP 承担，</a:t>
+              <a:t>软件栈研发与验证算力及兼容性验证在范围内，软件栈自研的主体工作由 RNP 承担，</a:t>
             </a:r>
             <a:r>
               <a:rPr sz="1000" b="0">
@@ -19326,7 +19092,7 @@
                 <a:latin typeface="微软雅黑"/>
                 <a:ea typeface="微软雅黑"/>
               </a:rPr>
-              <a:t>。讯飞 SOW 以外的工作包不在本页。</a:t>
+              <a:t>。各角色的学习路径见下页。</a:t>
             </a:r>
           </a:p>
         </p:txBody>
@@ -21600,7 +21366,7 @@
         <p:spPr>
           <a:xfrm>
             <a:off x="457200" y="960120"/>
-            <a:ext cx="3575304" cy="1874519"/>
+            <a:ext cx="3575304" cy="1600200"/>
           </a:xfrm>
           <a:prstGeom prst="roundRect">
             <a:avLst>
@@ -21689,7 +21455,7 @@
         <p:spPr>
           <a:xfrm>
             <a:off x="621792" y="1362456"/>
-            <a:ext cx="3246120" cy="1417319"/>
+            <a:ext cx="3246120" cy="1143000"/>
           </a:xfrm>
           <a:prstGeom prst="rect">
             <a:avLst/>
@@ -21707,7 +21473,7 @@
                 <a:spcPct val="115000"/>
               </a:lnSpc>
               <a:spcAft>
-                <a:spcPts val="100"/>
+                <a:spcPts val="200"/>
               </a:spcAft>
               <a:buClr>
                 <a:srgbClr val="3B7A1A"/>
@@ -21717,14 +21483,14 @@
               <a:buChar char="•"/>
             </a:pPr>
             <a:r>
-              <a:rPr sz="950" b="0">
+              <a:rPr sz="1000" b="0">
                 <a:solidFill>
                   <a:srgbClr val="333333"/>
                 </a:solidFill>
                 <a:latin typeface="微软雅黑"/>
                 <a:ea typeface="微软雅黑"/>
               </a:rPr>
-              <a:t>国家大模型（含葡语语音）、国家 APP、3 个 DLM；项目内知识转移</a:t>
+              <a:t>国家大模型（含葡语语音）、国家 APP、3 个 DLM</a:t>
             </a:r>
           </a:p>
           <a:p>
@@ -21733,7 +21499,7 @@
                 <a:spcPct val="115000"/>
               </a:lnSpc>
               <a:spcAft>
-                <a:spcPts val="100"/>
+                <a:spcPts val="200"/>
               </a:spcAft>
               <a:buClr>
                 <a:srgbClr val="3B7A1A"/>
@@ -21743,14 +21509,14 @@
               <a:buChar char="•"/>
             </a:pPr>
             <a:r>
-              <a:rPr sz="950" b="0">
+              <a:rPr sz="1000" b="0">
                 <a:solidFill>
                   <a:srgbClr val="333333"/>
                 </a:solidFill>
                 <a:latin typeface="微软雅黑"/>
                 <a:ea typeface="微软雅黑"/>
               </a:rPr>
-              <a:t>永久授权：模型权重、本土语料、定制代码、平台与应用</a:t>
+              <a:t>项目内知识转移；永久授权的权重、语料、定制代码与平台</a:t>
             </a:r>
           </a:p>
           <a:p>
@@ -21759,7 +21525,7 @@
                 <a:spcPct val="115000"/>
               </a:lnSpc>
               <a:spcAft>
-                <a:spcPts val="100"/>
+                <a:spcPts val="200"/>
               </a:spcAft>
               <a:buClr>
                 <a:srgbClr val="3B7A1A"/>
@@ -21769,40 +21535,14 @@
               <a:buChar char="•"/>
             </a:pPr>
             <a:r>
-              <a:rPr sz="950" b="0">
+              <a:rPr sz="1000" b="0">
                 <a:solidFill>
                   <a:srgbClr val="333333"/>
                 </a:solidFill>
                 <a:latin typeface="微软雅黑"/>
                 <a:ea typeface="微软雅黑"/>
               </a:rPr>
-              <a:t>MaaS 平台、ONNX 导出、基模结构源码</a:t>
-            </a:r>
-          </a:p>
-          <a:p>
-            <a:pPr algn="l" marL="164592" indent="-164592">
-              <a:lnSpc>
-                <a:spcPct val="115000"/>
-              </a:lnSpc>
-              <a:spcAft>
-                <a:spcPts val="100"/>
-              </a:spcAft>
-              <a:buClr>
-                <a:srgbClr val="3B7A1A"/>
-              </a:buClr>
-              <a:buSzPct val="100000"/>
-              <a:buFont typeface="Arial"/>
-              <a:buChar char="•"/>
-            </a:pPr>
-            <a:r>
-              <a:rPr sz="950" b="0">
-                <a:solidFill>
-                  <a:srgbClr val="333333"/>
-                </a:solidFill>
-                <a:latin typeface="微软雅黑"/>
-                <a:ea typeface="微软雅黑"/>
-              </a:rPr>
-              <a:t>开源模型导入与不超过 2 次推理迁移适配；软件栈研发与验证算力</a:t>
+              <a:t>开源模型导入与 2 次迁移适配；MaaS、导出与基模源码</a:t>
             </a:r>
           </a:p>
         </p:txBody>
@@ -21816,7 +21556,7 @@
         <p:spPr>
           <a:xfrm>
             <a:off x="4306824" y="960120"/>
-            <a:ext cx="3575304" cy="1874519"/>
+            <a:ext cx="3575304" cy="1600200"/>
           </a:xfrm>
           <a:prstGeom prst="roundRect">
             <a:avLst>
@@ -21905,7 +21645,7 @@
         <p:spPr>
           <a:xfrm>
             <a:off x="4471416" y="1362456"/>
-            <a:ext cx="3246120" cy="1417319"/>
+            <a:ext cx="3246120" cy="1143000"/>
           </a:xfrm>
           <a:prstGeom prst="rect">
             <a:avLst/>
@@ -21923,7 +21663,7 @@
                 <a:spcPct val="115000"/>
               </a:lnSpc>
               <a:spcAft>
-                <a:spcPts val="100"/>
+                <a:spcPts val="200"/>
               </a:spcAft>
               <a:buClr>
                 <a:srgbClr val="B35400"/>
@@ -21933,7 +21673,7 @@
               <a:buChar char="•"/>
             </a:pPr>
             <a:r>
-              <a:rPr sz="950" b="0">
+              <a:rPr sz="1000" b="0">
                 <a:solidFill>
                   <a:srgbClr val="333333"/>
                 </a:solidFill>
@@ -21949,7 +21689,7 @@
                 <a:spcPct val="115000"/>
               </a:lnSpc>
               <a:spcAft>
-                <a:spcPts val="100"/>
+                <a:spcPts val="200"/>
               </a:spcAft>
               <a:buClr>
                 <a:srgbClr val="B35400"/>
@@ -21959,14 +21699,14 @@
               <a:buChar char="•"/>
             </a:pPr>
             <a:r>
-              <a:rPr sz="950" b="0">
+              <a:rPr sz="1000" b="0">
                 <a:solidFill>
                   <a:srgbClr val="333333"/>
                 </a:solidFill>
                 <a:latin typeface="微软雅黑"/>
                 <a:ea typeface="微软雅黑"/>
               </a:rPr>
-              <a:t>清单外开源模型适配；微调、性能优化与定制开发</a:t>
+              <a:t>清单外模型适配；微调、性能优化与定制开发</a:t>
             </a:r>
           </a:p>
           <a:p>
@@ -21975,7 +21715,7 @@
                 <a:spcPct val="115000"/>
               </a:lnSpc>
               <a:spcAft>
-                <a:spcPts val="100"/>
+                <a:spcPts val="200"/>
               </a:spcAft>
               <a:buClr>
                 <a:srgbClr val="B35400"/>
@@ -21985,40 +21725,14 @@
               <a:buChar char="•"/>
             </a:pPr>
             <a:r>
-              <a:rPr sz="950" b="0">
+              <a:rPr sz="1000" b="0">
                 <a:solidFill>
                   <a:srgbClr val="333333"/>
                 </a:solidFill>
                 <a:latin typeface="微软雅黑"/>
                 <a:ea typeface="微软雅黑"/>
               </a:rPr>
-              <a:t>软件运维年费、模型持续优化年费</a:t>
-            </a:r>
-          </a:p>
-          <a:p>
-            <a:pPr algn="l" marL="164592" indent="-164592">
-              <a:lnSpc>
-                <a:spcPct val="115000"/>
-              </a:lnSpc>
-              <a:spcAft>
-                <a:spcPts val="100"/>
-              </a:spcAft>
-              <a:buClr>
-                <a:srgbClr val="B35400"/>
-              </a:buClr>
-              <a:buSzPct val="100000"/>
-              <a:buFont typeface="Arial"/>
-              <a:buChar char="•"/>
-            </a:pPr>
-            <a:r>
-              <a:rPr sz="950" b="0">
-                <a:solidFill>
-                  <a:srgbClr val="333333"/>
-                </a:solidFill>
-                <a:latin typeface="微软雅黑"/>
-                <a:ea typeface="微软雅黑"/>
-              </a:rPr>
-              <a:t>定制代码对外再分发；核心产品全量开源买断</a:t>
+              <a:t>运维年费与模型优化年费；代码再分发；全量开源买断</a:t>
             </a:r>
           </a:p>
         </p:txBody>
@@ -22032,7 +21746,7 @@
         <p:spPr>
           <a:xfrm>
             <a:off x="8156448" y="960120"/>
-            <a:ext cx="3575304" cy="1874519"/>
+            <a:ext cx="3575304" cy="1600200"/>
           </a:xfrm>
           <a:prstGeom prst="roundRect">
             <a:avLst>
@@ -22121,7 +21835,7 @@
         <p:spPr>
           <a:xfrm>
             <a:off x="8321040" y="1362456"/>
-            <a:ext cx="3246120" cy="1417319"/>
+            <a:ext cx="3246120" cy="1143000"/>
           </a:xfrm>
           <a:prstGeom prst="rect">
             <a:avLst/>
@@ -22139,7 +21853,7 @@
                 <a:spcPct val="115000"/>
               </a:lnSpc>
               <a:spcAft>
-                <a:spcPts val="100"/>
+                <a:spcPts val="200"/>
               </a:spcAft>
               <a:buClr>
                 <a:srgbClr val="1D1D1A"/>
@@ -22149,14 +21863,14 @@
               <a:buChar char="•"/>
             </a:pPr>
             <a:r>
-              <a:rPr sz="950" b="0">
+              <a:rPr sz="1000" b="0">
                 <a:solidFill>
                   <a:srgbClr val="333333"/>
                 </a:solidFill>
                 <a:latin typeface="微软雅黑"/>
                 <a:ea typeface="微软雅黑"/>
               </a:rPr>
-              <a:t>VLM；国家级技术验证实验室；全量非昇腾兼容测试（范围可议）</a:t>
+              <a:t>VLM；国家级技术验证实验室；全量非昇腾兼容测试</a:t>
             </a:r>
           </a:p>
           <a:p>
@@ -22165,7 +21879,7 @@
                 <a:spcPct val="115000"/>
               </a:lnSpc>
               <a:spcAft>
-                <a:spcPts val="100"/>
+                <a:spcPts val="200"/>
               </a:spcAft>
               <a:buClr>
                 <a:srgbClr val="1D1D1A"/>
@@ -22175,14 +21889,14 @@
               <a:buChar char="•"/>
             </a:pPr>
             <a:r>
-              <a:rPr sz="950" b="0">
+              <a:rPr sz="1000" b="0">
                 <a:solidFill>
                   <a:srgbClr val="333333"/>
                 </a:solidFill>
                 <a:latin typeface="微软雅黑"/>
                 <a:ea typeface="微软雅黑"/>
               </a:rPr>
-              <a:t>RNP：本地语料采集与授权、LGPD 合规、行业与场景确定、本地专家</a:t>
+              <a:t>RNP：本地语料与授权、LGPD 合规、场景确定、本地专家</a:t>
             </a:r>
           </a:p>
           <a:p>
@@ -22191,7 +21905,7 @@
                 <a:spcPct val="115000"/>
               </a:lnSpc>
               <a:spcAft>
-                <a:spcPts val="100"/>
+                <a:spcPts val="200"/>
               </a:spcAft>
               <a:buClr>
                 <a:srgbClr val="1D1D1A"/>
@@ -22201,7 +21915,7 @@
               <a:buChar char="•"/>
             </a:pPr>
             <a:r>
-              <a:rPr sz="950" b="0">
+              <a:rPr sz="1000" b="0">
                 <a:solidFill>
                   <a:srgbClr val="0070C0"/>
                 </a:solidFill>
@@ -22222,8 +21936,8 @@
           <p:nvPr/>
         </p:nvGraphicFramePr>
         <p:xfrm>
-          <a:off x="457200" y="3017520"/>
-          <a:ext cx="11274552" cy="2670048"/>
+          <a:off x="457200" y="2788920"/>
+          <a:ext cx="11274552" cy="2779776"/>
         </p:xfrm>
         <a:graphic>
           <a:graphicData uri="http://schemas.openxmlformats.org/drawingml/2006/table">
@@ -22409,7 +22123,7 @@
                   </a:tcPr>
                 </a:tc>
               </a:tr>
-              <a:tr h="384048">
+              <a:tr h="402336">
                 <a:tc>
                   <a:txBody>
                     <a:bodyPr wrap="square" lIns="73152" tIns="36576" rIns="73152" bIns="36576" anchor="ctr">
@@ -22582,7 +22296,7 @@
                   </a:tcPr>
                 </a:tc>
               </a:tr>
-              <a:tr h="384048">
+              <a:tr h="402336">
                 <a:tc>
                   <a:txBody>
                     <a:bodyPr wrap="square" lIns="73152" tIns="36576" rIns="73152" bIns="36576" anchor="ctr">
@@ -22755,7 +22469,7 @@
                   </a:tcPr>
                 </a:tc>
               </a:tr>
-              <a:tr h="384048">
+              <a:tr h="402336">
                 <a:tc>
                   <a:txBody>
                     <a:bodyPr wrap="square" lIns="73152" tIns="36576" rIns="73152" bIns="36576" anchor="ctr">
@@ -22928,7 +22642,7 @@
                   </a:tcPr>
                 </a:tc>
               </a:tr>
-              <a:tr h="384048">
+              <a:tr h="402336">
                 <a:tc>
                   <a:txBody>
                     <a:bodyPr wrap="square" lIns="73152" tIns="36576" rIns="73152" bIns="36576" anchor="ctr">
@@ -23101,7 +22815,7 @@
                   </a:tcPr>
                 </a:tc>
               </a:tr>
-              <a:tr h="384048">
+              <a:tr h="402336">
                 <a:tc>
                   <a:txBody>
                     <a:bodyPr wrap="square" lIns="73152" tIns="36576" rIns="73152" bIns="36576" anchor="ctr">
@@ -23274,7 +22988,7 @@
                   </a:tcPr>
                 </a:tc>
               </a:tr>
-              <a:tr h="384048">
+              <a:tr h="402336">
                 <a:tc>
                   <a:txBody>
                     <a:bodyPr wrap="square" lIns="73152" tIns="36576" rIns="73152" bIns="36576" anchor="ctr">
@@ -23459,7 +23173,7 @@
         </p:nvSpPr>
         <p:spPr>
           <a:xfrm>
-            <a:off x="457200" y="5760720"/>
+            <a:off x="457200" y="5623560"/>
             <a:ext cx="11274552" cy="365760"/>
           </a:xfrm>
           <a:prstGeom prst="rect">
@@ -23767,7 +23481,7 @@
                 <a:latin typeface="微软雅黑"/>
                 <a:ea typeface="微软雅黑"/>
               </a:rPr>
-              <a:t>讨论稿，内容以 SOW、报价与技术方案为准</a:t>
+              <a:t>讨论稿，内容以 SOW、报价与技术方案为准；第 2 页一页看全</a:t>
             </a:r>
           </a:p>
         </p:txBody>
@@ -24497,21 +24211,1358 @@
                 <a:latin typeface="微软雅黑"/>
                 <a:ea typeface="微软雅黑"/>
               </a:rPr>
-              <a:t>讯飞交付什么：三项成果，一套能力</a:t>
+              <a:t>一页看全：三项成果，怎么建、谁来做、关键数字</a:t>
             </a:r>
           </a:p>
         </p:txBody>
       </p:sp>
+      <p:graphicFrame>
+        <p:nvGraphicFramePr>
+          <p:cNvPr id="3" name="Table 2"/>
+          <p:cNvGraphicFramePr>
+            <a:graphicFrameLocks noGrp="1"/>
+          </p:cNvGraphicFramePr>
+          <p:nvPr/>
+        </p:nvGraphicFramePr>
+        <p:xfrm>
+          <a:off x="457200" y="960120"/>
+          <a:ext cx="11274552" cy="3127248"/>
+        </p:xfrm>
+        <a:graphic>
+          <a:graphicData uri="http://schemas.openxmlformats.org/drawingml/2006/table">
+            <a:tbl>
+              <a:tblPr firstRow="0" bandRow="0">
+                <a:tableStyleId>{2D5ABB26-0587-4C30-8999-92F81FD0307C}</a:tableStyleId>
+              </a:tblPr>
+              <a:tblGrid>
+                <a:gridCol w="1737360"/>
+                <a:gridCol w="2743200"/>
+                <a:gridCol w="2606040"/>
+                <a:gridCol w="2697480"/>
+                <a:gridCol w="1490472"/>
+              </a:tblGrid>
+              <a:tr h="384048">
+                <a:tc>
+                  <a:txBody>
+                    <a:bodyPr wrap="square" lIns="73152" tIns="18288" rIns="73152" bIns="18288" anchor="ctr">
+                      <a:noAutofit/>
+                    </a:bodyPr>
+                    <a:lstStyle/>
+                    <a:p>
+                      <a:pPr algn="l">
+                        <a:lnSpc>
+                          <a:spcPct val="115000"/>
+                        </a:lnSpc>
+                        <a:spcAft>
+                          <a:spcPts val="0"/>
+                        </a:spcAft>
+                      </a:pPr>
+                      <a:r>
+                        <a:rPr sz="1100" b="1">
+                          <a:solidFill>
+                            <a:srgbClr val="FFFFFF"/>
+                          </a:solidFill>
+                          <a:latin typeface="微软雅黑"/>
+                          <a:ea typeface="微软雅黑"/>
+                        </a:rPr>
+                        <a:t>成果</a:t>
+                      </a:r>
+                    </a:p>
+                  </a:txBody>
+                  <a:tcPr anchor="ctr">
+                    <a:lnL w="6350" cap="flat" cmpd="sng" algn="ctr">
+                      <a:solidFill>
+                        <a:srgbClr val="C00000"/>
+                      </a:solidFill>
+                      <a:prstDash val="solid"/>
+                    </a:lnL>
+                    <a:lnR w="6350" cap="flat" cmpd="sng" algn="ctr">
+                      <a:solidFill>
+                        <a:srgbClr val="C00000"/>
+                      </a:solidFill>
+                      <a:prstDash val="solid"/>
+                    </a:lnR>
+                    <a:lnT w="6350" cap="flat" cmpd="sng" algn="ctr">
+                      <a:solidFill>
+                        <a:srgbClr val="C00000"/>
+                      </a:solidFill>
+                      <a:prstDash val="solid"/>
+                    </a:lnT>
+                    <a:lnB w="6350" cap="flat" cmpd="sng" algn="ctr">
+                      <a:solidFill>
+                        <a:srgbClr val="C00000"/>
+                      </a:solidFill>
+                      <a:prstDash val="solid"/>
+                    </a:lnB>
+                    <a:solidFill>
+                      <a:srgbClr val="C00000"/>
+                    </a:solidFill>
+                  </a:tcPr>
+                </a:tc>
+                <a:tc>
+                  <a:txBody>
+                    <a:bodyPr wrap="square" lIns="73152" tIns="18288" rIns="73152" bIns="18288" anchor="ctr">
+                      <a:noAutofit/>
+                    </a:bodyPr>
+                    <a:lstStyle/>
+                    <a:p>
+                      <a:pPr algn="l">
+                        <a:lnSpc>
+                          <a:spcPct val="115000"/>
+                        </a:lnSpc>
+                        <a:spcAft>
+                          <a:spcPts val="0"/>
+                        </a:spcAft>
+                      </a:pPr>
+                      <a:r>
+                        <a:rPr sz="1100" b="1">
+                          <a:solidFill>
+                            <a:srgbClr val="FFFFFF"/>
+                          </a:solidFill>
+                          <a:latin typeface="微软雅黑"/>
+                          <a:ea typeface="微软雅黑"/>
+                        </a:rPr>
+                        <a:t>是什么</a:t>
+                      </a:r>
+                    </a:p>
+                  </a:txBody>
+                  <a:tcPr anchor="ctr">
+                    <a:lnL w="6350" cap="flat" cmpd="sng" algn="ctr">
+                      <a:solidFill>
+                        <a:srgbClr val="C00000"/>
+                      </a:solidFill>
+                      <a:prstDash val="solid"/>
+                    </a:lnL>
+                    <a:lnR w="6350" cap="flat" cmpd="sng" algn="ctr">
+                      <a:solidFill>
+                        <a:srgbClr val="C00000"/>
+                      </a:solidFill>
+                      <a:prstDash val="solid"/>
+                    </a:lnR>
+                    <a:lnT w="6350" cap="flat" cmpd="sng" algn="ctr">
+                      <a:solidFill>
+                        <a:srgbClr val="C00000"/>
+                      </a:solidFill>
+                      <a:prstDash val="solid"/>
+                    </a:lnT>
+                    <a:lnB w="6350" cap="flat" cmpd="sng" algn="ctr">
+                      <a:solidFill>
+                        <a:srgbClr val="C00000"/>
+                      </a:solidFill>
+                      <a:prstDash val="solid"/>
+                    </a:lnB>
+                    <a:solidFill>
+                      <a:srgbClr val="C00000"/>
+                    </a:solidFill>
+                  </a:tcPr>
+                </a:tc>
+                <a:tc>
+                  <a:txBody>
+                    <a:bodyPr wrap="square" lIns="73152" tIns="18288" rIns="73152" bIns="18288" anchor="ctr">
+                      <a:noAutofit/>
+                    </a:bodyPr>
+                    <a:lstStyle/>
+                    <a:p>
+                      <a:pPr algn="l">
+                        <a:lnSpc>
+                          <a:spcPct val="115000"/>
+                        </a:lnSpc>
+                        <a:spcAft>
+                          <a:spcPts val="0"/>
+                        </a:spcAft>
+                      </a:pPr>
+                      <a:r>
+                        <a:rPr sz="1100" b="1">
+                          <a:solidFill>
+                            <a:srgbClr val="FFFFFF"/>
+                          </a:solidFill>
+                          <a:latin typeface="微软雅黑"/>
+                          <a:ea typeface="微软雅黑"/>
+                        </a:rPr>
+                        <a:t>怎么建</a:t>
+                      </a:r>
+                    </a:p>
+                  </a:txBody>
+                  <a:tcPr anchor="ctr">
+                    <a:lnL w="6350" cap="flat" cmpd="sng" algn="ctr">
+                      <a:solidFill>
+                        <a:srgbClr val="C00000"/>
+                      </a:solidFill>
+                      <a:prstDash val="solid"/>
+                    </a:lnL>
+                    <a:lnR w="6350" cap="flat" cmpd="sng" algn="ctr">
+                      <a:solidFill>
+                        <a:srgbClr val="C00000"/>
+                      </a:solidFill>
+                      <a:prstDash val="solid"/>
+                    </a:lnR>
+                    <a:lnT w="6350" cap="flat" cmpd="sng" algn="ctr">
+                      <a:solidFill>
+                        <a:srgbClr val="C00000"/>
+                      </a:solidFill>
+                      <a:prstDash val="solid"/>
+                    </a:lnT>
+                    <a:lnB w="6350" cap="flat" cmpd="sng" algn="ctr">
+                      <a:solidFill>
+                        <a:srgbClr val="C00000"/>
+                      </a:solidFill>
+                      <a:prstDash val="solid"/>
+                    </a:lnB>
+                    <a:solidFill>
+                      <a:srgbClr val="C00000"/>
+                    </a:solidFill>
+                  </a:tcPr>
+                </a:tc>
+                <a:tc>
+                  <a:txBody>
+                    <a:bodyPr wrap="square" lIns="73152" tIns="18288" rIns="73152" bIns="18288" anchor="ctr">
+                      <a:noAutofit/>
+                    </a:bodyPr>
+                    <a:lstStyle/>
+                    <a:p>
+                      <a:pPr algn="l">
+                        <a:lnSpc>
+                          <a:spcPct val="115000"/>
+                        </a:lnSpc>
+                        <a:spcAft>
+                          <a:spcPts val="0"/>
+                        </a:spcAft>
+                      </a:pPr>
+                      <a:r>
+                        <a:rPr sz="1100" b="1">
+                          <a:solidFill>
+                            <a:srgbClr val="FFFFFF"/>
+                          </a:solidFill>
+                          <a:latin typeface="微软雅黑"/>
+                          <a:ea typeface="微软雅黑"/>
+                        </a:rPr>
+                        <a:t>谁做什么</a:t>
+                      </a:r>
+                    </a:p>
+                  </a:txBody>
+                  <a:tcPr anchor="ctr">
+                    <a:lnL w="6350" cap="flat" cmpd="sng" algn="ctr">
+                      <a:solidFill>
+                        <a:srgbClr val="C00000"/>
+                      </a:solidFill>
+                      <a:prstDash val="solid"/>
+                    </a:lnL>
+                    <a:lnR w="6350" cap="flat" cmpd="sng" algn="ctr">
+                      <a:solidFill>
+                        <a:srgbClr val="C00000"/>
+                      </a:solidFill>
+                      <a:prstDash val="solid"/>
+                    </a:lnR>
+                    <a:lnT w="6350" cap="flat" cmpd="sng" algn="ctr">
+                      <a:solidFill>
+                        <a:srgbClr val="C00000"/>
+                      </a:solidFill>
+                      <a:prstDash val="solid"/>
+                    </a:lnT>
+                    <a:lnB w="6350" cap="flat" cmpd="sng" algn="ctr">
+                      <a:solidFill>
+                        <a:srgbClr val="C00000"/>
+                      </a:solidFill>
+                      <a:prstDash val="solid"/>
+                    </a:lnB>
+                    <a:solidFill>
+                      <a:srgbClr val="C00000"/>
+                    </a:solidFill>
+                  </a:tcPr>
+                </a:tc>
+                <a:tc>
+                  <a:txBody>
+                    <a:bodyPr wrap="square" lIns="73152" tIns="18288" rIns="73152" bIns="18288" anchor="ctr">
+                      <a:noAutofit/>
+                    </a:bodyPr>
+                    <a:lstStyle/>
+                    <a:p>
+                      <a:pPr algn="l">
+                        <a:lnSpc>
+                          <a:spcPct val="115000"/>
+                        </a:lnSpc>
+                        <a:spcAft>
+                          <a:spcPts val="0"/>
+                        </a:spcAft>
+                      </a:pPr>
+                      <a:r>
+                        <a:rPr sz="1100" b="1">
+                          <a:solidFill>
+                            <a:srgbClr val="FFFFFF"/>
+                          </a:solidFill>
+                          <a:latin typeface="微软雅黑"/>
+                          <a:ea typeface="微软雅黑"/>
+                        </a:rPr>
+                        <a:t>关键数字</a:t>
+                      </a:r>
+                    </a:p>
+                  </a:txBody>
+                  <a:tcPr anchor="ctr">
+                    <a:lnL w="6350" cap="flat" cmpd="sng" algn="ctr">
+                      <a:solidFill>
+                        <a:srgbClr val="C00000"/>
+                      </a:solidFill>
+                      <a:prstDash val="solid"/>
+                    </a:lnL>
+                    <a:lnR w="6350" cap="flat" cmpd="sng" algn="ctr">
+                      <a:solidFill>
+                        <a:srgbClr val="C00000"/>
+                      </a:solidFill>
+                      <a:prstDash val="solid"/>
+                    </a:lnR>
+                    <a:lnT w="6350" cap="flat" cmpd="sng" algn="ctr">
+                      <a:solidFill>
+                        <a:srgbClr val="C00000"/>
+                      </a:solidFill>
+                      <a:prstDash val="solid"/>
+                    </a:lnT>
+                    <a:lnB w="6350" cap="flat" cmpd="sng" algn="ctr">
+                      <a:solidFill>
+                        <a:srgbClr val="C00000"/>
+                      </a:solidFill>
+                      <a:prstDash val="solid"/>
+                    </a:lnB>
+                    <a:solidFill>
+                      <a:srgbClr val="C00000"/>
+                    </a:solidFill>
+                  </a:tcPr>
+                </a:tc>
+              </a:tr>
+              <a:tr h="914400">
+                <a:tc>
+                  <a:txBody>
+                    <a:bodyPr wrap="square" lIns="73152" tIns="36576" rIns="73152" bIns="36576" anchor="ctr">
+                      <a:noAutofit/>
+                    </a:bodyPr>
+                    <a:lstStyle/>
+                    <a:p>
+                      <a:pPr algn="l">
+                        <a:lnSpc>
+                          <a:spcPct val="110000"/>
+                        </a:lnSpc>
+                        <a:spcAft>
+                          <a:spcPts val="100"/>
+                        </a:spcAft>
+                      </a:pPr>
+                      <a:r>
+                        <a:rPr sz="1050" b="1">
+                          <a:solidFill>
+                            <a:srgbClr val="1D1D1A"/>
+                          </a:solidFill>
+                          <a:latin typeface="微软雅黑"/>
+                          <a:ea typeface="微软雅黑"/>
+                        </a:rPr>
+                        <a:t>国家大模型</a:t>
+                      </a:r>
+                    </a:p>
+                    <a:p>
+                      <a:pPr algn="l">
+                        <a:lnSpc>
+                          <a:spcPct val="110000"/>
+                        </a:lnSpc>
+                        <a:spcAft>
+                          <a:spcPts val="100"/>
+                        </a:spcAft>
+                      </a:pPr>
+                      <a:r>
+                        <a:rPr sz="1050" b="1">
+                          <a:solidFill>
+                            <a:srgbClr val="1D1D1A"/>
+                          </a:solidFill>
+                          <a:latin typeface="微软雅黑"/>
+                          <a:ea typeface="微软雅黑"/>
+                        </a:rPr>
+                        <a:t>（含葡语语音）</a:t>
+                      </a:r>
+                    </a:p>
+                  </a:txBody>
+                  <a:tcPr anchor="ctr">
+                    <a:lnL w="6350" cap="flat" cmpd="sng" algn="ctr">
+                      <a:solidFill>
+                        <a:srgbClr val="D9D9D9"/>
+                      </a:solidFill>
+                      <a:prstDash val="solid"/>
+                    </a:lnL>
+                    <a:lnR w="6350" cap="flat" cmpd="sng" algn="ctr">
+                      <a:solidFill>
+                        <a:srgbClr val="D9D9D9"/>
+                      </a:solidFill>
+                      <a:prstDash val="solid"/>
+                    </a:lnR>
+                    <a:lnT w="6350" cap="flat" cmpd="sng" algn="ctr">
+                      <a:solidFill>
+                        <a:srgbClr val="D9D9D9"/>
+                      </a:solidFill>
+                      <a:prstDash val="solid"/>
+                    </a:lnT>
+                    <a:lnB w="6350" cap="flat" cmpd="sng" algn="ctr">
+                      <a:solidFill>
+                        <a:srgbClr val="D9D9D9"/>
+                      </a:solidFill>
+                      <a:prstDash val="solid"/>
+                    </a:lnB>
+                    <a:solidFill>
+                      <a:srgbClr val="FFFFFF"/>
+                    </a:solidFill>
+                  </a:tcPr>
+                </a:tc>
+                <a:tc>
+                  <a:txBody>
+                    <a:bodyPr wrap="square" lIns="73152" tIns="36576" rIns="73152" bIns="36576" anchor="ctr">
+                      <a:noAutofit/>
+                    </a:bodyPr>
+                    <a:lstStyle/>
+                    <a:p>
+                      <a:pPr algn="l">
+                        <a:lnSpc>
+                          <a:spcPct val="110000"/>
+                        </a:lnSpc>
+                        <a:spcAft>
+                          <a:spcPts val="100"/>
+                        </a:spcAft>
+                      </a:pPr>
+                      <a:r>
+                        <a:rPr sz="1050" b="0">
+                          <a:solidFill>
+                            <a:srgbClr val="333333"/>
+                          </a:solidFill>
+                          <a:latin typeface="微软雅黑"/>
+                          <a:ea typeface="微软雅黑"/>
+                        </a:rPr>
+                        <a:t>基于讯飞星火基础模型的约 300B 巴西主权大模型，加巴西葡语 ASR/TTS</a:t>
+                      </a:r>
+                    </a:p>
+                  </a:txBody>
+                  <a:tcPr anchor="ctr">
+                    <a:lnL w="6350" cap="flat" cmpd="sng" algn="ctr">
+                      <a:solidFill>
+                        <a:srgbClr val="D9D9D9"/>
+                      </a:solidFill>
+                      <a:prstDash val="solid"/>
+                    </a:lnL>
+                    <a:lnR w="6350" cap="flat" cmpd="sng" algn="ctr">
+                      <a:solidFill>
+                        <a:srgbClr val="D9D9D9"/>
+                      </a:solidFill>
+                      <a:prstDash val="solid"/>
+                    </a:lnR>
+                    <a:lnT w="6350" cap="flat" cmpd="sng" algn="ctr">
+                      <a:solidFill>
+                        <a:srgbClr val="D9D9D9"/>
+                      </a:solidFill>
+                      <a:prstDash val="solid"/>
+                    </a:lnT>
+                    <a:lnB w="6350" cap="flat" cmpd="sng" algn="ctr">
+                      <a:solidFill>
+                        <a:srgbClr val="D9D9D9"/>
+                      </a:solidFill>
+                      <a:prstDash val="solid"/>
+                    </a:lnB>
+                    <a:solidFill>
+                      <a:srgbClr val="FFFFFF"/>
+                    </a:solidFill>
+                  </a:tcPr>
+                </a:tc>
+                <a:tc>
+                  <a:txBody>
+                    <a:bodyPr wrap="square" lIns="73152" tIns="36576" rIns="73152" bIns="36576" anchor="ctr">
+                      <a:noAutofit/>
+                    </a:bodyPr>
+                    <a:lstStyle/>
+                    <a:p>
+                      <a:pPr algn="l">
+                        <a:lnSpc>
+                          <a:spcPct val="110000"/>
+                        </a:lnSpc>
+                        <a:spcAft>
+                          <a:spcPts val="100"/>
+                        </a:spcAft>
+                      </a:pPr>
+                      <a:r>
+                        <a:rPr sz="1050" b="0">
+                          <a:solidFill>
+                            <a:srgbClr val="333333"/>
+                          </a:solidFill>
+                          <a:latin typeface="微软雅黑"/>
+                          <a:ea typeface="微软雅黑"/>
+                        </a:rPr>
+                        <a:t>语料构建 → 预训练与后训练 → 评测 → 交付</a:t>
+                      </a:r>
+                    </a:p>
+                  </a:txBody>
+                  <a:tcPr anchor="ctr">
+                    <a:lnL w="6350" cap="flat" cmpd="sng" algn="ctr">
+                      <a:solidFill>
+                        <a:srgbClr val="D9D9D9"/>
+                      </a:solidFill>
+                      <a:prstDash val="solid"/>
+                    </a:lnL>
+                    <a:lnR w="6350" cap="flat" cmpd="sng" algn="ctr">
+                      <a:solidFill>
+                        <a:srgbClr val="D9D9D9"/>
+                      </a:solidFill>
+                      <a:prstDash val="solid"/>
+                    </a:lnR>
+                    <a:lnT w="6350" cap="flat" cmpd="sng" algn="ctr">
+                      <a:solidFill>
+                        <a:srgbClr val="D9D9D9"/>
+                      </a:solidFill>
+                      <a:prstDash val="solid"/>
+                    </a:lnT>
+                    <a:lnB w="6350" cap="flat" cmpd="sng" algn="ctr">
+                      <a:solidFill>
+                        <a:srgbClr val="D9D9D9"/>
+                      </a:solidFill>
+                      <a:prstDash val="solid"/>
+                    </a:lnB>
+                    <a:solidFill>
+                      <a:srgbClr val="FFFFFF"/>
+                    </a:solidFill>
+                  </a:tcPr>
+                </a:tc>
+                <a:tc>
+                  <a:txBody>
+                    <a:bodyPr wrap="square" lIns="73152" tIns="36576" rIns="73152" bIns="36576" anchor="ctr">
+                      <a:noAutofit/>
+                    </a:bodyPr>
+                    <a:lstStyle/>
+                    <a:p>
+                      <a:pPr algn="l">
+                        <a:lnSpc>
+                          <a:spcPct val="110000"/>
+                        </a:lnSpc>
+                        <a:spcAft>
+                          <a:spcPts val="100"/>
+                        </a:spcAft>
+                      </a:pPr>
+                      <a:r>
+                        <a:rPr sz="1050" b="0">
+                          <a:solidFill>
+                            <a:srgbClr val="333333"/>
+                          </a:solidFill>
+                          <a:latin typeface="微软雅黑"/>
+                          <a:ea typeface="微软雅黑"/>
+                        </a:rPr>
+                        <a:t>讯飞：主导训练与语料加工</a:t>
+                      </a:r>
+                    </a:p>
+                    <a:p>
+                      <a:pPr algn="l">
+                        <a:lnSpc>
+                          <a:spcPct val="110000"/>
+                        </a:lnSpc>
+                        <a:spcAft>
+                          <a:spcPts val="100"/>
+                        </a:spcAft>
+                      </a:pPr>
+                      <a:r>
+                        <a:rPr sz="1050" b="0">
+                          <a:solidFill>
+                            <a:srgbClr val="333333"/>
+                          </a:solidFill>
+                          <a:latin typeface="微软雅黑"/>
+                          <a:ea typeface="微软雅黑"/>
+                        </a:rPr>
+                        <a:t>RNP：采集本地语料，参与训练与验收</a:t>
+                      </a:r>
+                    </a:p>
+                  </a:txBody>
+                  <a:tcPr anchor="ctr">
+                    <a:lnL w="6350" cap="flat" cmpd="sng" algn="ctr">
+                      <a:solidFill>
+                        <a:srgbClr val="D9D9D9"/>
+                      </a:solidFill>
+                      <a:prstDash val="solid"/>
+                    </a:lnL>
+                    <a:lnR w="6350" cap="flat" cmpd="sng" algn="ctr">
+                      <a:solidFill>
+                        <a:srgbClr val="D9D9D9"/>
+                      </a:solidFill>
+                      <a:prstDash val="solid"/>
+                    </a:lnR>
+                    <a:lnT w="6350" cap="flat" cmpd="sng" algn="ctr">
+                      <a:solidFill>
+                        <a:srgbClr val="D9D9D9"/>
+                      </a:solidFill>
+                      <a:prstDash val="solid"/>
+                    </a:lnT>
+                    <a:lnB w="6350" cap="flat" cmpd="sng" algn="ctr">
+                      <a:solidFill>
+                        <a:srgbClr val="D9D9D9"/>
+                      </a:solidFill>
+                      <a:prstDash val="solid"/>
+                    </a:lnB>
+                    <a:solidFill>
+                      <a:srgbClr val="FFFFFF"/>
+                    </a:solidFill>
+                  </a:tcPr>
+                </a:tc>
+                <a:tc>
+                  <a:txBody>
+                    <a:bodyPr wrap="square" lIns="73152" tIns="36576" rIns="73152" bIns="36576" anchor="ctr">
+                      <a:noAutofit/>
+                    </a:bodyPr>
+                    <a:lstStyle/>
+                    <a:p>
+                      <a:pPr algn="l">
+                        <a:lnSpc>
+                          <a:spcPct val="110000"/>
+                        </a:lnSpc>
+                        <a:spcAft>
+                          <a:spcPts val="100"/>
+                        </a:spcAft>
+                      </a:pPr>
+                      <a:r>
+                        <a:rPr sz="1050" b="0">
+                          <a:solidFill>
+                            <a:srgbClr val="333333"/>
+                          </a:solidFill>
+                          <a:latin typeface="微软雅黑"/>
+                          <a:ea typeface="微软雅黑"/>
+                        </a:rPr>
+                        <a:t>约 300B 参数</a:t>
+                      </a:r>
+                    </a:p>
+                    <a:p>
+                      <a:pPr algn="l">
+                        <a:lnSpc>
+                          <a:spcPct val="110000"/>
+                        </a:lnSpc>
+                        <a:spcAft>
+                          <a:spcPts val="100"/>
+                        </a:spcAft>
+                      </a:pPr>
+                      <a:r>
+                        <a:rPr sz="1050" b="0">
+                          <a:solidFill>
+                            <a:srgbClr val="333333"/>
+                          </a:solidFill>
+                          <a:latin typeface="微软雅黑"/>
+                          <a:ea typeface="微软雅黑"/>
+                        </a:rPr>
+                        <a:t>本地 50B + 通用 300B 语料</a:t>
+                      </a:r>
+                    </a:p>
+                    <a:p>
+                      <a:pPr algn="l">
+                        <a:lnSpc>
+                          <a:spcPct val="110000"/>
+                        </a:lnSpc>
+                        <a:spcAft>
+                          <a:spcPts val="100"/>
+                        </a:spcAft>
+                      </a:pPr>
+                      <a:r>
+                        <a:rPr sz="1050" b="0">
+                          <a:solidFill>
+                            <a:srgbClr val="333333"/>
+                          </a:solidFill>
+                          <a:latin typeface="微软雅黑"/>
+                          <a:ea typeface="微软雅黑"/>
+                        </a:rPr>
+                        <a:t>约 6 个月一版</a:t>
+                      </a:r>
+                    </a:p>
+                  </a:txBody>
+                  <a:tcPr anchor="ctr">
+                    <a:lnL w="6350" cap="flat" cmpd="sng" algn="ctr">
+                      <a:solidFill>
+                        <a:srgbClr val="D9D9D9"/>
+                      </a:solidFill>
+                      <a:prstDash val="solid"/>
+                    </a:lnL>
+                    <a:lnR w="6350" cap="flat" cmpd="sng" algn="ctr">
+                      <a:solidFill>
+                        <a:srgbClr val="D9D9D9"/>
+                      </a:solidFill>
+                      <a:prstDash val="solid"/>
+                    </a:lnR>
+                    <a:lnT w="6350" cap="flat" cmpd="sng" algn="ctr">
+                      <a:solidFill>
+                        <a:srgbClr val="D9D9D9"/>
+                      </a:solidFill>
+                      <a:prstDash val="solid"/>
+                    </a:lnT>
+                    <a:lnB w="6350" cap="flat" cmpd="sng" algn="ctr">
+                      <a:solidFill>
+                        <a:srgbClr val="D9D9D9"/>
+                      </a:solidFill>
+                      <a:prstDash val="solid"/>
+                    </a:lnB>
+                    <a:solidFill>
+                      <a:srgbClr val="FFFFFF"/>
+                    </a:solidFill>
+                  </a:tcPr>
+                </a:tc>
+              </a:tr>
+              <a:tr h="914400">
+                <a:tc>
+                  <a:txBody>
+                    <a:bodyPr wrap="square" lIns="73152" tIns="36576" rIns="73152" bIns="36576" anchor="ctr">
+                      <a:noAutofit/>
+                    </a:bodyPr>
+                    <a:lstStyle/>
+                    <a:p>
+                      <a:pPr algn="l">
+                        <a:lnSpc>
+                          <a:spcPct val="110000"/>
+                        </a:lnSpc>
+                        <a:spcAft>
+                          <a:spcPts val="100"/>
+                        </a:spcAft>
+                      </a:pPr>
+                      <a:r>
+                        <a:rPr sz="1050" b="1">
+                          <a:solidFill>
+                            <a:srgbClr val="1D1D1A"/>
+                          </a:solidFill>
+                          <a:latin typeface="微软雅黑"/>
+                          <a:ea typeface="微软雅黑"/>
+                        </a:rPr>
+                        <a:t>国家 APP</a:t>
+                      </a:r>
+                    </a:p>
+                  </a:txBody>
+                  <a:tcPr anchor="ctr">
+                    <a:lnL w="6350" cap="flat" cmpd="sng" algn="ctr">
+                      <a:solidFill>
+                        <a:srgbClr val="D9D9D9"/>
+                      </a:solidFill>
+                      <a:prstDash val="solid"/>
+                    </a:lnL>
+                    <a:lnR w="6350" cap="flat" cmpd="sng" algn="ctr">
+                      <a:solidFill>
+                        <a:srgbClr val="D9D9D9"/>
+                      </a:solidFill>
+                      <a:prstDash val="solid"/>
+                    </a:lnR>
+                    <a:lnT w="6350" cap="flat" cmpd="sng" algn="ctr">
+                      <a:solidFill>
+                        <a:srgbClr val="D9D9D9"/>
+                      </a:solidFill>
+                      <a:prstDash val="solid"/>
+                    </a:lnT>
+                    <a:lnB w="6350" cap="flat" cmpd="sng" algn="ctr">
+                      <a:solidFill>
+                        <a:srgbClr val="D9D9D9"/>
+                      </a:solidFill>
+                      <a:prstDash val="solid"/>
+                    </a:lnB>
+                    <a:solidFill>
+                      <a:srgbClr val="FFFFFF"/>
+                    </a:solidFill>
+                  </a:tcPr>
+                </a:tc>
+                <a:tc>
+                  <a:txBody>
+                    <a:bodyPr wrap="square" lIns="73152" tIns="36576" rIns="73152" bIns="36576" anchor="ctr">
+                      <a:noAutofit/>
+                    </a:bodyPr>
+                    <a:lstStyle/>
+                    <a:p>
+                      <a:pPr algn="l">
+                        <a:lnSpc>
+                          <a:spcPct val="110000"/>
+                        </a:lnSpc>
+                        <a:spcAft>
+                          <a:spcPts val="100"/>
+                        </a:spcAft>
+                      </a:pPr>
+                      <a:r>
+                        <a:rPr sz="1050" b="0">
+                          <a:solidFill>
+                            <a:srgbClr val="333333"/>
+                          </a:solidFill>
+                          <a:latin typeface="微软雅黑"/>
+                          <a:ea typeface="微软雅黑"/>
+                        </a:rPr>
+                        <a:t>以讯飞星火 APP 为基线做巴西本地化的公众 AI 服务</a:t>
+                      </a:r>
+                    </a:p>
+                  </a:txBody>
+                  <a:tcPr anchor="ctr">
+                    <a:lnL w="6350" cap="flat" cmpd="sng" algn="ctr">
+                      <a:solidFill>
+                        <a:srgbClr val="D9D9D9"/>
+                      </a:solidFill>
+                      <a:prstDash val="solid"/>
+                    </a:lnL>
+                    <a:lnR w="6350" cap="flat" cmpd="sng" algn="ctr">
+                      <a:solidFill>
+                        <a:srgbClr val="D9D9D9"/>
+                      </a:solidFill>
+                      <a:prstDash val="solid"/>
+                    </a:lnR>
+                    <a:lnT w="6350" cap="flat" cmpd="sng" algn="ctr">
+                      <a:solidFill>
+                        <a:srgbClr val="D9D9D9"/>
+                      </a:solidFill>
+                      <a:prstDash val="solid"/>
+                    </a:lnT>
+                    <a:lnB w="6350" cap="flat" cmpd="sng" algn="ctr">
+                      <a:solidFill>
+                        <a:srgbClr val="D9D9D9"/>
+                      </a:solidFill>
+                      <a:prstDash val="solid"/>
+                    </a:lnB>
+                    <a:solidFill>
+                      <a:srgbClr val="FFFFFF"/>
+                    </a:solidFill>
+                  </a:tcPr>
+                </a:tc>
+                <a:tc>
+                  <a:txBody>
+                    <a:bodyPr wrap="square" lIns="73152" tIns="36576" rIns="73152" bIns="36576" anchor="ctr">
+                      <a:noAutofit/>
+                    </a:bodyPr>
+                    <a:lstStyle/>
+                    <a:p>
+                      <a:pPr algn="l">
+                        <a:lnSpc>
+                          <a:spcPct val="110000"/>
+                        </a:lnSpc>
+                        <a:spcAft>
+                          <a:spcPts val="100"/>
+                        </a:spcAft>
+                      </a:pPr>
+                      <a:r>
+                        <a:rPr sz="1050" b="0">
+                          <a:solidFill>
+                            <a:srgbClr val="333333"/>
+                          </a:solidFill>
+                          <a:latin typeface="微软雅黑"/>
+                          <a:ea typeface="微软雅黑"/>
+                        </a:rPr>
+                        <a:t>需求定义 → 本地化 → 系统集成 → 上线运营</a:t>
+                      </a:r>
+                    </a:p>
+                  </a:txBody>
+                  <a:tcPr anchor="ctr">
+                    <a:lnL w="6350" cap="flat" cmpd="sng" algn="ctr">
+                      <a:solidFill>
+                        <a:srgbClr val="D9D9D9"/>
+                      </a:solidFill>
+                      <a:prstDash val="solid"/>
+                    </a:lnL>
+                    <a:lnR w="6350" cap="flat" cmpd="sng" algn="ctr">
+                      <a:solidFill>
+                        <a:srgbClr val="D9D9D9"/>
+                      </a:solidFill>
+                      <a:prstDash val="solid"/>
+                    </a:lnR>
+                    <a:lnT w="6350" cap="flat" cmpd="sng" algn="ctr">
+                      <a:solidFill>
+                        <a:srgbClr val="D9D9D9"/>
+                      </a:solidFill>
+                      <a:prstDash val="solid"/>
+                    </a:lnT>
+                    <a:lnB w="6350" cap="flat" cmpd="sng" algn="ctr">
+                      <a:solidFill>
+                        <a:srgbClr val="D9D9D9"/>
+                      </a:solidFill>
+                      <a:prstDash val="solid"/>
+                    </a:lnB>
+                    <a:solidFill>
+                      <a:srgbClr val="FFFFFF"/>
+                    </a:solidFill>
+                  </a:tcPr>
+                </a:tc>
+                <a:tc>
+                  <a:txBody>
+                    <a:bodyPr wrap="square" lIns="73152" tIns="36576" rIns="73152" bIns="36576" anchor="ctr">
+                      <a:noAutofit/>
+                    </a:bodyPr>
+                    <a:lstStyle/>
+                    <a:p>
+                      <a:pPr algn="l">
+                        <a:lnSpc>
+                          <a:spcPct val="110000"/>
+                        </a:lnSpc>
+                        <a:spcAft>
+                          <a:spcPts val="100"/>
+                        </a:spcAft>
+                      </a:pPr>
+                      <a:r>
+                        <a:rPr sz="1050" b="0">
+                          <a:solidFill>
+                            <a:srgbClr val="333333"/>
+                          </a:solidFill>
+                          <a:latin typeface="微软雅黑"/>
+                          <a:ea typeface="微软雅黑"/>
+                        </a:rPr>
+                        <a:t>讯飞：基线产品、本地化与平台</a:t>
+                      </a:r>
+                    </a:p>
+                    <a:p>
+                      <a:pPr algn="l">
+                        <a:lnSpc>
+                          <a:spcPct val="110000"/>
+                        </a:lnSpc>
+                        <a:spcAft>
+                          <a:spcPts val="100"/>
+                        </a:spcAft>
+                      </a:pPr>
+                      <a:r>
+                        <a:rPr sz="1050" b="0">
+                          <a:solidFill>
+                            <a:srgbClr val="333333"/>
+                          </a:solidFill>
+                          <a:latin typeface="微软雅黑"/>
+                          <a:ea typeface="微软雅黑"/>
+                        </a:rPr>
+                        <a:t>RNP：定义场景，提供接口，验收与运营</a:t>
+                      </a:r>
+                    </a:p>
+                  </a:txBody>
+                  <a:tcPr anchor="ctr">
+                    <a:lnL w="6350" cap="flat" cmpd="sng" algn="ctr">
+                      <a:solidFill>
+                        <a:srgbClr val="D9D9D9"/>
+                      </a:solidFill>
+                      <a:prstDash val="solid"/>
+                    </a:lnL>
+                    <a:lnR w="6350" cap="flat" cmpd="sng" algn="ctr">
+                      <a:solidFill>
+                        <a:srgbClr val="D9D9D9"/>
+                      </a:solidFill>
+                      <a:prstDash val="solid"/>
+                    </a:lnR>
+                    <a:lnT w="6350" cap="flat" cmpd="sng" algn="ctr">
+                      <a:solidFill>
+                        <a:srgbClr val="D9D9D9"/>
+                      </a:solidFill>
+                      <a:prstDash val="solid"/>
+                    </a:lnT>
+                    <a:lnB w="6350" cap="flat" cmpd="sng" algn="ctr">
+                      <a:solidFill>
+                        <a:srgbClr val="D9D9D9"/>
+                      </a:solidFill>
+                      <a:prstDash val="solid"/>
+                    </a:lnB>
+                    <a:solidFill>
+                      <a:srgbClr val="FFFFFF"/>
+                    </a:solidFill>
+                  </a:tcPr>
+                </a:tc>
+                <a:tc>
+                  <a:txBody>
+                    <a:bodyPr wrap="square" lIns="73152" tIns="36576" rIns="73152" bIns="36576" anchor="ctr">
+                      <a:noAutofit/>
+                    </a:bodyPr>
+                    <a:lstStyle/>
+                    <a:p>
+                      <a:pPr algn="l">
+                        <a:lnSpc>
+                          <a:spcPct val="110000"/>
+                        </a:lnSpc>
+                        <a:spcAft>
+                          <a:spcPts val="100"/>
+                        </a:spcAft>
+                      </a:pPr>
+                      <a:r>
+                        <a:rPr sz="1050" b="0">
+                          <a:solidFill>
+                            <a:srgbClr val="333333"/>
+                          </a:solidFill>
+                          <a:latin typeface="微软雅黑"/>
+                          <a:ea typeface="微软雅黑"/>
+                        </a:rPr>
+                        <a:t>约 1000 万级用户</a:t>
+                      </a:r>
+                    </a:p>
+                    <a:p>
+                      <a:pPr algn="l">
+                        <a:lnSpc>
+                          <a:spcPct val="110000"/>
+                        </a:lnSpc>
+                        <a:spcAft>
+                          <a:spcPts val="100"/>
+                        </a:spcAft>
+                      </a:pPr>
+                      <a:r>
+                        <a:rPr sz="1050" b="0">
+                          <a:solidFill>
+                            <a:srgbClr val="333333"/>
+                          </a:solidFill>
+                          <a:latin typeface="微软雅黑"/>
+                          <a:ea typeface="微软雅黑"/>
+                        </a:rPr>
+                        <a:t>约 500 路峰值并发</a:t>
+                      </a:r>
+                    </a:p>
+                  </a:txBody>
+                  <a:tcPr anchor="ctr">
+                    <a:lnL w="6350" cap="flat" cmpd="sng" algn="ctr">
+                      <a:solidFill>
+                        <a:srgbClr val="D9D9D9"/>
+                      </a:solidFill>
+                      <a:prstDash val="solid"/>
+                    </a:lnL>
+                    <a:lnR w="6350" cap="flat" cmpd="sng" algn="ctr">
+                      <a:solidFill>
+                        <a:srgbClr val="D9D9D9"/>
+                      </a:solidFill>
+                      <a:prstDash val="solid"/>
+                    </a:lnR>
+                    <a:lnT w="6350" cap="flat" cmpd="sng" algn="ctr">
+                      <a:solidFill>
+                        <a:srgbClr val="D9D9D9"/>
+                      </a:solidFill>
+                      <a:prstDash val="solid"/>
+                    </a:lnT>
+                    <a:lnB w="6350" cap="flat" cmpd="sng" algn="ctr">
+                      <a:solidFill>
+                        <a:srgbClr val="D9D9D9"/>
+                      </a:solidFill>
+                      <a:prstDash val="solid"/>
+                    </a:lnB>
+                    <a:solidFill>
+                      <a:srgbClr val="FFFFFF"/>
+                    </a:solidFill>
+                  </a:tcPr>
+                </a:tc>
+              </a:tr>
+              <a:tr h="914400">
+                <a:tc>
+                  <a:txBody>
+                    <a:bodyPr wrap="square" lIns="73152" tIns="36576" rIns="73152" bIns="36576" anchor="ctr">
+                      <a:noAutofit/>
+                    </a:bodyPr>
+                    <a:lstStyle/>
+                    <a:p>
+                      <a:pPr algn="l">
+                        <a:lnSpc>
+                          <a:spcPct val="110000"/>
+                        </a:lnSpc>
+                        <a:spcAft>
+                          <a:spcPts val="100"/>
+                        </a:spcAft>
+                      </a:pPr>
+                      <a:r>
+                        <a:rPr sz="1050" b="1">
+                          <a:solidFill>
+                            <a:srgbClr val="1D1D1A"/>
+                          </a:solidFill>
+                          <a:latin typeface="微软雅黑"/>
+                          <a:ea typeface="微软雅黑"/>
+                        </a:rPr>
+                        <a:t>行业模型 DLM × 3</a:t>
+                      </a:r>
+                    </a:p>
+                  </a:txBody>
+                  <a:tcPr anchor="ctr">
+                    <a:lnL w="6350" cap="flat" cmpd="sng" algn="ctr">
+                      <a:solidFill>
+                        <a:srgbClr val="D9D9D9"/>
+                      </a:solidFill>
+                      <a:prstDash val="solid"/>
+                    </a:lnL>
+                    <a:lnR w="6350" cap="flat" cmpd="sng" algn="ctr">
+                      <a:solidFill>
+                        <a:srgbClr val="D9D9D9"/>
+                      </a:solidFill>
+                      <a:prstDash val="solid"/>
+                    </a:lnR>
+                    <a:lnT w="6350" cap="flat" cmpd="sng" algn="ctr">
+                      <a:solidFill>
+                        <a:srgbClr val="D9D9D9"/>
+                      </a:solidFill>
+                      <a:prstDash val="solid"/>
+                    </a:lnT>
+                    <a:lnB w="6350" cap="flat" cmpd="sng" algn="ctr">
+                      <a:solidFill>
+                        <a:srgbClr val="D9D9D9"/>
+                      </a:solidFill>
+                      <a:prstDash val="solid"/>
+                    </a:lnB>
+                    <a:solidFill>
+                      <a:srgbClr val="FFFFFF"/>
+                    </a:solidFill>
+                  </a:tcPr>
+                </a:tc>
+                <a:tc>
+                  <a:txBody>
+                    <a:bodyPr wrap="square" lIns="73152" tIns="36576" rIns="73152" bIns="36576" anchor="ctr">
+                      <a:noAutofit/>
+                    </a:bodyPr>
+                    <a:lstStyle/>
+                    <a:p>
+                      <a:pPr algn="l">
+                        <a:lnSpc>
+                          <a:spcPct val="110000"/>
+                        </a:lnSpc>
+                        <a:spcAft>
+                          <a:spcPts val="100"/>
+                        </a:spcAft>
+                      </a:pPr>
+                      <a:r>
+                        <a:rPr sz="1050" b="0">
+                          <a:solidFill>
+                            <a:srgbClr val="333333"/>
+                          </a:solidFill>
+                          <a:latin typeface="微软雅黑"/>
+                          <a:ea typeface="微软雅黑"/>
+                        </a:rPr>
+                        <a:t>3 个行业模型，各面向 1 个固定场景；方向由 RNP/MCTI 提出</a:t>
+                      </a:r>
+                    </a:p>
+                  </a:txBody>
+                  <a:tcPr anchor="ctr">
+                    <a:lnL w="6350" cap="flat" cmpd="sng" algn="ctr">
+                      <a:solidFill>
+                        <a:srgbClr val="D9D9D9"/>
+                      </a:solidFill>
+                      <a:prstDash val="solid"/>
+                    </a:lnL>
+                    <a:lnR w="6350" cap="flat" cmpd="sng" algn="ctr">
+                      <a:solidFill>
+                        <a:srgbClr val="D9D9D9"/>
+                      </a:solidFill>
+                      <a:prstDash val="solid"/>
+                    </a:lnR>
+                    <a:lnT w="6350" cap="flat" cmpd="sng" algn="ctr">
+                      <a:solidFill>
+                        <a:srgbClr val="D9D9D9"/>
+                      </a:solidFill>
+                      <a:prstDash val="solid"/>
+                    </a:lnT>
+                    <a:lnB w="6350" cap="flat" cmpd="sng" algn="ctr">
+                      <a:solidFill>
+                        <a:srgbClr val="D9D9D9"/>
+                      </a:solidFill>
+                      <a:prstDash val="solid"/>
+                    </a:lnB>
+                    <a:solidFill>
+                      <a:srgbClr val="FFFFFF"/>
+                    </a:solidFill>
+                  </a:tcPr>
+                </a:tc>
+                <a:tc>
+                  <a:txBody>
+                    <a:bodyPr wrap="square" lIns="73152" tIns="36576" rIns="73152" bIns="36576" anchor="ctr">
+                      <a:noAutofit/>
+                    </a:bodyPr>
+                    <a:lstStyle/>
+                    <a:p>
+                      <a:pPr algn="l">
+                        <a:lnSpc>
+                          <a:spcPct val="110000"/>
+                        </a:lnSpc>
+                        <a:spcAft>
+                          <a:spcPts val="100"/>
+                        </a:spcAft>
+                      </a:pPr>
+                      <a:r>
+                        <a:rPr sz="1050" b="0">
+                          <a:solidFill>
+                            <a:srgbClr val="333333"/>
+                          </a:solidFill>
+                          <a:latin typeface="微软雅黑"/>
+                          <a:ea typeface="微软雅黑"/>
+                        </a:rPr>
+                        <a:t>确定场景 → 数据与基座 → 训练与评测 → 验收</a:t>
+                      </a:r>
+                    </a:p>
+                  </a:txBody>
+                  <a:tcPr anchor="ctr">
+                    <a:lnL w="6350" cap="flat" cmpd="sng" algn="ctr">
+                      <a:solidFill>
+                        <a:srgbClr val="D9D9D9"/>
+                      </a:solidFill>
+                      <a:prstDash val="solid"/>
+                    </a:lnL>
+                    <a:lnR w="6350" cap="flat" cmpd="sng" algn="ctr">
+                      <a:solidFill>
+                        <a:srgbClr val="D9D9D9"/>
+                      </a:solidFill>
+                      <a:prstDash val="solid"/>
+                    </a:lnR>
+                    <a:lnT w="6350" cap="flat" cmpd="sng" algn="ctr">
+                      <a:solidFill>
+                        <a:srgbClr val="D9D9D9"/>
+                      </a:solidFill>
+                      <a:prstDash val="solid"/>
+                    </a:lnT>
+                    <a:lnB w="6350" cap="flat" cmpd="sng" algn="ctr">
+                      <a:solidFill>
+                        <a:srgbClr val="D9D9D9"/>
+                      </a:solidFill>
+                      <a:prstDash val="solid"/>
+                    </a:lnB>
+                    <a:solidFill>
+                      <a:srgbClr val="FFFFFF"/>
+                    </a:solidFill>
+                  </a:tcPr>
+                </a:tc>
+                <a:tc>
+                  <a:txBody>
+                    <a:bodyPr wrap="square" lIns="73152" tIns="36576" rIns="73152" bIns="36576" anchor="ctr">
+                      <a:noAutofit/>
+                    </a:bodyPr>
+                    <a:lstStyle/>
+                    <a:p>
+                      <a:pPr algn="l">
+                        <a:lnSpc>
+                          <a:spcPct val="110000"/>
+                        </a:lnSpc>
+                        <a:spcAft>
+                          <a:spcPts val="100"/>
+                        </a:spcAft>
+                      </a:pPr>
+                      <a:r>
+                        <a:rPr sz="1050" b="0">
+                          <a:solidFill>
+                            <a:srgbClr val="333333"/>
+                          </a:solidFill>
+                          <a:latin typeface="微软雅黑"/>
+                          <a:ea typeface="微软雅黑"/>
+                        </a:rPr>
+                        <a:t>讯飞：可行性评估、路线与指导</a:t>
+                      </a:r>
+                    </a:p>
+                    <a:p>
+                      <a:pPr algn="l">
+                        <a:lnSpc>
+                          <a:spcPct val="110000"/>
+                        </a:lnSpc>
+                        <a:spcAft>
+                          <a:spcPts val="100"/>
+                        </a:spcAft>
+                      </a:pPr>
+                      <a:r>
+                        <a:rPr sz="1050" b="0">
+                          <a:solidFill>
+                            <a:srgbClr val="333333"/>
+                          </a:solidFill>
+                          <a:latin typeface="微软雅黑"/>
+                          <a:ea typeface="微软雅黑"/>
+                        </a:rPr>
+                        <a:t>RNP：数据与专家，自主训练</a:t>
+                      </a:r>
+                    </a:p>
+                  </a:txBody>
+                  <a:tcPr anchor="ctr">
+                    <a:lnL w="6350" cap="flat" cmpd="sng" algn="ctr">
+                      <a:solidFill>
+                        <a:srgbClr val="D9D9D9"/>
+                      </a:solidFill>
+                      <a:prstDash val="solid"/>
+                    </a:lnL>
+                    <a:lnR w="6350" cap="flat" cmpd="sng" algn="ctr">
+                      <a:solidFill>
+                        <a:srgbClr val="D9D9D9"/>
+                      </a:solidFill>
+                      <a:prstDash val="solid"/>
+                    </a:lnR>
+                    <a:lnT w="6350" cap="flat" cmpd="sng" algn="ctr">
+                      <a:solidFill>
+                        <a:srgbClr val="D9D9D9"/>
+                      </a:solidFill>
+                      <a:prstDash val="solid"/>
+                    </a:lnT>
+                    <a:lnB w="6350" cap="flat" cmpd="sng" algn="ctr">
+                      <a:solidFill>
+                        <a:srgbClr val="D9D9D9"/>
+                      </a:solidFill>
+                      <a:prstDash val="solid"/>
+                    </a:lnB>
+                    <a:solidFill>
+                      <a:srgbClr val="FFFFFF"/>
+                    </a:solidFill>
+                  </a:tcPr>
+                </a:tc>
+                <a:tc>
+                  <a:txBody>
+                    <a:bodyPr wrap="square" lIns="73152" tIns="36576" rIns="73152" bIns="36576" anchor="ctr">
+                      <a:noAutofit/>
+                    </a:bodyPr>
+                    <a:lstStyle/>
+                    <a:p>
+                      <a:pPr algn="l">
+                        <a:lnSpc>
+                          <a:spcPct val="110000"/>
+                        </a:lnSpc>
+                        <a:spcAft>
+                          <a:spcPts val="100"/>
+                        </a:spcAft>
+                      </a:pPr>
+                      <a:r>
+                        <a:rPr sz="1050" b="0">
+                          <a:solidFill>
+                            <a:srgbClr val="333333"/>
+                          </a:solidFill>
+                          <a:latin typeface="微软雅黑"/>
+                          <a:ea typeface="微软雅黑"/>
+                        </a:rPr>
+                        <a:t>3 个</a:t>
+                      </a:r>
+                    </a:p>
+                    <a:p>
+                      <a:pPr algn="l">
+                        <a:lnSpc>
+                          <a:spcPct val="110000"/>
+                        </a:lnSpc>
+                        <a:spcAft>
+                          <a:spcPts val="100"/>
+                        </a:spcAft>
+                      </a:pPr>
+                      <a:r>
+                        <a:rPr sz="1050" b="0">
+                          <a:solidFill>
+                            <a:srgbClr val="333333"/>
+                          </a:solidFill>
+                          <a:latin typeface="微软雅黑"/>
+                          <a:ea typeface="微软雅黑"/>
+                        </a:rPr>
+                        <a:t>70B 以内基座</a:t>
+                      </a:r>
+                    </a:p>
+                  </a:txBody>
+                  <a:tcPr anchor="ctr">
+                    <a:lnL w="6350" cap="flat" cmpd="sng" algn="ctr">
+                      <a:solidFill>
+                        <a:srgbClr val="D9D9D9"/>
+                      </a:solidFill>
+                      <a:prstDash val="solid"/>
+                    </a:lnL>
+                    <a:lnR w="6350" cap="flat" cmpd="sng" algn="ctr">
+                      <a:solidFill>
+                        <a:srgbClr val="D9D9D9"/>
+                      </a:solidFill>
+                      <a:prstDash val="solid"/>
+                    </a:lnR>
+                    <a:lnT w="6350" cap="flat" cmpd="sng" algn="ctr">
+                      <a:solidFill>
+                        <a:srgbClr val="D9D9D9"/>
+                      </a:solidFill>
+                      <a:prstDash val="solid"/>
+                    </a:lnT>
+                    <a:lnB w="6350" cap="flat" cmpd="sng" algn="ctr">
+                      <a:solidFill>
+                        <a:srgbClr val="D9D9D9"/>
+                      </a:solidFill>
+                      <a:prstDash val="solid"/>
+                    </a:lnB>
+                    <a:solidFill>
+                      <a:srgbClr val="FFFFFF"/>
+                    </a:solidFill>
+                  </a:tcPr>
+                </a:tc>
+              </a:tr>
+            </a:tbl>
+          </a:graphicData>
+        </a:graphic>
+      </p:graphicFrame>
       <p:sp>
         <p:nvSpPr>
-          <p:cNvPr id="3" name="Rounded Rectangle 2"/>
+          <p:cNvPr id="4" name="Rounded Rectangle 3"/>
           <p:cNvSpPr/>
           <p:nvPr/>
         </p:nvSpPr>
         <p:spPr>
           <a:xfrm>
-            <a:off x="457200" y="960120"/>
-            <a:ext cx="3544824" cy="2788920"/>
+            <a:off x="457200" y="4251960"/>
+            <a:ext cx="11274552" cy="548640"/>
           </a:xfrm>
           <a:prstGeom prst="roundRect">
             <a:avLst>
@@ -24552,991 +25603,13 @@
       </p:sp>
       <p:sp>
         <p:nvSpPr>
-          <p:cNvPr id="4" name="Oval 3"/>
-          <p:cNvSpPr/>
-          <p:nvPr/>
-        </p:nvSpPr>
-        <p:spPr>
-          <a:xfrm>
-            <a:off x="685800" y="1161288"/>
-            <a:ext cx="365760" cy="365760"/>
-          </a:xfrm>
-          <a:prstGeom prst="ellipse">
-            <a:avLst/>
-          </a:prstGeom>
-          <a:solidFill>
-            <a:srgbClr val="E9002F"/>
-          </a:solidFill>
-          <a:ln>
-            <a:noFill/>
-          </a:ln>
-          <a:effectLst/>
-        </p:spPr>
-        <p:style>
-          <a:lnRef idx="1">
-            <a:schemeClr val="accent1"/>
-          </a:lnRef>
-          <a:fillRef idx="3">
-            <a:schemeClr val="accent1"/>
-          </a:fillRef>
-          <a:effectRef idx="2">
-            <a:schemeClr val="accent1"/>
-          </a:effectRef>
-          <a:fontRef idx="minor">
-            <a:schemeClr val="lt1"/>
-          </a:fontRef>
-        </p:style>
-        <p:txBody>
-          <a:bodyPr rtlCol="0" anchor="ctr" wrap="square" lIns="0" tIns="0" rIns="0" bIns="0">
-            <a:noAutofit/>
-          </a:bodyPr>
-          <a:lstStyle/>
-          <a:p>
-            <a:pPr algn="ctr">
-              <a:lnSpc>
-                <a:spcPct val="115000"/>
-              </a:lnSpc>
-              <a:spcAft>
-                <a:spcPts val="0"/>
-              </a:spcAft>
-            </a:pPr>
-            <a:r>
-              <a:rPr sz="1100" b="1">
-                <a:solidFill>
-                  <a:srgbClr val="FFFFFF"/>
-                </a:solidFill>
-                <a:latin typeface="微软雅黑"/>
-                <a:ea typeface="微软雅黑"/>
-              </a:rPr>
-              <a:t>1</a:t>
-            </a:r>
-          </a:p>
-        </p:txBody>
-      </p:sp>
-      <p:sp>
-        <p:nvSpPr>
           <p:cNvPr id="5" name="TextBox 4"/>
           <p:cNvSpPr txBox="1"/>
           <p:nvPr/>
         </p:nvSpPr>
         <p:spPr>
           <a:xfrm>
-            <a:off x="1170432" y="1115568"/>
-            <a:ext cx="2676144" cy="457200"/>
-          </a:xfrm>
-          <a:prstGeom prst="rect">
-            <a:avLst/>
-          </a:prstGeom>
-          <a:noFill/>
-        </p:spPr>
-        <p:txBody>
-          <a:bodyPr wrap="square" lIns="0" tIns="0" rIns="0" bIns="0" anchor="ctr">
-            <a:noAutofit/>
-          </a:bodyPr>
-          <a:lstStyle/>
-          <a:p>
-            <a:pPr algn="l">
-              <a:lnSpc>
-                <a:spcPct val="115000"/>
-              </a:lnSpc>
-              <a:spcAft>
-                <a:spcPts val="0"/>
-              </a:spcAft>
-            </a:pPr>
-            <a:r>
-              <a:rPr sz="1450" b="1">
-                <a:solidFill>
-                  <a:srgbClr val="1D1D1A"/>
-                </a:solidFill>
-                <a:latin typeface="微软雅黑"/>
-                <a:ea typeface="微软雅黑"/>
-              </a:rPr>
-              <a:t>国家大模型（含葡语语音）</a:t>
-            </a:r>
-          </a:p>
-        </p:txBody>
-      </p:sp>
-      <p:sp>
-        <p:nvSpPr>
-          <p:cNvPr id="6" name="TextBox 5"/>
-          <p:cNvSpPr txBox="1"/>
-          <p:nvPr/>
-        </p:nvSpPr>
-        <p:spPr>
-          <a:xfrm>
-            <a:off x="685800" y="1737360"/>
-            <a:ext cx="3087624" cy="274320"/>
-          </a:xfrm>
-          <a:prstGeom prst="rect">
-            <a:avLst/>
-          </a:prstGeom>
-          <a:noFill/>
-        </p:spPr>
-        <p:txBody>
-          <a:bodyPr wrap="square" lIns="0" tIns="0" rIns="0" bIns="0" anchor="ctr">
-            <a:noAutofit/>
-          </a:bodyPr>
-          <a:lstStyle/>
-          <a:p>
-            <a:pPr algn="l">
-              <a:lnSpc>
-                <a:spcPct val="115000"/>
-              </a:lnSpc>
-              <a:spcAft>
-                <a:spcPts val="0"/>
-              </a:spcAft>
-            </a:pPr>
-            <a:r>
-              <a:rPr sz="1150" b="1">
-                <a:solidFill>
-                  <a:srgbClr val="C00000"/>
-                </a:solidFill>
-                <a:latin typeface="微软雅黑"/>
-                <a:ea typeface="微软雅黑"/>
-              </a:rPr>
-              <a:t>用途</a:t>
-            </a:r>
-          </a:p>
-        </p:txBody>
-      </p:sp>
-      <p:sp>
-        <p:nvSpPr>
-          <p:cNvPr id="7" name="TextBox 6"/>
-          <p:cNvSpPr txBox="1"/>
-          <p:nvPr/>
-        </p:nvSpPr>
-        <p:spPr>
-          <a:xfrm>
-            <a:off x="685800" y="2029967"/>
-            <a:ext cx="3087624" cy="960120"/>
-          </a:xfrm>
-          <a:prstGeom prst="rect">
-            <a:avLst/>
-          </a:prstGeom>
-          <a:noFill/>
-        </p:spPr>
-        <p:txBody>
-          <a:bodyPr wrap="square" lIns="0" tIns="0" rIns="0" bIns="0" anchor="t">
-            <a:noAutofit/>
-          </a:bodyPr>
-          <a:lstStyle/>
-          <a:p>
-            <a:pPr algn="l">
-              <a:lnSpc>
-                <a:spcPct val="115000"/>
-              </a:lnSpc>
-              <a:spcAft>
-                <a:spcPts val="400"/>
-              </a:spcAft>
-            </a:pPr>
-            <a:r>
-              <a:rPr sz="1050" b="0">
-                <a:solidFill>
-                  <a:srgbClr val="333333"/>
-                </a:solidFill>
-                <a:latin typeface="微软雅黑"/>
-                <a:ea typeface="微软雅黑"/>
-              </a:rPr>
-              <a:t>约 300B 参数级巴西主权大模型，基于讯飞星火基础模型训练；加巴西葡语 ASR/TTS；是国家 APP 与行业模型的底座</a:t>
-            </a:r>
-          </a:p>
-        </p:txBody>
-      </p:sp>
-      <p:sp>
-        <p:nvSpPr>
-          <p:cNvPr id="8" name="TextBox 7"/>
-          <p:cNvSpPr txBox="1"/>
-          <p:nvPr/>
-        </p:nvSpPr>
-        <p:spPr>
-          <a:xfrm>
-            <a:off x="685800" y="2990088"/>
-            <a:ext cx="3087624" cy="274320"/>
-          </a:xfrm>
-          <a:prstGeom prst="rect">
-            <a:avLst/>
-          </a:prstGeom>
-          <a:noFill/>
-        </p:spPr>
-        <p:txBody>
-          <a:bodyPr wrap="square" lIns="0" tIns="0" rIns="0" bIns="0" anchor="ctr">
-            <a:noAutofit/>
-          </a:bodyPr>
-          <a:lstStyle/>
-          <a:p>
-            <a:pPr algn="l">
-              <a:lnSpc>
-                <a:spcPct val="115000"/>
-              </a:lnSpc>
-              <a:spcAft>
-                <a:spcPts val="0"/>
-              </a:spcAft>
-            </a:pPr>
-            <a:r>
-              <a:rPr sz="1150" b="1">
-                <a:solidFill>
-                  <a:srgbClr val="C00000"/>
-                </a:solidFill>
-                <a:latin typeface="微软雅黑"/>
-                <a:ea typeface="微软雅黑"/>
-              </a:rPr>
-              <a:t>巴方参与</a:t>
-            </a:r>
-          </a:p>
-        </p:txBody>
-      </p:sp>
-      <p:sp>
-        <p:nvSpPr>
-          <p:cNvPr id="9" name="TextBox 8"/>
-          <p:cNvSpPr txBox="1"/>
-          <p:nvPr/>
-        </p:nvSpPr>
-        <p:spPr>
-          <a:xfrm>
-            <a:off x="685800" y="3282696"/>
-            <a:ext cx="3087624" cy="457200"/>
-          </a:xfrm>
-          <a:prstGeom prst="rect">
-            <a:avLst/>
-          </a:prstGeom>
-          <a:noFill/>
-        </p:spPr>
-        <p:txBody>
-          <a:bodyPr wrap="square" lIns="0" tIns="0" rIns="0" bIns="0" anchor="t">
-            <a:noAutofit/>
-          </a:bodyPr>
-          <a:lstStyle/>
-          <a:p>
-            <a:pPr algn="l">
-              <a:lnSpc>
-                <a:spcPct val="115000"/>
-              </a:lnSpc>
-              <a:spcAft>
-                <a:spcPts val="400"/>
-              </a:spcAft>
-            </a:pPr>
-            <a:r>
-              <a:rPr sz="1050" b="0">
-                <a:solidFill>
-                  <a:srgbClr val="333333"/>
-                </a:solidFill>
-                <a:latin typeface="微软雅黑"/>
-                <a:ea typeface="微软雅黑"/>
-              </a:rPr>
-              <a:t>采集 50B 本地语料并落实授权；工程师通过知识转移参与训练</a:t>
-            </a:r>
-          </a:p>
-        </p:txBody>
-      </p:sp>
-      <p:sp>
-        <p:nvSpPr>
-          <p:cNvPr id="10" name="Rounded Rectangle 9"/>
-          <p:cNvSpPr/>
-          <p:nvPr/>
-        </p:nvSpPr>
-        <p:spPr>
-          <a:xfrm>
-            <a:off x="4322064" y="960120"/>
-            <a:ext cx="3544824" cy="2788920"/>
-          </a:xfrm>
-          <a:prstGeom prst="roundRect">
-            <a:avLst>
-              <a:gd name="adj" fmla="val 4000"/>
-            </a:avLst>
-          </a:prstGeom>
-          <a:solidFill>
-            <a:srgbClr val="F7F7F7"/>
-          </a:solidFill>
-          <a:ln w="9525">
-            <a:solidFill>
-              <a:srgbClr val="D9D9D9"/>
-            </a:solidFill>
-          </a:ln>
-          <a:effectLst/>
-        </p:spPr>
-        <p:style>
-          <a:lnRef idx="1">
-            <a:schemeClr val="accent1"/>
-          </a:lnRef>
-          <a:fillRef idx="3">
-            <a:schemeClr val="accent1"/>
-          </a:fillRef>
-          <a:effectRef idx="2">
-            <a:schemeClr val="accent1"/>
-          </a:effectRef>
-          <a:fontRef idx="minor">
-            <a:schemeClr val="lt1"/>
-          </a:fontRef>
-        </p:style>
-        <p:txBody>
-          <a:bodyPr rtlCol="0" anchor="ctr"/>
-          <a:lstStyle/>
-          <a:p>
-            <a:pPr algn="ctr"/>
-          </a:p>
-        </p:txBody>
-      </p:sp>
-      <p:sp>
-        <p:nvSpPr>
-          <p:cNvPr id="11" name="Oval 10"/>
-          <p:cNvSpPr/>
-          <p:nvPr/>
-        </p:nvSpPr>
-        <p:spPr>
-          <a:xfrm>
-            <a:off x="4550664" y="1161288"/>
-            <a:ext cx="365760" cy="365760"/>
-          </a:xfrm>
-          <a:prstGeom prst="ellipse">
-            <a:avLst/>
-          </a:prstGeom>
-          <a:solidFill>
-            <a:srgbClr val="E9002F"/>
-          </a:solidFill>
-          <a:ln>
-            <a:noFill/>
-          </a:ln>
-          <a:effectLst/>
-        </p:spPr>
-        <p:style>
-          <a:lnRef idx="1">
-            <a:schemeClr val="accent1"/>
-          </a:lnRef>
-          <a:fillRef idx="3">
-            <a:schemeClr val="accent1"/>
-          </a:fillRef>
-          <a:effectRef idx="2">
-            <a:schemeClr val="accent1"/>
-          </a:effectRef>
-          <a:fontRef idx="minor">
-            <a:schemeClr val="lt1"/>
-          </a:fontRef>
-        </p:style>
-        <p:txBody>
-          <a:bodyPr rtlCol="0" anchor="ctr" wrap="square" lIns="0" tIns="0" rIns="0" bIns="0">
-            <a:noAutofit/>
-          </a:bodyPr>
-          <a:lstStyle/>
-          <a:p>
-            <a:pPr algn="ctr">
-              <a:lnSpc>
-                <a:spcPct val="115000"/>
-              </a:lnSpc>
-              <a:spcAft>
-                <a:spcPts val="0"/>
-              </a:spcAft>
-            </a:pPr>
-            <a:r>
-              <a:rPr sz="1100" b="1">
-                <a:solidFill>
-                  <a:srgbClr val="FFFFFF"/>
-                </a:solidFill>
-                <a:latin typeface="微软雅黑"/>
-                <a:ea typeface="微软雅黑"/>
-              </a:rPr>
-              <a:t>2</a:t>
-            </a:r>
-          </a:p>
-        </p:txBody>
-      </p:sp>
-      <p:sp>
-        <p:nvSpPr>
-          <p:cNvPr id="12" name="TextBox 11"/>
-          <p:cNvSpPr txBox="1"/>
-          <p:nvPr/>
-        </p:nvSpPr>
-        <p:spPr>
-          <a:xfrm>
-            <a:off x="5035296" y="1115568"/>
-            <a:ext cx="2676144" cy="457200"/>
-          </a:xfrm>
-          <a:prstGeom prst="rect">
-            <a:avLst/>
-          </a:prstGeom>
-          <a:noFill/>
-        </p:spPr>
-        <p:txBody>
-          <a:bodyPr wrap="square" lIns="0" tIns="0" rIns="0" bIns="0" anchor="ctr">
-            <a:noAutofit/>
-          </a:bodyPr>
-          <a:lstStyle/>
-          <a:p>
-            <a:pPr algn="l">
-              <a:lnSpc>
-                <a:spcPct val="115000"/>
-              </a:lnSpc>
-              <a:spcAft>
-                <a:spcPts val="0"/>
-              </a:spcAft>
-            </a:pPr>
-            <a:r>
-              <a:rPr sz="1450" b="1">
-                <a:solidFill>
-                  <a:srgbClr val="1D1D1A"/>
-                </a:solidFill>
-                <a:latin typeface="微软雅黑"/>
-                <a:ea typeface="微软雅黑"/>
-              </a:rPr>
-              <a:t>国家 APP</a:t>
-            </a:r>
-          </a:p>
-        </p:txBody>
-      </p:sp>
-      <p:sp>
-        <p:nvSpPr>
-          <p:cNvPr id="13" name="TextBox 12"/>
-          <p:cNvSpPr txBox="1"/>
-          <p:nvPr/>
-        </p:nvSpPr>
-        <p:spPr>
-          <a:xfrm>
-            <a:off x="4550664" y="1737360"/>
-            <a:ext cx="3087624" cy="274320"/>
-          </a:xfrm>
-          <a:prstGeom prst="rect">
-            <a:avLst/>
-          </a:prstGeom>
-          <a:noFill/>
-        </p:spPr>
-        <p:txBody>
-          <a:bodyPr wrap="square" lIns="0" tIns="0" rIns="0" bIns="0" anchor="ctr">
-            <a:noAutofit/>
-          </a:bodyPr>
-          <a:lstStyle/>
-          <a:p>
-            <a:pPr algn="l">
-              <a:lnSpc>
-                <a:spcPct val="115000"/>
-              </a:lnSpc>
-              <a:spcAft>
-                <a:spcPts val="0"/>
-              </a:spcAft>
-            </a:pPr>
-            <a:r>
-              <a:rPr sz="1150" b="1">
-                <a:solidFill>
-                  <a:srgbClr val="C00000"/>
-                </a:solidFill>
-                <a:latin typeface="微软雅黑"/>
-                <a:ea typeface="微软雅黑"/>
-              </a:rPr>
-              <a:t>用途</a:t>
-            </a:r>
-          </a:p>
-        </p:txBody>
-      </p:sp>
-      <p:sp>
-        <p:nvSpPr>
-          <p:cNvPr id="14" name="TextBox 13"/>
-          <p:cNvSpPr txBox="1"/>
-          <p:nvPr/>
-        </p:nvSpPr>
-        <p:spPr>
-          <a:xfrm>
-            <a:off x="4550664" y="2029967"/>
-            <a:ext cx="3087624" cy="960120"/>
-          </a:xfrm>
-          <a:prstGeom prst="rect">
-            <a:avLst/>
-          </a:prstGeom>
-          <a:noFill/>
-        </p:spPr>
-        <p:txBody>
-          <a:bodyPr wrap="square" lIns="0" tIns="0" rIns="0" bIns="0" anchor="t">
-            <a:noAutofit/>
-          </a:bodyPr>
-          <a:lstStyle/>
-          <a:p>
-            <a:pPr algn="l">
-              <a:lnSpc>
-                <a:spcPct val="115000"/>
-              </a:lnSpc>
-              <a:spcAft>
-                <a:spcPts val="400"/>
-              </a:spcAft>
-            </a:pPr>
-            <a:r>
-              <a:rPr sz="1050" b="0">
-                <a:solidFill>
-                  <a:srgbClr val="333333"/>
-                </a:solidFill>
-                <a:latin typeface="微软雅黑"/>
-                <a:ea typeface="微软雅黑"/>
-              </a:rPr>
-              <a:t>以讯飞星火 APP 为基线做巴西本地化：问答、语音交互、文档理解、内容创作；面向公众，约 1000 万级用户、500 路峰值并发</a:t>
-            </a:r>
-          </a:p>
-        </p:txBody>
-      </p:sp>
-      <p:sp>
-        <p:nvSpPr>
-          <p:cNvPr id="15" name="TextBox 14"/>
-          <p:cNvSpPr txBox="1"/>
-          <p:nvPr/>
-        </p:nvSpPr>
-        <p:spPr>
-          <a:xfrm>
-            <a:off x="4550664" y="2990088"/>
-            <a:ext cx="3087624" cy="274320"/>
-          </a:xfrm>
-          <a:prstGeom prst="rect">
-            <a:avLst/>
-          </a:prstGeom>
-          <a:noFill/>
-        </p:spPr>
-        <p:txBody>
-          <a:bodyPr wrap="square" lIns="0" tIns="0" rIns="0" bIns="0" anchor="ctr">
-            <a:noAutofit/>
-          </a:bodyPr>
-          <a:lstStyle/>
-          <a:p>
-            <a:pPr algn="l">
-              <a:lnSpc>
-                <a:spcPct val="115000"/>
-              </a:lnSpc>
-              <a:spcAft>
-                <a:spcPts val="0"/>
-              </a:spcAft>
-            </a:pPr>
-            <a:r>
-              <a:rPr sz="1150" b="1">
-                <a:solidFill>
-                  <a:srgbClr val="C00000"/>
-                </a:solidFill>
-                <a:latin typeface="微软雅黑"/>
-                <a:ea typeface="微软雅黑"/>
-              </a:rPr>
-              <a:t>巴方参与</a:t>
-            </a:r>
-          </a:p>
-        </p:txBody>
-      </p:sp>
-      <p:sp>
-        <p:nvSpPr>
-          <p:cNvPr id="16" name="TextBox 15"/>
-          <p:cNvSpPr txBox="1"/>
-          <p:nvPr/>
-        </p:nvSpPr>
-        <p:spPr>
-          <a:xfrm>
-            <a:off x="4550664" y="3282696"/>
-            <a:ext cx="3087624" cy="457200"/>
-          </a:xfrm>
-          <a:prstGeom prst="rect">
-            <a:avLst/>
-          </a:prstGeom>
-          <a:noFill/>
-        </p:spPr>
-        <p:txBody>
-          <a:bodyPr wrap="square" lIns="0" tIns="0" rIns="0" bIns="0" anchor="t">
-            <a:noAutofit/>
-          </a:bodyPr>
-          <a:lstStyle/>
-          <a:p>
-            <a:pPr algn="l">
-              <a:lnSpc>
-                <a:spcPct val="115000"/>
-              </a:lnSpc>
-              <a:spcAft>
-                <a:spcPts val="400"/>
-              </a:spcAft>
-            </a:pPr>
-            <a:r>
-              <a:rPr sz="1050" b="0">
-                <a:solidFill>
-                  <a:srgbClr val="333333"/>
-                </a:solidFill>
-                <a:latin typeface="微软雅黑"/>
-                <a:ea typeface="微软雅黑"/>
-              </a:rPr>
-              <a:t>与巴西伙伴共同定义需求、场景与功能；提供本地系统接口</a:t>
-            </a:r>
-          </a:p>
-        </p:txBody>
-      </p:sp>
-      <p:sp>
-        <p:nvSpPr>
-          <p:cNvPr id="17" name="Rounded Rectangle 16"/>
-          <p:cNvSpPr/>
-          <p:nvPr/>
-        </p:nvSpPr>
-        <p:spPr>
-          <a:xfrm>
-            <a:off x="8186928" y="960120"/>
-            <a:ext cx="3544824" cy="2788920"/>
-          </a:xfrm>
-          <a:prstGeom prst="roundRect">
-            <a:avLst>
-              <a:gd name="adj" fmla="val 4000"/>
-            </a:avLst>
-          </a:prstGeom>
-          <a:solidFill>
-            <a:srgbClr val="F7F7F7"/>
-          </a:solidFill>
-          <a:ln w="9525">
-            <a:solidFill>
-              <a:srgbClr val="D9D9D9"/>
-            </a:solidFill>
-          </a:ln>
-          <a:effectLst/>
-        </p:spPr>
-        <p:style>
-          <a:lnRef idx="1">
-            <a:schemeClr val="accent1"/>
-          </a:lnRef>
-          <a:fillRef idx="3">
-            <a:schemeClr val="accent1"/>
-          </a:fillRef>
-          <a:effectRef idx="2">
-            <a:schemeClr val="accent1"/>
-          </a:effectRef>
-          <a:fontRef idx="minor">
-            <a:schemeClr val="lt1"/>
-          </a:fontRef>
-        </p:style>
-        <p:txBody>
-          <a:bodyPr rtlCol="0" anchor="ctr"/>
-          <a:lstStyle/>
-          <a:p>
-            <a:pPr algn="ctr"/>
-          </a:p>
-        </p:txBody>
-      </p:sp>
-      <p:sp>
-        <p:nvSpPr>
-          <p:cNvPr id="18" name="Oval 17"/>
-          <p:cNvSpPr/>
-          <p:nvPr/>
-        </p:nvSpPr>
-        <p:spPr>
-          <a:xfrm>
-            <a:off x="8415528" y="1161288"/>
-            <a:ext cx="365760" cy="365760"/>
-          </a:xfrm>
-          <a:prstGeom prst="ellipse">
-            <a:avLst/>
-          </a:prstGeom>
-          <a:solidFill>
-            <a:srgbClr val="E9002F"/>
-          </a:solidFill>
-          <a:ln>
-            <a:noFill/>
-          </a:ln>
-          <a:effectLst/>
-        </p:spPr>
-        <p:style>
-          <a:lnRef idx="1">
-            <a:schemeClr val="accent1"/>
-          </a:lnRef>
-          <a:fillRef idx="3">
-            <a:schemeClr val="accent1"/>
-          </a:fillRef>
-          <a:effectRef idx="2">
-            <a:schemeClr val="accent1"/>
-          </a:effectRef>
-          <a:fontRef idx="minor">
-            <a:schemeClr val="lt1"/>
-          </a:fontRef>
-        </p:style>
-        <p:txBody>
-          <a:bodyPr rtlCol="0" anchor="ctr" wrap="square" lIns="0" tIns="0" rIns="0" bIns="0">
-            <a:noAutofit/>
-          </a:bodyPr>
-          <a:lstStyle/>
-          <a:p>
-            <a:pPr algn="ctr">
-              <a:lnSpc>
-                <a:spcPct val="115000"/>
-              </a:lnSpc>
-              <a:spcAft>
-                <a:spcPts val="0"/>
-              </a:spcAft>
-            </a:pPr>
-            <a:r>
-              <a:rPr sz="1100" b="1">
-                <a:solidFill>
-                  <a:srgbClr val="FFFFFF"/>
-                </a:solidFill>
-                <a:latin typeface="微软雅黑"/>
-                <a:ea typeface="微软雅黑"/>
-              </a:rPr>
-              <a:t>3</a:t>
-            </a:r>
-          </a:p>
-        </p:txBody>
-      </p:sp>
-      <p:sp>
-        <p:nvSpPr>
-          <p:cNvPr id="19" name="TextBox 18"/>
-          <p:cNvSpPr txBox="1"/>
-          <p:nvPr/>
-        </p:nvSpPr>
-        <p:spPr>
-          <a:xfrm>
-            <a:off x="8900160" y="1115568"/>
-            <a:ext cx="2676144" cy="457200"/>
-          </a:xfrm>
-          <a:prstGeom prst="rect">
-            <a:avLst/>
-          </a:prstGeom>
-          <a:noFill/>
-        </p:spPr>
-        <p:txBody>
-          <a:bodyPr wrap="square" lIns="0" tIns="0" rIns="0" bIns="0" anchor="ctr">
-            <a:noAutofit/>
-          </a:bodyPr>
-          <a:lstStyle/>
-          <a:p>
-            <a:pPr algn="l">
-              <a:lnSpc>
-                <a:spcPct val="115000"/>
-              </a:lnSpc>
-              <a:spcAft>
-                <a:spcPts val="0"/>
-              </a:spcAft>
-            </a:pPr>
-            <a:r>
-              <a:rPr sz="1450" b="1">
-                <a:solidFill>
-                  <a:srgbClr val="1D1D1A"/>
-                </a:solidFill>
-                <a:latin typeface="微软雅黑"/>
-                <a:ea typeface="微软雅黑"/>
-              </a:rPr>
-              <a:t>行业模型 DLM × 3</a:t>
-            </a:r>
-          </a:p>
-        </p:txBody>
-      </p:sp>
-      <p:sp>
-        <p:nvSpPr>
-          <p:cNvPr id="20" name="TextBox 19"/>
-          <p:cNvSpPr txBox="1"/>
-          <p:nvPr/>
-        </p:nvSpPr>
-        <p:spPr>
-          <a:xfrm>
-            <a:off x="8415528" y="1737360"/>
-            <a:ext cx="3087624" cy="274320"/>
-          </a:xfrm>
-          <a:prstGeom prst="rect">
-            <a:avLst/>
-          </a:prstGeom>
-          <a:noFill/>
-        </p:spPr>
-        <p:txBody>
-          <a:bodyPr wrap="square" lIns="0" tIns="0" rIns="0" bIns="0" anchor="ctr">
-            <a:noAutofit/>
-          </a:bodyPr>
-          <a:lstStyle/>
-          <a:p>
-            <a:pPr algn="l">
-              <a:lnSpc>
-                <a:spcPct val="115000"/>
-              </a:lnSpc>
-              <a:spcAft>
-                <a:spcPts val="0"/>
-              </a:spcAft>
-            </a:pPr>
-            <a:r>
-              <a:rPr sz="1150" b="1">
-                <a:solidFill>
-                  <a:srgbClr val="C00000"/>
-                </a:solidFill>
-                <a:latin typeface="微软雅黑"/>
-                <a:ea typeface="微软雅黑"/>
-              </a:rPr>
-              <a:t>用途</a:t>
-            </a:r>
-          </a:p>
-        </p:txBody>
-      </p:sp>
-      <p:sp>
-        <p:nvSpPr>
-          <p:cNvPr id="21" name="TextBox 20"/>
-          <p:cNvSpPr txBox="1"/>
-          <p:nvPr/>
-        </p:nvSpPr>
-        <p:spPr>
-          <a:xfrm>
-            <a:off x="8415528" y="2029967"/>
-            <a:ext cx="3087624" cy="960120"/>
-          </a:xfrm>
-          <a:prstGeom prst="rect">
-            <a:avLst/>
-          </a:prstGeom>
-          <a:noFill/>
-        </p:spPr>
-        <p:txBody>
-          <a:bodyPr wrap="square" lIns="0" tIns="0" rIns="0" bIns="0" anchor="t">
-            <a:noAutofit/>
-          </a:bodyPr>
-          <a:lstStyle/>
-          <a:p>
-            <a:pPr algn="l">
-              <a:lnSpc>
-                <a:spcPct val="115000"/>
-              </a:lnSpc>
-              <a:spcAft>
-                <a:spcPts val="400"/>
-              </a:spcAft>
-            </a:pPr>
-            <a:r>
-              <a:rPr sz="1050" b="0">
-                <a:solidFill>
-                  <a:srgbClr val="333333"/>
-                </a:solidFill>
-                <a:latin typeface="微软雅黑"/>
-                <a:ea typeface="微软雅黑"/>
-              </a:rPr>
-              <a:t>3 个行业模型，每个面向 1 个边界清晰的固定场景；行业方向由 RNP/MCTI 提出，讯飞做可行性评估</a:t>
-            </a:r>
-          </a:p>
-        </p:txBody>
-      </p:sp>
-      <p:sp>
-        <p:nvSpPr>
-          <p:cNvPr id="22" name="TextBox 21"/>
-          <p:cNvSpPr txBox="1"/>
-          <p:nvPr/>
-        </p:nvSpPr>
-        <p:spPr>
-          <a:xfrm>
-            <a:off x="8415528" y="2990088"/>
-            <a:ext cx="3087624" cy="274320"/>
-          </a:xfrm>
-          <a:prstGeom prst="rect">
-            <a:avLst/>
-          </a:prstGeom>
-          <a:noFill/>
-        </p:spPr>
-        <p:txBody>
-          <a:bodyPr wrap="square" lIns="0" tIns="0" rIns="0" bIns="0" anchor="ctr">
-            <a:noAutofit/>
-          </a:bodyPr>
-          <a:lstStyle/>
-          <a:p>
-            <a:pPr algn="l">
-              <a:lnSpc>
-                <a:spcPct val="115000"/>
-              </a:lnSpc>
-              <a:spcAft>
-                <a:spcPts val="0"/>
-              </a:spcAft>
-            </a:pPr>
-            <a:r>
-              <a:rPr sz="1150" b="1">
-                <a:solidFill>
-                  <a:srgbClr val="C00000"/>
-                </a:solidFill>
-                <a:latin typeface="微软雅黑"/>
-                <a:ea typeface="微软雅黑"/>
-              </a:rPr>
-              <a:t>巴方参与</a:t>
-            </a:r>
-          </a:p>
-        </p:txBody>
-      </p:sp>
-      <p:sp>
-        <p:nvSpPr>
-          <p:cNvPr id="23" name="TextBox 22"/>
-          <p:cNvSpPr txBox="1"/>
-          <p:nvPr/>
-        </p:nvSpPr>
-        <p:spPr>
-          <a:xfrm>
-            <a:off x="8415528" y="3282696"/>
-            <a:ext cx="3087624" cy="457200"/>
-          </a:xfrm>
-          <a:prstGeom prst="rect">
-            <a:avLst/>
-          </a:prstGeom>
-          <a:noFill/>
-        </p:spPr>
-        <p:txBody>
-          <a:bodyPr wrap="square" lIns="0" tIns="0" rIns="0" bIns="0" anchor="t">
-            <a:noAutofit/>
-          </a:bodyPr>
-          <a:lstStyle/>
-          <a:p>
-            <a:pPr algn="l">
-              <a:lnSpc>
-                <a:spcPct val="115000"/>
-              </a:lnSpc>
-              <a:spcAft>
-                <a:spcPts val="400"/>
-              </a:spcAft>
-            </a:pPr>
-            <a:r>
-              <a:rPr sz="1050" b="0">
-                <a:solidFill>
-                  <a:srgbClr val="333333"/>
-                </a:solidFill>
-                <a:latin typeface="微软雅黑"/>
-                <a:ea typeface="微软雅黑"/>
-              </a:rPr>
-              <a:t>提供数据与专家；RNP 团队自主训练，讯飞辅助</a:t>
-            </a:r>
-          </a:p>
-        </p:txBody>
-      </p:sp>
-      <p:sp>
-        <p:nvSpPr>
-          <p:cNvPr id="24" name="Rounded Rectangle 23"/>
-          <p:cNvSpPr/>
-          <p:nvPr/>
-        </p:nvSpPr>
-        <p:spPr>
-          <a:xfrm>
-            <a:off x="457200" y="3931920"/>
-            <a:ext cx="11274552" cy="777240"/>
-          </a:xfrm>
-          <a:prstGeom prst="roundRect">
-            <a:avLst>
-              <a:gd name="adj" fmla="val 4000"/>
-            </a:avLst>
-          </a:prstGeom>
-          <a:solidFill>
-            <a:srgbClr val="F7F7F7"/>
-          </a:solidFill>
-          <a:ln w="9525">
-            <a:solidFill>
-              <a:srgbClr val="D9D9D9"/>
-            </a:solidFill>
-          </a:ln>
-          <a:effectLst/>
-        </p:spPr>
-        <p:style>
-          <a:lnRef idx="1">
-            <a:schemeClr val="accent1"/>
-          </a:lnRef>
-          <a:fillRef idx="3">
-            <a:schemeClr val="accent1"/>
-          </a:fillRef>
-          <a:effectRef idx="2">
-            <a:schemeClr val="accent1"/>
-          </a:effectRef>
-          <a:fontRef idx="minor">
-            <a:schemeClr val="lt1"/>
-          </a:fontRef>
-        </p:style>
-        <p:txBody>
-          <a:bodyPr rtlCol="0" anchor="ctr"/>
-          <a:lstStyle/>
-          <a:p>
-            <a:pPr algn="ctr"/>
-          </a:p>
-        </p:txBody>
-      </p:sp>
-      <p:sp>
-        <p:nvSpPr>
-          <p:cNvPr id="25" name="TextBox 24"/>
-          <p:cNvSpPr txBox="1"/>
-          <p:nvPr/>
-        </p:nvSpPr>
-        <p:spPr>
-          <a:xfrm>
-            <a:off x="685800" y="4165091"/>
+            <a:off x="685800" y="4370832"/>
             <a:ext cx="1188720" cy="310896"/>
           </a:xfrm>
           <a:prstGeom prst="rect">
@@ -25573,14 +25646,14 @@
       </p:sp>
       <p:sp>
         <p:nvSpPr>
-          <p:cNvPr id="26" name="TextBox 25"/>
+          <p:cNvPr id="6" name="TextBox 5"/>
           <p:cNvSpPr txBox="1"/>
           <p:nvPr/>
         </p:nvSpPr>
         <p:spPr>
           <a:xfrm>
-            <a:off x="1874519" y="4005072"/>
-            <a:ext cx="9628632" cy="649224"/>
+            <a:off x="1874519" y="4325112"/>
+            <a:ext cx="9628632" cy="420623"/>
           </a:xfrm>
           <a:prstGeom prst="rect">
             <a:avLst/>
@@ -25602,28 +25675,28 @@
               </a:spcAft>
             </a:pPr>
             <a:r>
-              <a:rPr sz="1050" b="0">
+              <a:rPr sz="1100" b="0">
                 <a:solidFill>
                   <a:srgbClr val="333333"/>
                 </a:solidFill>
                 <a:latin typeface="微软雅黑"/>
                 <a:ea typeface="微软雅黑"/>
               </a:rPr>
-              <a:t>三大中心（软件平台，非物理设施）：语料库构建中心 · 模型训练中心 · AI 应用创新中心。建设期讯飞主导方法论、训练与核心平台，RNP 主导本地语料采集、参与训练并定义本地应用；运维期 RNP 主导日常运营，讯飞持续支持</a:t>
+              <a:t>三大中心（软件平台）：语料库构建中心 · 模型训练中心 · AI 应用创新中心　｜　Stage 1 基础能力建设约 280P，Stage 2 全面运营合计约 560P</a:t>
             </a:r>
           </a:p>
         </p:txBody>
       </p:sp>
       <p:sp>
         <p:nvSpPr>
-          <p:cNvPr id="27" name="Rounded Rectangle 26"/>
+          <p:cNvPr id="7" name="Rounded Rectangle 6"/>
           <p:cNvSpPr/>
           <p:nvPr/>
         </p:nvSpPr>
         <p:spPr>
           <a:xfrm>
-            <a:off x="457200" y="4846320"/>
-            <a:ext cx="11274552" cy="713232"/>
+            <a:off x="457200" y="4937760"/>
+            <a:ext cx="11274552" cy="548640"/>
           </a:xfrm>
           <a:prstGeom prst="roundRect">
             <a:avLst>
@@ -25662,14 +25735,14 @@
       </p:sp>
       <p:sp>
         <p:nvSpPr>
-          <p:cNvPr id="28" name="TextBox 27"/>
+          <p:cNvPr id="8" name="TextBox 7"/>
           <p:cNvSpPr txBox="1"/>
           <p:nvPr/>
         </p:nvSpPr>
         <p:spPr>
           <a:xfrm>
-            <a:off x="731520" y="4901184"/>
-            <a:ext cx="2743200" cy="310896"/>
+            <a:off x="685800" y="5056632"/>
+            <a:ext cx="1188720" cy="310896"/>
           </a:xfrm>
           <a:prstGeom prst="rect">
             <a:avLst/>
@@ -25691,28 +25764,28 @@
               </a:spcAft>
             </a:pPr>
             <a:r>
-              <a:rPr sz="1300" b="1">
+              <a:rPr sz="1250" b="1">
                 <a:solidFill>
                   <a:srgbClr val="C00000"/>
                 </a:solidFill>
                 <a:latin typeface="微软雅黑"/>
                 <a:ea typeface="微软雅黑"/>
               </a:rPr>
-              <a:t>项目内知识转移</a:t>
+              <a:t>知识转移</a:t>
             </a:r>
           </a:p>
         </p:txBody>
       </p:sp>
       <p:sp>
         <p:nvSpPr>
-          <p:cNvPr id="29" name="TextBox 28"/>
+          <p:cNvPr id="9" name="TextBox 8"/>
           <p:cNvSpPr txBox="1"/>
           <p:nvPr/>
         </p:nvSpPr>
         <p:spPr>
           <a:xfrm>
-            <a:off x="731520" y="5212080"/>
-            <a:ext cx="10725912" cy="329184"/>
+            <a:off x="1874519" y="5010912"/>
+            <a:ext cx="9628632" cy="420623"/>
           </a:xfrm>
           <a:prstGeom prst="rect">
             <a:avLst/>
@@ -25720,7 +25793,7 @@
           <a:noFill/>
         </p:spPr>
         <p:txBody>
-          <a:bodyPr wrap="square" lIns="0" tIns="0" rIns="0" bIns="0" anchor="t">
+          <a:bodyPr wrap="square" lIns="0" tIns="0" rIns="0" bIns="0" anchor="ctr">
             <a:noAutofit/>
           </a:bodyPr>
           <a:lstStyle/>
@@ -25734,27 +25807,27 @@
               </a:spcAft>
             </a:pPr>
             <a:r>
-              <a:rPr sz="1050" b="0">
+              <a:rPr sz="1100" b="0">
                 <a:solidFill>
                   <a:srgbClr val="333333"/>
                 </a:solidFill>
                 <a:latin typeface="微软雅黑"/>
                 <a:ea typeface="微软雅黑"/>
               </a:rPr>
-              <a:t>巴方人员在参与以上工作的过程中掌握语料采集、数据工程、训练方法、模型评估、部署运维；完成知识转移后可自主研发 DLM 与其他尺寸模型</a:t>
+              <a:t>贯穿全程，巴方人员边做边学；DLM 由 RNP 自主训练、讯飞辅助；完成后巴方可自主研发 DLM 与其他尺寸模型</a:t>
             </a:r>
           </a:p>
         </p:txBody>
       </p:sp>
       <p:sp>
         <p:nvSpPr>
-          <p:cNvPr id="30" name="TextBox 29"/>
+          <p:cNvPr id="10" name="TextBox 9"/>
           <p:cNvSpPr txBox="1"/>
           <p:nvPr/>
         </p:nvSpPr>
         <p:spPr>
           <a:xfrm>
-            <a:off x="457200" y="5669280"/>
+            <a:off x="457200" y="5623560"/>
             <a:ext cx="11274552" cy="365760"/>
           </a:xfrm>
           <a:prstGeom prst="rect">
@@ -25784,7 +25857,7 @@
                 <a:latin typeface="微软雅黑"/>
                 <a:ea typeface="微软雅黑"/>
               </a:rPr>
-              <a:t>三大中心与分工见 5/8 答复，责任矩阵在 HLD；范围以 SOW 与报价核对为准。第 3、6、8 页逐项展开。</a:t>
+              <a:t>口径与讯飞给 RNP 的四份书面答复一致；范围以 SOW 与报价核对为准。后续各页逐项展开。</a:t>
             </a:r>
           </a:p>
         </p:txBody>
@@ -25974,7 +26047,7 @@
                 <a:latin typeface="微软雅黑"/>
                 <a:ea typeface="微软雅黑"/>
               </a:rPr>
-              <a:t>基于讯飞星火基础模型训练的约 300B 参数级巴西主权大模型，约 6 个月完成一个正式版本；另含巴西葡语 ASR/TTS；是国家 APP 与行业模型的底座</a:t>
+              <a:t>基于讯飞星火基础模型训练的约 300B 巴西主权大模型，含巴西葡语 ASR/TTS；约 6 个月完成一个正式版本</a:t>
             </a:r>
           </a:p>
         </p:txBody>
@@ -26212,7 +26285,7 @@
                 <a:latin typeface="微软雅黑"/>
                 <a:ea typeface="微软雅黑"/>
               </a:rPr>
-              <a:t>RNP 采集 50B 本地葡语语料；讯飞提供 300B 以上通用语料，并把原始语料加工为 AI Ready 语料库</a:t>
+              <a:t>RNP 采集 50B 本地语料；讯飞提供 300B 通用语料并加工</a:t>
             </a:r>
           </a:p>
         </p:txBody>
@@ -26451,7 +26524,7 @@
                 <a:latin typeface="微软雅黑"/>
                 <a:ea typeface="微软雅黑"/>
               </a:rPr>
-              <a:t>以星火基础模型为底座，约 300B 参数级；Stage 1 分配 210P；多轮优化与版本迭代</a:t>
+              <a:t>星火底座，约 300B 参数级；多轮优化与版本迭代</a:t>
             </a:r>
           </a:p>
         </p:txBody>
@@ -26690,7 +26763,7 @@
                 <a:latin typeface="微软雅黑"/>
                 <a:ea typeface="微软雅黑"/>
               </a:rPr>
-              <a:t>巴西本土基准（ENEM、OAB 等）+ 国际多语种基准；测试集联合构建，讯飞准备、RNP 审核</a:t>
+              <a:t>本土基准 + 国际基准；讯飞准备，RNP 审核</a:t>
             </a:r>
           </a:p>
         </p:txBody>
@@ -26929,7 +27002,7 @@
                 <a:latin typeface="微软雅黑"/>
                 <a:ea typeface="微软雅黑"/>
               </a:rPr>
-              <a:t>主权模型权重 100% 归巴西；基模结构源码、ONNX 导出；MaaS 平台与文档</a:t>
+              <a:t>权重归巴西；基模源码、导出格式与 MaaS 平台</a:t>
             </a:r>
           </a:p>
         </p:txBody>
@@ -27110,7 +27183,7 @@
                 <a:latin typeface="微软雅黑"/>
                 <a:ea typeface="微软雅黑"/>
               </a:rPr>
-              <a:t>主导训练（模型训练中心）</a:t>
+              <a:t>主导训练；语料加工与质检</a:t>
             </a:r>
           </a:p>
           <a:p>
@@ -27136,33 +27209,7 @@
                 <a:latin typeface="微软雅黑"/>
                 <a:ea typeface="微软雅黑"/>
               </a:rPr>
-              <a:t>语料加工、质检与方法论输出</a:t>
-            </a:r>
-          </a:p>
-          <a:p>
-            <a:pPr algn="l" marL="164592" indent="-164592">
-              <a:lnSpc>
-                <a:spcPct val="115000"/>
-              </a:lnSpc>
-              <a:spcAft>
-                <a:spcPts val="200"/>
-              </a:spcAft>
-              <a:buClr>
-                <a:srgbClr val="C00000"/>
-              </a:buClr>
-              <a:buSzPct val="100000"/>
-              <a:buFont typeface="Arial"/>
-              <a:buChar char="•"/>
-            </a:pPr>
-            <a:r>
-              <a:rPr sz="1100" b="0">
-                <a:solidFill>
-                  <a:srgbClr val="333333"/>
-                </a:solidFill>
-                <a:latin typeface="微软雅黑"/>
-                <a:ea typeface="微软雅黑"/>
-              </a:rPr>
-              <a:t>评测集与验收方案准备；文档与交付</a:t>
+              <a:t>评测方案、交付与文档</a:t>
             </a:r>
           </a:p>
         </p:txBody>
@@ -27300,7 +27347,7 @@
                 <a:latin typeface="微软雅黑"/>
                 <a:ea typeface="微软雅黑"/>
               </a:rPr>
-              <a:t>采集 50B 本地语料，落实版权与 LGPD 授权</a:t>
+              <a:t>采集本地语料并落实授权</a:t>
             </a:r>
           </a:p>
           <a:p>
@@ -27326,33 +27373,7 @@
                 <a:latin typeface="微软雅黑"/>
                 <a:ea typeface="微软雅黑"/>
               </a:rPr>
-              <a:t>工程师通过知识转移参与训练</a:t>
-            </a:r>
-          </a:p>
-          <a:p>
-            <a:pPr algn="l" marL="164592" indent="-164592">
-              <a:lnSpc>
-                <a:spcPct val="115000"/>
-              </a:lnSpc>
-              <a:spcAft>
-                <a:spcPts val="200"/>
-              </a:spcAft>
-              <a:buClr>
-                <a:srgbClr val="1F4E79"/>
-              </a:buClr>
-              <a:buSzPct val="100000"/>
-              <a:buFont typeface="Arial"/>
-              <a:buChar char="•"/>
-            </a:pPr>
-            <a:r>
-              <a:rPr sz="1100" b="0">
-                <a:solidFill>
-                  <a:srgbClr val="333333"/>
-                </a:solidFill>
-                <a:latin typeface="微软雅黑"/>
-                <a:ea typeface="微软雅黑"/>
-              </a:rPr>
-              <a:t>审核评测方案，组织验收</a:t>
+              <a:t>工程师参与训练；组织验收</a:t>
             </a:r>
           </a:p>
         </p:txBody>
@@ -27441,7 +27462,7 @@
                 <a:latin typeface="微软雅黑"/>
                 <a:ea typeface="微软雅黑"/>
               </a:rPr>
-              <a:t>交付物与验收</a:t>
+              <a:t>交付物</a:t>
             </a:r>
           </a:p>
         </p:txBody>
@@ -27484,17 +27505,7 @@
                 <a:latin typeface="微软雅黑"/>
                 <a:ea typeface="微软雅黑"/>
               </a:rPr>
-              <a:t>权重、基模结构源码（PyTorch/DeepSpeed，推理适配 vLLM）、评测报告、文档；验收达标线 </a:t>
-            </a:r>
-            <a:r>
-              <a:rPr sz="1150" b="0">
-                <a:solidFill>
-                  <a:srgbClr val="0070C0"/>
-                </a:solidFill>
-                <a:latin typeface="微软雅黑"/>
-                <a:ea typeface="微软雅黑"/>
-              </a:rPr>
-              <a:t>待核：按评测方案确定</a:t>
+              <a:t>模型权重、基模结构源码、评测报告、文档　·　规格、语料与评测见后两页</a:t>
             </a:r>
           </a:p>
         </p:txBody>
@@ -31497,7 +31508,7 @@
                 <a:latin typeface="微软雅黑"/>
                 <a:ea typeface="微软雅黑"/>
               </a:rPr>
-              <a:t>面向公众的国家级 AI 服务入口，以讯飞星火 APP 为基线做巴西本地化：问答、语音交互、文档理解、内容创作；约 1000 万级用户、500 路峰值并发</a:t>
+              <a:t>以讯飞星火 APP 为基线做巴西本地化的公众 AI 服务：问答、语音交互、文档理解、内容创作；约 1000 万级用户、500 路峰值并发</a:t>
             </a:r>
           </a:p>
         </p:txBody>
@@ -31735,7 +31746,7 @@
                 <a:latin typeface="微软雅黑"/>
                 <a:ea typeface="微软雅黑"/>
               </a:rPr>
-              <a:t>RNP 与巴西伙伴深度参与，共同定义需求、使用场景与功能</a:t>
+              <a:t>RNP 与巴西伙伴共同定义需求、场景与功能</a:t>
             </a:r>
           </a:p>
         </p:txBody>
@@ -31974,7 +31985,7 @@
                 <a:latin typeface="微软雅黑"/>
                 <a:ea typeface="微软雅黑"/>
               </a:rPr>
-              <a:t>巴西葡语本地化：界面、语音、内容；本地应用场景适配</a:t>
+              <a:t>巴西葡语界面、语音、内容；本地场景适配</a:t>
             </a:r>
           </a:p>
         </p:txBody>
@@ -32223,7 +32234,7 @@
                 <a:latin typeface="微软雅黑"/>
                 <a:ea typeface="微软雅黑"/>
               </a:rPr>
-              <a:t>待核：接口清单与测试数据按 SOW</a:t>
+              <a:t>待核：接口清单</a:t>
             </a:r>
           </a:p>
         </p:txBody>
@@ -32462,7 +32473,7 @@
                 <a:latin typeface="微软雅黑"/>
                 <a:ea typeface="微软雅黑"/>
               </a:rPr>
-              <a:t>在线推理 105P（Stage 2）；多模型混合调用、多副本、高可用、弹性扩容</a:t>
+              <a:t>Stage 2 在线推理；多副本、高可用、弹性扩容</a:t>
             </a:r>
           </a:p>
         </p:txBody>
@@ -32754,7 +32765,7 @@
                 <a:latin typeface="微软雅黑"/>
                 <a:ea typeface="微软雅黑"/>
               </a:rPr>
-              <a:t>交付星火 APP 基线与 AI 应用创新中心核心平台</a:t>
+              <a:t>星火 APP 基线与平台；本地化与集成开发</a:t>
             </a:r>
           </a:p>
           <a:p>
@@ -32780,33 +32791,7 @@
                 <a:latin typeface="微软雅黑"/>
                 <a:ea typeface="微软雅黑"/>
               </a:rPr>
-              <a:t>本地化定制与系统集成开发</a:t>
-            </a:r>
-          </a:p>
-          <a:p>
-            <a:pPr algn="l" marL="164592" indent="-164592">
-              <a:lnSpc>
-                <a:spcPct val="115000"/>
-              </a:lnSpc>
-              <a:spcAft>
-                <a:spcPts val="200"/>
-              </a:spcAft>
-              <a:buClr>
-                <a:srgbClr val="C00000"/>
-              </a:buClr>
-              <a:buSzPct val="100000"/>
-              <a:buFont typeface="Arial"/>
-              <a:buChar char="•"/>
-            </a:pPr>
-            <a:r>
-              <a:rPr sz="1050" b="0">
-                <a:solidFill>
-                  <a:srgbClr val="333333"/>
-                </a:solidFill>
-                <a:latin typeface="微软雅黑"/>
-                <a:ea typeface="微软雅黑"/>
-              </a:rPr>
-              <a:t>MaaS 平台与推理服务；运营团队培训</a:t>
+              <a:t>MaaS 平台与推理服务</a:t>
             </a:r>
           </a:p>
         </p:txBody>
@@ -32944,7 +32929,7 @@
                 <a:latin typeface="微软雅黑"/>
                 <a:ea typeface="微软雅黑"/>
               </a:rPr>
-              <a:t>定义本地应用场景与功能</a:t>
+              <a:t>定义本地场景与功能，提供系统接口</a:t>
             </a:r>
           </a:p>
           <a:p>
@@ -32970,33 +32955,7 @@
                 <a:latin typeface="微软雅黑"/>
                 <a:ea typeface="微软雅黑"/>
               </a:rPr>
-              <a:t>提供本地系统接口与测试数据</a:t>
-            </a:r>
-          </a:p>
-          <a:p>
-            <a:pPr algn="l" marL="164592" indent="-164592">
-              <a:lnSpc>
-                <a:spcPct val="115000"/>
-              </a:lnSpc>
-              <a:spcAft>
-                <a:spcPts val="200"/>
-              </a:spcAft>
-              <a:buClr>
-                <a:srgbClr val="1F4E79"/>
-              </a:buClr>
-              <a:buSzPct val="100000"/>
-              <a:buFont typeface="Arial"/>
-              <a:buChar char="•"/>
-            </a:pPr>
-            <a:r>
-              <a:rPr sz="1050" b="0">
-                <a:solidFill>
-                  <a:srgbClr val="333333"/>
-                </a:solidFill>
-                <a:latin typeface="微软雅黑"/>
-                <a:ea typeface="微软雅黑"/>
-              </a:rPr>
-              <a:t>组织测试与验收；运维期主导日常运营</a:t>
+              <a:t>组织测试验收；运维期主导运营</a:t>
             </a:r>
           </a:p>
         </p:txBody>
@@ -33085,7 +33044,7 @@
                 <a:latin typeface="微软雅黑"/>
                 <a:ea typeface="微软雅黑"/>
               </a:rPr>
-              <a:t>服务与规模</a:t>
+              <a:t>服务</a:t>
             </a:r>
           </a:p>
         </p:txBody>
@@ -33128,7 +33087,7 @@
                 <a:latin typeface="微软雅黑"/>
                 <a:ea typeface="微软雅黑"/>
               </a:rPr>
-              <a:t>NLP 问答 · 语音交互 · 文档理解与 OCR · 内容创作 · Embedding · Reranking；约 1000 万级用户，约 500 路峰值并发</a:t>
+              <a:t>问答 · 语音交互 · 文档理解 · 内容创作 · Embedding · Reranking　·　容量与接口见下页</a:t>
             </a:r>
           </a:p>
         </p:txBody>
@@ -35198,7 +35157,7 @@
                 <a:latin typeface="微软雅黑"/>
                 <a:ea typeface="微软雅黑"/>
               </a:rPr>
-              <a:t>3 个行业模型，每个面向 1 个边界清晰的固定场景；行业方向由 RNP/MCTI 提出，讯飞做可行性评估；讯飞在政务、法律、医疗、教育领域有 DLM 经验</a:t>
+              <a:t>3 个行业模型，每个面向 1 个边界清晰的固定场景；行业方向由 RNP/MCTI 提出，讯飞做可行性评估</a:t>
             </a:r>
           </a:p>
         </p:txBody>
@@ -35436,7 +35395,7 @@
                 <a:latin typeface="微软雅黑"/>
                 <a:ea typeface="微软雅黑"/>
               </a:rPr>
-              <a:t>RNP/MCTI 确定行业与固定场景、业务目标、目标用户、输入输出与使用边界</a:t>
+              <a:t>RNP/MCTI 确定行业、场景、目标与使用边界</a:t>
             </a:r>
           </a:p>
         </p:txBody>
@@ -35675,7 +35634,7 @@
                 <a:latin typeface="微软雅黑"/>
                 <a:ea typeface="微软雅黑"/>
               </a:rPr>
-              <a:t>RNP 提供或协调授权数据、标注与独立评测数据；共同确定 70B 以内基座（星火或 DeepSeek、Qwen）</a:t>
+              <a:t>RNP 提供授权数据与专家；70B 以内基座</a:t>
             </a:r>
           </a:p>
         </p:txBody>
@@ -35914,17 +35873,7 @@
                 <a:latin typeface="微软雅黑"/>
                 <a:ea typeface="微软雅黑"/>
               </a:rPr>
-              <a:t>RNP 自主训练，讯飞辅助训练与持续咨询；LoRA-SFT / SFT / GRPO 路线；Stage 2 分配 70P </a:t>
-            </a:r>
-            <a:r>
-              <a:rPr sz="1100" b="0">
-                <a:solidFill>
-                  <a:srgbClr val="0070C0"/>
-                </a:solidFill>
-                <a:latin typeface="微软雅黑"/>
-                <a:ea typeface="微软雅黑"/>
-              </a:rPr>
-              <a:t>待核：按 1 个规划</a:t>
+              <a:t>RNP 自主训练，讯飞辅助与持续咨询</a:t>
             </a:r>
           </a:p>
         </p:txBody>
@@ -36163,7 +36112,7 @@
                 <a:latin typeface="微软雅黑"/>
                 <a:ea typeface="微软雅黑"/>
               </a:rPr>
-              <a:t>基于双方确认的独立评测集验收；实施前签《DLM 场景及技术方案确认书》</a:t>
+              <a:t>独立评测集验收；实施前签场景与方案确认书</a:t>
             </a:r>
           </a:p>
         </p:txBody>
@@ -36344,7 +36293,7 @@
                 <a:latin typeface="微软雅黑"/>
                 <a:ea typeface="微软雅黑"/>
               </a:rPr>
-              <a:t>需求分析与可行性评估，基座选型建议</a:t>
+              <a:t>可行性评估；基座与训练路线建议</a:t>
             </a:r>
           </a:p>
           <a:p>
@@ -36370,33 +36319,7 @@
                 <a:latin typeface="微软雅黑"/>
                 <a:ea typeface="微软雅黑"/>
               </a:rPr>
-              <a:t>语料规划、数据治理、标注体系与配比建议</a:t>
-            </a:r>
-          </a:p>
-          <a:p>
-            <a:pPr algn="l" marL="164592" indent="-164592">
-              <a:lnSpc>
-                <a:spcPct val="115000"/>
-              </a:lnSpc>
-              <a:spcAft>
-                <a:spcPts val="200"/>
-              </a:spcAft>
-              <a:buClr>
-                <a:srgbClr val="C00000"/>
-              </a:buClr>
-              <a:buSzPct val="100000"/>
-              <a:buFont typeface="Arial"/>
-              <a:buChar char="•"/>
-            </a:pPr>
-            <a:r>
-              <a:rPr sz="1100" b="0">
-                <a:solidFill>
-                  <a:srgbClr val="333333"/>
-                </a:solidFill>
-                <a:latin typeface="微软雅黑"/>
-                <a:ea typeface="微软雅黑"/>
-              </a:rPr>
-              <a:t>后训练路线与评测方法设计；训练过程技术指导、日志分析与优化建议</a:t>
+              <a:t>训练过程技术指导与优化建议</a:t>
             </a:r>
           </a:p>
         </p:txBody>
@@ -36534,7 +36457,7 @@
                 <a:latin typeface="微软雅黑"/>
                 <a:ea typeface="微软雅黑"/>
               </a:rPr>
-              <a:t>确定行业与场景，指定业务负责人</a:t>
+              <a:t>确定场景；提供数据、标注与专家</a:t>
             </a:r>
           </a:p>
           <a:p>
@@ -36560,33 +36483,7 @@
                 <a:latin typeface="微软雅黑"/>
                 <a:ea typeface="微软雅黑"/>
               </a:rPr>
-              <a:t>提供授权数据、标注与评测数据，落实 LGPD 合规</a:t>
-            </a:r>
-          </a:p>
-          <a:p>
-            <a:pPr algn="l" marL="164592" indent="-164592">
-              <a:lnSpc>
-                <a:spcPct val="115000"/>
-              </a:lnSpc>
-              <a:spcAft>
-                <a:spcPts val="200"/>
-              </a:spcAft>
-              <a:buClr>
-                <a:srgbClr val="1F4E79"/>
-              </a:buClr>
-              <a:buSzPct val="100000"/>
-              <a:buFont typeface="Arial"/>
-              <a:buChar char="•"/>
-            </a:pPr>
-            <a:r>
-              <a:rPr sz="1100" b="0">
-                <a:solidFill>
-                  <a:srgbClr val="333333"/>
-                </a:solidFill>
-                <a:latin typeface="微软雅黑"/>
-                <a:ea typeface="微软雅黑"/>
-              </a:rPr>
-              <a:t>安排葡语、行业、安全、法律专家；技术团队参与数据集构建、训练与评测</a:t>
+              <a:t>自主训练与评测；组织验收</a:t>
             </a:r>
           </a:p>
         </p:txBody>
@@ -36675,7 +36572,7 @@
                 <a:latin typeface="微软雅黑"/>
                 <a:ea typeface="微软雅黑"/>
               </a:rPr>
-              <a:t>交付物与验收</a:t>
+              <a:t>交付物</a:t>
             </a:r>
           </a:p>
         </p:txBody>
@@ -36718,7 +36615,7 @@
                 <a:latin typeface="微软雅黑"/>
                 <a:ea typeface="微软雅黑"/>
               </a:rPr>
-              <a:t>技术方案、指导记录、问题清单、评测分析与演进建议；按独立评测集在约定场景下评测验收</a:t>
+              <a:t>技术方案、指导记录、问题清单、评测分析与演进建议　·　实施条件与数据规格见下页</a:t>
             </a:r>
           </a:p>
         </p:txBody>

--- a/RNP-讯飞交流-会议版.pptx
+++ b/RNP-讯飞交流-会议版.pptx
@@ -519,6 +519,32 @@
           <a:lstStyle/>
           <a:p>
             <a:r>
+              <a:t>如被问数据要多少：LoRA 微调建议 5 千到 5 万条，SFT 微调建议 2 万到 20 万条以上，最终看数据质量和场景复杂度。</a:t>
+            </a:r>
+          </a:p>
+          <a:p>
+            <a:r>
+              <a:t>如被问你们要出什么：训练、标注、独立评测数据的合法使用权，采集、清洗、标注、翻译、内容审核和 LGPD 合规；葡语、行业、安全、法律的本地专家。</a:t>
+            </a:r>
+          </a:p>
+          <a:p>
+            <a:r>
+              <a:t>如被问算力：8 月按 1 个 DLM 规划了 70P，3 个需要重估。</a:t>
+            </a:r>
+          </a:p>
+          <a:p>
+            <a:r>
+              <a:t>如被问不够怎么办：如果自主训练模式不足以满足需要，可以调整为讯飞进一步参与或直接承担。</a:t>
+            </a:r>
+          </a:p>
+          <a:p/>
+          <a:p>
+            <a:r>
+              <a:t>【材料来源备注】</a:t>
+            </a:r>
+          </a:p>
+          <a:p>
+            <a:r>
               <a:t>8/13 答复 Q1 原文整理，数量按最新口径。</a:t>
             </a:r>
           </a:p>
@@ -587,6 +613,29 @@
         <p:txBody>
           <a:bodyPr/>
           <a:lstStyle/>
+          <a:p>
+            <a:r>
+              <a:t>你们编计划需要时间线。项目分两个 Stage：Stage 1 国家 AI 基础能力建设，约 280P；Stage 2 国家级全面运营，合计约 560P。五个阶段从语料准备到交接运营，月份是示意，正式时间表随 SOW。</a:t>
+            </a:r>
+          </a:p>
+          <a:p/>
+          <a:p>
+            <a:r>
+              <a:t>三条横幅是三方责任。华为提供算力、部署环境、网络和数据中心运维衔接，这一行单列，算力和环境的事不在讯飞。知识转移贯穿五个阶段，不是最后才开始。交接后你们主导三大中心的日常运营，我们持续支持。</a:t>
+            </a:r>
+          </a:p>
+          <a:p/>
+          <a:p>
+            <a:r>
+              <a:t>对你们意味着：你们的人从第一个阶段就要在场，采集语料和授权是第一个阶段的主要工作。许可、年费和长期路径在下一页。</a:t>
+            </a:r>
+          </a:p>
+          <a:p/>
+          <a:p>
+            <a:r>
+              <a:t>【材料来源备注】</a:t>
+            </a:r>
+          </a:p>
           <a:p>
             <a:r>
               <a:t>Stage 与算力来自 8/13 答复 Q2；运维阶段分工来自 5/8 答复 Q2。五个阶段与月份是示意，待 SOW。</a:t>
@@ -659,6 +708,37 @@
           <a:lstStyle/>
           <a:p>
             <a:r>
+              <a:t>这一页大概率会被问，因为对应你们对运营主权和供应商依赖的关切。</a:t>
+            </a:r>
+          </a:p>
+          <a:p>
+            <a:r>
+              <a:t>如被问拿到什么：项目范围内永久授权，包括主权模型权重、本土语料、定制代码、平台与应用。权重可协商 100% 归巴西，在巴西本土数据中心存储维护。</a:t>
+            </a:r>
+          </a:p>
+          <a:p>
+            <a:r>
+              <a:t>如被问代码：定制代码有永久使用权和修改权，对外再分发需另行约定。三大中心和国民 APP 是讯飞核心资产，不开源，定制部分源码可开放，完全控制可付费买断。</a:t>
+            </a:r>
+          </a:p>
+          <a:p>
+            <a:r>
+              <a:t>如被问依赖：ONNX 导出、基模结构源码、五个知识包，加上 1 到 3 年授权加增训加知识转移、3 到 5 年你们主导自主研发的两段式路径。</a:t>
+            </a:r>
+          </a:p>
+          <a:p>
+            <a:r>
+              <a:t>如被问费用：运维阶段有软件运维年费和模型持续优化年费，另行商务约定，不影响软件使用，金额按报价。</a:t>
+            </a:r>
+          </a:p>
+          <a:p/>
+          <a:p>
+            <a:r>
+              <a:t>【材料来源备注】</a:t>
+            </a:r>
+          </a:p>
+          <a:p>
+            <a:r>
               <a:t>对应 RNP 关心的运营主权与防止供应商依赖：5/4 答复 Q5、Q9、Q10、Q14；5/8 答复 Q2；4/29 清单答复。</a:t>
             </a:r>
           </a:p>
@@ -727,6 +807,35 @@
         <p:txBody>
           <a:bodyPr/>
           <a:lstStyle/>
+          <a:p>
+            <a:r>
+              <a:t>这是今天最重要的一页，对应你们的第二和第三个关注点，你们回去编 HR plan 就照这页。</a:t>
+            </a:r>
+          </a:p>
+          <a:p/>
+          <a:p>
+            <a:r>
+              <a:t>八类角色。项目负责人统筹并确认方案、评测与验收。语料采集团队执行本地语料采集，对接高校、SoberanIA、WideLabs、国家图书馆这些来源，Stage 1 最重。葡语语言与标注专家做语料审核、标注质量、发音人协调。LGPD 合规专员负责数据来源分类、版权和合规审核，这是我们 4 月建议的岗位。行业专家确定 DLM 场景、评价成果。模型工程师参与国家大模型训练，自主做 DLM 训练和评测。应用开发定义 APP 本地场景，参与本地化和集成。运维工程师在 Stage 2 承担三大中心的日常运营。</a:t>
+            </a:r>
+          </a:p>
+          <a:p/>
+          <a:p>
+            <a:r>
+              <a:t>每行的基础要求写了，人数是示例，按 SOW 的名额回填。资源四项：本地语料 50B 及授权、标注与评测数据、实施环境、本地系统接口。</a:t>
+            </a:r>
+          </a:p>
+          <a:p/>
+          <a:p>
+            <a:r>
+              <a:t>我要明确说一句：人数最终由你们定，我们给的是量级和 SOW 名额作为参照。讯飞自己的驻场安排和支持方式，会后随 SOW 一并给你们。</a:t>
+            </a:r>
+          </a:p>
+          <a:p/>
+          <a:p>
+            <a:r>
+              <a:t>【材料来源备注】</a:t>
+            </a:r>
+          </a:p>
           <a:p>
             <a:r>
               <a:t>对 Mota 电话最直接的回应：巴方要出多少人、什么人、什么时候。人数待 SOW。</a:t>
@@ -799,6 +908,17 @@
           <a:lstStyle/>
           <a:p>
             <a:r>
+              <a:t>这张表是给你们直接抄成参与计划的：行是角色，列是五个阶段，格子是该阶段同时投入的人数，现在是示例。名额和阶段以 SOW 为准，同一个人可以跨阶段、跨成果。你们回填后就是 program 的骨架。</a:t>
+            </a:r>
+          </a:p>
+          <a:p/>
+          <a:p>
+            <a:r>
+              <a:t>【材料来源备注】</a:t>
+            </a:r>
+          </a:p>
+          <a:p>
+            <a:r>
               <a:t>Mota：they need to write down this program, how many people。这张表就是那个 program 的骨架。</a:t>
             </a:r>
           </a:p>
@@ -867,6 +987,35 @@
         <p:txBody>
           <a:bodyPr/>
           <a:lstStyle/>
+          <a:p>
+            <a:r>
+              <a:t>第三个关注点，你们的人学完能做什么。两层。</a:t>
+            </a:r>
+          </a:p>
+          <a:p/>
+          <a:p>
+            <a:r>
+              <a:t>第一层，项目内知识转移，已经在当前报价里，不另收费。五个知识包：语料采集方法论、数据工程、训练方法论、模型评估、部署运维。方式是现场培训、工作坊、边做边学，DLM 由你们自主训练就是最大的一块实践。交付运维文档、产品文档、定制代码、集成脚本、接口文档、专属语料、工具链。结果是：完成后你们可以自主研发 DLM 和其他尺寸的模型，并主导三大中心运营。名额和授课语言按 SOW。</a:t>
+            </a:r>
+          </a:p>
+          <a:p/>
+          <a:p>
+            <a:r>
+              <a:t>第二层，可选的核心人才深入研修，单独报价。面向少数有编程和模型基础的人，方向是训练调优、蒸馏、评测体系。要不要，你们评估后答复。</a:t>
+            </a:r>
+          </a:p>
+          <a:p/>
+          <a:p>
+            <a:r>
+              <a:t>底下一行说明位置：讯飞这一层是你们编制 Capacity Program 的输入之一，华为的培训计划是另一层，由华为提供并合稿。软件栈研发与验证的算力和兼容性验证在范围内，软件栈自研的主体工作由你们承担。</a:t>
+            </a:r>
+          </a:p>
+          <a:p/>
+          <a:p>
+            <a:r>
+              <a:t>【材料来源备注】</a:t>
+            </a:r>
+          </a:p>
           <a:p>
             <a:r>
               <a:t>知识包与方式来自 5/4 答复 Q10；结果来自 5/8 答复。第一层已在报价中，第二层可选单独报价。</a:t>
@@ -939,6 +1088,17 @@
           <a:lstStyle/>
           <a:p>
             <a:r>
+              <a:t>如被问怎么学、怎么验证：每类角色在哪几个阶段参与什么任务、我们怎么支持、用什么验证，这张表按角色写了。验证方式是示例，按 SOW 定。这张表也是给华为编整体能力计划的输入。</a:t>
+            </a:r>
+          </a:p>
+          <a:p/>
+          <a:p>
+            <a:r>
+              <a:t>【材料来源备注】</a:t>
+            </a:r>
+          </a:p>
+          <a:p>
+            <a:r>
               <a:t>对应 Mota：Huawei 在写 capacity program，这张表是讯飞给的输入。</a:t>
             </a:r>
           </a:p>
@@ -1009,6 +1169,40 @@
           <a:lstStyle/>
           <a:p>
             <a:r>
+              <a:t>第二个关注点的收口。三栏。</a:t>
+            </a:r>
+          </a:p>
+          <a:p/>
+          <a:p>
+            <a:r>
+              <a:t>已包含：三项成果加知识转移；永久授权的权重、语料、定制代码与平台；开源模型导入和两次迁移适配；MaaS、导出与基模源码。可选另行约定：深入研修；清单外模型适配、微调、性能优化、定制开发；运维年费与模型优化年费；代码再分发；全量开源买断。不在范围：VLM、国家级技术验证实验室、全量非昇腾兼容测试。RNP 负责：本地语料与授权、LGPD 合规、场景确定、本地专家。</a:t>
+            </a:r>
+          </a:p>
+          <a:p/>
+          <a:p>
+            <a:r>
+              <a:t>六项确认，逐条请你们回应承接方和时间。第一，3 个 DLM 方向，RNP 和 MCTI 什么时候给，确认书什么时候签。第二，参与人员、资源和语料采集计划，你们什么时候提交。第三，实施计划，我们会后提交。第四，知识转移名额和能力目标，按 SOW 核对后确认。第五，可选研修要不要。第六，范围与费用归属、许可与年费条款，讯飞和华为提交核对表。</a:t>
+            </a:r>
+          </a:p>
+          <a:p/>
+          <a:p>
+            <a:r>
+              <a:t>【收尾】</a:t>
+            </a:r>
+          </a:p>
+          <a:p>
+            <a:r>
+              <a:t>今天三件事：范围、分工与边界、知识转移，材料里都有对应页。你们回去编 Capacity Program 和 HR plan，用第 12、13、15 页；向上汇报用第 2 页。我们会后一周内给实施计划和 SOW 的名额、时间与讯飞驻场安排，把蓝色的数字补齐。请你们两周内给 3 个 DLM 方向和人员名单。有任何一页看不明白，随时找我们，不必等下次会。</a:t>
+            </a:r>
+          </a:p>
+          <a:p/>
+          <a:p>
+            <a:r>
+              <a:t>【材料来源备注】</a:t>
+            </a:r>
+          </a:p>
+          <a:p>
+            <a:r>
               <a:t>范围三栏把 RNP 历次提问的书面结论带进来。这次会相当于锁定 SOW，争取技术部分当场基本谈定。</a:t>
             </a:r>
           </a:p>
@@ -1077,6 +1271,33 @@
         <p:txBody>
           <a:bodyPr/>
           <a:lstStyle/>
+          <a:p>
+            <a:r>
+              <a:t>【开场】</a:t>
+            </a:r>
+          </a:p>
+          <a:p>
+            <a:r>
+              <a:t>Yara，各位，感谢安排今天的会。会前我们和你们确认过，你们最关心三件事：讯飞到底交付什么；双方各自负什么责、出什么资源、SOW 的边界在哪；以及我们的知识转移怎么做，好让你们编自己的 Capacity Program 和人力计划。今天的材料就按这三件事组织。材料已经提前发给你们，详情页你们看过，今天我不逐页讲，问到再翻。我希望今天结束时有两个结果：你们对讯飞的范围和分工没有疑问，并且拿到编制自己计划所需的全部输入。</a:t>
+            </a:r>
+          </a:p>
+          <a:p/>
+          <a:p>
+            <a:r>
+              <a:t>【本页】</a:t>
+            </a:r>
+          </a:p>
+          <a:p>
+            <a:r>
+              <a:t>这是讯飞与 RNP 的技术交流，讨论稿。所有黑字内容和我们此前给你们的四份书面答复一致，4 月的清单答复、5 月两份、8 月一份。蓝字是示例或待核，最终以 SOW 为准。有一处变化我先说：行业模型的数量按最新方案是 3 个，8 月答复里写的是 1 个，后面讲到时我会解释。</a:t>
+            </a:r>
+          </a:p>
+          <a:p/>
+          <a:p>
+            <a:r>
+              <a:t>【材料来源备注】</a:t>
+            </a:r>
+          </a:p>
           <a:p>
             <a:r>
               <a:t>本次交流讲四件事：讯飞交付什么、怎么做、双方怎么分工、巴方人员怎样学会并接手。顺序按 Mota 电话中 RNP 的诉求。</a:t>
@@ -1154,6 +1375,47 @@
           <a:lstStyle/>
           <a:p>
             <a:r>
+              <a:t>这一页回答你们的第一个问题，讯飞交付什么。三项成果加一套能力。</a:t>
+            </a:r>
+          </a:p>
+          <a:p/>
+          <a:p>
+            <a:r>
+              <a:t>第一项，国家大模型。基于讯飞星火基础模型训练的约 300B 参数巴西主权大模型，加巴西葡语的语音识别和合成。语料是你们本地构建 50B 高质量葡语语料，我们免费提供 300B 以上通用语料。约 6 个月出一个正式版本。分工是我们主导训练和语料加工，你们采集本地语料、参与训练和验收。</a:t>
+            </a:r>
+          </a:p>
+          <a:p/>
+          <a:p>
+            <a:r>
+              <a:t>第二项，国家 APP。以讯飞星火 APP 为基线做巴西本地化，面向公众，规划约 1000 万级用户、500 路峰值并发。我们出基线产品和平台，你们定义场景、提供接口、验收和运营。</a:t>
+            </a:r>
+          </a:p>
+          <a:p/>
+          <a:p>
+            <a:r>
+              <a:t>第三项，3 个行业模型。每个面向 1 个边界清晰的固定场景，方向由 RNP 和 MCTI 提出。你们自主训练，我们评估、给路线、做指导。</a:t>
+            </a:r>
+          </a:p>
+          <a:p/>
+          <a:p>
+            <a:r>
+              <a:t>底下两行。这些都跑在三大中心上，是软件平台不是物理设施：语料库构建中心、模型训练中心、AI 应用创新中心。算力 Stage 1 约 280P，Stage 2 合计约 560P。知识转移不是单独一段培训，贯穿全程，你们的人边做边学，完成后可以自主研发 DLM 和其他尺寸的模型。</a:t>
+            </a:r>
+          </a:p>
+          <a:p/>
+          <a:p>
+            <a:r>
+              <a:t>这一页你们可以直接拿去向上汇报。后面每项各展开一页。</a:t>
+            </a:r>
+          </a:p>
+          <a:p/>
+          <a:p>
+            <a:r>
+              <a:t>【材料来源备注】</a:t>
+            </a:r>
+          </a:p>
+          <a:p>
+            <a:r>
               <a:t>一页讲完：交付什么、怎么建、谁做、多大。RNP 可以直接用这一页向上汇报。六个锚点数字：300B、50B+300B、3 个 DLM、1000 万/500 并发、280P/560P、6 个月一版。</a:t>
             </a:r>
           </a:p>
@@ -1222,6 +1484,41 @@
         <p:txBody>
           <a:bodyPr/>
           <a:lstStyle/>
+          <a:p>
+            <a:r>
+              <a:t>你们 5 月问过模型尺寸、语料规模和责任划分，这一页把答复合在一起。</a:t>
+            </a:r>
+          </a:p>
+          <a:p/>
+          <a:p>
+            <a:r>
+              <a:t>模型是约 300B 参数，底座是讯飞星火基础模型。这里说清楚一点：5 月 4 日答复里语料写过 500B 的总目标，5 月 8 日已经拆成两部分，你们本地 50B，我们通用 300B 以上，合计超 350B。今天按这个口径。</a:t>
+            </a:r>
+          </a:p>
+          <a:p/>
+          <a:p>
+            <a:r>
+              <a:t>四步。语料构建：你们采集本地语料，我们提供通用语料并把原始语料加工成可训练的语料库。预训练与后训练：在星火底座上训练，多轮优化迭代。评测：巴西本土基准加国际多语种基准，评测集我们准备、你们审核。交付：主权模型权重归巴西，加基模结构源码、导出格式和 MaaS 平台。</a:t>
+            </a:r>
+          </a:p>
+          <a:p/>
+          <a:p>
+            <a:r>
+              <a:t>对你们意味着三件事：采集 50B 本地语料并落实版权和 LGPD 授权，这是 Stage 1 最重的一项；你们的工程师通过知识转移参与训练；评测方案你们有审核权。</a:t>
+            </a:r>
+          </a:p>
+          <a:p/>
+          <a:p>
+            <a:r>
+              <a:t>规格、语料、评测的细节在后面两页，问到再看。</a:t>
+            </a:r>
+          </a:p>
+          <a:p/>
+          <a:p>
+            <a:r>
+              <a:t>【材料来源备注】</a:t>
+            </a:r>
+          </a:p>
           <a:p>
             <a:r>
               <a:t>规模、周期来自 8/13 答复；语料分工来自 5/4、5/8 答复；底座与权重归属来自 4/29 答复。数字只留锚点，其余在后两页。</a:t>
@@ -1294,6 +1591,32 @@
           <a:lstStyle/>
           <a:p>
             <a:r>
+              <a:t>如被问底座：星火基础模型权重在双方约定范围内受限开放给巴西，参考 Qwen、Llama 的开源范围，这是 4 月答复的口径。</a:t>
+            </a:r>
+          </a:p>
+          <a:p>
+            <a:r>
+              <a:t>如被问算力：训练 210P、语料构建 17.5P、语音 35P，都在 Stage 1 的 280P 里，全部 NPU 池化调度。</a:t>
+            </a:r>
+          </a:p>
+          <a:p>
+            <a:r>
+              <a:t>如被问英伟达：模型可以 ONNX 导出在英伟达上运行，性能低于昇腾，这是 5 月答复。</a:t>
+            </a:r>
+          </a:p>
+          <a:p>
+            <a:r>
+              <a:t>如被问 VLM：不在范围。</a:t>
+            </a:r>
+          </a:p>
+          <a:p/>
+          <a:p>
+            <a:r>
+              <a:t>【材料来源备注】</a:t>
+            </a:r>
+          </a:p>
+          <a:p>
+            <a:r>
               <a:t>8/13 答复 Q2、5/4 答复 Q4 Q5、5/8 答复 Q1、4/29 清单 L4 答复整理。</a:t>
             </a:r>
           </a:p>
@@ -1362,6 +1685,32 @@
         <p:txBody>
           <a:bodyPr/>
           <a:lstStyle/>
+          <a:p>
+            <a:r>
+              <a:t>如被问数据是否出境：全部采集、训练、微调、推理、运维在巴西境内，遵守 LGPD，禁止未授权跨境。你们的本土数据集你们完全控制，我们的通用语料是可用不可见。</a:t>
+            </a:r>
+          </a:p>
+          <a:p>
+            <a:r>
+              <a:t>如被问基准：本土候选 ENEM、BlueX、HateBR、OAB、ASSIN2；国际 M-MMLU、MGSM、Xwinogrande、Belebele、FLORES。达标线在评测方案里定，按 SOW。</a:t>
+            </a:r>
+          </a:p>
+          <a:p>
+            <a:r>
+              <a:t>如被问语料任务量：有监督 20 万条以上，安全对齐 2 万条以上，ASR 1 万小时以上，TTS 100 小时以上。你们采集，我们出规范、做加工和质检。</a:t>
+            </a:r>
+          </a:p>
+          <a:p>
+            <a:r>
+              <a:t>如被问合规组织：建议你们指派一名 LGPD 合规专员和我们对接。</a:t>
+            </a:r>
+          </a:p>
+          <a:p/>
+          <a:p>
+            <a:r>
+              <a:t>【材料来源备注】</a:t>
+            </a:r>
+          </a:p>
           <a:p>
             <a:r>
               <a:t>5/4 答复 Q2、Q3、Q6、Q7 与 4/29 清单答复整理。500B 语料是 5/4 早期口径，会上若被问到按 50B 本地 + 300B 通用说明。</a:t>
@@ -1434,6 +1783,35 @@
           <a:lstStyle/>
           <a:p>
             <a:r>
+              <a:t>你们 5 月问 APP 到底交付什么。答案是：讯飞星火 APP 已在中国上线，作为基线，问答、语音交互、文档理解、内容创作这些能力是现成的。本项目做的是巴西本地化。</a:t>
+            </a:r>
+          </a:p>
+          <a:p/>
+          <a:p>
+            <a:r>
+              <a:t>先放一段演示。（放星火 APP 演示或截图，90 秒，说明这是基线产品的画面，不是本项目版本。）</a:t>
+            </a:r>
+          </a:p>
+          <a:p/>
+          <a:p>
+            <a:r>
+              <a:t>四步里有一步需要你们主导：需求与场景定义。本地化的界面、语音、内容，本地场景适配，和巴西本地系统的集成，都要你们和巴西伙伴一起定义需求和功能。我们做本地化和集成开发，提供 MaaS 平台和推理服务。规模按 1000 万用户、500 并发规划，Stage 2 上线。</a:t>
+            </a:r>
+          </a:p>
+          <a:p/>
+          <a:p>
+            <a:r>
+              <a:t>对你们意味着：要有人来定义场景和功能，要提供本地系统接口和测试数据，运维期由你们主导日常运营。接口清单按 SOW。</a:t>
+            </a:r>
+          </a:p>
+          <a:p/>
+          <a:p>
+            <a:r>
+              <a:t>【材料来源备注】</a:t>
+            </a:r>
+          </a:p>
+          <a:p>
+            <a:r>
               <a:t>基线与本地化来自 5/8 答复 Q4；用户规模与并发来自 8/13 答复 Q2。要有界面或视频。</a:t>
             </a:r>
           </a:p>
@@ -1504,6 +1882,32 @@
           <a:lstStyle/>
           <a:p>
             <a:r>
+              <a:t>如被问程序化访问：MaaS 平台提供 OpenAI 兼容的 REST API、Python、JS、Java 的 SDK、OpenAPI 文档、Docker 和 K8s 部署，带认证、限流、监控、审计。</a:t>
+            </a:r>
+          </a:p>
+          <a:p>
+            <a:r>
+              <a:t>如被问能不能接开源模型：可以，AI 能力中心已兼容 DeepSeek、Qwen 等，另含两次推理迁移适配。</a:t>
+            </a:r>
+          </a:p>
+          <a:p>
+            <a:r>
+              <a:t>如被问其他本地应用：可以由巴西本地企业和讯飞联合开发。</a:t>
+            </a:r>
+          </a:p>
+          <a:p>
+            <a:r>
+              <a:t>性能指标按 SOW。</a:t>
+            </a:r>
+          </a:p>
+          <a:p/>
+          <a:p>
+            <a:r>
+              <a:t>【材料来源备注】</a:t>
+            </a:r>
+          </a:p>
+          <a:p>
+            <a:r>
               <a:t>5/8 答复 Q4、8/13 答复 Q2、5/4 答复 Q11、4/29 清单答复 f 项整理。</a:t>
             </a:r>
           </a:p>
@@ -1572,6 +1976,41 @@
         <p:txBody>
           <a:bodyPr/>
           <a:lstStyle/>
+          <a:p>
+            <a:r>
+              <a:t>这一项和你们的关系最直接，因为方向由你们定、训练由你们做。</a:t>
+            </a:r>
+          </a:p>
+          <a:p/>
+          <a:p>
+            <a:r>
+              <a:t>先说变化：8 月答复里是 1 个，最新方案是 3 个，每个面向 1 个边界清晰的固定场景。实施条件和分工不变，算力和数据规模按 3 个重估后随 SOW 确认。</a:t>
+            </a:r>
+          </a:p>
+          <a:p/>
+          <a:p>
+            <a:r>
+              <a:t>四步。确定场景：RNP 和 MCTI 确定行业、场景、业务目标和使用边界。数据与基座：你们提供或协调授权数据、标注和独立评测数据，基座在 70B 以内，星火或 DeepSeek、Qwen 都可以。训练与评测：你们自主训练，我们辅助并持续咨询，这是我们建议的模式，也是知识转移的核心。验收与演进：基于双方确认的独立评测集验收，实施前签《DLM 场景及技术方案确认书》。</a:t>
+            </a:r>
+          </a:p>
+          <a:p/>
+          <a:p>
+            <a:r>
+              <a:t>我们做可行性评估、基座和路线建议、训练过程的技术指导。你们确定场景、出数据和专家、自己训练、组织验收。讯飞在政务、法律、医疗、教育都做过行业模型，供你们选方向时参考。</a:t>
+            </a:r>
+          </a:p>
+          <a:p/>
+          <a:p>
+            <a:r>
+              <a:t>需要你们的动作：三个方向什么时候能给。</a:t>
+            </a:r>
+          </a:p>
+          <a:p/>
+          <a:p>
+            <a:r>
+              <a:t>【材料来源备注】</a:t>
+            </a:r>
+          </a:p>
           <a:p>
             <a:r>
               <a:t>实施条件与分工来自 8/13 答复 Q1；数量 3 个为最新口径（8/13 为 1 个），会上要说明。</a:t>
@@ -5438,7 +5877,7 @@
 </p:sldMaster>
 </file>
 
-<file path=ppt/slides/slide10.xml><?xml version="1.0" encoding="utf-8"?>
+<file path=ppt/slides/slide1.xml><?xml version="1.0" encoding="utf-8"?>
 <p:sld xmlns:a="http://schemas.openxmlformats.org/drawingml/2006/main" xmlns:p="http://schemas.openxmlformats.org/presentationml/2006/main" xmlns:r="http://schemas.openxmlformats.org/officeDocument/2006/relationships">
   <p:cSld>
     <p:spTree>
@@ -5473,42 +5912,262 @@
                 <a:spcPts val="0"/>
               </a:spcAft>
             </a:pPr>
+          </a:p>
+        </p:txBody>
+      </p:sp>
+      <p:sp>
+        <p:nvSpPr>
+          <p:cNvPr id="3" name="TextBox 2"/>
+          <p:cNvSpPr txBox="1"/>
+          <p:nvPr/>
+        </p:nvSpPr>
+        <p:spPr>
+          <a:xfrm>
+            <a:off x="731520" y="1371600"/>
+            <a:ext cx="7863840" cy="365760"/>
+          </a:xfrm>
+          <a:prstGeom prst="rect">
+            <a:avLst/>
+          </a:prstGeom>
+          <a:noFill/>
+        </p:spPr>
+        <p:txBody>
+          <a:bodyPr wrap="square" lIns="0" tIns="0" rIns="0" bIns="0" anchor="t">
+            <a:noAutofit/>
+          </a:bodyPr>
+          <a:lstStyle/>
+          <a:p>
+            <a:pPr algn="l">
+              <a:lnSpc>
+                <a:spcPct val="115000"/>
+              </a:lnSpc>
+              <a:spcAft>
+                <a:spcPts val="400"/>
+              </a:spcAft>
+            </a:pPr>
             <a:r>
-              <a:rPr sz="2200" b="1">
+              <a:rPr sz="1400" b="1">
+                <a:solidFill>
+                  <a:srgbClr val="666666"/>
+                </a:solidFill>
+                <a:latin typeface="微软雅黑"/>
+                <a:ea typeface="微软雅黑"/>
+              </a:rPr>
+              <a:t>RNP × 科大讯飞 · 技术交流</a:t>
+            </a:r>
+          </a:p>
+        </p:txBody>
+      </p:sp>
+      <p:sp>
+        <p:nvSpPr>
+          <p:cNvPr id="4" name="TextBox 3"/>
+          <p:cNvSpPr txBox="1"/>
+          <p:nvPr/>
+        </p:nvSpPr>
+        <p:spPr>
+          <a:xfrm>
+            <a:off x="731520" y="1828800"/>
+            <a:ext cx="7863840" cy="914400"/>
+          </a:xfrm>
+          <a:prstGeom prst="rect">
+            <a:avLst/>
+          </a:prstGeom>
+          <a:noFill/>
+        </p:spPr>
+        <p:txBody>
+          <a:bodyPr wrap="square" lIns="0" tIns="0" rIns="0" bIns="0" anchor="t">
+            <a:noAutofit/>
+          </a:bodyPr>
+          <a:lstStyle/>
+          <a:p>
+            <a:pPr algn="l">
+              <a:lnSpc>
+                <a:spcPct val="115000"/>
+              </a:lnSpc>
+              <a:spcAft>
+                <a:spcPts val="400"/>
+              </a:spcAft>
+            </a:pPr>
+            <a:r>
+              <a:rPr sz="3400" b="1">
                 <a:solidFill>
                   <a:srgbClr val="C00000"/>
                 </a:solidFill>
                 <a:latin typeface="微软雅黑"/>
                 <a:ea typeface="微软雅黑"/>
               </a:rPr>
-              <a:t>行业模型 DLM：实施条件与数据规格</a:t>
+              <a:t>国家大模型、国家 APP 与行业模型</a:t>
             </a:r>
           </a:p>
         </p:txBody>
       </p:sp>
       <p:sp>
         <p:nvSpPr>
-          <p:cNvPr id="3" name="Rounded Rectangle 2"/>
+          <p:cNvPr id="5" name="TextBox 4"/>
+          <p:cNvSpPr txBox="1"/>
+          <p:nvPr/>
+        </p:nvSpPr>
+        <p:spPr>
+          <a:xfrm>
+            <a:off x="731520" y="2743200"/>
+            <a:ext cx="7863840" cy="548640"/>
+          </a:xfrm>
+          <a:prstGeom prst="rect">
+            <a:avLst/>
+          </a:prstGeom>
+          <a:noFill/>
+        </p:spPr>
+        <p:txBody>
+          <a:bodyPr wrap="square" lIns="0" tIns="0" rIns="0" bIns="0" anchor="t">
+            <a:noAutofit/>
+          </a:bodyPr>
+          <a:lstStyle/>
+          <a:p>
+            <a:pPr algn="l">
+              <a:lnSpc>
+                <a:spcPct val="115000"/>
+              </a:lnSpc>
+              <a:spcAft>
+                <a:spcPts val="400"/>
+              </a:spcAft>
+            </a:pPr>
+            <a:r>
+              <a:rPr sz="2000" b="1">
+                <a:solidFill>
+                  <a:srgbClr val="1D1D1A"/>
+                </a:solidFill>
+                <a:latin typeface="微软雅黑"/>
+                <a:ea typeface="微软雅黑"/>
+              </a:rPr>
+              <a:t>讯飞交付什么、双方怎么分工、能力如何转移</a:t>
+            </a:r>
+          </a:p>
+        </p:txBody>
+      </p:sp>
+      <p:sp>
+        <p:nvSpPr>
+          <p:cNvPr id="6" name="TextBox 5"/>
+          <p:cNvSpPr txBox="1"/>
+          <p:nvPr/>
+        </p:nvSpPr>
+        <p:spPr>
+          <a:xfrm>
+            <a:off x="731520" y="3749039"/>
+            <a:ext cx="7863840" cy="1188720"/>
+          </a:xfrm>
+          <a:prstGeom prst="rect">
+            <a:avLst/>
+          </a:prstGeom>
+          <a:noFill/>
+        </p:spPr>
+        <p:txBody>
+          <a:bodyPr wrap="square" lIns="0" tIns="0" rIns="0" bIns="0" anchor="t">
+            <a:noAutofit/>
+          </a:bodyPr>
+          <a:lstStyle/>
+          <a:p>
+            <a:pPr algn="l">
+              <a:lnSpc>
+                <a:spcPct val="135000"/>
+              </a:lnSpc>
+              <a:spcAft>
+                <a:spcPts val="400"/>
+              </a:spcAft>
+            </a:pPr>
+            <a:r>
+              <a:rPr sz="1300" b="0">
+                <a:solidFill>
+                  <a:srgbClr val="333333"/>
+                </a:solidFill>
+                <a:latin typeface="微软雅黑"/>
+                <a:ea typeface="微软雅黑"/>
+              </a:rPr>
+              <a:t>里约热内卢 · </a:t>
+            </a:r>
+            <a:r>
+              <a:rPr sz="1300" b="0">
+                <a:solidFill>
+                  <a:srgbClr val="0070C0"/>
+                </a:solidFill>
+                <a:latin typeface="微软雅黑"/>
+                <a:ea typeface="微软雅黑"/>
+              </a:rPr>
+              <a:t>示例：2026 年 9 月 9 日</a:t>
+            </a:r>
+          </a:p>
+          <a:p>
+            <a:pPr algn="l">
+              <a:lnSpc>
+                <a:spcPct val="135000"/>
+              </a:lnSpc>
+              <a:spcAft>
+                <a:spcPts val="400"/>
+              </a:spcAft>
+            </a:pPr>
+            <a:r>
+              <a:rPr sz="1300" b="0">
+                <a:solidFill>
+                  <a:srgbClr val="333333"/>
+                </a:solidFill>
+                <a:latin typeface="微软雅黑"/>
+                <a:ea typeface="微软雅黑"/>
+              </a:rPr>
+              <a:t>汇报：科大讯飞 </a:t>
+            </a:r>
+            <a:r>
+              <a:rPr sz="1300" b="0">
+                <a:solidFill>
+                  <a:srgbClr val="0070C0"/>
+                </a:solidFill>
+                <a:latin typeface="微软雅黑"/>
+                <a:ea typeface="微软雅黑"/>
+              </a:rPr>
+              <a:t>示例：陈浩、方案架构师</a:t>
+            </a:r>
+          </a:p>
+          <a:p>
+            <a:pPr algn="l">
+              <a:lnSpc>
+                <a:spcPct val="135000"/>
+              </a:lnSpc>
+              <a:spcAft>
+                <a:spcPts val="400"/>
+              </a:spcAft>
+            </a:pPr>
+            <a:r>
+              <a:rPr sz="1300" b="0">
+                <a:solidFill>
+                  <a:srgbClr val="333333"/>
+                </a:solidFill>
+                <a:latin typeface="微软雅黑"/>
+                <a:ea typeface="微软雅黑"/>
+              </a:rPr>
+              <a:t>讨论稿，内容以 SOW、报价与技术方案为准；第 2 页一页看全</a:t>
+            </a:r>
+          </a:p>
+        </p:txBody>
+      </p:sp>
+      <p:sp>
+        <p:nvSpPr>
+          <p:cNvPr id="7" name="Rounded Rectangle 6"/>
           <p:cNvSpPr/>
           <p:nvPr/>
         </p:nvSpPr>
         <p:spPr>
           <a:xfrm>
-            <a:off x="9902952" y="274320"/>
-            <a:ext cx="1828800" cy="274320"/>
+            <a:off x="731520" y="5120640"/>
+            <a:ext cx="7863840" cy="868680"/>
           </a:xfrm>
           <a:prstGeom prst="roundRect">
             <a:avLst>
-              <a:gd name="adj" fmla="val 50000"/>
+              <a:gd name="adj" fmla="val 4000"/>
             </a:avLst>
           </a:prstGeom>
           <a:solidFill>
-            <a:srgbClr val="EFEFEF"/>
+            <a:srgbClr val="E8F0FA"/>
           </a:solidFill>
-          <a:ln w="9525">
-            <a:solidFill>
-              <a:srgbClr val="D9D9D9"/>
-            </a:solidFill>
+          <a:ln>
+            <a:noFill/>
           </a:ln>
           <a:effectLst/>
         </p:spPr>
@@ -5527,7 +6186,180 @@
           </a:fontRef>
         </p:style>
         <p:txBody>
-          <a:bodyPr rtlCol="0" anchor="ctr" wrap="square" lIns="36576" tIns="0" rIns="36576" bIns="0">
+          <a:bodyPr rtlCol="0" anchor="ctr"/>
+          <a:lstStyle/>
+          <a:p>
+            <a:pPr algn="ctr"/>
+          </a:p>
+        </p:txBody>
+      </p:sp>
+      <p:sp>
+        <p:nvSpPr>
+          <p:cNvPr id="8" name="TextBox 7"/>
+          <p:cNvSpPr txBox="1"/>
+          <p:nvPr/>
+        </p:nvSpPr>
+        <p:spPr>
+          <a:xfrm>
+            <a:off x="868680" y="5120640"/>
+            <a:ext cx="7589520" cy="868680"/>
+          </a:xfrm>
+          <a:prstGeom prst="rect">
+            <a:avLst/>
+          </a:prstGeom>
+          <a:noFill/>
+        </p:spPr>
+        <p:txBody>
+          <a:bodyPr wrap="square" lIns="0" tIns="0" rIns="0" bIns="0" anchor="ctr">
+            <a:noAutofit/>
+          </a:bodyPr>
+          <a:lstStyle/>
+          <a:p>
+            <a:pPr algn="l">
+              <a:lnSpc>
+                <a:spcPct val="115000"/>
+              </a:lnSpc>
+              <a:spcAft>
+                <a:spcPts val="200"/>
+              </a:spcAft>
+            </a:pPr>
+            <a:r>
+              <a:rPr sz="1100" b="0">
+                <a:solidFill>
+                  <a:srgbClr val="333333"/>
+                </a:solidFill>
+                <a:latin typeface="微软雅黑"/>
+                <a:ea typeface="微软雅黑"/>
+              </a:rPr>
+              <a:t>图例：</a:t>
+            </a:r>
+            <a:r>
+              <a:rPr sz="1100" b="0">
+                <a:solidFill>
+                  <a:srgbClr val="0070C0"/>
+                </a:solidFill>
+                <a:latin typeface="微软雅黑"/>
+                <a:ea typeface="微软雅黑"/>
+              </a:rPr>
+              <a:t>蓝色文字</a:t>
+            </a:r>
+            <a:r>
+              <a:rPr sz="1100" b="0">
+                <a:solidFill>
+                  <a:srgbClr val="333333"/>
+                </a:solidFill>
+                <a:latin typeface="微软雅黑"/>
+                <a:ea typeface="微软雅黑"/>
+              </a:rPr>
+              <a:t> = 示例或待核实，需按 SOW、报价与技术方案替换</a:t>
+            </a:r>
+          </a:p>
+          <a:p>
+            <a:pPr algn="l">
+              <a:lnSpc>
+                <a:spcPct val="115000"/>
+              </a:lnSpc>
+              <a:spcAft>
+                <a:spcPts val="200"/>
+              </a:spcAft>
+            </a:pPr>
+            <a:r>
+              <a:rPr sz="1100" b="0">
+                <a:solidFill>
+                  <a:srgbClr val="333333"/>
+                </a:solidFill>
+                <a:latin typeface="微软雅黑"/>
+                <a:ea typeface="微软雅黑"/>
+              </a:rPr>
+              <a:t>黑色文字与讯飞给 RNP 的四份书面答复一致（4/29 清单答复、5/4、5/8、8/13 技术答复）；DLM 数量按最新口径</a:t>
+            </a:r>
+          </a:p>
+        </p:txBody>
+      </p:sp>
+      <p:sp>
+        <p:nvSpPr>
+          <p:cNvPr id="9" name="Rounded Rectangle 8"/>
+          <p:cNvSpPr/>
+          <p:nvPr/>
+        </p:nvSpPr>
+        <p:spPr>
+          <a:xfrm>
+            <a:off x="9052560" y="1737360"/>
+            <a:ext cx="2651760" cy="822960"/>
+          </a:xfrm>
+          <a:prstGeom prst="roundRect">
+            <a:avLst>
+              <a:gd name="adj" fmla="val 4000"/>
+            </a:avLst>
+          </a:prstGeom>
+          <a:solidFill>
+            <a:srgbClr val="F2F2F2"/>
+          </a:solidFill>
+          <a:ln>
+            <a:noFill/>
+          </a:ln>
+          <a:effectLst/>
+        </p:spPr>
+        <p:style>
+          <a:lnRef idx="1">
+            <a:schemeClr val="accent1"/>
+          </a:lnRef>
+          <a:fillRef idx="3">
+            <a:schemeClr val="accent1"/>
+          </a:fillRef>
+          <a:effectRef idx="2">
+            <a:schemeClr val="accent1"/>
+          </a:effectRef>
+          <a:fontRef idx="minor">
+            <a:schemeClr val="lt1"/>
+          </a:fontRef>
+        </p:style>
+        <p:txBody>
+          <a:bodyPr rtlCol="0" anchor="ctr"/>
+          <a:lstStyle/>
+          <a:p>
+            <a:pPr algn="ctr"/>
+          </a:p>
+        </p:txBody>
+      </p:sp>
+      <p:sp>
+        <p:nvSpPr>
+          <p:cNvPr id="10" name="Oval 9"/>
+          <p:cNvSpPr/>
+          <p:nvPr/>
+        </p:nvSpPr>
+        <p:spPr>
+          <a:xfrm>
+            <a:off x="9235440" y="1975104"/>
+            <a:ext cx="347472" cy="347472"/>
+          </a:xfrm>
+          <a:prstGeom prst="ellipse">
+            <a:avLst/>
+          </a:prstGeom>
+          <a:solidFill>
+            <a:srgbClr val="E9002F"/>
+          </a:solidFill>
+          <a:ln>
+            <a:noFill/>
+          </a:ln>
+          <a:effectLst/>
+        </p:spPr>
+        <p:style>
+          <a:lnRef idx="1">
+            <a:schemeClr val="accent1"/>
+          </a:lnRef>
+          <a:fillRef idx="3">
+            <a:schemeClr val="accent1"/>
+          </a:fillRef>
+          <a:effectRef idx="2">
+            <a:schemeClr val="accent1"/>
+          </a:effectRef>
+          <a:fontRef idx="minor">
+            <a:schemeClr val="lt1"/>
+          </a:fontRef>
+        </p:style>
+        <p:txBody>
+          <a:bodyPr rtlCol="0" anchor="ctr" wrap="square" lIns="0" tIns="0" rIns="0" bIns="0">
             <a:noAutofit/>
           </a:bodyPr>
           <a:lstStyle/>
@@ -5541,1805 +6373,28 @@
               </a:spcAft>
             </a:pPr>
             <a:r>
-              <a:rPr sz="950" b="1">
+              <a:rPr sz="1100" b="1">
                 <a:solidFill>
-                  <a:srgbClr val="1D1D1A"/>
+                  <a:srgbClr val="FFFFFF"/>
                 </a:solidFill>
                 <a:latin typeface="微软雅黑"/>
                 <a:ea typeface="微软雅黑"/>
               </a:rPr>
-              <a:t>详情 · 按需展开</a:t>
+              <a:t>1</a:t>
             </a:r>
           </a:p>
         </p:txBody>
       </p:sp>
-      <p:graphicFrame>
-        <p:nvGraphicFramePr>
-          <p:cNvPr id="4" name="Table 3"/>
-          <p:cNvGraphicFramePr>
-            <a:graphicFrameLocks noGrp="1"/>
-          </p:cNvGraphicFramePr>
-          <p:nvPr/>
-        </p:nvGraphicFramePr>
-        <p:xfrm>
-          <a:off x="457200" y="1051560"/>
-          <a:ext cx="11274552" cy="4315968"/>
-        </p:xfrm>
-        <a:graphic>
-          <a:graphicData uri="http://schemas.openxmlformats.org/drawingml/2006/table">
-            <a:tbl>
-              <a:tblPr firstRow="0" bandRow="0">
-                <a:tableStyleId>{2D5ABB26-0587-4C30-8999-92F81FD0307C}</a:tableStyleId>
-              </a:tblPr>
-              <a:tblGrid>
-                <a:gridCol w="1920240"/>
-                <a:gridCol w="7863840"/>
-                <a:gridCol w="1490472"/>
-              </a:tblGrid>
-              <a:tr h="365760">
-                <a:tc>
-                  <a:txBody>
-                    <a:bodyPr wrap="square" lIns="73152" tIns="18288" rIns="73152" bIns="18288" anchor="ctr">
-                      <a:noAutofit/>
-                    </a:bodyPr>
-                    <a:lstStyle/>
-                    <a:p>
-                      <a:pPr algn="l">
-                        <a:lnSpc>
-                          <a:spcPct val="115000"/>
-                        </a:lnSpc>
-                        <a:spcAft>
-                          <a:spcPts val="0"/>
-                        </a:spcAft>
-                      </a:pPr>
-                      <a:r>
-                        <a:rPr sz="1100" b="1">
-                          <a:solidFill>
-                            <a:srgbClr val="1D1D1A"/>
-                          </a:solidFill>
-                          <a:latin typeface="微软雅黑"/>
-                          <a:ea typeface="微软雅黑"/>
-                        </a:rPr>
-                        <a:t>项目</a:t>
-                      </a:r>
-                    </a:p>
-                  </a:txBody>
-                  <a:tcPr anchor="ctr">
-                    <a:lnL w="6350" cap="flat" cmpd="sng" algn="ctr">
-                      <a:solidFill>
-                        <a:srgbClr val="D9D9D9"/>
-                      </a:solidFill>
-                      <a:prstDash val="solid"/>
-                    </a:lnL>
-                    <a:lnR w="6350" cap="flat" cmpd="sng" algn="ctr">
-                      <a:solidFill>
-                        <a:srgbClr val="D9D9D9"/>
-                      </a:solidFill>
-                      <a:prstDash val="solid"/>
-                    </a:lnR>
-                    <a:lnT w="6350" cap="flat" cmpd="sng" algn="ctr">
-                      <a:solidFill>
-                        <a:srgbClr val="D9D9D9"/>
-                      </a:solidFill>
-                      <a:prstDash val="solid"/>
-                    </a:lnT>
-                    <a:lnB w="6350" cap="flat" cmpd="sng" algn="ctr">
-                      <a:solidFill>
-                        <a:srgbClr val="D9D9D9"/>
-                      </a:solidFill>
-                      <a:prstDash val="solid"/>
-                    </a:lnB>
-                    <a:solidFill>
-                      <a:srgbClr val="E6E6E6"/>
-                    </a:solidFill>
-                  </a:tcPr>
-                </a:tc>
-                <a:tc>
-                  <a:txBody>
-                    <a:bodyPr wrap="square" lIns="73152" tIns="18288" rIns="73152" bIns="18288" anchor="ctr">
-                      <a:noAutofit/>
-                    </a:bodyPr>
-                    <a:lstStyle/>
-                    <a:p>
-                      <a:pPr algn="l">
-                        <a:lnSpc>
-                          <a:spcPct val="115000"/>
-                        </a:lnSpc>
-                        <a:spcAft>
-                          <a:spcPts val="0"/>
-                        </a:spcAft>
-                      </a:pPr>
-                      <a:r>
-                        <a:rPr sz="1100" b="1">
-                          <a:solidFill>
-                            <a:srgbClr val="1D1D1A"/>
-                          </a:solidFill>
-                          <a:latin typeface="微软雅黑"/>
-                          <a:ea typeface="微软雅黑"/>
-                        </a:rPr>
-                        <a:t>内容</a:t>
-                      </a:r>
-                    </a:p>
-                  </a:txBody>
-                  <a:tcPr anchor="ctr">
-                    <a:lnL w="6350" cap="flat" cmpd="sng" algn="ctr">
-                      <a:solidFill>
-                        <a:srgbClr val="D9D9D9"/>
-                      </a:solidFill>
-                      <a:prstDash val="solid"/>
-                    </a:lnL>
-                    <a:lnR w="6350" cap="flat" cmpd="sng" algn="ctr">
-                      <a:solidFill>
-                        <a:srgbClr val="D9D9D9"/>
-                      </a:solidFill>
-                      <a:prstDash val="solid"/>
-                    </a:lnR>
-                    <a:lnT w="6350" cap="flat" cmpd="sng" algn="ctr">
-                      <a:solidFill>
-                        <a:srgbClr val="D9D9D9"/>
-                      </a:solidFill>
-                      <a:prstDash val="solid"/>
-                    </a:lnT>
-                    <a:lnB w="6350" cap="flat" cmpd="sng" algn="ctr">
-                      <a:solidFill>
-                        <a:srgbClr val="D9D9D9"/>
-                      </a:solidFill>
-                      <a:prstDash val="solid"/>
-                    </a:lnB>
-                    <a:solidFill>
-                      <a:srgbClr val="E6E6E6"/>
-                    </a:solidFill>
-                  </a:tcPr>
-                </a:tc>
-                <a:tc>
-                  <a:txBody>
-                    <a:bodyPr wrap="square" lIns="73152" tIns="18288" rIns="73152" bIns="18288" anchor="ctr">
-                      <a:noAutofit/>
-                    </a:bodyPr>
-                    <a:lstStyle/>
-                    <a:p>
-                      <a:pPr algn="l">
-                        <a:lnSpc>
-                          <a:spcPct val="115000"/>
-                        </a:lnSpc>
-                        <a:spcAft>
-                          <a:spcPts val="0"/>
-                        </a:spcAft>
-                      </a:pPr>
-                      <a:r>
-                        <a:rPr sz="1100" b="1">
-                          <a:solidFill>
-                            <a:srgbClr val="1D1D1A"/>
-                          </a:solidFill>
-                          <a:latin typeface="微软雅黑"/>
-                          <a:ea typeface="微软雅黑"/>
-                        </a:rPr>
-                        <a:t>来源</a:t>
-                      </a:r>
-                    </a:p>
-                  </a:txBody>
-                  <a:tcPr anchor="ctr">
-                    <a:lnL w="6350" cap="flat" cmpd="sng" algn="ctr">
-                      <a:solidFill>
-                        <a:srgbClr val="D9D9D9"/>
-                      </a:solidFill>
-                      <a:prstDash val="solid"/>
-                    </a:lnL>
-                    <a:lnR w="6350" cap="flat" cmpd="sng" algn="ctr">
-                      <a:solidFill>
-                        <a:srgbClr val="D9D9D9"/>
-                      </a:solidFill>
-                      <a:prstDash val="solid"/>
-                    </a:lnR>
-                    <a:lnT w="6350" cap="flat" cmpd="sng" algn="ctr">
-                      <a:solidFill>
-                        <a:srgbClr val="D9D9D9"/>
-                      </a:solidFill>
-                      <a:prstDash val="solid"/>
-                    </a:lnT>
-                    <a:lnB w="6350" cap="flat" cmpd="sng" algn="ctr">
-                      <a:solidFill>
-                        <a:srgbClr val="D9D9D9"/>
-                      </a:solidFill>
-                      <a:prstDash val="solid"/>
-                    </a:lnB>
-                    <a:solidFill>
-                      <a:srgbClr val="E6E6E6"/>
-                    </a:solidFill>
-                  </a:tcPr>
-                </a:tc>
-              </a:tr>
-              <a:tr h="438912">
-                <a:tc>
-                  <a:txBody>
-                    <a:bodyPr wrap="square" lIns="73152" tIns="36576" rIns="73152" bIns="36576" anchor="ctr">
-                      <a:noAutofit/>
-                    </a:bodyPr>
-                    <a:lstStyle/>
-                    <a:p>
-                      <a:pPr algn="l">
-                        <a:lnSpc>
-                          <a:spcPct val="110000"/>
-                        </a:lnSpc>
-                        <a:spcAft>
-                          <a:spcPts val="100"/>
-                        </a:spcAft>
-                      </a:pPr>
-                      <a:r>
-                        <a:rPr sz="1050" b="1">
-                          <a:solidFill>
-                            <a:srgbClr val="1D1D1A"/>
-                          </a:solidFill>
-                          <a:latin typeface="微软雅黑"/>
-                          <a:ea typeface="微软雅黑"/>
-                        </a:rPr>
-                        <a:t>数量与范围</a:t>
-                      </a:r>
-                    </a:p>
-                  </a:txBody>
-                  <a:tcPr anchor="ctr">
-                    <a:lnL w="6350" cap="flat" cmpd="sng" algn="ctr">
-                      <a:solidFill>
-                        <a:srgbClr val="D9D9D9"/>
-                      </a:solidFill>
-                      <a:prstDash val="solid"/>
-                    </a:lnL>
-                    <a:lnR w="6350" cap="flat" cmpd="sng" algn="ctr">
-                      <a:solidFill>
-                        <a:srgbClr val="D9D9D9"/>
-                      </a:solidFill>
-                      <a:prstDash val="solid"/>
-                    </a:lnR>
-                    <a:lnT w="6350" cap="flat" cmpd="sng" algn="ctr">
-                      <a:solidFill>
-                        <a:srgbClr val="D9D9D9"/>
-                      </a:solidFill>
-                      <a:prstDash val="solid"/>
-                    </a:lnT>
-                    <a:lnB w="6350" cap="flat" cmpd="sng" algn="ctr">
-                      <a:solidFill>
-                        <a:srgbClr val="D9D9D9"/>
-                      </a:solidFill>
-                      <a:prstDash val="solid"/>
-                    </a:lnB>
-                    <a:solidFill>
-                      <a:srgbClr val="FFFFFF"/>
-                    </a:solidFill>
-                  </a:tcPr>
-                </a:tc>
-                <a:tc>
-                  <a:txBody>
-                    <a:bodyPr wrap="square" lIns="73152" tIns="36576" rIns="73152" bIns="36576" anchor="ctr">
-                      <a:noAutofit/>
-                    </a:bodyPr>
-                    <a:lstStyle/>
-                    <a:p>
-                      <a:pPr algn="l">
-                        <a:lnSpc>
-                          <a:spcPct val="110000"/>
-                        </a:lnSpc>
-                        <a:spcAft>
-                          <a:spcPts val="100"/>
-                        </a:spcAft>
-                      </a:pPr>
-                      <a:r>
-                        <a:rPr sz="1050" b="0">
-                          <a:solidFill>
-                            <a:srgbClr val="333333"/>
-                          </a:solidFill>
-                          <a:latin typeface="微软雅黑"/>
-                          <a:ea typeface="微软雅黑"/>
-                        </a:rPr>
-                        <a:t>3 个行业模型；每个面向 1 个边界清晰的固定业务场景，含业务目标、目标用户、输入输出与使用边界</a:t>
-                      </a:r>
-                    </a:p>
-                  </a:txBody>
-                  <a:tcPr anchor="ctr">
-                    <a:lnL w="6350" cap="flat" cmpd="sng" algn="ctr">
-                      <a:solidFill>
-                        <a:srgbClr val="D9D9D9"/>
-                      </a:solidFill>
-                      <a:prstDash val="solid"/>
-                    </a:lnL>
-                    <a:lnR w="6350" cap="flat" cmpd="sng" algn="ctr">
-                      <a:solidFill>
-                        <a:srgbClr val="D9D9D9"/>
-                      </a:solidFill>
-                      <a:prstDash val="solid"/>
-                    </a:lnR>
-                    <a:lnT w="6350" cap="flat" cmpd="sng" algn="ctr">
-                      <a:solidFill>
-                        <a:srgbClr val="D9D9D9"/>
-                      </a:solidFill>
-                      <a:prstDash val="solid"/>
-                    </a:lnT>
-                    <a:lnB w="6350" cap="flat" cmpd="sng" algn="ctr">
-                      <a:solidFill>
-                        <a:srgbClr val="D9D9D9"/>
-                      </a:solidFill>
-                      <a:prstDash val="solid"/>
-                    </a:lnB>
-                    <a:solidFill>
-                      <a:srgbClr val="FFFFFF"/>
-                    </a:solidFill>
-                  </a:tcPr>
-                </a:tc>
-                <a:tc>
-                  <a:txBody>
-                    <a:bodyPr wrap="square" lIns="73152" tIns="36576" rIns="73152" bIns="36576" anchor="ctr">
-                      <a:noAutofit/>
-                    </a:bodyPr>
-                    <a:lstStyle/>
-                    <a:p>
-                      <a:pPr algn="l">
-                        <a:lnSpc>
-                          <a:spcPct val="110000"/>
-                        </a:lnSpc>
-                        <a:spcAft>
-                          <a:spcPts val="100"/>
-                        </a:spcAft>
-                      </a:pPr>
-                      <a:r>
-                        <a:rPr sz="1050" b="0">
-                          <a:solidFill>
-                            <a:srgbClr val="333333"/>
-                          </a:solidFill>
-                          <a:latin typeface="微软雅黑"/>
-                          <a:ea typeface="微软雅黑"/>
-                        </a:rPr>
-                        <a:t>最新口径（8/13 为 1 个）</a:t>
-                      </a:r>
-                    </a:p>
-                  </a:txBody>
-                  <a:tcPr anchor="ctr">
-                    <a:lnL w="6350" cap="flat" cmpd="sng" algn="ctr">
-                      <a:solidFill>
-                        <a:srgbClr val="D9D9D9"/>
-                      </a:solidFill>
-                      <a:prstDash val="solid"/>
-                    </a:lnL>
-                    <a:lnR w="6350" cap="flat" cmpd="sng" algn="ctr">
-                      <a:solidFill>
-                        <a:srgbClr val="D9D9D9"/>
-                      </a:solidFill>
-                      <a:prstDash val="solid"/>
-                    </a:lnR>
-                    <a:lnT w="6350" cap="flat" cmpd="sng" algn="ctr">
-                      <a:solidFill>
-                        <a:srgbClr val="D9D9D9"/>
-                      </a:solidFill>
-                      <a:prstDash val="solid"/>
-                    </a:lnT>
-                    <a:lnB w="6350" cap="flat" cmpd="sng" algn="ctr">
-                      <a:solidFill>
-                        <a:srgbClr val="D9D9D9"/>
-                      </a:solidFill>
-                      <a:prstDash val="solid"/>
-                    </a:lnB>
-                    <a:solidFill>
-                      <a:srgbClr val="FFFFFF"/>
-                    </a:solidFill>
-                  </a:tcPr>
-                </a:tc>
-              </a:tr>
-              <a:tr h="438912">
-                <a:tc>
-                  <a:txBody>
-                    <a:bodyPr wrap="square" lIns="73152" tIns="36576" rIns="73152" bIns="36576" anchor="ctr">
-                      <a:noAutofit/>
-                    </a:bodyPr>
-                    <a:lstStyle/>
-                    <a:p>
-                      <a:pPr algn="l">
-                        <a:lnSpc>
-                          <a:spcPct val="110000"/>
-                        </a:lnSpc>
-                        <a:spcAft>
-                          <a:spcPts val="100"/>
-                        </a:spcAft>
-                      </a:pPr>
-                      <a:r>
-                        <a:rPr sz="1050" b="1">
-                          <a:solidFill>
-                            <a:srgbClr val="1D1D1A"/>
-                          </a:solidFill>
-                          <a:latin typeface="微软雅黑"/>
-                          <a:ea typeface="微软雅黑"/>
-                        </a:rPr>
-                        <a:t>基础模型</a:t>
-                      </a:r>
-                    </a:p>
-                  </a:txBody>
-                  <a:tcPr anchor="ctr">
-                    <a:lnL w="6350" cap="flat" cmpd="sng" algn="ctr">
-                      <a:solidFill>
-                        <a:srgbClr val="D9D9D9"/>
-                      </a:solidFill>
-                      <a:prstDash val="solid"/>
-                    </a:lnL>
-                    <a:lnR w="6350" cap="flat" cmpd="sng" algn="ctr">
-                      <a:solidFill>
-                        <a:srgbClr val="D9D9D9"/>
-                      </a:solidFill>
-                      <a:prstDash val="solid"/>
-                    </a:lnR>
-                    <a:lnT w="6350" cap="flat" cmpd="sng" algn="ctr">
-                      <a:solidFill>
-                        <a:srgbClr val="D9D9D9"/>
-                      </a:solidFill>
-                      <a:prstDash val="solid"/>
-                    </a:lnT>
-                    <a:lnB w="6350" cap="flat" cmpd="sng" algn="ctr">
-                      <a:solidFill>
-                        <a:srgbClr val="D9D9D9"/>
-                      </a:solidFill>
-                      <a:prstDash val="solid"/>
-                    </a:lnB>
-                    <a:solidFill>
-                      <a:srgbClr val="FFFFFF"/>
-                    </a:solidFill>
-                  </a:tcPr>
-                </a:tc>
-                <a:tc>
-                  <a:txBody>
-                    <a:bodyPr wrap="square" lIns="73152" tIns="36576" rIns="73152" bIns="36576" anchor="ctr">
-                      <a:noAutofit/>
-                    </a:bodyPr>
-                    <a:lstStyle/>
-                    <a:p>
-                      <a:pPr algn="l">
-                        <a:lnSpc>
-                          <a:spcPct val="110000"/>
-                        </a:lnSpc>
-                        <a:spcAft>
-                          <a:spcPts val="100"/>
-                        </a:spcAft>
-                      </a:pPr>
-                      <a:r>
-                        <a:rPr sz="1050" b="0">
-                          <a:solidFill>
-                            <a:srgbClr val="333333"/>
-                          </a:solidFill>
-                          <a:latin typeface="微软雅黑"/>
-                          <a:ea typeface="微软雅黑"/>
-                        </a:rPr>
-                        <a:t>70B 参数以内的星火模型或主流开源模型（DeepSeek、Qwen）；采用第三方开源基座时 RNP 需确保使用、修改及再训练权利</a:t>
-                      </a:r>
-                    </a:p>
-                  </a:txBody>
-                  <a:tcPr anchor="ctr">
-                    <a:lnL w="6350" cap="flat" cmpd="sng" algn="ctr">
-                      <a:solidFill>
-                        <a:srgbClr val="D9D9D9"/>
-                      </a:solidFill>
-                      <a:prstDash val="solid"/>
-                    </a:lnL>
-                    <a:lnR w="6350" cap="flat" cmpd="sng" algn="ctr">
-                      <a:solidFill>
-                        <a:srgbClr val="D9D9D9"/>
-                      </a:solidFill>
-                      <a:prstDash val="solid"/>
-                    </a:lnR>
-                    <a:lnT w="6350" cap="flat" cmpd="sng" algn="ctr">
-                      <a:solidFill>
-                        <a:srgbClr val="D9D9D9"/>
-                      </a:solidFill>
-                      <a:prstDash val="solid"/>
-                    </a:lnT>
-                    <a:lnB w="6350" cap="flat" cmpd="sng" algn="ctr">
-                      <a:solidFill>
-                        <a:srgbClr val="D9D9D9"/>
-                      </a:solidFill>
-                      <a:prstDash val="solid"/>
-                    </a:lnB>
-                    <a:solidFill>
-                      <a:srgbClr val="FFFFFF"/>
-                    </a:solidFill>
-                  </a:tcPr>
-                </a:tc>
-                <a:tc>
-                  <a:txBody>
-                    <a:bodyPr wrap="square" lIns="73152" tIns="36576" rIns="73152" bIns="36576" anchor="ctr">
-                      <a:noAutofit/>
-                    </a:bodyPr>
-                    <a:lstStyle/>
-                    <a:p>
-                      <a:pPr algn="l">
-                        <a:lnSpc>
-                          <a:spcPct val="110000"/>
-                        </a:lnSpc>
-                        <a:spcAft>
-                          <a:spcPts val="100"/>
-                        </a:spcAft>
-                      </a:pPr>
-                      <a:r>
-                        <a:rPr sz="1050" b="0">
-                          <a:solidFill>
-                            <a:srgbClr val="333333"/>
-                          </a:solidFill>
-                          <a:latin typeface="微软雅黑"/>
-                          <a:ea typeface="微软雅黑"/>
-                        </a:rPr>
-                        <a:t>8/13 答复</a:t>
-                      </a:r>
-                    </a:p>
-                  </a:txBody>
-                  <a:tcPr anchor="ctr">
-                    <a:lnL w="6350" cap="flat" cmpd="sng" algn="ctr">
-                      <a:solidFill>
-                        <a:srgbClr val="D9D9D9"/>
-                      </a:solidFill>
-                      <a:prstDash val="solid"/>
-                    </a:lnL>
-                    <a:lnR w="6350" cap="flat" cmpd="sng" algn="ctr">
-                      <a:solidFill>
-                        <a:srgbClr val="D9D9D9"/>
-                      </a:solidFill>
-                      <a:prstDash val="solid"/>
-                    </a:lnR>
-                    <a:lnT w="6350" cap="flat" cmpd="sng" algn="ctr">
-                      <a:solidFill>
-                        <a:srgbClr val="D9D9D9"/>
-                      </a:solidFill>
-                      <a:prstDash val="solid"/>
-                    </a:lnT>
-                    <a:lnB w="6350" cap="flat" cmpd="sng" algn="ctr">
-                      <a:solidFill>
-                        <a:srgbClr val="D9D9D9"/>
-                      </a:solidFill>
-                      <a:prstDash val="solid"/>
-                    </a:lnB>
-                    <a:solidFill>
-                      <a:srgbClr val="FFFFFF"/>
-                    </a:solidFill>
-                  </a:tcPr>
-                </a:tc>
-              </a:tr>
-              <a:tr h="438912">
-                <a:tc>
-                  <a:txBody>
-                    <a:bodyPr wrap="square" lIns="73152" tIns="36576" rIns="73152" bIns="36576" anchor="ctr">
-                      <a:noAutofit/>
-                    </a:bodyPr>
-                    <a:lstStyle/>
-                    <a:p>
-                      <a:pPr algn="l">
-                        <a:lnSpc>
-                          <a:spcPct val="110000"/>
-                        </a:lnSpc>
-                        <a:spcAft>
-                          <a:spcPts val="100"/>
-                        </a:spcAft>
-                      </a:pPr>
-                      <a:r>
-                        <a:rPr sz="1050" b="1">
-                          <a:solidFill>
-                            <a:srgbClr val="1D1D1A"/>
-                          </a:solidFill>
-                          <a:latin typeface="微软雅黑"/>
-                          <a:ea typeface="微软雅黑"/>
-                        </a:rPr>
-                        <a:t>数据规模参考</a:t>
-                      </a:r>
-                    </a:p>
-                  </a:txBody>
-                  <a:tcPr anchor="ctr">
-                    <a:lnL w="6350" cap="flat" cmpd="sng" algn="ctr">
-                      <a:solidFill>
-                        <a:srgbClr val="D9D9D9"/>
-                      </a:solidFill>
-                      <a:prstDash val="solid"/>
-                    </a:lnL>
-                    <a:lnR w="6350" cap="flat" cmpd="sng" algn="ctr">
-                      <a:solidFill>
-                        <a:srgbClr val="D9D9D9"/>
-                      </a:solidFill>
-                      <a:prstDash val="solid"/>
-                    </a:lnR>
-                    <a:lnT w="6350" cap="flat" cmpd="sng" algn="ctr">
-                      <a:solidFill>
-                        <a:srgbClr val="D9D9D9"/>
-                      </a:solidFill>
-                      <a:prstDash val="solid"/>
-                    </a:lnT>
-                    <a:lnB w="6350" cap="flat" cmpd="sng" algn="ctr">
-                      <a:solidFill>
-                        <a:srgbClr val="D9D9D9"/>
-                      </a:solidFill>
-                      <a:prstDash val="solid"/>
-                    </a:lnB>
-                    <a:solidFill>
-                      <a:srgbClr val="FFFFFF"/>
-                    </a:solidFill>
-                  </a:tcPr>
-                </a:tc>
-                <a:tc>
-                  <a:txBody>
-                    <a:bodyPr wrap="square" lIns="73152" tIns="36576" rIns="73152" bIns="36576" anchor="ctr">
-                      <a:noAutofit/>
-                    </a:bodyPr>
-                    <a:lstStyle/>
-                    <a:p>
-                      <a:pPr algn="l">
-                        <a:lnSpc>
-                          <a:spcPct val="110000"/>
-                        </a:lnSpc>
-                        <a:spcAft>
-                          <a:spcPts val="100"/>
-                        </a:spcAft>
-                      </a:pPr>
-                      <a:r>
-                        <a:rPr sz="1050" b="0">
-                          <a:solidFill>
-                            <a:srgbClr val="333333"/>
-                          </a:solidFill>
-                          <a:latin typeface="微软雅黑"/>
-                          <a:ea typeface="微软雅黑"/>
-                        </a:rPr>
-                        <a:t>LoRA 微调最少约 200–1k 条，建议 5k–50k 条；SFT 微调最少约 1k–5k 条，建议 20k–200k+ 条</a:t>
-                      </a:r>
-                    </a:p>
-                  </a:txBody>
-                  <a:tcPr anchor="ctr">
-                    <a:lnL w="6350" cap="flat" cmpd="sng" algn="ctr">
-                      <a:solidFill>
-                        <a:srgbClr val="D9D9D9"/>
-                      </a:solidFill>
-                      <a:prstDash val="solid"/>
-                    </a:lnL>
-                    <a:lnR w="6350" cap="flat" cmpd="sng" algn="ctr">
-                      <a:solidFill>
-                        <a:srgbClr val="D9D9D9"/>
-                      </a:solidFill>
-                      <a:prstDash val="solid"/>
-                    </a:lnR>
-                    <a:lnT w="6350" cap="flat" cmpd="sng" algn="ctr">
-                      <a:solidFill>
-                        <a:srgbClr val="D9D9D9"/>
-                      </a:solidFill>
-                      <a:prstDash val="solid"/>
-                    </a:lnT>
-                    <a:lnB w="6350" cap="flat" cmpd="sng" algn="ctr">
-                      <a:solidFill>
-                        <a:srgbClr val="D9D9D9"/>
-                      </a:solidFill>
-                      <a:prstDash val="solid"/>
-                    </a:lnB>
-                    <a:solidFill>
-                      <a:srgbClr val="FFFFFF"/>
-                    </a:solidFill>
-                  </a:tcPr>
-                </a:tc>
-                <a:tc>
-                  <a:txBody>
-                    <a:bodyPr wrap="square" lIns="73152" tIns="36576" rIns="73152" bIns="36576" anchor="ctr">
-                      <a:noAutofit/>
-                    </a:bodyPr>
-                    <a:lstStyle/>
-                    <a:p>
-                      <a:pPr algn="l">
-                        <a:lnSpc>
-                          <a:spcPct val="110000"/>
-                        </a:lnSpc>
-                        <a:spcAft>
-                          <a:spcPts val="100"/>
-                        </a:spcAft>
-                      </a:pPr>
-                      <a:r>
-                        <a:rPr sz="1050" b="0">
-                          <a:solidFill>
-                            <a:srgbClr val="333333"/>
-                          </a:solidFill>
-                          <a:latin typeface="微软雅黑"/>
-                          <a:ea typeface="微软雅黑"/>
-                        </a:rPr>
-                        <a:t>8/13 答复</a:t>
-                      </a:r>
-                    </a:p>
-                  </a:txBody>
-                  <a:tcPr anchor="ctr">
-                    <a:lnL w="6350" cap="flat" cmpd="sng" algn="ctr">
-                      <a:solidFill>
-                        <a:srgbClr val="D9D9D9"/>
-                      </a:solidFill>
-                      <a:prstDash val="solid"/>
-                    </a:lnL>
-                    <a:lnR w="6350" cap="flat" cmpd="sng" algn="ctr">
-                      <a:solidFill>
-                        <a:srgbClr val="D9D9D9"/>
-                      </a:solidFill>
-                      <a:prstDash val="solid"/>
-                    </a:lnR>
-                    <a:lnT w="6350" cap="flat" cmpd="sng" algn="ctr">
-                      <a:solidFill>
-                        <a:srgbClr val="D9D9D9"/>
-                      </a:solidFill>
-                      <a:prstDash val="solid"/>
-                    </a:lnT>
-                    <a:lnB w="6350" cap="flat" cmpd="sng" algn="ctr">
-                      <a:solidFill>
-                        <a:srgbClr val="D9D9D9"/>
-                      </a:solidFill>
-                      <a:prstDash val="solid"/>
-                    </a:lnB>
-                    <a:solidFill>
-                      <a:srgbClr val="FFFFFF"/>
-                    </a:solidFill>
-                  </a:tcPr>
-                </a:tc>
-              </a:tr>
-              <a:tr h="438912">
-                <a:tc>
-                  <a:txBody>
-                    <a:bodyPr wrap="square" lIns="73152" tIns="36576" rIns="73152" bIns="36576" anchor="ctr">
-                      <a:noAutofit/>
-                    </a:bodyPr>
-                    <a:lstStyle/>
-                    <a:p>
-                      <a:pPr algn="l">
-                        <a:lnSpc>
-                          <a:spcPct val="110000"/>
-                        </a:lnSpc>
-                        <a:spcAft>
-                          <a:spcPts val="100"/>
-                        </a:spcAft>
-                      </a:pPr>
-                      <a:r>
-                        <a:rPr sz="1050" b="1">
-                          <a:solidFill>
-                            <a:srgbClr val="1D1D1A"/>
-                          </a:solidFill>
-                          <a:latin typeface="微软雅黑"/>
-                          <a:ea typeface="微软雅黑"/>
-                        </a:rPr>
-                        <a:t>RNP 数据责任</a:t>
-                      </a:r>
-                    </a:p>
-                  </a:txBody>
-                  <a:tcPr anchor="ctr">
-                    <a:lnL w="6350" cap="flat" cmpd="sng" algn="ctr">
-                      <a:solidFill>
-                        <a:srgbClr val="D9D9D9"/>
-                      </a:solidFill>
-                      <a:prstDash val="solid"/>
-                    </a:lnL>
-                    <a:lnR w="6350" cap="flat" cmpd="sng" algn="ctr">
-                      <a:solidFill>
-                        <a:srgbClr val="D9D9D9"/>
-                      </a:solidFill>
-                      <a:prstDash val="solid"/>
-                    </a:lnR>
-                    <a:lnT w="6350" cap="flat" cmpd="sng" algn="ctr">
-                      <a:solidFill>
-                        <a:srgbClr val="D9D9D9"/>
-                      </a:solidFill>
-                      <a:prstDash val="solid"/>
-                    </a:lnT>
-                    <a:lnB w="6350" cap="flat" cmpd="sng" algn="ctr">
-                      <a:solidFill>
-                        <a:srgbClr val="D9D9D9"/>
-                      </a:solidFill>
-                      <a:prstDash val="solid"/>
-                    </a:lnB>
-                    <a:solidFill>
-                      <a:srgbClr val="FFFFFF"/>
-                    </a:solidFill>
-                  </a:tcPr>
-                </a:tc>
-                <a:tc>
-                  <a:txBody>
-                    <a:bodyPr wrap="square" lIns="73152" tIns="36576" rIns="73152" bIns="36576" anchor="ctr">
-                      <a:noAutofit/>
-                    </a:bodyPr>
-                    <a:lstStyle/>
-                    <a:p>
-                      <a:pPr algn="l">
-                        <a:lnSpc>
-                          <a:spcPct val="110000"/>
-                        </a:lnSpc>
-                        <a:spcAft>
-                          <a:spcPts val="100"/>
-                        </a:spcAft>
-                      </a:pPr>
-                      <a:r>
-                        <a:rPr sz="1050" b="0">
-                          <a:solidFill>
-                            <a:srgbClr val="333333"/>
-                          </a:solidFill>
-                          <a:latin typeface="微软雅黑"/>
-                          <a:ea typeface="微软雅黑"/>
-                        </a:rPr>
-                        <a:t>训练、标注、独立评测数据的合法使用权；采集、采购、清洗、标注、翻译、来源授权、内容审核及 LGPD 合规</a:t>
-                      </a:r>
-                    </a:p>
-                  </a:txBody>
-                  <a:tcPr anchor="ctr">
-                    <a:lnL w="6350" cap="flat" cmpd="sng" algn="ctr">
-                      <a:solidFill>
-                        <a:srgbClr val="D9D9D9"/>
-                      </a:solidFill>
-                      <a:prstDash val="solid"/>
-                    </a:lnL>
-                    <a:lnR w="6350" cap="flat" cmpd="sng" algn="ctr">
-                      <a:solidFill>
-                        <a:srgbClr val="D9D9D9"/>
-                      </a:solidFill>
-                      <a:prstDash val="solid"/>
-                    </a:lnR>
-                    <a:lnT w="6350" cap="flat" cmpd="sng" algn="ctr">
-                      <a:solidFill>
-                        <a:srgbClr val="D9D9D9"/>
-                      </a:solidFill>
-                      <a:prstDash val="solid"/>
-                    </a:lnT>
-                    <a:lnB w="6350" cap="flat" cmpd="sng" algn="ctr">
-                      <a:solidFill>
-                        <a:srgbClr val="D9D9D9"/>
-                      </a:solidFill>
-                      <a:prstDash val="solid"/>
-                    </a:lnB>
-                    <a:solidFill>
-                      <a:srgbClr val="FFFFFF"/>
-                    </a:solidFill>
-                  </a:tcPr>
-                </a:tc>
-                <a:tc>
-                  <a:txBody>
-                    <a:bodyPr wrap="square" lIns="73152" tIns="36576" rIns="73152" bIns="36576" anchor="ctr">
-                      <a:noAutofit/>
-                    </a:bodyPr>
-                    <a:lstStyle/>
-                    <a:p>
-                      <a:pPr algn="l">
-                        <a:lnSpc>
-                          <a:spcPct val="110000"/>
-                        </a:lnSpc>
-                        <a:spcAft>
-                          <a:spcPts val="100"/>
-                        </a:spcAft>
-                      </a:pPr>
-                      <a:r>
-                        <a:rPr sz="1050" b="0">
-                          <a:solidFill>
-                            <a:srgbClr val="333333"/>
-                          </a:solidFill>
-                          <a:latin typeface="微软雅黑"/>
-                          <a:ea typeface="微软雅黑"/>
-                        </a:rPr>
-                        <a:t>8/13 答复</a:t>
-                      </a:r>
-                    </a:p>
-                  </a:txBody>
-                  <a:tcPr anchor="ctr">
-                    <a:lnL w="6350" cap="flat" cmpd="sng" algn="ctr">
-                      <a:solidFill>
-                        <a:srgbClr val="D9D9D9"/>
-                      </a:solidFill>
-                      <a:prstDash val="solid"/>
-                    </a:lnL>
-                    <a:lnR w="6350" cap="flat" cmpd="sng" algn="ctr">
-                      <a:solidFill>
-                        <a:srgbClr val="D9D9D9"/>
-                      </a:solidFill>
-                      <a:prstDash val="solid"/>
-                    </a:lnR>
-                    <a:lnT w="6350" cap="flat" cmpd="sng" algn="ctr">
-                      <a:solidFill>
-                        <a:srgbClr val="D9D9D9"/>
-                      </a:solidFill>
-                      <a:prstDash val="solid"/>
-                    </a:lnT>
-                    <a:lnB w="6350" cap="flat" cmpd="sng" algn="ctr">
-                      <a:solidFill>
-                        <a:srgbClr val="D9D9D9"/>
-                      </a:solidFill>
-                      <a:prstDash val="solid"/>
-                    </a:lnB>
-                    <a:solidFill>
-                      <a:srgbClr val="FFFFFF"/>
-                    </a:solidFill>
-                  </a:tcPr>
-                </a:tc>
-              </a:tr>
-              <a:tr h="438912">
-                <a:tc>
-                  <a:txBody>
-                    <a:bodyPr wrap="square" lIns="73152" tIns="36576" rIns="73152" bIns="36576" anchor="ctr">
-                      <a:noAutofit/>
-                    </a:bodyPr>
-                    <a:lstStyle/>
-                    <a:p>
-                      <a:pPr algn="l">
-                        <a:lnSpc>
-                          <a:spcPct val="110000"/>
-                        </a:lnSpc>
-                        <a:spcAft>
-                          <a:spcPts val="100"/>
-                        </a:spcAft>
-                      </a:pPr>
-                      <a:r>
-                        <a:rPr sz="1050" b="1">
-                          <a:solidFill>
-                            <a:srgbClr val="1D1D1A"/>
-                          </a:solidFill>
-                          <a:latin typeface="微软雅黑"/>
-                          <a:ea typeface="微软雅黑"/>
-                        </a:rPr>
-                        <a:t>RNP 专家资源</a:t>
-                      </a:r>
-                    </a:p>
-                  </a:txBody>
-                  <a:tcPr anchor="ctr">
-                    <a:lnL w="6350" cap="flat" cmpd="sng" algn="ctr">
-                      <a:solidFill>
-                        <a:srgbClr val="D9D9D9"/>
-                      </a:solidFill>
-                      <a:prstDash val="solid"/>
-                    </a:lnL>
-                    <a:lnR w="6350" cap="flat" cmpd="sng" algn="ctr">
-                      <a:solidFill>
-                        <a:srgbClr val="D9D9D9"/>
-                      </a:solidFill>
-                      <a:prstDash val="solid"/>
-                    </a:lnR>
-                    <a:lnT w="6350" cap="flat" cmpd="sng" algn="ctr">
-                      <a:solidFill>
-                        <a:srgbClr val="D9D9D9"/>
-                      </a:solidFill>
-                      <a:prstDash val="solid"/>
-                    </a:lnT>
-                    <a:lnB w="6350" cap="flat" cmpd="sng" algn="ctr">
-                      <a:solidFill>
-                        <a:srgbClr val="D9D9D9"/>
-                      </a:solidFill>
-                      <a:prstDash val="solid"/>
-                    </a:lnB>
-                    <a:solidFill>
-                      <a:srgbClr val="FFFFFF"/>
-                    </a:solidFill>
-                  </a:tcPr>
-                </a:tc>
-                <a:tc>
-                  <a:txBody>
-                    <a:bodyPr wrap="square" lIns="73152" tIns="36576" rIns="73152" bIns="36576" anchor="ctr">
-                      <a:noAutofit/>
-                    </a:bodyPr>
-                    <a:lstStyle/>
-                    <a:p>
-                      <a:pPr algn="l">
-                        <a:lnSpc>
-                          <a:spcPct val="110000"/>
-                        </a:lnSpc>
-                        <a:spcAft>
-                          <a:spcPts val="100"/>
-                        </a:spcAft>
-                      </a:pPr>
-                      <a:r>
-                        <a:rPr sz="1050" b="0">
-                          <a:solidFill>
-                            <a:srgbClr val="333333"/>
-                          </a:solidFill>
-                          <a:latin typeface="微软雅黑"/>
-                          <a:ea typeface="微软雅黑"/>
-                        </a:rPr>
-                        <a:t>巴西葡萄牙语、行业、安全及法律合规本地专家</a:t>
-                      </a:r>
-                    </a:p>
-                  </a:txBody>
-                  <a:tcPr anchor="ctr">
-                    <a:lnL w="6350" cap="flat" cmpd="sng" algn="ctr">
-                      <a:solidFill>
-                        <a:srgbClr val="D9D9D9"/>
-                      </a:solidFill>
-                      <a:prstDash val="solid"/>
-                    </a:lnL>
-                    <a:lnR w="6350" cap="flat" cmpd="sng" algn="ctr">
-                      <a:solidFill>
-                        <a:srgbClr val="D9D9D9"/>
-                      </a:solidFill>
-                      <a:prstDash val="solid"/>
-                    </a:lnR>
-                    <a:lnT w="6350" cap="flat" cmpd="sng" algn="ctr">
-                      <a:solidFill>
-                        <a:srgbClr val="D9D9D9"/>
-                      </a:solidFill>
-                      <a:prstDash val="solid"/>
-                    </a:lnT>
-                    <a:lnB w="6350" cap="flat" cmpd="sng" algn="ctr">
-                      <a:solidFill>
-                        <a:srgbClr val="D9D9D9"/>
-                      </a:solidFill>
-                      <a:prstDash val="solid"/>
-                    </a:lnB>
-                    <a:solidFill>
-                      <a:srgbClr val="FFFFFF"/>
-                    </a:solidFill>
-                  </a:tcPr>
-                </a:tc>
-                <a:tc>
-                  <a:txBody>
-                    <a:bodyPr wrap="square" lIns="73152" tIns="36576" rIns="73152" bIns="36576" anchor="ctr">
-                      <a:noAutofit/>
-                    </a:bodyPr>
-                    <a:lstStyle/>
-                    <a:p>
-                      <a:pPr algn="l">
-                        <a:lnSpc>
-                          <a:spcPct val="110000"/>
-                        </a:lnSpc>
-                        <a:spcAft>
-                          <a:spcPts val="100"/>
-                        </a:spcAft>
-                      </a:pPr>
-                      <a:r>
-                        <a:rPr sz="1050" b="0">
-                          <a:solidFill>
-                            <a:srgbClr val="333333"/>
-                          </a:solidFill>
-                          <a:latin typeface="微软雅黑"/>
-                          <a:ea typeface="微软雅黑"/>
-                        </a:rPr>
-                        <a:t>8/13 答复</a:t>
-                      </a:r>
-                    </a:p>
-                  </a:txBody>
-                  <a:tcPr anchor="ctr">
-                    <a:lnL w="6350" cap="flat" cmpd="sng" algn="ctr">
-                      <a:solidFill>
-                        <a:srgbClr val="D9D9D9"/>
-                      </a:solidFill>
-                      <a:prstDash val="solid"/>
-                    </a:lnL>
-                    <a:lnR w="6350" cap="flat" cmpd="sng" algn="ctr">
-                      <a:solidFill>
-                        <a:srgbClr val="D9D9D9"/>
-                      </a:solidFill>
-                      <a:prstDash val="solid"/>
-                    </a:lnR>
-                    <a:lnT w="6350" cap="flat" cmpd="sng" algn="ctr">
-                      <a:solidFill>
-                        <a:srgbClr val="D9D9D9"/>
-                      </a:solidFill>
-                      <a:prstDash val="solid"/>
-                    </a:lnT>
-                    <a:lnB w="6350" cap="flat" cmpd="sng" algn="ctr">
-                      <a:solidFill>
-                        <a:srgbClr val="D9D9D9"/>
-                      </a:solidFill>
-                      <a:prstDash val="solid"/>
-                    </a:lnB>
-                    <a:solidFill>
-                      <a:srgbClr val="FFFFFF"/>
-                    </a:solidFill>
-                  </a:tcPr>
-                </a:tc>
-              </a:tr>
-              <a:tr h="438912">
-                <a:tc>
-                  <a:txBody>
-                    <a:bodyPr wrap="square" lIns="73152" tIns="36576" rIns="73152" bIns="36576" anchor="ctr">
-                      <a:noAutofit/>
-                    </a:bodyPr>
-                    <a:lstStyle/>
-                    <a:p>
-                      <a:pPr algn="l">
-                        <a:lnSpc>
-                          <a:spcPct val="110000"/>
-                        </a:lnSpc>
-                        <a:spcAft>
-                          <a:spcPts val="100"/>
-                        </a:spcAft>
-                      </a:pPr>
-                      <a:r>
-                        <a:rPr sz="1050" b="1">
-                          <a:solidFill>
-                            <a:srgbClr val="1D1D1A"/>
-                          </a:solidFill>
-                          <a:latin typeface="微软雅黑"/>
-                          <a:ea typeface="微软雅黑"/>
-                        </a:rPr>
-                        <a:t>实施环境</a:t>
-                      </a:r>
-                    </a:p>
-                  </a:txBody>
-                  <a:tcPr anchor="ctr">
-                    <a:lnL w="6350" cap="flat" cmpd="sng" algn="ctr">
-                      <a:solidFill>
-                        <a:srgbClr val="D9D9D9"/>
-                      </a:solidFill>
-                      <a:prstDash val="solid"/>
-                    </a:lnL>
-                    <a:lnR w="6350" cap="flat" cmpd="sng" algn="ctr">
-                      <a:solidFill>
-                        <a:srgbClr val="D9D9D9"/>
-                      </a:solidFill>
-                      <a:prstDash val="solid"/>
-                    </a:lnR>
-                    <a:lnT w="6350" cap="flat" cmpd="sng" algn="ctr">
-                      <a:solidFill>
-                        <a:srgbClr val="D9D9D9"/>
-                      </a:solidFill>
-                      <a:prstDash val="solid"/>
-                    </a:lnT>
-                    <a:lnB w="6350" cap="flat" cmpd="sng" algn="ctr">
-                      <a:solidFill>
-                        <a:srgbClr val="D9D9D9"/>
-                      </a:solidFill>
-                      <a:prstDash val="solid"/>
-                    </a:lnB>
-                    <a:solidFill>
-                      <a:srgbClr val="FFFFFF"/>
-                    </a:solidFill>
-                  </a:tcPr>
-                </a:tc>
-                <a:tc>
-                  <a:txBody>
-                    <a:bodyPr wrap="square" lIns="73152" tIns="36576" rIns="73152" bIns="36576" anchor="ctr">
-                      <a:noAutofit/>
-                    </a:bodyPr>
-                    <a:lstStyle/>
-                    <a:p>
-                      <a:pPr algn="l">
-                        <a:lnSpc>
-                          <a:spcPct val="110000"/>
-                        </a:lnSpc>
-                        <a:spcAft>
-                          <a:spcPts val="100"/>
-                        </a:spcAft>
-                      </a:pPr>
-                      <a:r>
-                        <a:rPr sz="1050" b="0">
-                          <a:solidFill>
-                            <a:srgbClr val="333333"/>
-                          </a:solidFill>
-                          <a:latin typeface="微软雅黑"/>
-                          <a:ea typeface="微软雅黑"/>
-                        </a:rPr>
-                        <a:t>训练、评测、部署所需算力、存储、网络；算力 70P </a:t>
-                      </a:r>
-                      <a:r>
-                        <a:rPr sz="1050" b="0">
-                          <a:solidFill>
-                            <a:srgbClr val="0070C0"/>
-                          </a:solidFill>
-                          <a:latin typeface="微软雅黑"/>
-                          <a:ea typeface="微软雅黑"/>
-                        </a:rPr>
-                        <a:t>待核：按 1 个 DLM 规划，3 个需重估</a:t>
-                      </a:r>
-                    </a:p>
-                  </a:txBody>
-                  <a:tcPr anchor="ctr">
-                    <a:lnL w="6350" cap="flat" cmpd="sng" algn="ctr">
-                      <a:solidFill>
-                        <a:srgbClr val="D9D9D9"/>
-                      </a:solidFill>
-                      <a:prstDash val="solid"/>
-                    </a:lnL>
-                    <a:lnR w="6350" cap="flat" cmpd="sng" algn="ctr">
-                      <a:solidFill>
-                        <a:srgbClr val="D9D9D9"/>
-                      </a:solidFill>
-                      <a:prstDash val="solid"/>
-                    </a:lnR>
-                    <a:lnT w="6350" cap="flat" cmpd="sng" algn="ctr">
-                      <a:solidFill>
-                        <a:srgbClr val="D9D9D9"/>
-                      </a:solidFill>
-                      <a:prstDash val="solid"/>
-                    </a:lnT>
-                    <a:lnB w="6350" cap="flat" cmpd="sng" algn="ctr">
-                      <a:solidFill>
-                        <a:srgbClr val="D9D9D9"/>
-                      </a:solidFill>
-                      <a:prstDash val="solid"/>
-                    </a:lnB>
-                    <a:solidFill>
-                      <a:srgbClr val="FFFFFF"/>
-                    </a:solidFill>
-                  </a:tcPr>
-                </a:tc>
-                <a:tc>
-                  <a:txBody>
-                    <a:bodyPr wrap="square" lIns="73152" tIns="36576" rIns="73152" bIns="36576" anchor="ctr">
-                      <a:noAutofit/>
-                    </a:bodyPr>
-                    <a:lstStyle/>
-                    <a:p>
-                      <a:pPr algn="l">
-                        <a:lnSpc>
-                          <a:spcPct val="110000"/>
-                        </a:lnSpc>
-                        <a:spcAft>
-                          <a:spcPts val="100"/>
-                        </a:spcAft>
-                      </a:pPr>
-                      <a:r>
-                        <a:rPr sz="1050" b="0">
-                          <a:solidFill>
-                            <a:srgbClr val="333333"/>
-                          </a:solidFill>
-                          <a:latin typeface="微软雅黑"/>
-                          <a:ea typeface="微软雅黑"/>
-                        </a:rPr>
-                        <a:t>8/13 答复</a:t>
-                      </a:r>
-                    </a:p>
-                  </a:txBody>
-                  <a:tcPr anchor="ctr">
-                    <a:lnL w="6350" cap="flat" cmpd="sng" algn="ctr">
-                      <a:solidFill>
-                        <a:srgbClr val="D9D9D9"/>
-                      </a:solidFill>
-                      <a:prstDash val="solid"/>
-                    </a:lnL>
-                    <a:lnR w="6350" cap="flat" cmpd="sng" algn="ctr">
-                      <a:solidFill>
-                        <a:srgbClr val="D9D9D9"/>
-                      </a:solidFill>
-                      <a:prstDash val="solid"/>
-                    </a:lnR>
-                    <a:lnT w="6350" cap="flat" cmpd="sng" algn="ctr">
-                      <a:solidFill>
-                        <a:srgbClr val="D9D9D9"/>
-                      </a:solidFill>
-                      <a:prstDash val="solid"/>
-                    </a:lnT>
-                    <a:lnB w="6350" cap="flat" cmpd="sng" algn="ctr">
-                      <a:solidFill>
-                        <a:srgbClr val="D9D9D9"/>
-                      </a:solidFill>
-                      <a:prstDash val="solid"/>
-                    </a:lnB>
-                    <a:solidFill>
-                      <a:srgbClr val="FFFFFF"/>
-                    </a:solidFill>
-                  </a:tcPr>
-                </a:tc>
-              </a:tr>
-              <a:tr h="438912">
-                <a:tc>
-                  <a:txBody>
-                    <a:bodyPr wrap="square" lIns="73152" tIns="36576" rIns="73152" bIns="36576" anchor="ctr">
-                      <a:noAutofit/>
-                    </a:bodyPr>
-                    <a:lstStyle/>
-                    <a:p>
-                      <a:pPr algn="l">
-                        <a:lnSpc>
-                          <a:spcPct val="110000"/>
-                        </a:lnSpc>
-                        <a:spcAft>
-                          <a:spcPts val="100"/>
-                        </a:spcAft>
-                      </a:pPr>
-                      <a:r>
-                        <a:rPr sz="1050" b="1">
-                          <a:solidFill>
-                            <a:srgbClr val="1D1D1A"/>
-                          </a:solidFill>
-                          <a:latin typeface="微软雅黑"/>
-                          <a:ea typeface="微软雅黑"/>
-                        </a:rPr>
-                        <a:t>实施模式</a:t>
-                      </a:r>
-                    </a:p>
-                  </a:txBody>
-                  <a:tcPr anchor="ctr">
-                    <a:lnL w="6350" cap="flat" cmpd="sng" algn="ctr">
-                      <a:solidFill>
-                        <a:srgbClr val="D9D9D9"/>
-                      </a:solidFill>
-                      <a:prstDash val="solid"/>
-                    </a:lnL>
-                    <a:lnR w="6350" cap="flat" cmpd="sng" algn="ctr">
-                      <a:solidFill>
-                        <a:srgbClr val="D9D9D9"/>
-                      </a:solidFill>
-                      <a:prstDash val="solid"/>
-                    </a:lnR>
-                    <a:lnT w="6350" cap="flat" cmpd="sng" algn="ctr">
-                      <a:solidFill>
-                        <a:srgbClr val="D9D9D9"/>
-                      </a:solidFill>
-                      <a:prstDash val="solid"/>
-                    </a:lnT>
-                    <a:lnB w="6350" cap="flat" cmpd="sng" algn="ctr">
-                      <a:solidFill>
-                        <a:srgbClr val="D9D9D9"/>
-                      </a:solidFill>
-                      <a:prstDash val="solid"/>
-                    </a:lnB>
-                    <a:solidFill>
-                      <a:srgbClr val="FFFFFF"/>
-                    </a:solidFill>
-                  </a:tcPr>
-                </a:tc>
-                <a:tc>
-                  <a:txBody>
-                    <a:bodyPr wrap="square" lIns="73152" tIns="36576" rIns="73152" bIns="36576" anchor="ctr">
-                      <a:noAutofit/>
-                    </a:bodyPr>
-                    <a:lstStyle/>
-                    <a:p>
-                      <a:pPr algn="l">
-                        <a:lnSpc>
-                          <a:spcPct val="110000"/>
-                        </a:lnSpc>
-                        <a:spcAft>
-                          <a:spcPts val="100"/>
-                        </a:spcAft>
-                      </a:pPr>
-                      <a:r>
-                        <a:rPr sz="1050" b="0">
-                          <a:solidFill>
-                            <a:srgbClr val="333333"/>
-                          </a:solidFill>
-                          <a:latin typeface="微软雅黑"/>
-                          <a:ea typeface="微软雅黑"/>
-                        </a:rPr>
-                        <a:t>优先“RNP 自主训练 + 讯飞辅助训练及持续咨询”；不足时可调整为讯飞进一步参与或直接承担训练</a:t>
-                      </a:r>
-                    </a:p>
-                  </a:txBody>
-                  <a:tcPr anchor="ctr">
-                    <a:lnL w="6350" cap="flat" cmpd="sng" algn="ctr">
-                      <a:solidFill>
-                        <a:srgbClr val="D9D9D9"/>
-                      </a:solidFill>
-                      <a:prstDash val="solid"/>
-                    </a:lnL>
-                    <a:lnR w="6350" cap="flat" cmpd="sng" algn="ctr">
-                      <a:solidFill>
-                        <a:srgbClr val="D9D9D9"/>
-                      </a:solidFill>
-                      <a:prstDash val="solid"/>
-                    </a:lnR>
-                    <a:lnT w="6350" cap="flat" cmpd="sng" algn="ctr">
-                      <a:solidFill>
-                        <a:srgbClr val="D9D9D9"/>
-                      </a:solidFill>
-                      <a:prstDash val="solid"/>
-                    </a:lnT>
-                    <a:lnB w="6350" cap="flat" cmpd="sng" algn="ctr">
-                      <a:solidFill>
-                        <a:srgbClr val="D9D9D9"/>
-                      </a:solidFill>
-                      <a:prstDash val="solid"/>
-                    </a:lnB>
-                    <a:solidFill>
-                      <a:srgbClr val="FFFFFF"/>
-                    </a:solidFill>
-                  </a:tcPr>
-                </a:tc>
-                <a:tc>
-                  <a:txBody>
-                    <a:bodyPr wrap="square" lIns="73152" tIns="36576" rIns="73152" bIns="36576" anchor="ctr">
-                      <a:noAutofit/>
-                    </a:bodyPr>
-                    <a:lstStyle/>
-                    <a:p>
-                      <a:pPr algn="l">
-                        <a:lnSpc>
-                          <a:spcPct val="110000"/>
-                        </a:lnSpc>
-                        <a:spcAft>
-                          <a:spcPts val="100"/>
-                        </a:spcAft>
-                      </a:pPr>
-                      <a:r>
-                        <a:rPr sz="1050" b="0">
-                          <a:solidFill>
-                            <a:srgbClr val="333333"/>
-                          </a:solidFill>
-                          <a:latin typeface="微软雅黑"/>
-                          <a:ea typeface="微软雅黑"/>
-                        </a:rPr>
-                        <a:t>8/13 答复</a:t>
-                      </a:r>
-                    </a:p>
-                  </a:txBody>
-                  <a:tcPr anchor="ctr">
-                    <a:lnL w="6350" cap="flat" cmpd="sng" algn="ctr">
-                      <a:solidFill>
-                        <a:srgbClr val="D9D9D9"/>
-                      </a:solidFill>
-                      <a:prstDash val="solid"/>
-                    </a:lnL>
-                    <a:lnR w="6350" cap="flat" cmpd="sng" algn="ctr">
-                      <a:solidFill>
-                        <a:srgbClr val="D9D9D9"/>
-                      </a:solidFill>
-                      <a:prstDash val="solid"/>
-                    </a:lnR>
-                    <a:lnT w="6350" cap="flat" cmpd="sng" algn="ctr">
-                      <a:solidFill>
-                        <a:srgbClr val="D9D9D9"/>
-                      </a:solidFill>
-                      <a:prstDash val="solid"/>
-                    </a:lnT>
-                    <a:lnB w="6350" cap="flat" cmpd="sng" algn="ctr">
-                      <a:solidFill>
-                        <a:srgbClr val="D9D9D9"/>
-                      </a:solidFill>
-                      <a:prstDash val="solid"/>
-                    </a:lnB>
-                    <a:solidFill>
-                      <a:srgbClr val="FFFFFF"/>
-                    </a:solidFill>
-                  </a:tcPr>
-                </a:tc>
-              </a:tr>
-              <a:tr h="438912">
-                <a:tc>
-                  <a:txBody>
-                    <a:bodyPr wrap="square" lIns="73152" tIns="36576" rIns="73152" bIns="36576" anchor="ctr">
-                      <a:noAutofit/>
-                    </a:bodyPr>
-                    <a:lstStyle/>
-                    <a:p>
-                      <a:pPr algn="l">
-                        <a:lnSpc>
-                          <a:spcPct val="110000"/>
-                        </a:lnSpc>
-                        <a:spcAft>
-                          <a:spcPts val="100"/>
-                        </a:spcAft>
-                      </a:pPr>
-                      <a:r>
-                        <a:rPr sz="1050" b="1">
-                          <a:solidFill>
-                            <a:srgbClr val="1D1D1A"/>
-                          </a:solidFill>
-                          <a:latin typeface="微软雅黑"/>
-                          <a:ea typeface="微软雅黑"/>
-                        </a:rPr>
-                        <a:t>验收依据</a:t>
-                      </a:r>
-                    </a:p>
-                  </a:txBody>
-                  <a:tcPr anchor="ctr">
-                    <a:lnL w="6350" cap="flat" cmpd="sng" algn="ctr">
-                      <a:solidFill>
-                        <a:srgbClr val="D9D9D9"/>
-                      </a:solidFill>
-                      <a:prstDash val="solid"/>
-                    </a:lnL>
-                    <a:lnR w="6350" cap="flat" cmpd="sng" algn="ctr">
-                      <a:solidFill>
-                        <a:srgbClr val="D9D9D9"/>
-                      </a:solidFill>
-                      <a:prstDash val="solid"/>
-                    </a:lnR>
-                    <a:lnT w="6350" cap="flat" cmpd="sng" algn="ctr">
-                      <a:solidFill>
-                        <a:srgbClr val="D9D9D9"/>
-                      </a:solidFill>
-                      <a:prstDash val="solid"/>
-                    </a:lnT>
-                    <a:lnB w="6350" cap="flat" cmpd="sng" algn="ctr">
-                      <a:solidFill>
-                        <a:srgbClr val="D9D9D9"/>
-                      </a:solidFill>
-                      <a:prstDash val="solid"/>
-                    </a:lnB>
-                    <a:solidFill>
-                      <a:srgbClr val="FFFFFF"/>
-                    </a:solidFill>
-                  </a:tcPr>
-                </a:tc>
-                <a:tc>
-                  <a:txBody>
-                    <a:bodyPr wrap="square" lIns="73152" tIns="36576" rIns="73152" bIns="36576" anchor="ctr">
-                      <a:noAutofit/>
-                    </a:bodyPr>
-                    <a:lstStyle/>
-                    <a:p>
-                      <a:pPr algn="l">
-                        <a:lnSpc>
-                          <a:spcPct val="110000"/>
-                        </a:lnSpc>
-                        <a:spcAft>
-                          <a:spcPts val="100"/>
-                        </a:spcAft>
-                      </a:pPr>
-                      <a:r>
-                        <a:rPr sz="1050" b="0">
-                          <a:solidFill>
-                            <a:srgbClr val="333333"/>
-                          </a:solidFill>
-                          <a:latin typeface="微软雅黑"/>
-                          <a:ea typeface="微软雅黑"/>
-                        </a:rPr>
-                        <a:t>双方确认的独立评测数据集；场景、基座、路线、评测方法与验收条件写入《DLM 场景及技术方案确认书》</a:t>
-                      </a:r>
-                    </a:p>
-                  </a:txBody>
-                  <a:tcPr anchor="ctr">
-                    <a:lnL w="6350" cap="flat" cmpd="sng" algn="ctr">
-                      <a:solidFill>
-                        <a:srgbClr val="D9D9D9"/>
-                      </a:solidFill>
-                      <a:prstDash val="solid"/>
-                    </a:lnL>
-                    <a:lnR w="6350" cap="flat" cmpd="sng" algn="ctr">
-                      <a:solidFill>
-                        <a:srgbClr val="D9D9D9"/>
-                      </a:solidFill>
-                      <a:prstDash val="solid"/>
-                    </a:lnR>
-                    <a:lnT w="6350" cap="flat" cmpd="sng" algn="ctr">
-                      <a:solidFill>
-                        <a:srgbClr val="D9D9D9"/>
-                      </a:solidFill>
-                      <a:prstDash val="solid"/>
-                    </a:lnT>
-                    <a:lnB w="6350" cap="flat" cmpd="sng" algn="ctr">
-                      <a:solidFill>
-                        <a:srgbClr val="D9D9D9"/>
-                      </a:solidFill>
-                      <a:prstDash val="solid"/>
-                    </a:lnB>
-                    <a:solidFill>
-                      <a:srgbClr val="FFFFFF"/>
-                    </a:solidFill>
-                  </a:tcPr>
-                </a:tc>
-                <a:tc>
-                  <a:txBody>
-                    <a:bodyPr wrap="square" lIns="73152" tIns="36576" rIns="73152" bIns="36576" anchor="ctr">
-                      <a:noAutofit/>
-                    </a:bodyPr>
-                    <a:lstStyle/>
-                    <a:p>
-                      <a:pPr algn="l">
-                        <a:lnSpc>
-                          <a:spcPct val="110000"/>
-                        </a:lnSpc>
-                        <a:spcAft>
-                          <a:spcPts val="100"/>
-                        </a:spcAft>
-                      </a:pPr>
-                      <a:r>
-                        <a:rPr sz="1050" b="0">
-                          <a:solidFill>
-                            <a:srgbClr val="333333"/>
-                          </a:solidFill>
-                          <a:latin typeface="微软雅黑"/>
-                          <a:ea typeface="微软雅黑"/>
-                        </a:rPr>
-                        <a:t>8/13 答复</a:t>
-                      </a:r>
-                    </a:p>
-                  </a:txBody>
-                  <a:tcPr anchor="ctr">
-                    <a:lnL w="6350" cap="flat" cmpd="sng" algn="ctr">
-                      <a:solidFill>
-                        <a:srgbClr val="D9D9D9"/>
-                      </a:solidFill>
-                      <a:prstDash val="solid"/>
-                    </a:lnL>
-                    <a:lnR w="6350" cap="flat" cmpd="sng" algn="ctr">
-                      <a:solidFill>
-                        <a:srgbClr val="D9D9D9"/>
-                      </a:solidFill>
-                      <a:prstDash val="solid"/>
-                    </a:lnR>
-                    <a:lnT w="6350" cap="flat" cmpd="sng" algn="ctr">
-                      <a:solidFill>
-                        <a:srgbClr val="D9D9D9"/>
-                      </a:solidFill>
-                      <a:prstDash val="solid"/>
-                    </a:lnT>
-                    <a:lnB w="6350" cap="flat" cmpd="sng" algn="ctr">
-                      <a:solidFill>
-                        <a:srgbClr val="D9D9D9"/>
-                      </a:solidFill>
-                      <a:prstDash val="solid"/>
-                    </a:lnB>
-                    <a:solidFill>
-                      <a:srgbClr val="FFFFFF"/>
-                    </a:solidFill>
-                  </a:tcPr>
-                </a:tc>
-              </a:tr>
-              <a:tr h="438912">
-                <a:tc>
-                  <a:txBody>
-                    <a:bodyPr wrap="square" lIns="73152" tIns="36576" rIns="73152" bIns="36576" anchor="ctr">
-                      <a:noAutofit/>
-                    </a:bodyPr>
-                    <a:lstStyle/>
-                    <a:p>
-                      <a:pPr algn="l">
-                        <a:lnSpc>
-                          <a:spcPct val="110000"/>
-                        </a:lnSpc>
-                        <a:spcAft>
-                          <a:spcPts val="100"/>
-                        </a:spcAft>
-                      </a:pPr>
-                      <a:r>
-                        <a:rPr sz="1050" b="1">
-                          <a:solidFill>
-                            <a:srgbClr val="1D1D1A"/>
-                          </a:solidFill>
-                          <a:latin typeface="微软雅黑"/>
-                          <a:ea typeface="微软雅黑"/>
-                        </a:rPr>
-                        <a:t>行业方向</a:t>
-                      </a:r>
-                    </a:p>
-                  </a:txBody>
-                  <a:tcPr anchor="ctr">
-                    <a:lnL w="6350" cap="flat" cmpd="sng" algn="ctr">
-                      <a:solidFill>
-                        <a:srgbClr val="D9D9D9"/>
-                      </a:solidFill>
-                      <a:prstDash val="solid"/>
-                    </a:lnL>
-                    <a:lnR w="6350" cap="flat" cmpd="sng" algn="ctr">
-                      <a:solidFill>
-                        <a:srgbClr val="D9D9D9"/>
-                      </a:solidFill>
-                      <a:prstDash val="solid"/>
-                    </a:lnR>
-                    <a:lnT w="6350" cap="flat" cmpd="sng" algn="ctr">
-                      <a:solidFill>
-                        <a:srgbClr val="D9D9D9"/>
-                      </a:solidFill>
-                      <a:prstDash val="solid"/>
-                    </a:lnT>
-                    <a:lnB w="6350" cap="flat" cmpd="sng" algn="ctr">
-                      <a:solidFill>
-                        <a:srgbClr val="D9D9D9"/>
-                      </a:solidFill>
-                      <a:prstDash val="solid"/>
-                    </a:lnB>
-                    <a:solidFill>
-                      <a:srgbClr val="FFFFFF"/>
-                    </a:solidFill>
-                  </a:tcPr>
-                </a:tc>
-                <a:tc>
-                  <a:txBody>
-                    <a:bodyPr wrap="square" lIns="73152" tIns="36576" rIns="73152" bIns="36576" anchor="ctr">
-                      <a:noAutofit/>
-                    </a:bodyPr>
-                    <a:lstStyle/>
-                    <a:p>
-                      <a:pPr algn="l">
-                        <a:lnSpc>
-                          <a:spcPct val="110000"/>
-                        </a:lnSpc>
-                        <a:spcAft>
-                          <a:spcPts val="100"/>
-                        </a:spcAft>
-                      </a:pPr>
-                      <a:r>
-                        <a:rPr sz="1050" b="0">
-                          <a:solidFill>
-                            <a:srgbClr val="333333"/>
-                          </a:solidFill>
-                          <a:latin typeface="微软雅黑"/>
-                          <a:ea typeface="微软雅黑"/>
-                        </a:rPr>
-                        <a:t>候选：政务服务、法律、医疗、教育（讯飞有经验）；</a:t>
-                      </a:r>
-                      <a:r>
-                        <a:rPr sz="1050" b="0">
-                          <a:solidFill>
-                            <a:srgbClr val="0070C0"/>
-                          </a:solidFill>
-                          <a:latin typeface="微软雅黑"/>
-                          <a:ea typeface="微软雅黑"/>
-                        </a:rPr>
-                        <a:t>待核：由 RNP/MCTI 提出 3 个</a:t>
-                      </a:r>
-                    </a:p>
-                  </a:txBody>
-                  <a:tcPr anchor="ctr">
-                    <a:lnL w="6350" cap="flat" cmpd="sng" algn="ctr">
-                      <a:solidFill>
-                        <a:srgbClr val="D9D9D9"/>
-                      </a:solidFill>
-                      <a:prstDash val="solid"/>
-                    </a:lnL>
-                    <a:lnR w="6350" cap="flat" cmpd="sng" algn="ctr">
-                      <a:solidFill>
-                        <a:srgbClr val="D9D9D9"/>
-                      </a:solidFill>
-                      <a:prstDash val="solid"/>
-                    </a:lnR>
-                    <a:lnT w="6350" cap="flat" cmpd="sng" algn="ctr">
-                      <a:solidFill>
-                        <a:srgbClr val="D9D9D9"/>
-                      </a:solidFill>
-                      <a:prstDash val="solid"/>
-                    </a:lnT>
-                    <a:lnB w="6350" cap="flat" cmpd="sng" algn="ctr">
-                      <a:solidFill>
-                        <a:srgbClr val="D9D9D9"/>
-                      </a:solidFill>
-                      <a:prstDash val="solid"/>
-                    </a:lnB>
-                    <a:solidFill>
-                      <a:srgbClr val="FFFFFF"/>
-                    </a:solidFill>
-                  </a:tcPr>
-                </a:tc>
-                <a:tc>
-                  <a:txBody>
-                    <a:bodyPr wrap="square" lIns="73152" tIns="36576" rIns="73152" bIns="36576" anchor="ctr">
-                      <a:noAutofit/>
-                    </a:bodyPr>
-                    <a:lstStyle/>
-                    <a:p>
-                      <a:pPr algn="l">
-                        <a:lnSpc>
-                          <a:spcPct val="110000"/>
-                        </a:lnSpc>
-                        <a:spcAft>
-                          <a:spcPts val="100"/>
-                        </a:spcAft>
-                      </a:pPr>
-                      <a:r>
-                        <a:rPr sz="1050" b="0">
-                          <a:solidFill>
-                            <a:srgbClr val="333333"/>
-                          </a:solidFill>
-                          <a:latin typeface="微软雅黑"/>
-                          <a:ea typeface="微软雅黑"/>
-                        </a:rPr>
-                        <a:t>5/8 答复</a:t>
-                      </a:r>
-                    </a:p>
-                  </a:txBody>
-                  <a:tcPr anchor="ctr">
-                    <a:lnL w="6350" cap="flat" cmpd="sng" algn="ctr">
-                      <a:solidFill>
-                        <a:srgbClr val="D9D9D9"/>
-                      </a:solidFill>
-                      <a:prstDash val="solid"/>
-                    </a:lnL>
-                    <a:lnR w="6350" cap="flat" cmpd="sng" algn="ctr">
-                      <a:solidFill>
-                        <a:srgbClr val="D9D9D9"/>
-                      </a:solidFill>
-                      <a:prstDash val="solid"/>
-                    </a:lnR>
-                    <a:lnT w="6350" cap="flat" cmpd="sng" algn="ctr">
-                      <a:solidFill>
-                        <a:srgbClr val="D9D9D9"/>
-                      </a:solidFill>
-                      <a:prstDash val="solid"/>
-                    </a:lnT>
-                    <a:lnB w="6350" cap="flat" cmpd="sng" algn="ctr">
-                      <a:solidFill>
-                        <a:srgbClr val="D9D9D9"/>
-                      </a:solidFill>
-                      <a:prstDash val="solid"/>
-                    </a:lnB>
-                    <a:solidFill>
-                      <a:srgbClr val="FFFFFF"/>
-                    </a:solidFill>
-                  </a:tcPr>
-                </a:tc>
-              </a:tr>
-            </a:tbl>
-          </a:graphicData>
-        </a:graphic>
-      </p:graphicFrame>
       <p:sp>
         <p:nvSpPr>
-          <p:cNvPr id="5" name="TextBox 4"/>
+          <p:cNvPr id="11" name="TextBox 10"/>
           <p:cNvSpPr txBox="1"/>
           <p:nvPr/>
         </p:nvSpPr>
         <p:spPr>
           <a:xfrm>
-            <a:off x="457200" y="5532120"/>
-            <a:ext cx="11274552" cy="365760"/>
+            <a:off x="9738360" y="1737360"/>
+            <a:ext cx="1874519" cy="822960"/>
           </a:xfrm>
           <a:prstGeom prst="rect">
             <a:avLst/>
@@ -7361,14 +6416,407 @@
               </a:spcAft>
             </a:pPr>
             <a:r>
-              <a:rPr sz="1050" b="0">
+              <a:rPr sz="1400" b="1">
                 <a:solidFill>
-                  <a:srgbClr val="666666"/>
+                  <a:srgbClr val="1D1D1A"/>
                 </a:solidFill>
                 <a:latin typeface="微软雅黑"/>
                 <a:ea typeface="微软雅黑"/>
               </a:rPr>
-              <a:t>讯飞交付文档：技术方案、指导记录、问题清单、评测分析、演进建议。</a:t>
+              <a:t>国家大模型 + 葡语语音</a:t>
+            </a:r>
+          </a:p>
+        </p:txBody>
+      </p:sp>
+      <p:sp>
+        <p:nvSpPr>
+          <p:cNvPr id="12" name="Rounded Rectangle 11"/>
+          <p:cNvSpPr/>
+          <p:nvPr/>
+        </p:nvSpPr>
+        <p:spPr>
+          <a:xfrm>
+            <a:off x="9052560" y="2761488"/>
+            <a:ext cx="2651760" cy="822960"/>
+          </a:xfrm>
+          <a:prstGeom prst="roundRect">
+            <a:avLst>
+              <a:gd name="adj" fmla="val 4000"/>
+            </a:avLst>
+          </a:prstGeom>
+          <a:solidFill>
+            <a:srgbClr val="F2F2F2"/>
+          </a:solidFill>
+          <a:ln>
+            <a:noFill/>
+          </a:ln>
+          <a:effectLst/>
+        </p:spPr>
+        <p:style>
+          <a:lnRef idx="1">
+            <a:schemeClr val="accent1"/>
+          </a:lnRef>
+          <a:fillRef idx="3">
+            <a:schemeClr val="accent1"/>
+          </a:fillRef>
+          <a:effectRef idx="2">
+            <a:schemeClr val="accent1"/>
+          </a:effectRef>
+          <a:fontRef idx="minor">
+            <a:schemeClr val="lt1"/>
+          </a:fontRef>
+        </p:style>
+        <p:txBody>
+          <a:bodyPr rtlCol="0" anchor="ctr"/>
+          <a:lstStyle/>
+          <a:p>
+            <a:pPr algn="ctr"/>
+          </a:p>
+        </p:txBody>
+      </p:sp>
+      <p:sp>
+        <p:nvSpPr>
+          <p:cNvPr id="13" name="Oval 12"/>
+          <p:cNvSpPr/>
+          <p:nvPr/>
+        </p:nvSpPr>
+        <p:spPr>
+          <a:xfrm>
+            <a:off x="9235440" y="2999232"/>
+            <a:ext cx="347472" cy="347472"/>
+          </a:xfrm>
+          <a:prstGeom prst="ellipse">
+            <a:avLst/>
+          </a:prstGeom>
+          <a:solidFill>
+            <a:srgbClr val="E9002F"/>
+          </a:solidFill>
+          <a:ln>
+            <a:noFill/>
+          </a:ln>
+          <a:effectLst/>
+        </p:spPr>
+        <p:style>
+          <a:lnRef idx="1">
+            <a:schemeClr val="accent1"/>
+          </a:lnRef>
+          <a:fillRef idx="3">
+            <a:schemeClr val="accent1"/>
+          </a:fillRef>
+          <a:effectRef idx="2">
+            <a:schemeClr val="accent1"/>
+          </a:effectRef>
+          <a:fontRef idx="minor">
+            <a:schemeClr val="lt1"/>
+          </a:fontRef>
+        </p:style>
+        <p:txBody>
+          <a:bodyPr rtlCol="0" anchor="ctr" wrap="square" lIns="0" tIns="0" rIns="0" bIns="0">
+            <a:noAutofit/>
+          </a:bodyPr>
+          <a:lstStyle/>
+          <a:p>
+            <a:pPr algn="ctr">
+              <a:lnSpc>
+                <a:spcPct val="115000"/>
+              </a:lnSpc>
+              <a:spcAft>
+                <a:spcPts val="0"/>
+              </a:spcAft>
+            </a:pPr>
+            <a:r>
+              <a:rPr sz="1100" b="1">
+                <a:solidFill>
+                  <a:srgbClr val="FFFFFF"/>
+                </a:solidFill>
+                <a:latin typeface="微软雅黑"/>
+                <a:ea typeface="微软雅黑"/>
+              </a:rPr>
+              <a:t>2</a:t>
+            </a:r>
+          </a:p>
+        </p:txBody>
+      </p:sp>
+      <p:sp>
+        <p:nvSpPr>
+          <p:cNvPr id="14" name="TextBox 13"/>
+          <p:cNvSpPr txBox="1"/>
+          <p:nvPr/>
+        </p:nvSpPr>
+        <p:spPr>
+          <a:xfrm>
+            <a:off x="9738360" y="2761488"/>
+            <a:ext cx="1874519" cy="822960"/>
+          </a:xfrm>
+          <a:prstGeom prst="rect">
+            <a:avLst/>
+          </a:prstGeom>
+          <a:noFill/>
+        </p:spPr>
+        <p:txBody>
+          <a:bodyPr wrap="square" lIns="0" tIns="0" rIns="0" bIns="0" anchor="ctr">
+            <a:noAutofit/>
+          </a:bodyPr>
+          <a:lstStyle/>
+          <a:p>
+            <a:pPr algn="l">
+              <a:lnSpc>
+                <a:spcPct val="115000"/>
+              </a:lnSpc>
+              <a:spcAft>
+                <a:spcPts val="0"/>
+              </a:spcAft>
+            </a:pPr>
+            <a:r>
+              <a:rPr sz="1400" b="1">
+                <a:solidFill>
+                  <a:srgbClr val="1D1D1A"/>
+                </a:solidFill>
+                <a:latin typeface="微软雅黑"/>
+                <a:ea typeface="微软雅黑"/>
+              </a:rPr>
+              <a:t>国家 APP</a:t>
+            </a:r>
+          </a:p>
+        </p:txBody>
+      </p:sp>
+      <p:sp>
+        <p:nvSpPr>
+          <p:cNvPr id="15" name="Rounded Rectangle 14"/>
+          <p:cNvSpPr/>
+          <p:nvPr/>
+        </p:nvSpPr>
+        <p:spPr>
+          <a:xfrm>
+            <a:off x="9052560" y="3785616"/>
+            <a:ext cx="2651760" cy="822960"/>
+          </a:xfrm>
+          <a:prstGeom prst="roundRect">
+            <a:avLst>
+              <a:gd name="adj" fmla="val 4000"/>
+            </a:avLst>
+          </a:prstGeom>
+          <a:solidFill>
+            <a:srgbClr val="F2F2F2"/>
+          </a:solidFill>
+          <a:ln>
+            <a:noFill/>
+          </a:ln>
+          <a:effectLst/>
+        </p:spPr>
+        <p:style>
+          <a:lnRef idx="1">
+            <a:schemeClr val="accent1"/>
+          </a:lnRef>
+          <a:fillRef idx="3">
+            <a:schemeClr val="accent1"/>
+          </a:fillRef>
+          <a:effectRef idx="2">
+            <a:schemeClr val="accent1"/>
+          </a:effectRef>
+          <a:fontRef idx="minor">
+            <a:schemeClr val="lt1"/>
+          </a:fontRef>
+        </p:style>
+        <p:txBody>
+          <a:bodyPr rtlCol="0" anchor="ctr"/>
+          <a:lstStyle/>
+          <a:p>
+            <a:pPr algn="ctr"/>
+          </a:p>
+        </p:txBody>
+      </p:sp>
+      <p:sp>
+        <p:nvSpPr>
+          <p:cNvPr id="16" name="Oval 15"/>
+          <p:cNvSpPr/>
+          <p:nvPr/>
+        </p:nvSpPr>
+        <p:spPr>
+          <a:xfrm>
+            <a:off x="9235440" y="4023360"/>
+            <a:ext cx="347472" cy="347472"/>
+          </a:xfrm>
+          <a:prstGeom prst="ellipse">
+            <a:avLst/>
+          </a:prstGeom>
+          <a:solidFill>
+            <a:srgbClr val="E9002F"/>
+          </a:solidFill>
+          <a:ln>
+            <a:noFill/>
+          </a:ln>
+          <a:effectLst/>
+        </p:spPr>
+        <p:style>
+          <a:lnRef idx="1">
+            <a:schemeClr val="accent1"/>
+          </a:lnRef>
+          <a:fillRef idx="3">
+            <a:schemeClr val="accent1"/>
+          </a:fillRef>
+          <a:effectRef idx="2">
+            <a:schemeClr val="accent1"/>
+          </a:effectRef>
+          <a:fontRef idx="minor">
+            <a:schemeClr val="lt1"/>
+          </a:fontRef>
+        </p:style>
+        <p:txBody>
+          <a:bodyPr rtlCol="0" anchor="ctr" wrap="square" lIns="0" tIns="0" rIns="0" bIns="0">
+            <a:noAutofit/>
+          </a:bodyPr>
+          <a:lstStyle/>
+          <a:p>
+            <a:pPr algn="ctr">
+              <a:lnSpc>
+                <a:spcPct val="115000"/>
+              </a:lnSpc>
+              <a:spcAft>
+                <a:spcPts val="0"/>
+              </a:spcAft>
+            </a:pPr>
+            <a:r>
+              <a:rPr sz="1100" b="1">
+                <a:solidFill>
+                  <a:srgbClr val="FFFFFF"/>
+                </a:solidFill>
+                <a:latin typeface="微软雅黑"/>
+                <a:ea typeface="微软雅黑"/>
+              </a:rPr>
+              <a:t>3</a:t>
+            </a:r>
+          </a:p>
+        </p:txBody>
+      </p:sp>
+      <p:sp>
+        <p:nvSpPr>
+          <p:cNvPr id="17" name="TextBox 16"/>
+          <p:cNvSpPr txBox="1"/>
+          <p:nvPr/>
+        </p:nvSpPr>
+        <p:spPr>
+          <a:xfrm>
+            <a:off x="9738360" y="3785616"/>
+            <a:ext cx="1874519" cy="822960"/>
+          </a:xfrm>
+          <a:prstGeom prst="rect">
+            <a:avLst/>
+          </a:prstGeom>
+          <a:noFill/>
+        </p:spPr>
+        <p:txBody>
+          <a:bodyPr wrap="square" lIns="0" tIns="0" rIns="0" bIns="0" anchor="ctr">
+            <a:noAutofit/>
+          </a:bodyPr>
+          <a:lstStyle/>
+          <a:p>
+            <a:pPr algn="l">
+              <a:lnSpc>
+                <a:spcPct val="115000"/>
+              </a:lnSpc>
+              <a:spcAft>
+                <a:spcPts val="0"/>
+              </a:spcAft>
+            </a:pPr>
+            <a:r>
+              <a:rPr sz="1400" b="1">
+                <a:solidFill>
+                  <a:srgbClr val="1D1D1A"/>
+                </a:solidFill>
+                <a:latin typeface="微软雅黑"/>
+                <a:ea typeface="微软雅黑"/>
+              </a:rPr>
+              <a:t>行业模型 DLM × 3</a:t>
+            </a:r>
+          </a:p>
+        </p:txBody>
+      </p:sp>
+      <p:sp>
+        <p:nvSpPr>
+          <p:cNvPr id="18" name="Rounded Rectangle 17"/>
+          <p:cNvSpPr/>
+          <p:nvPr/>
+        </p:nvSpPr>
+        <p:spPr>
+          <a:xfrm>
+            <a:off x="9052560" y="4809744"/>
+            <a:ext cx="2651760" cy="685800"/>
+          </a:xfrm>
+          <a:prstGeom prst="roundRect">
+            <a:avLst>
+              <a:gd name="adj" fmla="val 4000"/>
+            </a:avLst>
+          </a:prstGeom>
+          <a:solidFill>
+            <a:srgbClr val="C00000"/>
+          </a:solidFill>
+          <a:ln>
+            <a:noFill/>
+          </a:ln>
+          <a:effectLst/>
+        </p:spPr>
+        <p:style>
+          <a:lnRef idx="1">
+            <a:schemeClr val="accent1"/>
+          </a:lnRef>
+          <a:fillRef idx="3">
+            <a:schemeClr val="accent1"/>
+          </a:fillRef>
+          <a:effectRef idx="2">
+            <a:schemeClr val="accent1"/>
+          </a:effectRef>
+          <a:fontRef idx="minor">
+            <a:schemeClr val="lt1"/>
+          </a:fontRef>
+        </p:style>
+        <p:txBody>
+          <a:bodyPr rtlCol="0" anchor="ctr"/>
+          <a:lstStyle/>
+          <a:p>
+            <a:pPr algn="ctr"/>
+          </a:p>
+        </p:txBody>
+      </p:sp>
+      <p:sp>
+        <p:nvSpPr>
+          <p:cNvPr id="19" name="TextBox 18"/>
+          <p:cNvSpPr txBox="1"/>
+          <p:nvPr/>
+        </p:nvSpPr>
+        <p:spPr>
+          <a:xfrm>
+            <a:off x="9052560" y="4809744"/>
+            <a:ext cx="2651760" cy="685800"/>
+          </a:xfrm>
+          <a:prstGeom prst="rect">
+            <a:avLst/>
+          </a:prstGeom>
+          <a:noFill/>
+        </p:spPr>
+        <p:txBody>
+          <a:bodyPr wrap="square" lIns="0" tIns="0" rIns="0" bIns="0" anchor="ctr">
+            <a:noAutofit/>
+          </a:bodyPr>
+          <a:lstStyle/>
+          <a:p>
+            <a:pPr algn="ctr">
+              <a:lnSpc>
+                <a:spcPct val="115000"/>
+              </a:lnSpc>
+              <a:spcAft>
+                <a:spcPts val="0"/>
+              </a:spcAft>
+            </a:pPr>
+            <a:r>
+              <a:rPr sz="1500" b="1">
+                <a:solidFill>
+                  <a:srgbClr val="FFFFFF"/>
+                </a:solidFill>
+                <a:latin typeface="微软雅黑"/>
+                <a:ea typeface="微软雅黑"/>
+              </a:rPr>
+              <a:t>知识转移</a:t>
             </a:r>
           </a:p>
         </p:txBody>
@@ -7381,7 +6829,7 @@
 </p:sld>
 </file>
 
-<file path=ppt/slides/slide11.xml><?xml version="1.0" encoding="utf-8"?>
+<file path=ppt/slides/slide10.xml><?xml version="1.0" encoding="utf-8"?>
 <p:sld xmlns:a="http://schemas.openxmlformats.org/drawingml/2006/main" xmlns:p="http://schemas.openxmlformats.org/presentationml/2006/main" xmlns:r="http://schemas.openxmlformats.org/officeDocument/2006/relationships">
   <p:cSld>
     <p:spTree>
@@ -9438,7 +8886,7 @@
 </p:sld>
 </file>
 
-<file path=ppt/slides/slide12.xml><?xml version="1.0" encoding="utf-8"?>
+<file path=ppt/slides/slide11.xml><?xml version="1.0" encoding="utf-8"?>
 <p:sld xmlns:a="http://schemas.openxmlformats.org/drawingml/2006/main" xmlns:p="http://schemas.openxmlformats.org/presentationml/2006/main" xmlns:r="http://schemas.openxmlformats.org/officeDocument/2006/relationships">
   <p:cSld>
     <p:spTree>
@@ -11501,7 +10949,7 @@
 </p:sld>
 </file>
 
-<file path=ppt/slides/slide13.xml><?xml version="1.0" encoding="utf-8"?>
+<file path=ppt/slides/slide12.xml><?xml version="1.0" encoding="utf-8"?>
 <p:sld xmlns:a="http://schemas.openxmlformats.org/drawingml/2006/main" xmlns:p="http://schemas.openxmlformats.org/presentationml/2006/main" xmlns:r="http://schemas.openxmlformats.org/officeDocument/2006/relationships">
   <p:cSld>
     <p:spTree>
@@ -14356,7 +13804,7 @@
 </p:sld>
 </file>
 
-<file path=ppt/slides/slide14.xml><?xml version="1.0" encoding="utf-8"?>
+<file path=ppt/slides/slide13.xml><?xml version="1.0" encoding="utf-8"?>
 <p:sld xmlns:a="http://schemas.openxmlformats.org/drawingml/2006/main" xmlns:p="http://schemas.openxmlformats.org/presentationml/2006/main" xmlns:r="http://schemas.openxmlformats.org/officeDocument/2006/relationships">
   <p:cSld>
     <p:spTree>
@@ -18262,7 +17710,7 @@
 </p:sld>
 </file>
 
-<file path=ppt/slides/slide15.xml><?xml version="1.0" encoding="utf-8"?>
+<file path=ppt/slides/slide14.xml><?xml version="1.0" encoding="utf-8"?>
 <p:sld xmlns:a="http://schemas.openxmlformats.org/drawingml/2006/main" xmlns:p="http://schemas.openxmlformats.org/presentationml/2006/main" xmlns:r="http://schemas.openxmlformats.org/officeDocument/2006/relationships">
   <p:cSld>
     <p:spTree>
@@ -19105,7 +18553,7 @@
 </p:sld>
 </file>
 
-<file path=ppt/slides/slide16.xml><?xml version="1.0" encoding="utf-8"?>
+<file path=ppt/slides/slide15.xml><?xml version="1.0" encoding="utf-8"?>
 <p:sld xmlns:a="http://schemas.openxmlformats.org/drawingml/2006/main" xmlns:p="http://schemas.openxmlformats.org/presentationml/2006/main" xmlns:r="http://schemas.openxmlformats.org/officeDocument/2006/relationships">
   <p:cSld>
     <p:spTree>
@@ -21309,7 +20757,7 @@
 </p:sld>
 </file>
 
-<file path=ppt/slides/slide17.xml><?xml version="1.0" encoding="utf-8"?>
+<file path=ppt/slides/slide16.xml><?xml version="1.0" encoding="utf-8"?>
 <p:sld xmlns:a="http://schemas.openxmlformats.org/drawingml/2006/main" xmlns:p="http://schemas.openxmlformats.org/presentationml/2006/main" xmlns:r="http://schemas.openxmlformats.org/officeDocument/2006/relationships">
   <p:cSld>
     <p:spTree>
@@ -23251,958 +22699,6 @@
                 <a:spcPts val="0"/>
               </a:spcAft>
             </a:pPr>
-          </a:p>
-        </p:txBody>
-      </p:sp>
-      <p:sp>
-        <p:nvSpPr>
-          <p:cNvPr id="3" name="TextBox 2"/>
-          <p:cNvSpPr txBox="1"/>
-          <p:nvPr/>
-        </p:nvSpPr>
-        <p:spPr>
-          <a:xfrm>
-            <a:off x="731520" y="1371600"/>
-            <a:ext cx="7863840" cy="365760"/>
-          </a:xfrm>
-          <a:prstGeom prst="rect">
-            <a:avLst/>
-          </a:prstGeom>
-          <a:noFill/>
-        </p:spPr>
-        <p:txBody>
-          <a:bodyPr wrap="square" lIns="0" tIns="0" rIns="0" bIns="0" anchor="t">
-            <a:noAutofit/>
-          </a:bodyPr>
-          <a:lstStyle/>
-          <a:p>
-            <a:pPr algn="l">
-              <a:lnSpc>
-                <a:spcPct val="115000"/>
-              </a:lnSpc>
-              <a:spcAft>
-                <a:spcPts val="400"/>
-              </a:spcAft>
-            </a:pPr>
-            <a:r>
-              <a:rPr sz="1400" b="1">
-                <a:solidFill>
-                  <a:srgbClr val="666666"/>
-                </a:solidFill>
-                <a:latin typeface="微软雅黑"/>
-                <a:ea typeface="微软雅黑"/>
-              </a:rPr>
-              <a:t>RNP × 科大讯飞 · 技术交流</a:t>
-            </a:r>
-          </a:p>
-        </p:txBody>
-      </p:sp>
-      <p:sp>
-        <p:nvSpPr>
-          <p:cNvPr id="4" name="TextBox 3"/>
-          <p:cNvSpPr txBox="1"/>
-          <p:nvPr/>
-        </p:nvSpPr>
-        <p:spPr>
-          <a:xfrm>
-            <a:off x="731520" y="1828800"/>
-            <a:ext cx="7863840" cy="914400"/>
-          </a:xfrm>
-          <a:prstGeom prst="rect">
-            <a:avLst/>
-          </a:prstGeom>
-          <a:noFill/>
-        </p:spPr>
-        <p:txBody>
-          <a:bodyPr wrap="square" lIns="0" tIns="0" rIns="0" bIns="0" anchor="t">
-            <a:noAutofit/>
-          </a:bodyPr>
-          <a:lstStyle/>
-          <a:p>
-            <a:pPr algn="l">
-              <a:lnSpc>
-                <a:spcPct val="115000"/>
-              </a:lnSpc>
-              <a:spcAft>
-                <a:spcPts val="400"/>
-              </a:spcAft>
-            </a:pPr>
-            <a:r>
-              <a:rPr sz="3400" b="1">
-                <a:solidFill>
-                  <a:srgbClr val="C00000"/>
-                </a:solidFill>
-                <a:latin typeface="微软雅黑"/>
-                <a:ea typeface="微软雅黑"/>
-              </a:rPr>
-              <a:t>国家大模型、国家 APP 与行业模型</a:t>
-            </a:r>
-          </a:p>
-        </p:txBody>
-      </p:sp>
-      <p:sp>
-        <p:nvSpPr>
-          <p:cNvPr id="5" name="TextBox 4"/>
-          <p:cNvSpPr txBox="1"/>
-          <p:nvPr/>
-        </p:nvSpPr>
-        <p:spPr>
-          <a:xfrm>
-            <a:off x="731520" y="2743200"/>
-            <a:ext cx="7863840" cy="548640"/>
-          </a:xfrm>
-          <a:prstGeom prst="rect">
-            <a:avLst/>
-          </a:prstGeom>
-          <a:noFill/>
-        </p:spPr>
-        <p:txBody>
-          <a:bodyPr wrap="square" lIns="0" tIns="0" rIns="0" bIns="0" anchor="t">
-            <a:noAutofit/>
-          </a:bodyPr>
-          <a:lstStyle/>
-          <a:p>
-            <a:pPr algn="l">
-              <a:lnSpc>
-                <a:spcPct val="115000"/>
-              </a:lnSpc>
-              <a:spcAft>
-                <a:spcPts val="400"/>
-              </a:spcAft>
-            </a:pPr>
-            <a:r>
-              <a:rPr sz="2000" b="1">
-                <a:solidFill>
-                  <a:srgbClr val="1D1D1A"/>
-                </a:solidFill>
-                <a:latin typeface="微软雅黑"/>
-                <a:ea typeface="微软雅黑"/>
-              </a:rPr>
-              <a:t>讯飞交付什么、双方怎么分工、能力如何转移</a:t>
-            </a:r>
-          </a:p>
-        </p:txBody>
-      </p:sp>
-      <p:sp>
-        <p:nvSpPr>
-          <p:cNvPr id="6" name="TextBox 5"/>
-          <p:cNvSpPr txBox="1"/>
-          <p:nvPr/>
-        </p:nvSpPr>
-        <p:spPr>
-          <a:xfrm>
-            <a:off x="731520" y="3749039"/>
-            <a:ext cx="7863840" cy="1188720"/>
-          </a:xfrm>
-          <a:prstGeom prst="rect">
-            <a:avLst/>
-          </a:prstGeom>
-          <a:noFill/>
-        </p:spPr>
-        <p:txBody>
-          <a:bodyPr wrap="square" lIns="0" tIns="0" rIns="0" bIns="0" anchor="t">
-            <a:noAutofit/>
-          </a:bodyPr>
-          <a:lstStyle/>
-          <a:p>
-            <a:pPr algn="l">
-              <a:lnSpc>
-                <a:spcPct val="135000"/>
-              </a:lnSpc>
-              <a:spcAft>
-                <a:spcPts val="400"/>
-              </a:spcAft>
-            </a:pPr>
-            <a:r>
-              <a:rPr sz="1300" b="0">
-                <a:solidFill>
-                  <a:srgbClr val="333333"/>
-                </a:solidFill>
-                <a:latin typeface="微软雅黑"/>
-                <a:ea typeface="微软雅黑"/>
-              </a:rPr>
-              <a:t>里约热内卢 · </a:t>
-            </a:r>
-            <a:r>
-              <a:rPr sz="1300" b="0">
-                <a:solidFill>
-                  <a:srgbClr val="0070C0"/>
-                </a:solidFill>
-                <a:latin typeface="微软雅黑"/>
-                <a:ea typeface="微软雅黑"/>
-              </a:rPr>
-              <a:t>示例：2026 年 9 月 9 日</a:t>
-            </a:r>
-          </a:p>
-          <a:p>
-            <a:pPr algn="l">
-              <a:lnSpc>
-                <a:spcPct val="135000"/>
-              </a:lnSpc>
-              <a:spcAft>
-                <a:spcPts val="400"/>
-              </a:spcAft>
-            </a:pPr>
-            <a:r>
-              <a:rPr sz="1300" b="0">
-                <a:solidFill>
-                  <a:srgbClr val="333333"/>
-                </a:solidFill>
-                <a:latin typeface="微软雅黑"/>
-                <a:ea typeface="微软雅黑"/>
-              </a:rPr>
-              <a:t>汇报：科大讯飞 </a:t>
-            </a:r>
-            <a:r>
-              <a:rPr sz="1300" b="0">
-                <a:solidFill>
-                  <a:srgbClr val="0070C0"/>
-                </a:solidFill>
-                <a:latin typeface="微软雅黑"/>
-                <a:ea typeface="微软雅黑"/>
-              </a:rPr>
-              <a:t>示例：陈浩、方案架构师</a:t>
-            </a:r>
-          </a:p>
-          <a:p>
-            <a:pPr algn="l">
-              <a:lnSpc>
-                <a:spcPct val="135000"/>
-              </a:lnSpc>
-              <a:spcAft>
-                <a:spcPts val="400"/>
-              </a:spcAft>
-            </a:pPr>
-            <a:r>
-              <a:rPr sz="1300" b="0">
-                <a:solidFill>
-                  <a:srgbClr val="333333"/>
-                </a:solidFill>
-                <a:latin typeface="微软雅黑"/>
-                <a:ea typeface="微软雅黑"/>
-              </a:rPr>
-              <a:t>讨论稿，内容以 SOW、报价与技术方案为准；第 2 页一页看全</a:t>
-            </a:r>
-          </a:p>
-        </p:txBody>
-      </p:sp>
-      <p:sp>
-        <p:nvSpPr>
-          <p:cNvPr id="7" name="Rounded Rectangle 6"/>
-          <p:cNvSpPr/>
-          <p:nvPr/>
-        </p:nvSpPr>
-        <p:spPr>
-          <a:xfrm>
-            <a:off x="731520" y="5120640"/>
-            <a:ext cx="7863840" cy="868680"/>
-          </a:xfrm>
-          <a:prstGeom prst="roundRect">
-            <a:avLst>
-              <a:gd name="adj" fmla="val 4000"/>
-            </a:avLst>
-          </a:prstGeom>
-          <a:solidFill>
-            <a:srgbClr val="E8F0FA"/>
-          </a:solidFill>
-          <a:ln>
-            <a:noFill/>
-          </a:ln>
-          <a:effectLst/>
-        </p:spPr>
-        <p:style>
-          <a:lnRef idx="1">
-            <a:schemeClr val="accent1"/>
-          </a:lnRef>
-          <a:fillRef idx="3">
-            <a:schemeClr val="accent1"/>
-          </a:fillRef>
-          <a:effectRef idx="2">
-            <a:schemeClr val="accent1"/>
-          </a:effectRef>
-          <a:fontRef idx="minor">
-            <a:schemeClr val="lt1"/>
-          </a:fontRef>
-        </p:style>
-        <p:txBody>
-          <a:bodyPr rtlCol="0" anchor="ctr"/>
-          <a:lstStyle/>
-          <a:p>
-            <a:pPr algn="ctr"/>
-          </a:p>
-        </p:txBody>
-      </p:sp>
-      <p:sp>
-        <p:nvSpPr>
-          <p:cNvPr id="8" name="TextBox 7"/>
-          <p:cNvSpPr txBox="1"/>
-          <p:nvPr/>
-        </p:nvSpPr>
-        <p:spPr>
-          <a:xfrm>
-            <a:off x="868680" y="5120640"/>
-            <a:ext cx="7589520" cy="868680"/>
-          </a:xfrm>
-          <a:prstGeom prst="rect">
-            <a:avLst/>
-          </a:prstGeom>
-          <a:noFill/>
-        </p:spPr>
-        <p:txBody>
-          <a:bodyPr wrap="square" lIns="0" tIns="0" rIns="0" bIns="0" anchor="ctr">
-            <a:noAutofit/>
-          </a:bodyPr>
-          <a:lstStyle/>
-          <a:p>
-            <a:pPr algn="l">
-              <a:lnSpc>
-                <a:spcPct val="115000"/>
-              </a:lnSpc>
-              <a:spcAft>
-                <a:spcPts val="200"/>
-              </a:spcAft>
-            </a:pPr>
-            <a:r>
-              <a:rPr sz="1100" b="0">
-                <a:solidFill>
-                  <a:srgbClr val="333333"/>
-                </a:solidFill>
-                <a:latin typeface="微软雅黑"/>
-                <a:ea typeface="微软雅黑"/>
-              </a:rPr>
-              <a:t>图例：</a:t>
-            </a:r>
-            <a:r>
-              <a:rPr sz="1100" b="0">
-                <a:solidFill>
-                  <a:srgbClr val="0070C0"/>
-                </a:solidFill>
-                <a:latin typeface="微软雅黑"/>
-                <a:ea typeface="微软雅黑"/>
-              </a:rPr>
-              <a:t>蓝色文字</a:t>
-            </a:r>
-            <a:r>
-              <a:rPr sz="1100" b="0">
-                <a:solidFill>
-                  <a:srgbClr val="333333"/>
-                </a:solidFill>
-                <a:latin typeface="微软雅黑"/>
-                <a:ea typeface="微软雅黑"/>
-              </a:rPr>
-              <a:t> = 示例或待核实，需按 SOW、报价与技术方案替换</a:t>
-            </a:r>
-          </a:p>
-          <a:p>
-            <a:pPr algn="l">
-              <a:lnSpc>
-                <a:spcPct val="115000"/>
-              </a:lnSpc>
-              <a:spcAft>
-                <a:spcPts val="200"/>
-              </a:spcAft>
-            </a:pPr>
-            <a:r>
-              <a:rPr sz="1100" b="0">
-                <a:solidFill>
-                  <a:srgbClr val="333333"/>
-                </a:solidFill>
-                <a:latin typeface="微软雅黑"/>
-                <a:ea typeface="微软雅黑"/>
-              </a:rPr>
-              <a:t>黑色文字与讯飞给 RNP 的四份书面答复一致（4/29 清单答复、5/4、5/8、8/13 技术答复）；DLM 数量按最新口径</a:t>
-            </a:r>
-          </a:p>
-        </p:txBody>
-      </p:sp>
-      <p:sp>
-        <p:nvSpPr>
-          <p:cNvPr id="9" name="Rounded Rectangle 8"/>
-          <p:cNvSpPr/>
-          <p:nvPr/>
-        </p:nvSpPr>
-        <p:spPr>
-          <a:xfrm>
-            <a:off x="9052560" y="1737360"/>
-            <a:ext cx="2651760" cy="822960"/>
-          </a:xfrm>
-          <a:prstGeom prst="roundRect">
-            <a:avLst>
-              <a:gd name="adj" fmla="val 4000"/>
-            </a:avLst>
-          </a:prstGeom>
-          <a:solidFill>
-            <a:srgbClr val="F2F2F2"/>
-          </a:solidFill>
-          <a:ln>
-            <a:noFill/>
-          </a:ln>
-          <a:effectLst/>
-        </p:spPr>
-        <p:style>
-          <a:lnRef idx="1">
-            <a:schemeClr val="accent1"/>
-          </a:lnRef>
-          <a:fillRef idx="3">
-            <a:schemeClr val="accent1"/>
-          </a:fillRef>
-          <a:effectRef idx="2">
-            <a:schemeClr val="accent1"/>
-          </a:effectRef>
-          <a:fontRef idx="minor">
-            <a:schemeClr val="lt1"/>
-          </a:fontRef>
-        </p:style>
-        <p:txBody>
-          <a:bodyPr rtlCol="0" anchor="ctr"/>
-          <a:lstStyle/>
-          <a:p>
-            <a:pPr algn="ctr"/>
-          </a:p>
-        </p:txBody>
-      </p:sp>
-      <p:sp>
-        <p:nvSpPr>
-          <p:cNvPr id="10" name="Oval 9"/>
-          <p:cNvSpPr/>
-          <p:nvPr/>
-        </p:nvSpPr>
-        <p:spPr>
-          <a:xfrm>
-            <a:off x="9235440" y="1975104"/>
-            <a:ext cx="347472" cy="347472"/>
-          </a:xfrm>
-          <a:prstGeom prst="ellipse">
-            <a:avLst/>
-          </a:prstGeom>
-          <a:solidFill>
-            <a:srgbClr val="E9002F"/>
-          </a:solidFill>
-          <a:ln>
-            <a:noFill/>
-          </a:ln>
-          <a:effectLst/>
-        </p:spPr>
-        <p:style>
-          <a:lnRef idx="1">
-            <a:schemeClr val="accent1"/>
-          </a:lnRef>
-          <a:fillRef idx="3">
-            <a:schemeClr val="accent1"/>
-          </a:fillRef>
-          <a:effectRef idx="2">
-            <a:schemeClr val="accent1"/>
-          </a:effectRef>
-          <a:fontRef idx="minor">
-            <a:schemeClr val="lt1"/>
-          </a:fontRef>
-        </p:style>
-        <p:txBody>
-          <a:bodyPr rtlCol="0" anchor="ctr" wrap="square" lIns="0" tIns="0" rIns="0" bIns="0">
-            <a:noAutofit/>
-          </a:bodyPr>
-          <a:lstStyle/>
-          <a:p>
-            <a:pPr algn="ctr">
-              <a:lnSpc>
-                <a:spcPct val="115000"/>
-              </a:lnSpc>
-              <a:spcAft>
-                <a:spcPts val="0"/>
-              </a:spcAft>
-            </a:pPr>
-            <a:r>
-              <a:rPr sz="1100" b="1">
-                <a:solidFill>
-                  <a:srgbClr val="FFFFFF"/>
-                </a:solidFill>
-                <a:latin typeface="微软雅黑"/>
-                <a:ea typeface="微软雅黑"/>
-              </a:rPr>
-              <a:t>1</a:t>
-            </a:r>
-          </a:p>
-        </p:txBody>
-      </p:sp>
-      <p:sp>
-        <p:nvSpPr>
-          <p:cNvPr id="11" name="TextBox 10"/>
-          <p:cNvSpPr txBox="1"/>
-          <p:nvPr/>
-        </p:nvSpPr>
-        <p:spPr>
-          <a:xfrm>
-            <a:off x="9738360" y="1737360"/>
-            <a:ext cx="1874519" cy="822960"/>
-          </a:xfrm>
-          <a:prstGeom prst="rect">
-            <a:avLst/>
-          </a:prstGeom>
-          <a:noFill/>
-        </p:spPr>
-        <p:txBody>
-          <a:bodyPr wrap="square" lIns="0" tIns="0" rIns="0" bIns="0" anchor="ctr">
-            <a:noAutofit/>
-          </a:bodyPr>
-          <a:lstStyle/>
-          <a:p>
-            <a:pPr algn="l">
-              <a:lnSpc>
-                <a:spcPct val="115000"/>
-              </a:lnSpc>
-              <a:spcAft>
-                <a:spcPts val="0"/>
-              </a:spcAft>
-            </a:pPr>
-            <a:r>
-              <a:rPr sz="1400" b="1">
-                <a:solidFill>
-                  <a:srgbClr val="1D1D1A"/>
-                </a:solidFill>
-                <a:latin typeface="微软雅黑"/>
-                <a:ea typeface="微软雅黑"/>
-              </a:rPr>
-              <a:t>国家大模型 + 葡语语音</a:t>
-            </a:r>
-          </a:p>
-        </p:txBody>
-      </p:sp>
-      <p:sp>
-        <p:nvSpPr>
-          <p:cNvPr id="12" name="Rounded Rectangle 11"/>
-          <p:cNvSpPr/>
-          <p:nvPr/>
-        </p:nvSpPr>
-        <p:spPr>
-          <a:xfrm>
-            <a:off x="9052560" y="2761488"/>
-            <a:ext cx="2651760" cy="822960"/>
-          </a:xfrm>
-          <a:prstGeom prst="roundRect">
-            <a:avLst>
-              <a:gd name="adj" fmla="val 4000"/>
-            </a:avLst>
-          </a:prstGeom>
-          <a:solidFill>
-            <a:srgbClr val="F2F2F2"/>
-          </a:solidFill>
-          <a:ln>
-            <a:noFill/>
-          </a:ln>
-          <a:effectLst/>
-        </p:spPr>
-        <p:style>
-          <a:lnRef idx="1">
-            <a:schemeClr val="accent1"/>
-          </a:lnRef>
-          <a:fillRef idx="3">
-            <a:schemeClr val="accent1"/>
-          </a:fillRef>
-          <a:effectRef idx="2">
-            <a:schemeClr val="accent1"/>
-          </a:effectRef>
-          <a:fontRef idx="minor">
-            <a:schemeClr val="lt1"/>
-          </a:fontRef>
-        </p:style>
-        <p:txBody>
-          <a:bodyPr rtlCol="0" anchor="ctr"/>
-          <a:lstStyle/>
-          <a:p>
-            <a:pPr algn="ctr"/>
-          </a:p>
-        </p:txBody>
-      </p:sp>
-      <p:sp>
-        <p:nvSpPr>
-          <p:cNvPr id="13" name="Oval 12"/>
-          <p:cNvSpPr/>
-          <p:nvPr/>
-        </p:nvSpPr>
-        <p:spPr>
-          <a:xfrm>
-            <a:off x="9235440" y="2999232"/>
-            <a:ext cx="347472" cy="347472"/>
-          </a:xfrm>
-          <a:prstGeom prst="ellipse">
-            <a:avLst/>
-          </a:prstGeom>
-          <a:solidFill>
-            <a:srgbClr val="E9002F"/>
-          </a:solidFill>
-          <a:ln>
-            <a:noFill/>
-          </a:ln>
-          <a:effectLst/>
-        </p:spPr>
-        <p:style>
-          <a:lnRef idx="1">
-            <a:schemeClr val="accent1"/>
-          </a:lnRef>
-          <a:fillRef idx="3">
-            <a:schemeClr val="accent1"/>
-          </a:fillRef>
-          <a:effectRef idx="2">
-            <a:schemeClr val="accent1"/>
-          </a:effectRef>
-          <a:fontRef idx="minor">
-            <a:schemeClr val="lt1"/>
-          </a:fontRef>
-        </p:style>
-        <p:txBody>
-          <a:bodyPr rtlCol="0" anchor="ctr" wrap="square" lIns="0" tIns="0" rIns="0" bIns="0">
-            <a:noAutofit/>
-          </a:bodyPr>
-          <a:lstStyle/>
-          <a:p>
-            <a:pPr algn="ctr">
-              <a:lnSpc>
-                <a:spcPct val="115000"/>
-              </a:lnSpc>
-              <a:spcAft>
-                <a:spcPts val="0"/>
-              </a:spcAft>
-            </a:pPr>
-            <a:r>
-              <a:rPr sz="1100" b="1">
-                <a:solidFill>
-                  <a:srgbClr val="FFFFFF"/>
-                </a:solidFill>
-                <a:latin typeface="微软雅黑"/>
-                <a:ea typeface="微软雅黑"/>
-              </a:rPr>
-              <a:t>2</a:t>
-            </a:r>
-          </a:p>
-        </p:txBody>
-      </p:sp>
-      <p:sp>
-        <p:nvSpPr>
-          <p:cNvPr id="14" name="TextBox 13"/>
-          <p:cNvSpPr txBox="1"/>
-          <p:nvPr/>
-        </p:nvSpPr>
-        <p:spPr>
-          <a:xfrm>
-            <a:off x="9738360" y="2761488"/>
-            <a:ext cx="1874519" cy="822960"/>
-          </a:xfrm>
-          <a:prstGeom prst="rect">
-            <a:avLst/>
-          </a:prstGeom>
-          <a:noFill/>
-        </p:spPr>
-        <p:txBody>
-          <a:bodyPr wrap="square" lIns="0" tIns="0" rIns="0" bIns="0" anchor="ctr">
-            <a:noAutofit/>
-          </a:bodyPr>
-          <a:lstStyle/>
-          <a:p>
-            <a:pPr algn="l">
-              <a:lnSpc>
-                <a:spcPct val="115000"/>
-              </a:lnSpc>
-              <a:spcAft>
-                <a:spcPts val="0"/>
-              </a:spcAft>
-            </a:pPr>
-            <a:r>
-              <a:rPr sz="1400" b="1">
-                <a:solidFill>
-                  <a:srgbClr val="1D1D1A"/>
-                </a:solidFill>
-                <a:latin typeface="微软雅黑"/>
-                <a:ea typeface="微软雅黑"/>
-              </a:rPr>
-              <a:t>国家 APP</a:t>
-            </a:r>
-          </a:p>
-        </p:txBody>
-      </p:sp>
-      <p:sp>
-        <p:nvSpPr>
-          <p:cNvPr id="15" name="Rounded Rectangle 14"/>
-          <p:cNvSpPr/>
-          <p:nvPr/>
-        </p:nvSpPr>
-        <p:spPr>
-          <a:xfrm>
-            <a:off x="9052560" y="3785616"/>
-            <a:ext cx="2651760" cy="822960"/>
-          </a:xfrm>
-          <a:prstGeom prst="roundRect">
-            <a:avLst>
-              <a:gd name="adj" fmla="val 4000"/>
-            </a:avLst>
-          </a:prstGeom>
-          <a:solidFill>
-            <a:srgbClr val="F2F2F2"/>
-          </a:solidFill>
-          <a:ln>
-            <a:noFill/>
-          </a:ln>
-          <a:effectLst/>
-        </p:spPr>
-        <p:style>
-          <a:lnRef idx="1">
-            <a:schemeClr val="accent1"/>
-          </a:lnRef>
-          <a:fillRef idx="3">
-            <a:schemeClr val="accent1"/>
-          </a:fillRef>
-          <a:effectRef idx="2">
-            <a:schemeClr val="accent1"/>
-          </a:effectRef>
-          <a:fontRef idx="minor">
-            <a:schemeClr val="lt1"/>
-          </a:fontRef>
-        </p:style>
-        <p:txBody>
-          <a:bodyPr rtlCol="0" anchor="ctr"/>
-          <a:lstStyle/>
-          <a:p>
-            <a:pPr algn="ctr"/>
-          </a:p>
-        </p:txBody>
-      </p:sp>
-      <p:sp>
-        <p:nvSpPr>
-          <p:cNvPr id="16" name="Oval 15"/>
-          <p:cNvSpPr/>
-          <p:nvPr/>
-        </p:nvSpPr>
-        <p:spPr>
-          <a:xfrm>
-            <a:off x="9235440" y="4023360"/>
-            <a:ext cx="347472" cy="347472"/>
-          </a:xfrm>
-          <a:prstGeom prst="ellipse">
-            <a:avLst/>
-          </a:prstGeom>
-          <a:solidFill>
-            <a:srgbClr val="E9002F"/>
-          </a:solidFill>
-          <a:ln>
-            <a:noFill/>
-          </a:ln>
-          <a:effectLst/>
-        </p:spPr>
-        <p:style>
-          <a:lnRef idx="1">
-            <a:schemeClr val="accent1"/>
-          </a:lnRef>
-          <a:fillRef idx="3">
-            <a:schemeClr val="accent1"/>
-          </a:fillRef>
-          <a:effectRef idx="2">
-            <a:schemeClr val="accent1"/>
-          </a:effectRef>
-          <a:fontRef idx="minor">
-            <a:schemeClr val="lt1"/>
-          </a:fontRef>
-        </p:style>
-        <p:txBody>
-          <a:bodyPr rtlCol="0" anchor="ctr" wrap="square" lIns="0" tIns="0" rIns="0" bIns="0">
-            <a:noAutofit/>
-          </a:bodyPr>
-          <a:lstStyle/>
-          <a:p>
-            <a:pPr algn="ctr">
-              <a:lnSpc>
-                <a:spcPct val="115000"/>
-              </a:lnSpc>
-              <a:spcAft>
-                <a:spcPts val="0"/>
-              </a:spcAft>
-            </a:pPr>
-            <a:r>
-              <a:rPr sz="1100" b="1">
-                <a:solidFill>
-                  <a:srgbClr val="FFFFFF"/>
-                </a:solidFill>
-                <a:latin typeface="微软雅黑"/>
-                <a:ea typeface="微软雅黑"/>
-              </a:rPr>
-              <a:t>3</a:t>
-            </a:r>
-          </a:p>
-        </p:txBody>
-      </p:sp>
-      <p:sp>
-        <p:nvSpPr>
-          <p:cNvPr id="17" name="TextBox 16"/>
-          <p:cNvSpPr txBox="1"/>
-          <p:nvPr/>
-        </p:nvSpPr>
-        <p:spPr>
-          <a:xfrm>
-            <a:off x="9738360" y="3785616"/>
-            <a:ext cx="1874519" cy="822960"/>
-          </a:xfrm>
-          <a:prstGeom prst="rect">
-            <a:avLst/>
-          </a:prstGeom>
-          <a:noFill/>
-        </p:spPr>
-        <p:txBody>
-          <a:bodyPr wrap="square" lIns="0" tIns="0" rIns="0" bIns="0" anchor="ctr">
-            <a:noAutofit/>
-          </a:bodyPr>
-          <a:lstStyle/>
-          <a:p>
-            <a:pPr algn="l">
-              <a:lnSpc>
-                <a:spcPct val="115000"/>
-              </a:lnSpc>
-              <a:spcAft>
-                <a:spcPts val="0"/>
-              </a:spcAft>
-            </a:pPr>
-            <a:r>
-              <a:rPr sz="1400" b="1">
-                <a:solidFill>
-                  <a:srgbClr val="1D1D1A"/>
-                </a:solidFill>
-                <a:latin typeface="微软雅黑"/>
-                <a:ea typeface="微软雅黑"/>
-              </a:rPr>
-              <a:t>行业模型 DLM × 3</a:t>
-            </a:r>
-          </a:p>
-        </p:txBody>
-      </p:sp>
-      <p:sp>
-        <p:nvSpPr>
-          <p:cNvPr id="18" name="Rounded Rectangle 17"/>
-          <p:cNvSpPr/>
-          <p:nvPr/>
-        </p:nvSpPr>
-        <p:spPr>
-          <a:xfrm>
-            <a:off x="9052560" y="4809744"/>
-            <a:ext cx="2651760" cy="685800"/>
-          </a:xfrm>
-          <a:prstGeom prst="roundRect">
-            <a:avLst>
-              <a:gd name="adj" fmla="val 4000"/>
-            </a:avLst>
-          </a:prstGeom>
-          <a:solidFill>
-            <a:srgbClr val="C00000"/>
-          </a:solidFill>
-          <a:ln>
-            <a:noFill/>
-          </a:ln>
-          <a:effectLst/>
-        </p:spPr>
-        <p:style>
-          <a:lnRef idx="1">
-            <a:schemeClr val="accent1"/>
-          </a:lnRef>
-          <a:fillRef idx="3">
-            <a:schemeClr val="accent1"/>
-          </a:fillRef>
-          <a:effectRef idx="2">
-            <a:schemeClr val="accent1"/>
-          </a:effectRef>
-          <a:fontRef idx="minor">
-            <a:schemeClr val="lt1"/>
-          </a:fontRef>
-        </p:style>
-        <p:txBody>
-          <a:bodyPr rtlCol="0" anchor="ctr"/>
-          <a:lstStyle/>
-          <a:p>
-            <a:pPr algn="ctr"/>
-          </a:p>
-        </p:txBody>
-      </p:sp>
-      <p:sp>
-        <p:nvSpPr>
-          <p:cNvPr id="19" name="TextBox 18"/>
-          <p:cNvSpPr txBox="1"/>
-          <p:nvPr/>
-        </p:nvSpPr>
-        <p:spPr>
-          <a:xfrm>
-            <a:off x="9052560" y="4809744"/>
-            <a:ext cx="2651760" cy="685800"/>
-          </a:xfrm>
-          <a:prstGeom prst="rect">
-            <a:avLst/>
-          </a:prstGeom>
-          <a:noFill/>
-        </p:spPr>
-        <p:txBody>
-          <a:bodyPr wrap="square" lIns="0" tIns="0" rIns="0" bIns="0" anchor="ctr">
-            <a:noAutofit/>
-          </a:bodyPr>
-          <a:lstStyle/>
-          <a:p>
-            <a:pPr algn="ctr">
-              <a:lnSpc>
-                <a:spcPct val="115000"/>
-              </a:lnSpc>
-              <a:spcAft>
-                <a:spcPts val="0"/>
-              </a:spcAft>
-            </a:pPr>
-            <a:r>
-              <a:rPr sz="1500" b="1">
-                <a:solidFill>
-                  <a:srgbClr val="FFFFFF"/>
-                </a:solidFill>
-                <a:latin typeface="微软雅黑"/>
-                <a:ea typeface="微软雅黑"/>
-              </a:rPr>
-              <a:t>知识转移</a:t>
-            </a:r>
-          </a:p>
-        </p:txBody>
-      </p:sp>
-    </p:spTree>
-  </p:cSld>
-  <p:clrMapOvr>
-    <a:masterClrMapping/>
-  </p:clrMapOvr>
-</p:sld>
-</file>
-
-<file path=ppt/slides/slide3.xml><?xml version="1.0" encoding="utf-8"?>
-<p:sld xmlns:a="http://schemas.openxmlformats.org/drawingml/2006/main" xmlns:p="http://schemas.openxmlformats.org/presentationml/2006/main" xmlns:r="http://schemas.openxmlformats.org/officeDocument/2006/relationships">
-  <p:cSld>
-    <p:spTree>
-      <p:nvGrpSpPr>
-        <p:cNvPr id="1" name=""/>
-        <p:cNvGrpSpPr/>
-        <p:nvPr/>
-      </p:nvGrpSpPr>
-      <p:grpSpPr/>
-      <p:sp>
-        <p:nvSpPr>
-          <p:cNvPr id="2" name="Subtitle 1"/>
-          <p:cNvSpPr>
-            <a:spLocks noGrp="1"/>
-          </p:cNvSpPr>
-          <p:nvPr>
-            <p:ph type="subTitle" idx="1"/>
-          </p:nvPr>
-        </p:nvSpPr>
-        <p:spPr/>
-        <p:txBody>
-          <a:bodyPr wrap="square" lIns="45720" tIns="0" rIns="45720" bIns="0" anchor="b">
-            <a:noAutofit/>
-          </a:bodyPr>
-          <a:lstStyle/>
-          <a:p>
-            <a:pPr algn="l">
-              <a:lnSpc>
-                <a:spcPct val="115000"/>
-              </a:lnSpc>
-              <a:spcAft>
-                <a:spcPts val="0"/>
-              </a:spcAft>
-            </a:pPr>
             <a:r>
               <a:rPr sz="2200" b="1">
                 <a:solidFill>
@@ -25870,7 +24366,7 @@
 </p:sld>
 </file>
 
-<file path=ppt/slides/slide4.xml><?xml version="1.0" encoding="utf-8"?>
+<file path=ppt/slides/slide3.xml><?xml version="1.0" encoding="utf-8"?>
 <p:sld xmlns:a="http://schemas.openxmlformats.org/drawingml/2006/main" xmlns:p="http://schemas.openxmlformats.org/presentationml/2006/main" xmlns:r="http://schemas.openxmlformats.org/officeDocument/2006/relationships">
   <p:cSld>
     <p:spTree>
@@ -27518,7 +26014,7 @@
 </p:sld>
 </file>
 
-<file path=ppt/slides/slide5.xml><?xml version="1.0" encoding="utf-8"?>
+<file path=ppt/slides/slide4.xml><?xml version="1.0" encoding="utf-8"?>
 <p:sld xmlns:a="http://schemas.openxmlformats.org/drawingml/2006/main" xmlns:p="http://schemas.openxmlformats.org/presentationml/2006/main" xmlns:r="http://schemas.openxmlformats.org/officeDocument/2006/relationships">
   <p:cSld>
     <p:spTree>
@@ -29441,7 +27937,7 @@
 </p:sld>
 </file>
 
-<file path=ppt/slides/slide6.xml><?xml version="1.0" encoding="utf-8"?>
+<file path=ppt/slides/slide5.xml><?xml version="1.0" encoding="utf-8"?>
 <p:sld xmlns:a="http://schemas.openxmlformats.org/drawingml/2006/main" xmlns:p="http://schemas.openxmlformats.org/presentationml/2006/main" xmlns:r="http://schemas.openxmlformats.org/officeDocument/2006/relationships">
   <p:cSld>
     <p:spTree>
@@ -31331,7 +29827,7 @@
 </p:sld>
 </file>
 
-<file path=ppt/slides/slide7.xml><?xml version="1.0" encoding="utf-8"?>
+<file path=ppt/slides/slide6.xml><?xml version="1.0" encoding="utf-8"?>
 <p:sld xmlns:a="http://schemas.openxmlformats.org/drawingml/2006/main" xmlns:p="http://schemas.openxmlformats.org/presentationml/2006/main" xmlns:r="http://schemas.openxmlformats.org/officeDocument/2006/relationships">
   <p:cSld>
     <p:spTree>
@@ -33100,7 +31596,7 @@
 </p:sld>
 </file>
 
-<file path=ppt/slides/slide8.xml><?xml version="1.0" encoding="utf-8"?>
+<file path=ppt/slides/slide7.xml><?xml version="1.0" encoding="utf-8"?>
 <p:sld xmlns:a="http://schemas.openxmlformats.org/drawingml/2006/main" xmlns:p="http://schemas.openxmlformats.org/presentationml/2006/main" xmlns:r="http://schemas.openxmlformats.org/officeDocument/2006/relationships">
   <p:cSld>
     <p:spTree>
@@ -34980,7 +33476,7 @@
 </p:sld>
 </file>
 
-<file path=ppt/slides/slide9.xml><?xml version="1.0" encoding="utf-8"?>
+<file path=ppt/slides/slide8.xml><?xml version="1.0" encoding="utf-8"?>
 <p:sld xmlns:a="http://schemas.openxmlformats.org/drawingml/2006/main" xmlns:p="http://schemas.openxmlformats.org/presentationml/2006/main" xmlns:r="http://schemas.openxmlformats.org/officeDocument/2006/relationships">
   <p:cSld>
     <p:spTree>
@@ -36628,6 +35124,1949 @@
 </p:sld>
 </file>
 
+<file path=ppt/slides/slide9.xml><?xml version="1.0" encoding="utf-8"?>
+<p:sld xmlns:a="http://schemas.openxmlformats.org/drawingml/2006/main" xmlns:p="http://schemas.openxmlformats.org/presentationml/2006/main" xmlns:r="http://schemas.openxmlformats.org/officeDocument/2006/relationships">
+  <p:cSld>
+    <p:spTree>
+      <p:nvGrpSpPr>
+        <p:cNvPr id="1" name=""/>
+        <p:cNvGrpSpPr/>
+        <p:nvPr/>
+      </p:nvGrpSpPr>
+      <p:grpSpPr/>
+      <p:sp>
+        <p:nvSpPr>
+          <p:cNvPr id="2" name="Subtitle 1"/>
+          <p:cNvSpPr>
+            <a:spLocks noGrp="1"/>
+          </p:cNvSpPr>
+          <p:nvPr>
+            <p:ph type="subTitle" idx="1"/>
+          </p:nvPr>
+        </p:nvSpPr>
+        <p:spPr/>
+        <p:txBody>
+          <a:bodyPr wrap="square" lIns="45720" tIns="0" rIns="45720" bIns="0" anchor="b">
+            <a:noAutofit/>
+          </a:bodyPr>
+          <a:lstStyle/>
+          <a:p>
+            <a:pPr algn="l">
+              <a:lnSpc>
+                <a:spcPct val="115000"/>
+              </a:lnSpc>
+              <a:spcAft>
+                <a:spcPts val="0"/>
+              </a:spcAft>
+            </a:pPr>
+            <a:r>
+              <a:rPr sz="2200" b="1">
+                <a:solidFill>
+                  <a:srgbClr val="C00000"/>
+                </a:solidFill>
+                <a:latin typeface="微软雅黑"/>
+                <a:ea typeface="微软雅黑"/>
+              </a:rPr>
+              <a:t>行业模型 DLM：实施条件与数据规格</a:t>
+            </a:r>
+          </a:p>
+        </p:txBody>
+      </p:sp>
+      <p:sp>
+        <p:nvSpPr>
+          <p:cNvPr id="3" name="Rounded Rectangle 2"/>
+          <p:cNvSpPr/>
+          <p:nvPr/>
+        </p:nvSpPr>
+        <p:spPr>
+          <a:xfrm>
+            <a:off x="9902952" y="274320"/>
+            <a:ext cx="1828800" cy="274320"/>
+          </a:xfrm>
+          <a:prstGeom prst="roundRect">
+            <a:avLst>
+              <a:gd name="adj" fmla="val 50000"/>
+            </a:avLst>
+          </a:prstGeom>
+          <a:solidFill>
+            <a:srgbClr val="EFEFEF"/>
+          </a:solidFill>
+          <a:ln w="9525">
+            <a:solidFill>
+              <a:srgbClr val="D9D9D9"/>
+            </a:solidFill>
+          </a:ln>
+          <a:effectLst/>
+        </p:spPr>
+        <p:style>
+          <a:lnRef idx="1">
+            <a:schemeClr val="accent1"/>
+          </a:lnRef>
+          <a:fillRef idx="3">
+            <a:schemeClr val="accent1"/>
+          </a:fillRef>
+          <a:effectRef idx="2">
+            <a:schemeClr val="accent1"/>
+          </a:effectRef>
+          <a:fontRef idx="minor">
+            <a:schemeClr val="lt1"/>
+          </a:fontRef>
+        </p:style>
+        <p:txBody>
+          <a:bodyPr rtlCol="0" anchor="ctr" wrap="square" lIns="36576" tIns="0" rIns="36576" bIns="0">
+            <a:noAutofit/>
+          </a:bodyPr>
+          <a:lstStyle/>
+          <a:p>
+            <a:pPr algn="ctr">
+              <a:lnSpc>
+                <a:spcPct val="115000"/>
+              </a:lnSpc>
+              <a:spcAft>
+                <a:spcPts val="0"/>
+              </a:spcAft>
+            </a:pPr>
+            <a:r>
+              <a:rPr sz="950" b="1">
+                <a:solidFill>
+                  <a:srgbClr val="1D1D1A"/>
+                </a:solidFill>
+                <a:latin typeface="微软雅黑"/>
+                <a:ea typeface="微软雅黑"/>
+              </a:rPr>
+              <a:t>详情 · 按需展开</a:t>
+            </a:r>
+          </a:p>
+        </p:txBody>
+      </p:sp>
+      <p:graphicFrame>
+        <p:nvGraphicFramePr>
+          <p:cNvPr id="4" name="Table 3"/>
+          <p:cNvGraphicFramePr>
+            <a:graphicFrameLocks noGrp="1"/>
+          </p:cNvGraphicFramePr>
+          <p:nvPr/>
+        </p:nvGraphicFramePr>
+        <p:xfrm>
+          <a:off x="457200" y="1051560"/>
+          <a:ext cx="11274552" cy="4315968"/>
+        </p:xfrm>
+        <a:graphic>
+          <a:graphicData uri="http://schemas.openxmlformats.org/drawingml/2006/table">
+            <a:tbl>
+              <a:tblPr firstRow="0" bandRow="0">
+                <a:tableStyleId>{2D5ABB26-0587-4C30-8999-92F81FD0307C}</a:tableStyleId>
+              </a:tblPr>
+              <a:tblGrid>
+                <a:gridCol w="1920240"/>
+                <a:gridCol w="7863840"/>
+                <a:gridCol w="1490472"/>
+              </a:tblGrid>
+              <a:tr h="365760">
+                <a:tc>
+                  <a:txBody>
+                    <a:bodyPr wrap="square" lIns="73152" tIns="18288" rIns="73152" bIns="18288" anchor="ctr">
+                      <a:noAutofit/>
+                    </a:bodyPr>
+                    <a:lstStyle/>
+                    <a:p>
+                      <a:pPr algn="l">
+                        <a:lnSpc>
+                          <a:spcPct val="115000"/>
+                        </a:lnSpc>
+                        <a:spcAft>
+                          <a:spcPts val="0"/>
+                        </a:spcAft>
+                      </a:pPr>
+                      <a:r>
+                        <a:rPr sz="1100" b="1">
+                          <a:solidFill>
+                            <a:srgbClr val="1D1D1A"/>
+                          </a:solidFill>
+                          <a:latin typeface="微软雅黑"/>
+                          <a:ea typeface="微软雅黑"/>
+                        </a:rPr>
+                        <a:t>项目</a:t>
+                      </a:r>
+                    </a:p>
+                  </a:txBody>
+                  <a:tcPr anchor="ctr">
+                    <a:lnL w="6350" cap="flat" cmpd="sng" algn="ctr">
+                      <a:solidFill>
+                        <a:srgbClr val="D9D9D9"/>
+                      </a:solidFill>
+                      <a:prstDash val="solid"/>
+                    </a:lnL>
+                    <a:lnR w="6350" cap="flat" cmpd="sng" algn="ctr">
+                      <a:solidFill>
+                        <a:srgbClr val="D9D9D9"/>
+                      </a:solidFill>
+                      <a:prstDash val="solid"/>
+                    </a:lnR>
+                    <a:lnT w="6350" cap="flat" cmpd="sng" algn="ctr">
+                      <a:solidFill>
+                        <a:srgbClr val="D9D9D9"/>
+                      </a:solidFill>
+                      <a:prstDash val="solid"/>
+                    </a:lnT>
+                    <a:lnB w="6350" cap="flat" cmpd="sng" algn="ctr">
+                      <a:solidFill>
+                        <a:srgbClr val="D9D9D9"/>
+                      </a:solidFill>
+                      <a:prstDash val="solid"/>
+                    </a:lnB>
+                    <a:solidFill>
+                      <a:srgbClr val="E6E6E6"/>
+                    </a:solidFill>
+                  </a:tcPr>
+                </a:tc>
+                <a:tc>
+                  <a:txBody>
+                    <a:bodyPr wrap="square" lIns="73152" tIns="18288" rIns="73152" bIns="18288" anchor="ctr">
+                      <a:noAutofit/>
+                    </a:bodyPr>
+                    <a:lstStyle/>
+                    <a:p>
+                      <a:pPr algn="l">
+                        <a:lnSpc>
+                          <a:spcPct val="115000"/>
+                        </a:lnSpc>
+                        <a:spcAft>
+                          <a:spcPts val="0"/>
+                        </a:spcAft>
+                      </a:pPr>
+                      <a:r>
+                        <a:rPr sz="1100" b="1">
+                          <a:solidFill>
+                            <a:srgbClr val="1D1D1A"/>
+                          </a:solidFill>
+                          <a:latin typeface="微软雅黑"/>
+                          <a:ea typeface="微软雅黑"/>
+                        </a:rPr>
+                        <a:t>内容</a:t>
+                      </a:r>
+                    </a:p>
+                  </a:txBody>
+                  <a:tcPr anchor="ctr">
+                    <a:lnL w="6350" cap="flat" cmpd="sng" algn="ctr">
+                      <a:solidFill>
+                        <a:srgbClr val="D9D9D9"/>
+                      </a:solidFill>
+                      <a:prstDash val="solid"/>
+                    </a:lnL>
+                    <a:lnR w="6350" cap="flat" cmpd="sng" algn="ctr">
+                      <a:solidFill>
+                        <a:srgbClr val="D9D9D9"/>
+                      </a:solidFill>
+                      <a:prstDash val="solid"/>
+                    </a:lnR>
+                    <a:lnT w="6350" cap="flat" cmpd="sng" algn="ctr">
+                      <a:solidFill>
+                        <a:srgbClr val="D9D9D9"/>
+                      </a:solidFill>
+                      <a:prstDash val="solid"/>
+                    </a:lnT>
+                    <a:lnB w="6350" cap="flat" cmpd="sng" algn="ctr">
+                      <a:solidFill>
+                        <a:srgbClr val="D9D9D9"/>
+                      </a:solidFill>
+                      <a:prstDash val="solid"/>
+                    </a:lnB>
+                    <a:solidFill>
+                      <a:srgbClr val="E6E6E6"/>
+                    </a:solidFill>
+                  </a:tcPr>
+                </a:tc>
+                <a:tc>
+                  <a:txBody>
+                    <a:bodyPr wrap="square" lIns="73152" tIns="18288" rIns="73152" bIns="18288" anchor="ctr">
+                      <a:noAutofit/>
+                    </a:bodyPr>
+                    <a:lstStyle/>
+                    <a:p>
+                      <a:pPr algn="l">
+                        <a:lnSpc>
+                          <a:spcPct val="115000"/>
+                        </a:lnSpc>
+                        <a:spcAft>
+                          <a:spcPts val="0"/>
+                        </a:spcAft>
+                      </a:pPr>
+                      <a:r>
+                        <a:rPr sz="1100" b="1">
+                          <a:solidFill>
+                            <a:srgbClr val="1D1D1A"/>
+                          </a:solidFill>
+                          <a:latin typeface="微软雅黑"/>
+                          <a:ea typeface="微软雅黑"/>
+                        </a:rPr>
+                        <a:t>来源</a:t>
+                      </a:r>
+                    </a:p>
+                  </a:txBody>
+                  <a:tcPr anchor="ctr">
+                    <a:lnL w="6350" cap="flat" cmpd="sng" algn="ctr">
+                      <a:solidFill>
+                        <a:srgbClr val="D9D9D9"/>
+                      </a:solidFill>
+                      <a:prstDash val="solid"/>
+                    </a:lnL>
+                    <a:lnR w="6350" cap="flat" cmpd="sng" algn="ctr">
+                      <a:solidFill>
+                        <a:srgbClr val="D9D9D9"/>
+                      </a:solidFill>
+                      <a:prstDash val="solid"/>
+                    </a:lnR>
+                    <a:lnT w="6350" cap="flat" cmpd="sng" algn="ctr">
+                      <a:solidFill>
+                        <a:srgbClr val="D9D9D9"/>
+                      </a:solidFill>
+                      <a:prstDash val="solid"/>
+                    </a:lnT>
+                    <a:lnB w="6350" cap="flat" cmpd="sng" algn="ctr">
+                      <a:solidFill>
+                        <a:srgbClr val="D9D9D9"/>
+                      </a:solidFill>
+                      <a:prstDash val="solid"/>
+                    </a:lnB>
+                    <a:solidFill>
+                      <a:srgbClr val="E6E6E6"/>
+                    </a:solidFill>
+                  </a:tcPr>
+                </a:tc>
+              </a:tr>
+              <a:tr h="438912">
+                <a:tc>
+                  <a:txBody>
+                    <a:bodyPr wrap="square" lIns="73152" tIns="36576" rIns="73152" bIns="36576" anchor="ctr">
+                      <a:noAutofit/>
+                    </a:bodyPr>
+                    <a:lstStyle/>
+                    <a:p>
+                      <a:pPr algn="l">
+                        <a:lnSpc>
+                          <a:spcPct val="110000"/>
+                        </a:lnSpc>
+                        <a:spcAft>
+                          <a:spcPts val="100"/>
+                        </a:spcAft>
+                      </a:pPr>
+                      <a:r>
+                        <a:rPr sz="1050" b="1">
+                          <a:solidFill>
+                            <a:srgbClr val="1D1D1A"/>
+                          </a:solidFill>
+                          <a:latin typeface="微软雅黑"/>
+                          <a:ea typeface="微软雅黑"/>
+                        </a:rPr>
+                        <a:t>数量与范围</a:t>
+                      </a:r>
+                    </a:p>
+                  </a:txBody>
+                  <a:tcPr anchor="ctr">
+                    <a:lnL w="6350" cap="flat" cmpd="sng" algn="ctr">
+                      <a:solidFill>
+                        <a:srgbClr val="D9D9D9"/>
+                      </a:solidFill>
+                      <a:prstDash val="solid"/>
+                    </a:lnL>
+                    <a:lnR w="6350" cap="flat" cmpd="sng" algn="ctr">
+                      <a:solidFill>
+                        <a:srgbClr val="D9D9D9"/>
+                      </a:solidFill>
+                      <a:prstDash val="solid"/>
+                    </a:lnR>
+                    <a:lnT w="6350" cap="flat" cmpd="sng" algn="ctr">
+                      <a:solidFill>
+                        <a:srgbClr val="D9D9D9"/>
+                      </a:solidFill>
+                      <a:prstDash val="solid"/>
+                    </a:lnT>
+                    <a:lnB w="6350" cap="flat" cmpd="sng" algn="ctr">
+                      <a:solidFill>
+                        <a:srgbClr val="D9D9D9"/>
+                      </a:solidFill>
+                      <a:prstDash val="solid"/>
+                    </a:lnB>
+                    <a:solidFill>
+                      <a:srgbClr val="FFFFFF"/>
+                    </a:solidFill>
+                  </a:tcPr>
+                </a:tc>
+                <a:tc>
+                  <a:txBody>
+                    <a:bodyPr wrap="square" lIns="73152" tIns="36576" rIns="73152" bIns="36576" anchor="ctr">
+                      <a:noAutofit/>
+                    </a:bodyPr>
+                    <a:lstStyle/>
+                    <a:p>
+                      <a:pPr algn="l">
+                        <a:lnSpc>
+                          <a:spcPct val="110000"/>
+                        </a:lnSpc>
+                        <a:spcAft>
+                          <a:spcPts val="100"/>
+                        </a:spcAft>
+                      </a:pPr>
+                      <a:r>
+                        <a:rPr sz="1050" b="0">
+                          <a:solidFill>
+                            <a:srgbClr val="333333"/>
+                          </a:solidFill>
+                          <a:latin typeface="微软雅黑"/>
+                          <a:ea typeface="微软雅黑"/>
+                        </a:rPr>
+                        <a:t>3 个行业模型；每个面向 1 个边界清晰的固定业务场景，含业务目标、目标用户、输入输出与使用边界</a:t>
+                      </a:r>
+                    </a:p>
+                  </a:txBody>
+                  <a:tcPr anchor="ctr">
+                    <a:lnL w="6350" cap="flat" cmpd="sng" algn="ctr">
+                      <a:solidFill>
+                        <a:srgbClr val="D9D9D9"/>
+                      </a:solidFill>
+                      <a:prstDash val="solid"/>
+                    </a:lnL>
+                    <a:lnR w="6350" cap="flat" cmpd="sng" algn="ctr">
+                      <a:solidFill>
+                        <a:srgbClr val="D9D9D9"/>
+                      </a:solidFill>
+                      <a:prstDash val="solid"/>
+                    </a:lnR>
+                    <a:lnT w="6350" cap="flat" cmpd="sng" algn="ctr">
+                      <a:solidFill>
+                        <a:srgbClr val="D9D9D9"/>
+                      </a:solidFill>
+                      <a:prstDash val="solid"/>
+                    </a:lnT>
+                    <a:lnB w="6350" cap="flat" cmpd="sng" algn="ctr">
+                      <a:solidFill>
+                        <a:srgbClr val="D9D9D9"/>
+                      </a:solidFill>
+                      <a:prstDash val="solid"/>
+                    </a:lnB>
+                    <a:solidFill>
+                      <a:srgbClr val="FFFFFF"/>
+                    </a:solidFill>
+                  </a:tcPr>
+                </a:tc>
+                <a:tc>
+                  <a:txBody>
+                    <a:bodyPr wrap="square" lIns="73152" tIns="36576" rIns="73152" bIns="36576" anchor="ctr">
+                      <a:noAutofit/>
+                    </a:bodyPr>
+                    <a:lstStyle/>
+                    <a:p>
+                      <a:pPr algn="l">
+                        <a:lnSpc>
+                          <a:spcPct val="110000"/>
+                        </a:lnSpc>
+                        <a:spcAft>
+                          <a:spcPts val="100"/>
+                        </a:spcAft>
+                      </a:pPr>
+                      <a:r>
+                        <a:rPr sz="1050" b="0">
+                          <a:solidFill>
+                            <a:srgbClr val="333333"/>
+                          </a:solidFill>
+                          <a:latin typeface="微软雅黑"/>
+                          <a:ea typeface="微软雅黑"/>
+                        </a:rPr>
+                        <a:t>最新口径（8/13 为 1 个）</a:t>
+                      </a:r>
+                    </a:p>
+                  </a:txBody>
+                  <a:tcPr anchor="ctr">
+                    <a:lnL w="6350" cap="flat" cmpd="sng" algn="ctr">
+                      <a:solidFill>
+                        <a:srgbClr val="D9D9D9"/>
+                      </a:solidFill>
+                      <a:prstDash val="solid"/>
+                    </a:lnL>
+                    <a:lnR w="6350" cap="flat" cmpd="sng" algn="ctr">
+                      <a:solidFill>
+                        <a:srgbClr val="D9D9D9"/>
+                      </a:solidFill>
+                      <a:prstDash val="solid"/>
+                    </a:lnR>
+                    <a:lnT w="6350" cap="flat" cmpd="sng" algn="ctr">
+                      <a:solidFill>
+                        <a:srgbClr val="D9D9D9"/>
+                      </a:solidFill>
+                      <a:prstDash val="solid"/>
+                    </a:lnT>
+                    <a:lnB w="6350" cap="flat" cmpd="sng" algn="ctr">
+                      <a:solidFill>
+                        <a:srgbClr val="D9D9D9"/>
+                      </a:solidFill>
+                      <a:prstDash val="solid"/>
+                    </a:lnB>
+                    <a:solidFill>
+                      <a:srgbClr val="FFFFFF"/>
+                    </a:solidFill>
+                  </a:tcPr>
+                </a:tc>
+              </a:tr>
+              <a:tr h="438912">
+                <a:tc>
+                  <a:txBody>
+                    <a:bodyPr wrap="square" lIns="73152" tIns="36576" rIns="73152" bIns="36576" anchor="ctr">
+                      <a:noAutofit/>
+                    </a:bodyPr>
+                    <a:lstStyle/>
+                    <a:p>
+                      <a:pPr algn="l">
+                        <a:lnSpc>
+                          <a:spcPct val="110000"/>
+                        </a:lnSpc>
+                        <a:spcAft>
+                          <a:spcPts val="100"/>
+                        </a:spcAft>
+                      </a:pPr>
+                      <a:r>
+                        <a:rPr sz="1050" b="1">
+                          <a:solidFill>
+                            <a:srgbClr val="1D1D1A"/>
+                          </a:solidFill>
+                          <a:latin typeface="微软雅黑"/>
+                          <a:ea typeface="微软雅黑"/>
+                        </a:rPr>
+                        <a:t>基础模型</a:t>
+                      </a:r>
+                    </a:p>
+                  </a:txBody>
+                  <a:tcPr anchor="ctr">
+                    <a:lnL w="6350" cap="flat" cmpd="sng" algn="ctr">
+                      <a:solidFill>
+                        <a:srgbClr val="D9D9D9"/>
+                      </a:solidFill>
+                      <a:prstDash val="solid"/>
+                    </a:lnL>
+                    <a:lnR w="6350" cap="flat" cmpd="sng" algn="ctr">
+                      <a:solidFill>
+                        <a:srgbClr val="D9D9D9"/>
+                      </a:solidFill>
+                      <a:prstDash val="solid"/>
+                    </a:lnR>
+                    <a:lnT w="6350" cap="flat" cmpd="sng" algn="ctr">
+                      <a:solidFill>
+                        <a:srgbClr val="D9D9D9"/>
+                      </a:solidFill>
+                      <a:prstDash val="solid"/>
+                    </a:lnT>
+                    <a:lnB w="6350" cap="flat" cmpd="sng" algn="ctr">
+                      <a:solidFill>
+                        <a:srgbClr val="D9D9D9"/>
+                      </a:solidFill>
+                      <a:prstDash val="solid"/>
+                    </a:lnB>
+                    <a:solidFill>
+                      <a:srgbClr val="FFFFFF"/>
+                    </a:solidFill>
+                  </a:tcPr>
+                </a:tc>
+                <a:tc>
+                  <a:txBody>
+                    <a:bodyPr wrap="square" lIns="73152" tIns="36576" rIns="73152" bIns="36576" anchor="ctr">
+                      <a:noAutofit/>
+                    </a:bodyPr>
+                    <a:lstStyle/>
+                    <a:p>
+                      <a:pPr algn="l">
+                        <a:lnSpc>
+                          <a:spcPct val="110000"/>
+                        </a:lnSpc>
+                        <a:spcAft>
+                          <a:spcPts val="100"/>
+                        </a:spcAft>
+                      </a:pPr>
+                      <a:r>
+                        <a:rPr sz="1050" b="0">
+                          <a:solidFill>
+                            <a:srgbClr val="333333"/>
+                          </a:solidFill>
+                          <a:latin typeface="微软雅黑"/>
+                          <a:ea typeface="微软雅黑"/>
+                        </a:rPr>
+                        <a:t>70B 参数以内的星火模型或主流开源模型（DeepSeek、Qwen）；采用第三方开源基座时 RNP 需确保使用、修改及再训练权利</a:t>
+                      </a:r>
+                    </a:p>
+                  </a:txBody>
+                  <a:tcPr anchor="ctr">
+                    <a:lnL w="6350" cap="flat" cmpd="sng" algn="ctr">
+                      <a:solidFill>
+                        <a:srgbClr val="D9D9D9"/>
+                      </a:solidFill>
+                      <a:prstDash val="solid"/>
+                    </a:lnL>
+                    <a:lnR w="6350" cap="flat" cmpd="sng" algn="ctr">
+                      <a:solidFill>
+                        <a:srgbClr val="D9D9D9"/>
+                      </a:solidFill>
+                      <a:prstDash val="solid"/>
+                    </a:lnR>
+                    <a:lnT w="6350" cap="flat" cmpd="sng" algn="ctr">
+                      <a:solidFill>
+                        <a:srgbClr val="D9D9D9"/>
+                      </a:solidFill>
+                      <a:prstDash val="solid"/>
+                    </a:lnT>
+                    <a:lnB w="6350" cap="flat" cmpd="sng" algn="ctr">
+                      <a:solidFill>
+                        <a:srgbClr val="D9D9D9"/>
+                      </a:solidFill>
+                      <a:prstDash val="solid"/>
+                    </a:lnB>
+                    <a:solidFill>
+                      <a:srgbClr val="FFFFFF"/>
+                    </a:solidFill>
+                  </a:tcPr>
+                </a:tc>
+                <a:tc>
+                  <a:txBody>
+                    <a:bodyPr wrap="square" lIns="73152" tIns="36576" rIns="73152" bIns="36576" anchor="ctr">
+                      <a:noAutofit/>
+                    </a:bodyPr>
+                    <a:lstStyle/>
+                    <a:p>
+                      <a:pPr algn="l">
+                        <a:lnSpc>
+                          <a:spcPct val="110000"/>
+                        </a:lnSpc>
+                        <a:spcAft>
+                          <a:spcPts val="100"/>
+                        </a:spcAft>
+                      </a:pPr>
+                      <a:r>
+                        <a:rPr sz="1050" b="0">
+                          <a:solidFill>
+                            <a:srgbClr val="333333"/>
+                          </a:solidFill>
+                          <a:latin typeface="微软雅黑"/>
+                          <a:ea typeface="微软雅黑"/>
+                        </a:rPr>
+                        <a:t>8/13 答复</a:t>
+                      </a:r>
+                    </a:p>
+                  </a:txBody>
+                  <a:tcPr anchor="ctr">
+                    <a:lnL w="6350" cap="flat" cmpd="sng" algn="ctr">
+                      <a:solidFill>
+                        <a:srgbClr val="D9D9D9"/>
+                      </a:solidFill>
+                      <a:prstDash val="solid"/>
+                    </a:lnL>
+                    <a:lnR w="6350" cap="flat" cmpd="sng" algn="ctr">
+                      <a:solidFill>
+                        <a:srgbClr val="D9D9D9"/>
+                      </a:solidFill>
+                      <a:prstDash val="solid"/>
+                    </a:lnR>
+                    <a:lnT w="6350" cap="flat" cmpd="sng" algn="ctr">
+                      <a:solidFill>
+                        <a:srgbClr val="D9D9D9"/>
+                      </a:solidFill>
+                      <a:prstDash val="solid"/>
+                    </a:lnT>
+                    <a:lnB w="6350" cap="flat" cmpd="sng" algn="ctr">
+                      <a:solidFill>
+                        <a:srgbClr val="D9D9D9"/>
+                      </a:solidFill>
+                      <a:prstDash val="solid"/>
+                    </a:lnB>
+                    <a:solidFill>
+                      <a:srgbClr val="FFFFFF"/>
+                    </a:solidFill>
+                  </a:tcPr>
+                </a:tc>
+              </a:tr>
+              <a:tr h="438912">
+                <a:tc>
+                  <a:txBody>
+                    <a:bodyPr wrap="square" lIns="73152" tIns="36576" rIns="73152" bIns="36576" anchor="ctr">
+                      <a:noAutofit/>
+                    </a:bodyPr>
+                    <a:lstStyle/>
+                    <a:p>
+                      <a:pPr algn="l">
+                        <a:lnSpc>
+                          <a:spcPct val="110000"/>
+                        </a:lnSpc>
+                        <a:spcAft>
+                          <a:spcPts val="100"/>
+                        </a:spcAft>
+                      </a:pPr>
+                      <a:r>
+                        <a:rPr sz="1050" b="1">
+                          <a:solidFill>
+                            <a:srgbClr val="1D1D1A"/>
+                          </a:solidFill>
+                          <a:latin typeface="微软雅黑"/>
+                          <a:ea typeface="微软雅黑"/>
+                        </a:rPr>
+                        <a:t>数据规模参考</a:t>
+                      </a:r>
+                    </a:p>
+                  </a:txBody>
+                  <a:tcPr anchor="ctr">
+                    <a:lnL w="6350" cap="flat" cmpd="sng" algn="ctr">
+                      <a:solidFill>
+                        <a:srgbClr val="D9D9D9"/>
+                      </a:solidFill>
+                      <a:prstDash val="solid"/>
+                    </a:lnL>
+                    <a:lnR w="6350" cap="flat" cmpd="sng" algn="ctr">
+                      <a:solidFill>
+                        <a:srgbClr val="D9D9D9"/>
+                      </a:solidFill>
+                      <a:prstDash val="solid"/>
+                    </a:lnR>
+                    <a:lnT w="6350" cap="flat" cmpd="sng" algn="ctr">
+                      <a:solidFill>
+                        <a:srgbClr val="D9D9D9"/>
+                      </a:solidFill>
+                      <a:prstDash val="solid"/>
+                    </a:lnT>
+                    <a:lnB w="6350" cap="flat" cmpd="sng" algn="ctr">
+                      <a:solidFill>
+                        <a:srgbClr val="D9D9D9"/>
+                      </a:solidFill>
+                      <a:prstDash val="solid"/>
+                    </a:lnB>
+                    <a:solidFill>
+                      <a:srgbClr val="FFFFFF"/>
+                    </a:solidFill>
+                  </a:tcPr>
+                </a:tc>
+                <a:tc>
+                  <a:txBody>
+                    <a:bodyPr wrap="square" lIns="73152" tIns="36576" rIns="73152" bIns="36576" anchor="ctr">
+                      <a:noAutofit/>
+                    </a:bodyPr>
+                    <a:lstStyle/>
+                    <a:p>
+                      <a:pPr algn="l">
+                        <a:lnSpc>
+                          <a:spcPct val="110000"/>
+                        </a:lnSpc>
+                        <a:spcAft>
+                          <a:spcPts val="100"/>
+                        </a:spcAft>
+                      </a:pPr>
+                      <a:r>
+                        <a:rPr sz="1050" b="0">
+                          <a:solidFill>
+                            <a:srgbClr val="333333"/>
+                          </a:solidFill>
+                          <a:latin typeface="微软雅黑"/>
+                          <a:ea typeface="微软雅黑"/>
+                        </a:rPr>
+                        <a:t>LoRA 微调最少约 200–1k 条，建议 5k–50k 条；SFT 微调最少约 1k–5k 条，建议 20k–200k+ 条</a:t>
+                      </a:r>
+                    </a:p>
+                  </a:txBody>
+                  <a:tcPr anchor="ctr">
+                    <a:lnL w="6350" cap="flat" cmpd="sng" algn="ctr">
+                      <a:solidFill>
+                        <a:srgbClr val="D9D9D9"/>
+                      </a:solidFill>
+                      <a:prstDash val="solid"/>
+                    </a:lnL>
+                    <a:lnR w="6350" cap="flat" cmpd="sng" algn="ctr">
+                      <a:solidFill>
+                        <a:srgbClr val="D9D9D9"/>
+                      </a:solidFill>
+                      <a:prstDash val="solid"/>
+                    </a:lnR>
+                    <a:lnT w="6350" cap="flat" cmpd="sng" algn="ctr">
+                      <a:solidFill>
+                        <a:srgbClr val="D9D9D9"/>
+                      </a:solidFill>
+                      <a:prstDash val="solid"/>
+                    </a:lnT>
+                    <a:lnB w="6350" cap="flat" cmpd="sng" algn="ctr">
+                      <a:solidFill>
+                        <a:srgbClr val="D9D9D9"/>
+                      </a:solidFill>
+                      <a:prstDash val="solid"/>
+                    </a:lnB>
+                    <a:solidFill>
+                      <a:srgbClr val="FFFFFF"/>
+                    </a:solidFill>
+                  </a:tcPr>
+                </a:tc>
+                <a:tc>
+                  <a:txBody>
+                    <a:bodyPr wrap="square" lIns="73152" tIns="36576" rIns="73152" bIns="36576" anchor="ctr">
+                      <a:noAutofit/>
+                    </a:bodyPr>
+                    <a:lstStyle/>
+                    <a:p>
+                      <a:pPr algn="l">
+                        <a:lnSpc>
+                          <a:spcPct val="110000"/>
+                        </a:lnSpc>
+                        <a:spcAft>
+                          <a:spcPts val="100"/>
+                        </a:spcAft>
+                      </a:pPr>
+                      <a:r>
+                        <a:rPr sz="1050" b="0">
+                          <a:solidFill>
+                            <a:srgbClr val="333333"/>
+                          </a:solidFill>
+                          <a:latin typeface="微软雅黑"/>
+                          <a:ea typeface="微软雅黑"/>
+                        </a:rPr>
+                        <a:t>8/13 答复</a:t>
+                      </a:r>
+                    </a:p>
+                  </a:txBody>
+                  <a:tcPr anchor="ctr">
+                    <a:lnL w="6350" cap="flat" cmpd="sng" algn="ctr">
+                      <a:solidFill>
+                        <a:srgbClr val="D9D9D9"/>
+                      </a:solidFill>
+                      <a:prstDash val="solid"/>
+                    </a:lnL>
+                    <a:lnR w="6350" cap="flat" cmpd="sng" algn="ctr">
+                      <a:solidFill>
+                        <a:srgbClr val="D9D9D9"/>
+                      </a:solidFill>
+                      <a:prstDash val="solid"/>
+                    </a:lnR>
+                    <a:lnT w="6350" cap="flat" cmpd="sng" algn="ctr">
+                      <a:solidFill>
+                        <a:srgbClr val="D9D9D9"/>
+                      </a:solidFill>
+                      <a:prstDash val="solid"/>
+                    </a:lnT>
+                    <a:lnB w="6350" cap="flat" cmpd="sng" algn="ctr">
+                      <a:solidFill>
+                        <a:srgbClr val="D9D9D9"/>
+                      </a:solidFill>
+                      <a:prstDash val="solid"/>
+                    </a:lnB>
+                    <a:solidFill>
+                      <a:srgbClr val="FFFFFF"/>
+                    </a:solidFill>
+                  </a:tcPr>
+                </a:tc>
+              </a:tr>
+              <a:tr h="438912">
+                <a:tc>
+                  <a:txBody>
+                    <a:bodyPr wrap="square" lIns="73152" tIns="36576" rIns="73152" bIns="36576" anchor="ctr">
+                      <a:noAutofit/>
+                    </a:bodyPr>
+                    <a:lstStyle/>
+                    <a:p>
+                      <a:pPr algn="l">
+                        <a:lnSpc>
+                          <a:spcPct val="110000"/>
+                        </a:lnSpc>
+                        <a:spcAft>
+                          <a:spcPts val="100"/>
+                        </a:spcAft>
+                      </a:pPr>
+                      <a:r>
+                        <a:rPr sz="1050" b="1">
+                          <a:solidFill>
+                            <a:srgbClr val="1D1D1A"/>
+                          </a:solidFill>
+                          <a:latin typeface="微软雅黑"/>
+                          <a:ea typeface="微软雅黑"/>
+                        </a:rPr>
+                        <a:t>RNP 数据责任</a:t>
+                      </a:r>
+                    </a:p>
+                  </a:txBody>
+                  <a:tcPr anchor="ctr">
+                    <a:lnL w="6350" cap="flat" cmpd="sng" algn="ctr">
+                      <a:solidFill>
+                        <a:srgbClr val="D9D9D9"/>
+                      </a:solidFill>
+                      <a:prstDash val="solid"/>
+                    </a:lnL>
+                    <a:lnR w="6350" cap="flat" cmpd="sng" algn="ctr">
+                      <a:solidFill>
+                        <a:srgbClr val="D9D9D9"/>
+                      </a:solidFill>
+                      <a:prstDash val="solid"/>
+                    </a:lnR>
+                    <a:lnT w="6350" cap="flat" cmpd="sng" algn="ctr">
+                      <a:solidFill>
+                        <a:srgbClr val="D9D9D9"/>
+                      </a:solidFill>
+                      <a:prstDash val="solid"/>
+                    </a:lnT>
+                    <a:lnB w="6350" cap="flat" cmpd="sng" algn="ctr">
+                      <a:solidFill>
+                        <a:srgbClr val="D9D9D9"/>
+                      </a:solidFill>
+                      <a:prstDash val="solid"/>
+                    </a:lnB>
+                    <a:solidFill>
+                      <a:srgbClr val="FFFFFF"/>
+                    </a:solidFill>
+                  </a:tcPr>
+                </a:tc>
+                <a:tc>
+                  <a:txBody>
+                    <a:bodyPr wrap="square" lIns="73152" tIns="36576" rIns="73152" bIns="36576" anchor="ctr">
+                      <a:noAutofit/>
+                    </a:bodyPr>
+                    <a:lstStyle/>
+                    <a:p>
+                      <a:pPr algn="l">
+                        <a:lnSpc>
+                          <a:spcPct val="110000"/>
+                        </a:lnSpc>
+                        <a:spcAft>
+                          <a:spcPts val="100"/>
+                        </a:spcAft>
+                      </a:pPr>
+                      <a:r>
+                        <a:rPr sz="1050" b="0">
+                          <a:solidFill>
+                            <a:srgbClr val="333333"/>
+                          </a:solidFill>
+                          <a:latin typeface="微软雅黑"/>
+                          <a:ea typeface="微软雅黑"/>
+                        </a:rPr>
+                        <a:t>训练、标注、独立评测数据的合法使用权；采集、采购、清洗、标注、翻译、来源授权、内容审核及 LGPD 合规</a:t>
+                      </a:r>
+                    </a:p>
+                  </a:txBody>
+                  <a:tcPr anchor="ctr">
+                    <a:lnL w="6350" cap="flat" cmpd="sng" algn="ctr">
+                      <a:solidFill>
+                        <a:srgbClr val="D9D9D9"/>
+                      </a:solidFill>
+                      <a:prstDash val="solid"/>
+                    </a:lnL>
+                    <a:lnR w="6350" cap="flat" cmpd="sng" algn="ctr">
+                      <a:solidFill>
+                        <a:srgbClr val="D9D9D9"/>
+                      </a:solidFill>
+                      <a:prstDash val="solid"/>
+                    </a:lnR>
+                    <a:lnT w="6350" cap="flat" cmpd="sng" algn="ctr">
+                      <a:solidFill>
+                        <a:srgbClr val="D9D9D9"/>
+                      </a:solidFill>
+                      <a:prstDash val="solid"/>
+                    </a:lnT>
+                    <a:lnB w="6350" cap="flat" cmpd="sng" algn="ctr">
+                      <a:solidFill>
+                        <a:srgbClr val="D9D9D9"/>
+                      </a:solidFill>
+                      <a:prstDash val="solid"/>
+                    </a:lnB>
+                    <a:solidFill>
+                      <a:srgbClr val="FFFFFF"/>
+                    </a:solidFill>
+                  </a:tcPr>
+                </a:tc>
+                <a:tc>
+                  <a:txBody>
+                    <a:bodyPr wrap="square" lIns="73152" tIns="36576" rIns="73152" bIns="36576" anchor="ctr">
+                      <a:noAutofit/>
+                    </a:bodyPr>
+                    <a:lstStyle/>
+                    <a:p>
+                      <a:pPr algn="l">
+                        <a:lnSpc>
+                          <a:spcPct val="110000"/>
+                        </a:lnSpc>
+                        <a:spcAft>
+                          <a:spcPts val="100"/>
+                        </a:spcAft>
+                      </a:pPr>
+                      <a:r>
+                        <a:rPr sz="1050" b="0">
+                          <a:solidFill>
+                            <a:srgbClr val="333333"/>
+                          </a:solidFill>
+                          <a:latin typeface="微软雅黑"/>
+                          <a:ea typeface="微软雅黑"/>
+                        </a:rPr>
+                        <a:t>8/13 答复</a:t>
+                      </a:r>
+                    </a:p>
+                  </a:txBody>
+                  <a:tcPr anchor="ctr">
+                    <a:lnL w="6350" cap="flat" cmpd="sng" algn="ctr">
+                      <a:solidFill>
+                        <a:srgbClr val="D9D9D9"/>
+                      </a:solidFill>
+                      <a:prstDash val="solid"/>
+                    </a:lnL>
+                    <a:lnR w="6350" cap="flat" cmpd="sng" algn="ctr">
+                      <a:solidFill>
+                        <a:srgbClr val="D9D9D9"/>
+                      </a:solidFill>
+                      <a:prstDash val="solid"/>
+                    </a:lnR>
+                    <a:lnT w="6350" cap="flat" cmpd="sng" algn="ctr">
+                      <a:solidFill>
+                        <a:srgbClr val="D9D9D9"/>
+                      </a:solidFill>
+                      <a:prstDash val="solid"/>
+                    </a:lnT>
+                    <a:lnB w="6350" cap="flat" cmpd="sng" algn="ctr">
+                      <a:solidFill>
+                        <a:srgbClr val="D9D9D9"/>
+                      </a:solidFill>
+                      <a:prstDash val="solid"/>
+                    </a:lnB>
+                    <a:solidFill>
+                      <a:srgbClr val="FFFFFF"/>
+                    </a:solidFill>
+                  </a:tcPr>
+                </a:tc>
+              </a:tr>
+              <a:tr h="438912">
+                <a:tc>
+                  <a:txBody>
+                    <a:bodyPr wrap="square" lIns="73152" tIns="36576" rIns="73152" bIns="36576" anchor="ctr">
+                      <a:noAutofit/>
+                    </a:bodyPr>
+                    <a:lstStyle/>
+                    <a:p>
+                      <a:pPr algn="l">
+                        <a:lnSpc>
+                          <a:spcPct val="110000"/>
+                        </a:lnSpc>
+                        <a:spcAft>
+                          <a:spcPts val="100"/>
+                        </a:spcAft>
+                      </a:pPr>
+                      <a:r>
+                        <a:rPr sz="1050" b="1">
+                          <a:solidFill>
+                            <a:srgbClr val="1D1D1A"/>
+                          </a:solidFill>
+                          <a:latin typeface="微软雅黑"/>
+                          <a:ea typeface="微软雅黑"/>
+                        </a:rPr>
+                        <a:t>RNP 专家资源</a:t>
+                      </a:r>
+                    </a:p>
+                  </a:txBody>
+                  <a:tcPr anchor="ctr">
+                    <a:lnL w="6350" cap="flat" cmpd="sng" algn="ctr">
+                      <a:solidFill>
+                        <a:srgbClr val="D9D9D9"/>
+                      </a:solidFill>
+                      <a:prstDash val="solid"/>
+                    </a:lnL>
+                    <a:lnR w="6350" cap="flat" cmpd="sng" algn="ctr">
+                      <a:solidFill>
+                        <a:srgbClr val="D9D9D9"/>
+                      </a:solidFill>
+                      <a:prstDash val="solid"/>
+                    </a:lnR>
+                    <a:lnT w="6350" cap="flat" cmpd="sng" algn="ctr">
+                      <a:solidFill>
+                        <a:srgbClr val="D9D9D9"/>
+                      </a:solidFill>
+                      <a:prstDash val="solid"/>
+                    </a:lnT>
+                    <a:lnB w="6350" cap="flat" cmpd="sng" algn="ctr">
+                      <a:solidFill>
+                        <a:srgbClr val="D9D9D9"/>
+                      </a:solidFill>
+                      <a:prstDash val="solid"/>
+                    </a:lnB>
+                    <a:solidFill>
+                      <a:srgbClr val="FFFFFF"/>
+                    </a:solidFill>
+                  </a:tcPr>
+                </a:tc>
+                <a:tc>
+                  <a:txBody>
+                    <a:bodyPr wrap="square" lIns="73152" tIns="36576" rIns="73152" bIns="36576" anchor="ctr">
+                      <a:noAutofit/>
+                    </a:bodyPr>
+                    <a:lstStyle/>
+                    <a:p>
+                      <a:pPr algn="l">
+                        <a:lnSpc>
+                          <a:spcPct val="110000"/>
+                        </a:lnSpc>
+                        <a:spcAft>
+                          <a:spcPts val="100"/>
+                        </a:spcAft>
+                      </a:pPr>
+                      <a:r>
+                        <a:rPr sz="1050" b="0">
+                          <a:solidFill>
+                            <a:srgbClr val="333333"/>
+                          </a:solidFill>
+                          <a:latin typeface="微软雅黑"/>
+                          <a:ea typeface="微软雅黑"/>
+                        </a:rPr>
+                        <a:t>巴西葡萄牙语、行业、安全及法律合规本地专家</a:t>
+                      </a:r>
+                    </a:p>
+                  </a:txBody>
+                  <a:tcPr anchor="ctr">
+                    <a:lnL w="6350" cap="flat" cmpd="sng" algn="ctr">
+                      <a:solidFill>
+                        <a:srgbClr val="D9D9D9"/>
+                      </a:solidFill>
+                      <a:prstDash val="solid"/>
+                    </a:lnL>
+                    <a:lnR w="6350" cap="flat" cmpd="sng" algn="ctr">
+                      <a:solidFill>
+                        <a:srgbClr val="D9D9D9"/>
+                      </a:solidFill>
+                      <a:prstDash val="solid"/>
+                    </a:lnR>
+                    <a:lnT w="6350" cap="flat" cmpd="sng" algn="ctr">
+                      <a:solidFill>
+                        <a:srgbClr val="D9D9D9"/>
+                      </a:solidFill>
+                      <a:prstDash val="solid"/>
+                    </a:lnT>
+                    <a:lnB w="6350" cap="flat" cmpd="sng" algn="ctr">
+                      <a:solidFill>
+                        <a:srgbClr val="D9D9D9"/>
+                      </a:solidFill>
+                      <a:prstDash val="solid"/>
+                    </a:lnB>
+                    <a:solidFill>
+                      <a:srgbClr val="FFFFFF"/>
+                    </a:solidFill>
+                  </a:tcPr>
+                </a:tc>
+                <a:tc>
+                  <a:txBody>
+                    <a:bodyPr wrap="square" lIns="73152" tIns="36576" rIns="73152" bIns="36576" anchor="ctr">
+                      <a:noAutofit/>
+                    </a:bodyPr>
+                    <a:lstStyle/>
+                    <a:p>
+                      <a:pPr algn="l">
+                        <a:lnSpc>
+                          <a:spcPct val="110000"/>
+                        </a:lnSpc>
+                        <a:spcAft>
+                          <a:spcPts val="100"/>
+                        </a:spcAft>
+                      </a:pPr>
+                      <a:r>
+                        <a:rPr sz="1050" b="0">
+                          <a:solidFill>
+                            <a:srgbClr val="333333"/>
+                          </a:solidFill>
+                          <a:latin typeface="微软雅黑"/>
+                          <a:ea typeface="微软雅黑"/>
+                        </a:rPr>
+                        <a:t>8/13 答复</a:t>
+                      </a:r>
+                    </a:p>
+                  </a:txBody>
+                  <a:tcPr anchor="ctr">
+                    <a:lnL w="6350" cap="flat" cmpd="sng" algn="ctr">
+                      <a:solidFill>
+                        <a:srgbClr val="D9D9D9"/>
+                      </a:solidFill>
+                      <a:prstDash val="solid"/>
+                    </a:lnL>
+                    <a:lnR w="6350" cap="flat" cmpd="sng" algn="ctr">
+                      <a:solidFill>
+                        <a:srgbClr val="D9D9D9"/>
+                      </a:solidFill>
+                      <a:prstDash val="solid"/>
+                    </a:lnR>
+                    <a:lnT w="6350" cap="flat" cmpd="sng" algn="ctr">
+                      <a:solidFill>
+                        <a:srgbClr val="D9D9D9"/>
+                      </a:solidFill>
+                      <a:prstDash val="solid"/>
+                    </a:lnT>
+                    <a:lnB w="6350" cap="flat" cmpd="sng" algn="ctr">
+                      <a:solidFill>
+                        <a:srgbClr val="D9D9D9"/>
+                      </a:solidFill>
+                      <a:prstDash val="solid"/>
+                    </a:lnB>
+                    <a:solidFill>
+                      <a:srgbClr val="FFFFFF"/>
+                    </a:solidFill>
+                  </a:tcPr>
+                </a:tc>
+              </a:tr>
+              <a:tr h="438912">
+                <a:tc>
+                  <a:txBody>
+                    <a:bodyPr wrap="square" lIns="73152" tIns="36576" rIns="73152" bIns="36576" anchor="ctr">
+                      <a:noAutofit/>
+                    </a:bodyPr>
+                    <a:lstStyle/>
+                    <a:p>
+                      <a:pPr algn="l">
+                        <a:lnSpc>
+                          <a:spcPct val="110000"/>
+                        </a:lnSpc>
+                        <a:spcAft>
+                          <a:spcPts val="100"/>
+                        </a:spcAft>
+                      </a:pPr>
+                      <a:r>
+                        <a:rPr sz="1050" b="1">
+                          <a:solidFill>
+                            <a:srgbClr val="1D1D1A"/>
+                          </a:solidFill>
+                          <a:latin typeface="微软雅黑"/>
+                          <a:ea typeface="微软雅黑"/>
+                        </a:rPr>
+                        <a:t>实施环境</a:t>
+                      </a:r>
+                    </a:p>
+                  </a:txBody>
+                  <a:tcPr anchor="ctr">
+                    <a:lnL w="6350" cap="flat" cmpd="sng" algn="ctr">
+                      <a:solidFill>
+                        <a:srgbClr val="D9D9D9"/>
+                      </a:solidFill>
+                      <a:prstDash val="solid"/>
+                    </a:lnL>
+                    <a:lnR w="6350" cap="flat" cmpd="sng" algn="ctr">
+                      <a:solidFill>
+                        <a:srgbClr val="D9D9D9"/>
+                      </a:solidFill>
+                      <a:prstDash val="solid"/>
+                    </a:lnR>
+                    <a:lnT w="6350" cap="flat" cmpd="sng" algn="ctr">
+                      <a:solidFill>
+                        <a:srgbClr val="D9D9D9"/>
+                      </a:solidFill>
+                      <a:prstDash val="solid"/>
+                    </a:lnT>
+                    <a:lnB w="6350" cap="flat" cmpd="sng" algn="ctr">
+                      <a:solidFill>
+                        <a:srgbClr val="D9D9D9"/>
+                      </a:solidFill>
+                      <a:prstDash val="solid"/>
+                    </a:lnB>
+                    <a:solidFill>
+                      <a:srgbClr val="FFFFFF"/>
+                    </a:solidFill>
+                  </a:tcPr>
+                </a:tc>
+                <a:tc>
+                  <a:txBody>
+                    <a:bodyPr wrap="square" lIns="73152" tIns="36576" rIns="73152" bIns="36576" anchor="ctr">
+                      <a:noAutofit/>
+                    </a:bodyPr>
+                    <a:lstStyle/>
+                    <a:p>
+                      <a:pPr algn="l">
+                        <a:lnSpc>
+                          <a:spcPct val="110000"/>
+                        </a:lnSpc>
+                        <a:spcAft>
+                          <a:spcPts val="100"/>
+                        </a:spcAft>
+                      </a:pPr>
+                      <a:r>
+                        <a:rPr sz="1050" b="0">
+                          <a:solidFill>
+                            <a:srgbClr val="333333"/>
+                          </a:solidFill>
+                          <a:latin typeface="微软雅黑"/>
+                          <a:ea typeface="微软雅黑"/>
+                        </a:rPr>
+                        <a:t>训练、评测、部署所需算力、存储、网络；算力 70P </a:t>
+                      </a:r>
+                      <a:r>
+                        <a:rPr sz="1050" b="0">
+                          <a:solidFill>
+                            <a:srgbClr val="0070C0"/>
+                          </a:solidFill>
+                          <a:latin typeface="微软雅黑"/>
+                          <a:ea typeface="微软雅黑"/>
+                        </a:rPr>
+                        <a:t>待核：按 1 个 DLM 规划，3 个需重估</a:t>
+                      </a:r>
+                    </a:p>
+                  </a:txBody>
+                  <a:tcPr anchor="ctr">
+                    <a:lnL w="6350" cap="flat" cmpd="sng" algn="ctr">
+                      <a:solidFill>
+                        <a:srgbClr val="D9D9D9"/>
+                      </a:solidFill>
+                      <a:prstDash val="solid"/>
+                    </a:lnL>
+                    <a:lnR w="6350" cap="flat" cmpd="sng" algn="ctr">
+                      <a:solidFill>
+                        <a:srgbClr val="D9D9D9"/>
+                      </a:solidFill>
+                      <a:prstDash val="solid"/>
+                    </a:lnR>
+                    <a:lnT w="6350" cap="flat" cmpd="sng" algn="ctr">
+                      <a:solidFill>
+                        <a:srgbClr val="D9D9D9"/>
+                      </a:solidFill>
+                      <a:prstDash val="solid"/>
+                    </a:lnT>
+                    <a:lnB w="6350" cap="flat" cmpd="sng" algn="ctr">
+                      <a:solidFill>
+                        <a:srgbClr val="D9D9D9"/>
+                      </a:solidFill>
+                      <a:prstDash val="solid"/>
+                    </a:lnB>
+                    <a:solidFill>
+                      <a:srgbClr val="FFFFFF"/>
+                    </a:solidFill>
+                  </a:tcPr>
+                </a:tc>
+                <a:tc>
+                  <a:txBody>
+                    <a:bodyPr wrap="square" lIns="73152" tIns="36576" rIns="73152" bIns="36576" anchor="ctr">
+                      <a:noAutofit/>
+                    </a:bodyPr>
+                    <a:lstStyle/>
+                    <a:p>
+                      <a:pPr algn="l">
+                        <a:lnSpc>
+                          <a:spcPct val="110000"/>
+                        </a:lnSpc>
+                        <a:spcAft>
+                          <a:spcPts val="100"/>
+                        </a:spcAft>
+                      </a:pPr>
+                      <a:r>
+                        <a:rPr sz="1050" b="0">
+                          <a:solidFill>
+                            <a:srgbClr val="333333"/>
+                          </a:solidFill>
+                          <a:latin typeface="微软雅黑"/>
+                          <a:ea typeface="微软雅黑"/>
+                        </a:rPr>
+                        <a:t>8/13 答复</a:t>
+                      </a:r>
+                    </a:p>
+                  </a:txBody>
+                  <a:tcPr anchor="ctr">
+                    <a:lnL w="6350" cap="flat" cmpd="sng" algn="ctr">
+                      <a:solidFill>
+                        <a:srgbClr val="D9D9D9"/>
+                      </a:solidFill>
+                      <a:prstDash val="solid"/>
+                    </a:lnL>
+                    <a:lnR w="6350" cap="flat" cmpd="sng" algn="ctr">
+                      <a:solidFill>
+                        <a:srgbClr val="D9D9D9"/>
+                      </a:solidFill>
+                      <a:prstDash val="solid"/>
+                    </a:lnR>
+                    <a:lnT w="6350" cap="flat" cmpd="sng" algn="ctr">
+                      <a:solidFill>
+                        <a:srgbClr val="D9D9D9"/>
+                      </a:solidFill>
+                      <a:prstDash val="solid"/>
+                    </a:lnT>
+                    <a:lnB w="6350" cap="flat" cmpd="sng" algn="ctr">
+                      <a:solidFill>
+                        <a:srgbClr val="D9D9D9"/>
+                      </a:solidFill>
+                      <a:prstDash val="solid"/>
+                    </a:lnB>
+                    <a:solidFill>
+                      <a:srgbClr val="FFFFFF"/>
+                    </a:solidFill>
+                  </a:tcPr>
+                </a:tc>
+              </a:tr>
+              <a:tr h="438912">
+                <a:tc>
+                  <a:txBody>
+                    <a:bodyPr wrap="square" lIns="73152" tIns="36576" rIns="73152" bIns="36576" anchor="ctr">
+                      <a:noAutofit/>
+                    </a:bodyPr>
+                    <a:lstStyle/>
+                    <a:p>
+                      <a:pPr algn="l">
+                        <a:lnSpc>
+                          <a:spcPct val="110000"/>
+                        </a:lnSpc>
+                        <a:spcAft>
+                          <a:spcPts val="100"/>
+                        </a:spcAft>
+                      </a:pPr>
+                      <a:r>
+                        <a:rPr sz="1050" b="1">
+                          <a:solidFill>
+                            <a:srgbClr val="1D1D1A"/>
+                          </a:solidFill>
+                          <a:latin typeface="微软雅黑"/>
+                          <a:ea typeface="微软雅黑"/>
+                        </a:rPr>
+                        <a:t>实施模式</a:t>
+                      </a:r>
+                    </a:p>
+                  </a:txBody>
+                  <a:tcPr anchor="ctr">
+                    <a:lnL w="6350" cap="flat" cmpd="sng" algn="ctr">
+                      <a:solidFill>
+                        <a:srgbClr val="D9D9D9"/>
+                      </a:solidFill>
+                      <a:prstDash val="solid"/>
+                    </a:lnL>
+                    <a:lnR w="6350" cap="flat" cmpd="sng" algn="ctr">
+                      <a:solidFill>
+                        <a:srgbClr val="D9D9D9"/>
+                      </a:solidFill>
+                      <a:prstDash val="solid"/>
+                    </a:lnR>
+                    <a:lnT w="6350" cap="flat" cmpd="sng" algn="ctr">
+                      <a:solidFill>
+                        <a:srgbClr val="D9D9D9"/>
+                      </a:solidFill>
+                      <a:prstDash val="solid"/>
+                    </a:lnT>
+                    <a:lnB w="6350" cap="flat" cmpd="sng" algn="ctr">
+                      <a:solidFill>
+                        <a:srgbClr val="D9D9D9"/>
+                      </a:solidFill>
+                      <a:prstDash val="solid"/>
+                    </a:lnB>
+                    <a:solidFill>
+                      <a:srgbClr val="FFFFFF"/>
+                    </a:solidFill>
+                  </a:tcPr>
+                </a:tc>
+                <a:tc>
+                  <a:txBody>
+                    <a:bodyPr wrap="square" lIns="73152" tIns="36576" rIns="73152" bIns="36576" anchor="ctr">
+                      <a:noAutofit/>
+                    </a:bodyPr>
+                    <a:lstStyle/>
+                    <a:p>
+                      <a:pPr algn="l">
+                        <a:lnSpc>
+                          <a:spcPct val="110000"/>
+                        </a:lnSpc>
+                        <a:spcAft>
+                          <a:spcPts val="100"/>
+                        </a:spcAft>
+                      </a:pPr>
+                      <a:r>
+                        <a:rPr sz="1050" b="0">
+                          <a:solidFill>
+                            <a:srgbClr val="333333"/>
+                          </a:solidFill>
+                          <a:latin typeface="微软雅黑"/>
+                          <a:ea typeface="微软雅黑"/>
+                        </a:rPr>
+                        <a:t>优先“RNP 自主训练 + 讯飞辅助训练及持续咨询”；不足时可调整为讯飞进一步参与或直接承担训练</a:t>
+                      </a:r>
+                    </a:p>
+                  </a:txBody>
+                  <a:tcPr anchor="ctr">
+                    <a:lnL w="6350" cap="flat" cmpd="sng" algn="ctr">
+                      <a:solidFill>
+                        <a:srgbClr val="D9D9D9"/>
+                      </a:solidFill>
+                      <a:prstDash val="solid"/>
+                    </a:lnL>
+                    <a:lnR w="6350" cap="flat" cmpd="sng" algn="ctr">
+                      <a:solidFill>
+                        <a:srgbClr val="D9D9D9"/>
+                      </a:solidFill>
+                      <a:prstDash val="solid"/>
+                    </a:lnR>
+                    <a:lnT w="6350" cap="flat" cmpd="sng" algn="ctr">
+                      <a:solidFill>
+                        <a:srgbClr val="D9D9D9"/>
+                      </a:solidFill>
+                      <a:prstDash val="solid"/>
+                    </a:lnT>
+                    <a:lnB w="6350" cap="flat" cmpd="sng" algn="ctr">
+                      <a:solidFill>
+                        <a:srgbClr val="D9D9D9"/>
+                      </a:solidFill>
+                      <a:prstDash val="solid"/>
+                    </a:lnB>
+                    <a:solidFill>
+                      <a:srgbClr val="FFFFFF"/>
+                    </a:solidFill>
+                  </a:tcPr>
+                </a:tc>
+                <a:tc>
+                  <a:txBody>
+                    <a:bodyPr wrap="square" lIns="73152" tIns="36576" rIns="73152" bIns="36576" anchor="ctr">
+                      <a:noAutofit/>
+                    </a:bodyPr>
+                    <a:lstStyle/>
+                    <a:p>
+                      <a:pPr algn="l">
+                        <a:lnSpc>
+                          <a:spcPct val="110000"/>
+                        </a:lnSpc>
+                        <a:spcAft>
+                          <a:spcPts val="100"/>
+                        </a:spcAft>
+                      </a:pPr>
+                      <a:r>
+                        <a:rPr sz="1050" b="0">
+                          <a:solidFill>
+                            <a:srgbClr val="333333"/>
+                          </a:solidFill>
+                          <a:latin typeface="微软雅黑"/>
+                          <a:ea typeface="微软雅黑"/>
+                        </a:rPr>
+                        <a:t>8/13 答复</a:t>
+                      </a:r>
+                    </a:p>
+                  </a:txBody>
+                  <a:tcPr anchor="ctr">
+                    <a:lnL w="6350" cap="flat" cmpd="sng" algn="ctr">
+                      <a:solidFill>
+                        <a:srgbClr val="D9D9D9"/>
+                      </a:solidFill>
+                      <a:prstDash val="solid"/>
+                    </a:lnL>
+                    <a:lnR w="6350" cap="flat" cmpd="sng" algn="ctr">
+                      <a:solidFill>
+                        <a:srgbClr val="D9D9D9"/>
+                      </a:solidFill>
+                      <a:prstDash val="solid"/>
+                    </a:lnR>
+                    <a:lnT w="6350" cap="flat" cmpd="sng" algn="ctr">
+                      <a:solidFill>
+                        <a:srgbClr val="D9D9D9"/>
+                      </a:solidFill>
+                      <a:prstDash val="solid"/>
+                    </a:lnT>
+                    <a:lnB w="6350" cap="flat" cmpd="sng" algn="ctr">
+                      <a:solidFill>
+                        <a:srgbClr val="D9D9D9"/>
+                      </a:solidFill>
+                      <a:prstDash val="solid"/>
+                    </a:lnB>
+                    <a:solidFill>
+                      <a:srgbClr val="FFFFFF"/>
+                    </a:solidFill>
+                  </a:tcPr>
+                </a:tc>
+              </a:tr>
+              <a:tr h="438912">
+                <a:tc>
+                  <a:txBody>
+                    <a:bodyPr wrap="square" lIns="73152" tIns="36576" rIns="73152" bIns="36576" anchor="ctr">
+                      <a:noAutofit/>
+                    </a:bodyPr>
+                    <a:lstStyle/>
+                    <a:p>
+                      <a:pPr algn="l">
+                        <a:lnSpc>
+                          <a:spcPct val="110000"/>
+                        </a:lnSpc>
+                        <a:spcAft>
+                          <a:spcPts val="100"/>
+                        </a:spcAft>
+                      </a:pPr>
+                      <a:r>
+                        <a:rPr sz="1050" b="1">
+                          <a:solidFill>
+                            <a:srgbClr val="1D1D1A"/>
+                          </a:solidFill>
+                          <a:latin typeface="微软雅黑"/>
+                          <a:ea typeface="微软雅黑"/>
+                        </a:rPr>
+                        <a:t>验收依据</a:t>
+                      </a:r>
+                    </a:p>
+                  </a:txBody>
+                  <a:tcPr anchor="ctr">
+                    <a:lnL w="6350" cap="flat" cmpd="sng" algn="ctr">
+                      <a:solidFill>
+                        <a:srgbClr val="D9D9D9"/>
+                      </a:solidFill>
+                      <a:prstDash val="solid"/>
+                    </a:lnL>
+                    <a:lnR w="6350" cap="flat" cmpd="sng" algn="ctr">
+                      <a:solidFill>
+                        <a:srgbClr val="D9D9D9"/>
+                      </a:solidFill>
+                      <a:prstDash val="solid"/>
+                    </a:lnR>
+                    <a:lnT w="6350" cap="flat" cmpd="sng" algn="ctr">
+                      <a:solidFill>
+                        <a:srgbClr val="D9D9D9"/>
+                      </a:solidFill>
+                      <a:prstDash val="solid"/>
+                    </a:lnT>
+                    <a:lnB w="6350" cap="flat" cmpd="sng" algn="ctr">
+                      <a:solidFill>
+                        <a:srgbClr val="D9D9D9"/>
+                      </a:solidFill>
+                      <a:prstDash val="solid"/>
+                    </a:lnB>
+                    <a:solidFill>
+                      <a:srgbClr val="FFFFFF"/>
+                    </a:solidFill>
+                  </a:tcPr>
+                </a:tc>
+                <a:tc>
+                  <a:txBody>
+                    <a:bodyPr wrap="square" lIns="73152" tIns="36576" rIns="73152" bIns="36576" anchor="ctr">
+                      <a:noAutofit/>
+                    </a:bodyPr>
+                    <a:lstStyle/>
+                    <a:p>
+                      <a:pPr algn="l">
+                        <a:lnSpc>
+                          <a:spcPct val="110000"/>
+                        </a:lnSpc>
+                        <a:spcAft>
+                          <a:spcPts val="100"/>
+                        </a:spcAft>
+                      </a:pPr>
+                      <a:r>
+                        <a:rPr sz="1050" b="0">
+                          <a:solidFill>
+                            <a:srgbClr val="333333"/>
+                          </a:solidFill>
+                          <a:latin typeface="微软雅黑"/>
+                          <a:ea typeface="微软雅黑"/>
+                        </a:rPr>
+                        <a:t>双方确认的独立评测数据集；场景、基座、路线、评测方法与验收条件写入《DLM 场景及技术方案确认书》</a:t>
+                      </a:r>
+                    </a:p>
+                  </a:txBody>
+                  <a:tcPr anchor="ctr">
+                    <a:lnL w="6350" cap="flat" cmpd="sng" algn="ctr">
+                      <a:solidFill>
+                        <a:srgbClr val="D9D9D9"/>
+                      </a:solidFill>
+                      <a:prstDash val="solid"/>
+                    </a:lnL>
+                    <a:lnR w="6350" cap="flat" cmpd="sng" algn="ctr">
+                      <a:solidFill>
+                        <a:srgbClr val="D9D9D9"/>
+                      </a:solidFill>
+                      <a:prstDash val="solid"/>
+                    </a:lnR>
+                    <a:lnT w="6350" cap="flat" cmpd="sng" algn="ctr">
+                      <a:solidFill>
+                        <a:srgbClr val="D9D9D9"/>
+                      </a:solidFill>
+                      <a:prstDash val="solid"/>
+                    </a:lnT>
+                    <a:lnB w="6350" cap="flat" cmpd="sng" algn="ctr">
+                      <a:solidFill>
+                        <a:srgbClr val="D9D9D9"/>
+                      </a:solidFill>
+                      <a:prstDash val="solid"/>
+                    </a:lnB>
+                    <a:solidFill>
+                      <a:srgbClr val="FFFFFF"/>
+                    </a:solidFill>
+                  </a:tcPr>
+                </a:tc>
+                <a:tc>
+                  <a:txBody>
+                    <a:bodyPr wrap="square" lIns="73152" tIns="36576" rIns="73152" bIns="36576" anchor="ctr">
+                      <a:noAutofit/>
+                    </a:bodyPr>
+                    <a:lstStyle/>
+                    <a:p>
+                      <a:pPr algn="l">
+                        <a:lnSpc>
+                          <a:spcPct val="110000"/>
+                        </a:lnSpc>
+                        <a:spcAft>
+                          <a:spcPts val="100"/>
+                        </a:spcAft>
+                      </a:pPr>
+                      <a:r>
+                        <a:rPr sz="1050" b="0">
+                          <a:solidFill>
+                            <a:srgbClr val="333333"/>
+                          </a:solidFill>
+                          <a:latin typeface="微软雅黑"/>
+                          <a:ea typeface="微软雅黑"/>
+                        </a:rPr>
+                        <a:t>8/13 答复</a:t>
+                      </a:r>
+                    </a:p>
+                  </a:txBody>
+                  <a:tcPr anchor="ctr">
+                    <a:lnL w="6350" cap="flat" cmpd="sng" algn="ctr">
+                      <a:solidFill>
+                        <a:srgbClr val="D9D9D9"/>
+                      </a:solidFill>
+                      <a:prstDash val="solid"/>
+                    </a:lnL>
+                    <a:lnR w="6350" cap="flat" cmpd="sng" algn="ctr">
+                      <a:solidFill>
+                        <a:srgbClr val="D9D9D9"/>
+                      </a:solidFill>
+                      <a:prstDash val="solid"/>
+                    </a:lnR>
+                    <a:lnT w="6350" cap="flat" cmpd="sng" algn="ctr">
+                      <a:solidFill>
+                        <a:srgbClr val="D9D9D9"/>
+                      </a:solidFill>
+                      <a:prstDash val="solid"/>
+                    </a:lnT>
+                    <a:lnB w="6350" cap="flat" cmpd="sng" algn="ctr">
+                      <a:solidFill>
+                        <a:srgbClr val="D9D9D9"/>
+                      </a:solidFill>
+                      <a:prstDash val="solid"/>
+                    </a:lnB>
+                    <a:solidFill>
+                      <a:srgbClr val="FFFFFF"/>
+                    </a:solidFill>
+                  </a:tcPr>
+                </a:tc>
+              </a:tr>
+              <a:tr h="438912">
+                <a:tc>
+                  <a:txBody>
+                    <a:bodyPr wrap="square" lIns="73152" tIns="36576" rIns="73152" bIns="36576" anchor="ctr">
+                      <a:noAutofit/>
+                    </a:bodyPr>
+                    <a:lstStyle/>
+                    <a:p>
+                      <a:pPr algn="l">
+                        <a:lnSpc>
+                          <a:spcPct val="110000"/>
+                        </a:lnSpc>
+                        <a:spcAft>
+                          <a:spcPts val="100"/>
+                        </a:spcAft>
+                      </a:pPr>
+                      <a:r>
+                        <a:rPr sz="1050" b="1">
+                          <a:solidFill>
+                            <a:srgbClr val="1D1D1A"/>
+                          </a:solidFill>
+                          <a:latin typeface="微软雅黑"/>
+                          <a:ea typeface="微软雅黑"/>
+                        </a:rPr>
+                        <a:t>行业方向</a:t>
+                      </a:r>
+                    </a:p>
+                  </a:txBody>
+                  <a:tcPr anchor="ctr">
+                    <a:lnL w="6350" cap="flat" cmpd="sng" algn="ctr">
+                      <a:solidFill>
+                        <a:srgbClr val="D9D9D9"/>
+                      </a:solidFill>
+                      <a:prstDash val="solid"/>
+                    </a:lnL>
+                    <a:lnR w="6350" cap="flat" cmpd="sng" algn="ctr">
+                      <a:solidFill>
+                        <a:srgbClr val="D9D9D9"/>
+                      </a:solidFill>
+                      <a:prstDash val="solid"/>
+                    </a:lnR>
+                    <a:lnT w="6350" cap="flat" cmpd="sng" algn="ctr">
+                      <a:solidFill>
+                        <a:srgbClr val="D9D9D9"/>
+                      </a:solidFill>
+                      <a:prstDash val="solid"/>
+                    </a:lnT>
+                    <a:lnB w="6350" cap="flat" cmpd="sng" algn="ctr">
+                      <a:solidFill>
+                        <a:srgbClr val="D9D9D9"/>
+                      </a:solidFill>
+                      <a:prstDash val="solid"/>
+                    </a:lnB>
+                    <a:solidFill>
+                      <a:srgbClr val="FFFFFF"/>
+                    </a:solidFill>
+                  </a:tcPr>
+                </a:tc>
+                <a:tc>
+                  <a:txBody>
+                    <a:bodyPr wrap="square" lIns="73152" tIns="36576" rIns="73152" bIns="36576" anchor="ctr">
+                      <a:noAutofit/>
+                    </a:bodyPr>
+                    <a:lstStyle/>
+                    <a:p>
+                      <a:pPr algn="l">
+                        <a:lnSpc>
+                          <a:spcPct val="110000"/>
+                        </a:lnSpc>
+                        <a:spcAft>
+                          <a:spcPts val="100"/>
+                        </a:spcAft>
+                      </a:pPr>
+                      <a:r>
+                        <a:rPr sz="1050" b="0">
+                          <a:solidFill>
+                            <a:srgbClr val="333333"/>
+                          </a:solidFill>
+                          <a:latin typeface="微软雅黑"/>
+                          <a:ea typeface="微软雅黑"/>
+                        </a:rPr>
+                        <a:t>候选：政务服务、法律、医疗、教育（讯飞有经验）；</a:t>
+                      </a:r>
+                      <a:r>
+                        <a:rPr sz="1050" b="0">
+                          <a:solidFill>
+                            <a:srgbClr val="0070C0"/>
+                          </a:solidFill>
+                          <a:latin typeface="微软雅黑"/>
+                          <a:ea typeface="微软雅黑"/>
+                        </a:rPr>
+                        <a:t>待核：由 RNP/MCTI 提出 3 个</a:t>
+                      </a:r>
+                    </a:p>
+                  </a:txBody>
+                  <a:tcPr anchor="ctr">
+                    <a:lnL w="6350" cap="flat" cmpd="sng" algn="ctr">
+                      <a:solidFill>
+                        <a:srgbClr val="D9D9D9"/>
+                      </a:solidFill>
+                      <a:prstDash val="solid"/>
+                    </a:lnL>
+                    <a:lnR w="6350" cap="flat" cmpd="sng" algn="ctr">
+                      <a:solidFill>
+                        <a:srgbClr val="D9D9D9"/>
+                      </a:solidFill>
+                      <a:prstDash val="solid"/>
+                    </a:lnR>
+                    <a:lnT w="6350" cap="flat" cmpd="sng" algn="ctr">
+                      <a:solidFill>
+                        <a:srgbClr val="D9D9D9"/>
+                      </a:solidFill>
+                      <a:prstDash val="solid"/>
+                    </a:lnT>
+                    <a:lnB w="6350" cap="flat" cmpd="sng" algn="ctr">
+                      <a:solidFill>
+                        <a:srgbClr val="D9D9D9"/>
+                      </a:solidFill>
+                      <a:prstDash val="solid"/>
+                    </a:lnB>
+                    <a:solidFill>
+                      <a:srgbClr val="FFFFFF"/>
+                    </a:solidFill>
+                  </a:tcPr>
+                </a:tc>
+                <a:tc>
+                  <a:txBody>
+                    <a:bodyPr wrap="square" lIns="73152" tIns="36576" rIns="73152" bIns="36576" anchor="ctr">
+                      <a:noAutofit/>
+                    </a:bodyPr>
+                    <a:lstStyle/>
+                    <a:p>
+                      <a:pPr algn="l">
+                        <a:lnSpc>
+                          <a:spcPct val="110000"/>
+                        </a:lnSpc>
+                        <a:spcAft>
+                          <a:spcPts val="100"/>
+                        </a:spcAft>
+                      </a:pPr>
+                      <a:r>
+                        <a:rPr sz="1050" b="0">
+                          <a:solidFill>
+                            <a:srgbClr val="333333"/>
+                          </a:solidFill>
+                          <a:latin typeface="微软雅黑"/>
+                          <a:ea typeface="微软雅黑"/>
+                        </a:rPr>
+                        <a:t>5/8 答复</a:t>
+                      </a:r>
+                    </a:p>
+                  </a:txBody>
+                  <a:tcPr anchor="ctr">
+                    <a:lnL w="6350" cap="flat" cmpd="sng" algn="ctr">
+                      <a:solidFill>
+                        <a:srgbClr val="D9D9D9"/>
+                      </a:solidFill>
+                      <a:prstDash val="solid"/>
+                    </a:lnL>
+                    <a:lnR w="6350" cap="flat" cmpd="sng" algn="ctr">
+                      <a:solidFill>
+                        <a:srgbClr val="D9D9D9"/>
+                      </a:solidFill>
+                      <a:prstDash val="solid"/>
+                    </a:lnR>
+                    <a:lnT w="6350" cap="flat" cmpd="sng" algn="ctr">
+                      <a:solidFill>
+                        <a:srgbClr val="D9D9D9"/>
+                      </a:solidFill>
+                      <a:prstDash val="solid"/>
+                    </a:lnT>
+                    <a:lnB w="6350" cap="flat" cmpd="sng" algn="ctr">
+                      <a:solidFill>
+                        <a:srgbClr val="D9D9D9"/>
+                      </a:solidFill>
+                      <a:prstDash val="solid"/>
+                    </a:lnB>
+                    <a:solidFill>
+                      <a:srgbClr val="FFFFFF"/>
+                    </a:solidFill>
+                  </a:tcPr>
+                </a:tc>
+              </a:tr>
+            </a:tbl>
+          </a:graphicData>
+        </a:graphic>
+      </p:graphicFrame>
+      <p:sp>
+        <p:nvSpPr>
+          <p:cNvPr id="5" name="TextBox 4"/>
+          <p:cNvSpPr txBox="1"/>
+          <p:nvPr/>
+        </p:nvSpPr>
+        <p:spPr>
+          <a:xfrm>
+            <a:off x="457200" y="5532120"/>
+            <a:ext cx="11274552" cy="365760"/>
+          </a:xfrm>
+          <a:prstGeom prst="rect">
+            <a:avLst/>
+          </a:prstGeom>
+          <a:noFill/>
+        </p:spPr>
+        <p:txBody>
+          <a:bodyPr wrap="square" lIns="0" tIns="0" rIns="0" bIns="0" anchor="ctr">
+            <a:noAutofit/>
+          </a:bodyPr>
+          <a:lstStyle/>
+          <a:p>
+            <a:pPr algn="l">
+              <a:lnSpc>
+                <a:spcPct val="115000"/>
+              </a:lnSpc>
+              <a:spcAft>
+                <a:spcPts val="0"/>
+              </a:spcAft>
+            </a:pPr>
+            <a:r>
+              <a:rPr sz="1050" b="0">
+                <a:solidFill>
+                  <a:srgbClr val="666666"/>
+                </a:solidFill>
+                <a:latin typeface="微软雅黑"/>
+                <a:ea typeface="微软雅黑"/>
+              </a:rPr>
+              <a:t>讯飞交付文档：技术方案、指导记录、问题清单、评测分析、演进建议。</a:t>
+            </a:r>
+          </a:p>
+        </p:txBody>
+      </p:sp>
+    </p:spTree>
+  </p:cSld>
+  <p:clrMapOvr>
+    <a:masterClrMapping/>
+  </p:clrMapOvr>
+</p:sld>
+</file>
+
 <file path=ppt/theme/theme1.xml><?xml version="1.0" encoding="utf-8"?>
 <a:theme xmlns:a="http://schemas.openxmlformats.org/drawingml/2006/main" name="7_章节页">
   <a:themeElements>
